--- a/协作/提示词/分享PPT交接_2026-10-29/第四版交付_云端/烟花秀AI全流程_第四版.pptx
+++ b/协作/提示词/分享PPT交接_2026-10-29/第四版交付_云端/烟花秀AI全流程_第四版.pptx
@@ -678,13 +678,13 @@
           <a:lstStyle/>
           <a:p>
             <a:r>
-              <a:t>第 11 页 · 资源成果：球花、扇形、尾缀与窜天猴全部入表（约 35 秒）</a:t>
+              <a:t>第 11 页 · 资源成果：球花、扇形、尾缀与窜天猴全部入表（约 40 秒）</a:t>
             </a:r>
           </a:p>
           <a:p/>
           <a:p>
             <a:r>
-              <a:t>下面看成果。资源方面，进入跨年 3.0 资源表的有球花与扇形共 26 种、升空尾缀 6 档、窜天猴一套；手游覆盖其中 12 种开花、全部尾缀和窜天猴。引用贴图 PC 专用 133 张、手游专用 33 张、两端共用 46 张。其中 20 种开花保留了烘焙器配方，可以调参后重新导出。</a:t>
+              <a:t>下面看成果。资源方面，进入跨年 3.0 资源表的有球花与扇形共 26 种、升空尾缀 6 档、窜天猴一套；手游覆盖其中 12 种开花、全部尾缀和窜天猴。引用贴图去重共 212 张，其中 PC 专用 133 张、手游专用 33 张、两端共用 46 张。26 种开花中，19 种保留了烘焙器配方与导出记录，可以调参后重新导出。</a:t>
             </a:r>
           </a:p>
           <a:p/>
@@ -1012,7 +1012,7 @@
           <a:p/>
           <a:p>
             <a:r>
-              <a:t>第二个是升空尾缀。尾缀拆成近段和远段：近段为循环面片，随弹体移动；远段为一次性序列，表现留在空中的老火星。帧数按观看距离换算每帧屏幕位移后分配，快的阶段多给帧、慢的阶段少给，L 档上升段最慢帧率由约 1.9 提高到 30。代价是单格高度降低，近看略软。</a:t>
+              <a:t>第二个是升空尾缀。尾缀拆成近段和远段：近段为循环面片，随弹体移动；远段为一次性序列，表现留在空中的老火星。帧数按观看距离换算每帧屏幕位移后分配，快的阶段多给帧、慢的阶段少给，L 档远段上升段的最慢帧率由约 1.9 提高到 30。代价是单格高度降低，近看略软。</a:t>
             </a:r>
           </a:p>
           <a:p/>
@@ -1088,13 +1088,13 @@
           <a:lstStyle/>
           <a:p>
             <a:r>
-              <a:t>第 16 页 · 方头与黑点：定位原因，写入导出与导入规则（约 35 秒）</a:t>
+              <a:t>第 16 页 · 方头与黑块：定位原因，写入导出与导入规则（约 40 秒）</a:t>
             </a:r>
           </a:p>
           <a:p/>
           <a:p>
             <a:r>
-              <a:t>排查方面，方头和黑点是两个典型问题。方头只在低配出现：长条格压扁后采样到低 Mip，星头变方；固定机位与档位对比后定位，PC 主序列改为不使用 Mip。黑点出现在最亮处：亮度采样落到 Ramp 末格的黑色，设置 EmissiveDissolve 为 0.98 后解决。两项规则都已写入导出与导入流程。</a:t>
+              <a:t>排查方面，方头和最亮处黑块是两个典型问题。方头只在低配出现：长条格压扁后采样到低 Mip，星头变方；固定机位与档位对比后定位，PC 主序列改为不使用 Mip。黑块出现在最亮处，看上去是一个个黑点：亮度采样落到 Ramp 末格的黑色，设置 EmissiveDissolve 为 0.98 后解决。两项规则都已写入导出与导入流程。</a:t>
             </a:r>
           </a:p>
           <a:p/>
@@ -1404,7 +1404,7 @@
           <a:lstStyle/>
           <a:p>
             <a:r>
-              <a:t>第 2 页 · 制作规模：种类、规格与时长都远超去年（约 25 秒）</a:t>
+              <a:t>第 2 页 · 制作规模：开花 26 种、尾缀 6 档、时长约 220 秒（约 25 秒）</a:t>
             </a:r>
           </a:p>
           <a:p/>
@@ -1498,7 +1498,7 @@
           <a:p/>
           <a:p>
             <a:r>
-              <a:t>依据：12 项设置沿用第一版第 3 页（烟花贴图规范与性能组约定、烟花特效资产规范）；CLAUDE.md §2。</a:t>
+              <a:t>依据：12 项设置沿用第一版第 3 页（烟花贴图规范与性能组约定、烟花特效资产规范）；项目规则 §2。</a:t>
             </a:r>
           </a:p>
         </p:txBody>
@@ -1826,7 +1826,7 @@
           <a:p/>
           <a:p>
             <a:r>
-              <a:t>依据：CLAUDE.md §2 烟花贴图规范（v2.31）；spec/workspace_resource_v1.md（检查不写 UE，确认后写入）；截图为特效工作台烟花素材导入页（10-24）。</a:t>
+              <a:t>依据：项目规则 §2 烟花贴图规范（v2.31）；spec/workspace_resource_v1.md（检查不写 UE，确认后写入）；截图为特效工作台烟花素材导入页（10-24）。</a:t>
             </a:r>
           </a:p>
         </p:txBody>
@@ -8313,7 +8313,51 @@
                 <a:ea typeface="微软雅黑"/>
                 <a:cs typeface="微软雅黑"/>
               </a:rPr>
-              <a:t>开发；</a:t>
+              <a:t>开发，关键结果在</a:t>
+            </a:r>
+            <a:r>
+              <a:rPr sz="1300" b="0" lang="zh-CN" altLang="en-US">
+                <a:solidFill>
+                  <a:srgbClr val="F5F5F5"/>
+                </a:solidFill>
+                <a:latin typeface="微软雅黑"/>
+                <a:ea typeface="微软雅黑"/>
+                <a:cs typeface="微软雅黑"/>
+              </a:rPr>
+              <a:t> </a:t>
+            </a:r>
+            <a:r>
+              <a:rPr sz="1300" b="0" lang="zh-CN" altLang="en-US">
+                <a:solidFill>
+                  <a:srgbClr val="F5F5F5"/>
+                </a:solidFill>
+                <a:latin typeface="Consolas"/>
+                <a:ea typeface="微软雅黑"/>
+                <a:cs typeface="微软雅黑"/>
+              </a:rPr>
+              <a:t>UE</a:t>
+            </a:r>
+            <a:r>
+              <a:rPr sz="1300" b="0" lang="zh-CN" altLang="en-US">
+                <a:solidFill>
+                  <a:srgbClr val="F5F5F5"/>
+                </a:solidFill>
+                <a:latin typeface="微软雅黑"/>
+                <a:ea typeface="微软雅黑"/>
+                <a:cs typeface="微软雅黑"/>
+              </a:rPr>
+              <a:t> </a:t>
+            </a:r>
+            <a:r>
+              <a:rPr sz="1300" b="0" lang="zh-CN" altLang="en-US">
+                <a:solidFill>
+                  <a:srgbClr val="F5F5F5"/>
+                </a:solidFill>
+                <a:latin typeface="Consolas"/>
+                <a:ea typeface="微软雅黑"/>
+                <a:cs typeface="微软雅黑"/>
+              </a:rPr>
+              <a:t>验收</a:t>
             </a:r>
           </a:p>
           <a:p>
@@ -8331,7 +8375,7 @@
                 <a:ea typeface="微软雅黑"/>
                 <a:cs typeface="微软雅黑"/>
               </a:rPr>
-              <a:t>关键结果在</a:t>
+              <a:t>一人对接</a:t>
             </a:r>
             <a:r>
               <a:rPr sz="1300" b="0" lang="zh-CN" altLang="en-US">
@@ -8353,7 +8397,7 @@
                 <a:ea typeface="微软雅黑"/>
                 <a:cs typeface="微软雅黑"/>
               </a:rPr>
-              <a:t>UE</a:t>
+              <a:t>AI；仓库约</a:t>
             </a:r>
             <a:r>
               <a:rPr sz="1300" b="0" lang="zh-CN" altLang="en-US">
@@ -8375,7 +8419,7 @@
                 <a:ea typeface="微软雅黑"/>
                 <a:cs typeface="微软雅黑"/>
               </a:rPr>
-              <a:t>验收（一人对接，约</a:t>
+              <a:t>2200</a:t>
             </a:r>
             <a:r>
               <a:rPr sz="1300" b="0" lang="zh-CN" altLang="en-US">
@@ -8397,29 +8441,7 @@
                 <a:ea typeface="微软雅黑"/>
                 <a:cs typeface="微软雅黑"/>
               </a:rPr>
-              <a:t>2200</a:t>
-            </a:r>
-            <a:r>
-              <a:rPr sz="1300" b="0" lang="zh-CN" altLang="en-US">
-                <a:solidFill>
-                  <a:srgbClr val="F5F5F5"/>
-                </a:solidFill>
-                <a:latin typeface="微软雅黑"/>
-                <a:ea typeface="微软雅黑"/>
-                <a:cs typeface="微软雅黑"/>
-              </a:rPr>
-              <a:t> </a:t>
-            </a:r>
-            <a:r>
-              <a:rPr sz="1300" b="0" lang="zh-CN" altLang="en-US">
-                <a:solidFill>
-                  <a:srgbClr val="F5F5F5"/>
-                </a:solidFill>
-                <a:latin typeface="Consolas"/>
-                <a:ea typeface="微软雅黑"/>
-                <a:cs typeface="微软雅黑"/>
-              </a:rPr>
-              <a:t>次提交）</a:t>
+              <a:t>次提交（含后台自动回传）</a:t>
             </a:r>
           </a:p>
         </p:txBody>
@@ -9180,7 +9202,7 @@
       </p:sp>
       <p:pic>
         <p:nvPicPr>
-          <p:cNvPr id="14" name="Picture 13" descr="p11_12.jpg"/>
+          <p:cNvPr id="14" name="Picture 13" descr="p11_fan.jpg"/>
           <p:cNvPicPr>
             <a:picLocks noChangeAspect="1"/>
           </p:cNvPicPr>
@@ -9240,14 +9262,66 @@
                 <a:ea typeface="微软雅黑"/>
                 <a:cs typeface="微软雅黑"/>
               </a:rPr>
-              <a:t>银白菊</a:t>
+              <a:t>扇形</a:t>
+            </a:r>
+            <a:r>
+              <a:rPr sz="1200" b="0" lang="zh-CN" altLang="en-US">
+                <a:solidFill>
+                  <a:srgbClr val="F5F5F5">
+                    <a:alpha val="70000"/>
+                  </a:srgbClr>
+                </a:solidFill>
+                <a:latin typeface="微软雅黑"/>
+                <a:ea typeface="微软雅黑"/>
+                <a:cs typeface="微软雅黑"/>
+              </a:rPr>
+              <a:t> </a:t>
+            </a:r>
+            <a:r>
+              <a:rPr sz="1200" b="0" lang="zh-CN" altLang="en-US">
+                <a:solidFill>
+                  <a:srgbClr val="F5F5F5">
+                    <a:alpha val="70000"/>
+                  </a:srgbClr>
+                </a:solidFill>
+                <a:latin typeface="Consolas"/>
+                <a:ea typeface="微软雅黑"/>
+                <a:cs typeface="微软雅黑"/>
+              </a:rPr>
+              <a:t>·</a:t>
+            </a:r>
+            <a:r>
+              <a:rPr sz="1200" b="0" lang="zh-CN" altLang="en-US">
+                <a:solidFill>
+                  <a:srgbClr val="F5F5F5">
+                    <a:alpha val="70000"/>
+                  </a:srgbClr>
+                </a:solidFill>
+                <a:latin typeface="微软雅黑"/>
+                <a:ea typeface="微软雅黑"/>
+                <a:cs typeface="微软雅黑"/>
+              </a:rPr>
+              <a:t> </a:t>
+            </a:r>
+            <a:r>
+              <a:rPr sz="1200" b="0" lang="zh-CN" altLang="en-US">
+                <a:solidFill>
+                  <a:srgbClr val="F5F5F5">
+                    <a:alpha val="70000"/>
+                  </a:srgbClr>
+                </a:solidFill>
+                <a:latin typeface="Consolas"/>
+                <a:ea typeface="微软雅黑"/>
+                <a:cs typeface="微软雅黑"/>
+              </a:rPr>
+              <a:t>整场</a:t>
             </a:r>
           </a:p>
         </p:txBody>
       </p:sp>
       <p:pic>
         <p:nvPicPr>
-          <p:cNvPr id="16" name="Picture 15" descr="p11_14.jpg"/>
+          <p:cNvPr id="16" name="Picture 15" descr="p11_trail.jpg"/>
           <p:cNvPicPr>
             <a:picLocks noChangeAspect="1"/>
           </p:cNvPicPr>
@@ -9307,7 +9381,7 @@
                 <a:ea typeface="微软雅黑"/>
                 <a:cs typeface="微软雅黑"/>
               </a:rPr>
-              <a:t>爆裂星</a:t>
+              <a:t>升空尾缀</a:t>
             </a:r>
           </a:p>
         </p:txBody>
@@ -9376,7 +9450,7 @@
                 <a:ea typeface="微软雅黑"/>
                 <a:cs typeface="微软雅黑"/>
               </a:rPr>
-              <a:t>资产试放</a:t>
+              <a:t>实机</a:t>
             </a:r>
             <a:r>
               <a:rPr sz="1000" b="0" lang="zh-CN" altLang="en-US">
@@ -9480,7 +9554,7 @@
                 <a:ea typeface="微软雅黑"/>
                 <a:cs typeface="微软雅黑"/>
               </a:rPr>
-              <a:t>花型示例</a:t>
+              <a:t>资源示例</a:t>
             </a:r>
           </a:p>
         </p:txBody>
@@ -10065,11 +10139,11 @@
           <a:p>
             <a:pPr algn="l">
               <a:lnSpc>
-                <a:spcPts val="1950"/>
-              </a:lnSpc>
-            </a:pPr>
-            <a:r>
-              <a:rPr sz="1500" b="1" lang="zh-CN" altLang="en-US">
+                <a:spcPts val="1820"/>
+              </a:lnSpc>
+            </a:pPr>
+            <a:r>
+              <a:rPr sz="1400" b="1" lang="zh-CN" altLang="en-US">
                 <a:solidFill>
                   <a:srgbClr val="F5F5F5"/>
                 </a:solidFill>
@@ -10080,7 +10154,7 @@
               <a:t>PC</a:t>
             </a:r>
             <a:r>
-              <a:rPr sz="1500" b="1" lang="zh-CN" altLang="en-US">
+              <a:rPr sz="1400" b="1" lang="zh-CN" altLang="en-US">
                 <a:solidFill>
                   <a:srgbClr val="F5F5F5"/>
                 </a:solidFill>
@@ -10091,7 +10165,7 @@
               <a:t> </a:t>
             </a:r>
             <a:r>
-              <a:rPr sz="1500" b="1" lang="zh-CN" altLang="en-US">
+              <a:rPr sz="1400" b="1" lang="zh-CN" altLang="en-US">
                 <a:solidFill>
                   <a:srgbClr val="F5F5F5"/>
                 </a:solidFill>
@@ -10099,10 +10173,32 @@
                 <a:ea typeface="微软雅黑"/>
                 <a:cs typeface="微软雅黑"/>
               </a:rPr>
+              <a:t>专用</a:t>
+            </a:r>
+            <a:r>
+              <a:rPr sz="1400" b="1" lang="zh-CN" altLang="en-US">
+                <a:solidFill>
+                  <a:srgbClr val="F5F5F5"/>
+                </a:solidFill>
+                <a:latin typeface="微软雅黑"/>
+                <a:ea typeface="微软雅黑"/>
+                <a:cs typeface="微软雅黑"/>
+              </a:rPr>
+              <a:t> </a:t>
+            </a:r>
+            <a:r>
+              <a:rPr sz="1400" b="1" lang="zh-CN" altLang="en-US">
+                <a:solidFill>
+                  <a:srgbClr val="F5F5F5"/>
+                </a:solidFill>
+                <a:latin typeface="Consolas"/>
+                <a:ea typeface="微软雅黑"/>
+                <a:cs typeface="微软雅黑"/>
+              </a:rPr>
               <a:t>133</a:t>
             </a:r>
             <a:r>
-              <a:rPr sz="1500" b="1" lang="zh-CN" altLang="en-US">
+              <a:rPr sz="1400" b="1" lang="zh-CN" altLang="en-US">
                 <a:solidFill>
                   <a:srgbClr val="F5F5F5"/>
                 </a:solidFill>
@@ -10113,7 +10209,7 @@
               <a:t> </a:t>
             </a:r>
             <a:r>
-              <a:rPr sz="1500" b="1" lang="zh-CN" altLang="en-US">
+              <a:rPr sz="1400" b="1" lang="zh-CN" altLang="en-US">
                 <a:solidFill>
                   <a:srgbClr val="F5F5F5"/>
                 </a:solidFill>
@@ -10124,7 +10220,7 @@
               <a:t>·</a:t>
             </a:r>
             <a:r>
-              <a:rPr sz="1500" b="1" lang="zh-CN" altLang="en-US">
+              <a:rPr sz="1400" b="1" lang="zh-CN" altLang="en-US">
                 <a:solidFill>
                   <a:srgbClr val="F5F5F5"/>
                 </a:solidFill>
@@ -10135,7 +10231,7 @@
               <a:t> </a:t>
             </a:r>
             <a:r>
-              <a:rPr sz="1500" b="1" lang="zh-CN" altLang="en-US">
+              <a:rPr sz="1400" b="1" lang="zh-CN" altLang="en-US">
                 <a:solidFill>
                   <a:srgbClr val="F5F5F5"/>
                 </a:solidFill>
@@ -10143,10 +10239,10 @@
                 <a:ea typeface="微软雅黑"/>
                 <a:cs typeface="微软雅黑"/>
               </a:rPr>
-              <a:t>手游</a:t>
-            </a:r>
-            <a:r>
-              <a:rPr sz="1500" b="1" lang="zh-CN" altLang="en-US">
+              <a:t>手游专用</a:t>
+            </a:r>
+            <a:r>
+              <a:rPr sz="1400" b="1" lang="zh-CN" altLang="en-US">
                 <a:solidFill>
                   <a:srgbClr val="F5F5F5"/>
                 </a:solidFill>
@@ -10157,7 +10253,7 @@
               <a:t> </a:t>
             </a:r>
             <a:r>
-              <a:rPr sz="1500" b="1" lang="zh-CN" altLang="en-US">
+              <a:rPr sz="1400" b="1" lang="zh-CN" altLang="en-US">
                 <a:solidFill>
                   <a:srgbClr val="F5F5F5"/>
                 </a:solidFill>
@@ -10168,7 +10264,7 @@
               <a:t>33</a:t>
             </a:r>
             <a:r>
-              <a:rPr sz="1500" b="1" lang="zh-CN" altLang="en-US">
+              <a:rPr sz="1400" b="1" lang="zh-CN" altLang="en-US">
                 <a:solidFill>
                   <a:srgbClr val="F5F5F5"/>
                 </a:solidFill>
@@ -10179,7 +10275,7 @@
               <a:t> </a:t>
             </a:r>
             <a:r>
-              <a:rPr sz="1500" b="1" lang="zh-CN" altLang="en-US">
+              <a:rPr sz="1400" b="1" lang="zh-CN" altLang="en-US">
                 <a:solidFill>
                   <a:srgbClr val="F5F5F5"/>
                 </a:solidFill>
@@ -10190,7 +10286,7 @@
               <a:t>·</a:t>
             </a:r>
             <a:r>
-              <a:rPr sz="1500" b="1" lang="zh-CN" altLang="en-US">
+              <a:rPr sz="1400" b="1" lang="zh-CN" altLang="en-US">
                 <a:solidFill>
                   <a:srgbClr val="F5F5F5"/>
                 </a:solidFill>
@@ -10201,7 +10297,7 @@
               <a:t> </a:t>
             </a:r>
             <a:r>
-              <a:rPr sz="1500" b="1" lang="zh-CN" altLang="en-US">
+              <a:rPr sz="1400" b="1" lang="zh-CN" altLang="en-US">
                 <a:solidFill>
                   <a:srgbClr val="F5F5F5"/>
                 </a:solidFill>
@@ -10212,7 +10308,7 @@
               <a:t>共用</a:t>
             </a:r>
             <a:r>
-              <a:rPr sz="1500" b="1" lang="zh-CN" altLang="en-US">
+              <a:rPr sz="1400" b="1" lang="zh-CN" altLang="en-US">
                 <a:solidFill>
                   <a:srgbClr val="F5F5F5"/>
                 </a:solidFill>
@@ -10223,7 +10319,7 @@
               <a:t> </a:t>
             </a:r>
             <a:r>
-              <a:rPr sz="1500" b="1" lang="zh-CN" altLang="en-US">
+              <a:rPr sz="1400" b="1" lang="zh-CN" altLang="en-US">
                 <a:solidFill>
                   <a:srgbClr val="F5F5F5"/>
                 </a:solidFill>
@@ -10244,8 +10340,8 @@
         </p:nvSpPr>
         <p:spPr>
           <a:xfrm>
-            <a:off x="7315200" y="5245100"/>
-            <a:ext cx="4267200" cy="254000"/>
+            <a:off x="7315200" y="5219700"/>
+            <a:ext cx="4267200" cy="444500"/>
           </a:xfrm>
           <a:prstGeom prst="rect">
             <a:avLst/>
@@ -10260,11 +10356,11 @@
           <a:p>
             <a:pPr algn="l">
               <a:lnSpc>
-                <a:spcPts val="1679"/>
-              </a:lnSpc>
-            </a:pPr>
-            <a:r>
-              <a:rPr sz="1200" b="0" lang="zh-CN" altLang="en-US">
+                <a:spcPts val="1650"/>
+              </a:lnSpc>
+            </a:pPr>
+            <a:r>
+              <a:rPr sz="1100" b="0" lang="zh-CN" altLang="en-US">
                 <a:solidFill>
                   <a:srgbClr val="F5F5F5">
                     <a:alpha val="55000"/>
@@ -10274,10 +10370,10 @@
                 <a:ea typeface="微软雅黑"/>
                 <a:cs typeface="微软雅黑"/>
               </a:rPr>
-              <a:t>20</a:t>
-            </a:r>
-            <a:r>
-              <a:rPr sz="1200" b="0" lang="zh-CN" altLang="en-US">
+              <a:t>去重共</a:t>
+            </a:r>
+            <a:r>
+              <a:rPr sz="1100" b="0" lang="zh-CN" altLang="en-US">
                 <a:solidFill>
                   <a:srgbClr val="F5F5F5">
                     <a:alpha val="55000"/>
@@ -10290,7 +10386,7 @@
               <a:t> </a:t>
             </a:r>
             <a:r>
-              <a:rPr sz="1200" b="0" lang="zh-CN" altLang="en-US">
+              <a:rPr sz="1100" b="0" lang="zh-CN" altLang="en-US">
                 <a:solidFill>
                   <a:srgbClr val="F5F5F5">
                     <a:alpha val="55000"/>
@@ -10300,7 +10396,131 @@
                 <a:ea typeface="微软雅黑"/>
                 <a:cs typeface="微软雅黑"/>
               </a:rPr>
-              <a:t>种开花保留烘焙器配方，可调参重新导出</a:t>
+              <a:t>212</a:t>
+            </a:r>
+            <a:r>
+              <a:rPr sz="1100" b="0" lang="zh-CN" altLang="en-US">
+                <a:solidFill>
+                  <a:srgbClr val="F5F5F5">
+                    <a:alpha val="55000"/>
+                  </a:srgbClr>
+                </a:solidFill>
+                <a:latin typeface="微软雅黑"/>
+                <a:ea typeface="微软雅黑"/>
+                <a:cs typeface="微软雅黑"/>
+              </a:rPr>
+              <a:t> </a:t>
+            </a:r>
+            <a:r>
+              <a:rPr sz="1100" b="0" lang="zh-CN" altLang="en-US">
+                <a:solidFill>
+                  <a:srgbClr val="F5F5F5">
+                    <a:alpha val="55000"/>
+                  </a:srgbClr>
+                </a:solidFill>
+                <a:latin typeface="Consolas"/>
+                <a:ea typeface="微软雅黑"/>
+                <a:cs typeface="微软雅黑"/>
+              </a:rPr>
+              <a:t>张；20</a:t>
+            </a:r>
+            <a:r>
+              <a:rPr sz="1100" b="0" lang="zh-CN" altLang="en-US">
+                <a:solidFill>
+                  <a:srgbClr val="F5F5F5">
+                    <a:alpha val="55000"/>
+                  </a:srgbClr>
+                </a:solidFill>
+                <a:latin typeface="微软雅黑"/>
+                <a:ea typeface="微软雅黑"/>
+                <a:cs typeface="微软雅黑"/>
+              </a:rPr>
+              <a:t> </a:t>
+            </a:r>
+            <a:r>
+              <a:rPr sz="1100" b="0" lang="zh-CN" altLang="en-US">
+                <a:solidFill>
+                  <a:srgbClr val="F5F5F5">
+                    <a:alpha val="55000"/>
+                  </a:srgbClr>
+                </a:solidFill>
+                <a:latin typeface="Consolas"/>
+                <a:ea typeface="微软雅黑"/>
+                <a:cs typeface="微软雅黑"/>
+              </a:rPr>
+              <a:t>种开花有烘焙器导出材料，</a:t>
+            </a:r>
+          </a:p>
+          <a:p>
+            <a:pPr algn="l">
+              <a:lnSpc>
+                <a:spcPts val="1650"/>
+              </a:lnSpc>
+            </a:pPr>
+            <a:r>
+              <a:rPr sz="1100" b="0" lang="zh-CN" altLang="en-US">
+                <a:solidFill>
+                  <a:srgbClr val="F5F5F5">
+                    <a:alpha val="55000"/>
+                  </a:srgbClr>
+                </a:solidFill>
+                <a:latin typeface="Consolas"/>
+                <a:ea typeface="微软雅黑"/>
+                <a:cs typeface="微软雅黑"/>
+              </a:rPr>
+              <a:t>其中</a:t>
+            </a:r>
+            <a:r>
+              <a:rPr sz="1100" b="0" lang="zh-CN" altLang="en-US">
+                <a:solidFill>
+                  <a:srgbClr val="F5F5F5">
+                    <a:alpha val="55000"/>
+                  </a:srgbClr>
+                </a:solidFill>
+                <a:latin typeface="微软雅黑"/>
+                <a:ea typeface="微软雅黑"/>
+                <a:cs typeface="微软雅黑"/>
+              </a:rPr>
+              <a:t> </a:t>
+            </a:r>
+            <a:r>
+              <a:rPr sz="1100" b="0" lang="zh-CN" altLang="en-US">
+                <a:solidFill>
+                  <a:srgbClr val="F5F5F5">
+                    <a:alpha val="55000"/>
+                  </a:srgbClr>
+                </a:solidFill>
+                <a:latin typeface="Consolas"/>
+                <a:ea typeface="微软雅黑"/>
+                <a:cs typeface="微软雅黑"/>
+              </a:rPr>
+              <a:t>19</a:t>
+            </a:r>
+            <a:r>
+              <a:rPr sz="1100" b="0" lang="zh-CN" altLang="en-US">
+                <a:solidFill>
+                  <a:srgbClr val="F5F5F5">
+                    <a:alpha val="55000"/>
+                  </a:srgbClr>
+                </a:solidFill>
+                <a:latin typeface="微软雅黑"/>
+                <a:ea typeface="微软雅黑"/>
+                <a:cs typeface="微软雅黑"/>
+              </a:rPr>
+              <a:t> </a:t>
+            </a:r>
+            <a:r>
+              <a:rPr sz="1100" b="0" lang="zh-CN" altLang="en-US">
+                <a:solidFill>
+                  <a:srgbClr val="F5F5F5">
+                    <a:alpha val="55000"/>
+                  </a:srgbClr>
+                </a:solidFill>
+                <a:latin typeface="Consolas"/>
+                <a:ea typeface="微软雅黑"/>
+                <a:cs typeface="微软雅黑"/>
+              </a:rPr>
+              <a:t>种有配方与导出记录</a:t>
             </a:r>
           </a:p>
         </p:txBody>
@@ -10654,9 +10874,506 @@
           </a:p>
         </p:txBody>
       </p:sp>
+      <p:sp>
+        <p:nvSpPr>
+          <p:cNvPr id="6" name="TextBox 5"/>
+          <p:cNvSpPr txBox="1"/>
+          <p:nvPr/>
+        </p:nvSpPr>
+        <p:spPr>
+          <a:xfrm>
+            <a:off x="609600" y="1358900"/>
+            <a:ext cx="4064000" cy="228600"/>
+          </a:xfrm>
+          <a:prstGeom prst="rect">
+            <a:avLst/>
+          </a:prstGeom>
+          <a:noFill/>
+        </p:spPr>
+        <p:txBody>
+          <a:bodyPr wrap="square" lIns="0" rIns="0" tIns="0" bIns="0" anchor="t">
+            <a:noAutofit/>
+          </a:bodyPr>
+          <a:lstStyle/>
+          <a:p>
+            <a:pPr algn="l">
+              <a:lnSpc>
+                <a:spcPts val="1560"/>
+              </a:lnSpc>
+            </a:pPr>
+            <a:r>
+              <a:rPr sz="1200" b="1" lang="zh-CN" altLang="en-US" spc="100">
+                <a:solidFill>
+                  <a:srgbClr val="0FF796"/>
+                </a:solidFill>
+                <a:latin typeface="Consolas"/>
+                <a:ea typeface="微软雅黑"/>
+                <a:cs typeface="微软雅黑"/>
+              </a:rPr>
+              <a:t>贴图规范确定后</a:t>
+            </a:r>
+          </a:p>
+        </p:txBody>
+      </p:sp>
+      <p:sp>
+        <p:nvSpPr>
+          <p:cNvPr id="7" name="TextBox 6"/>
+          <p:cNvSpPr txBox="1"/>
+          <p:nvPr/>
+        </p:nvSpPr>
+        <p:spPr>
+          <a:xfrm>
+            <a:off x="609600" y="1663700"/>
+            <a:ext cx="4064000" cy="889000"/>
+          </a:xfrm>
+          <a:prstGeom prst="rect">
+            <a:avLst/>
+          </a:prstGeom>
+          <a:noFill/>
+        </p:spPr>
+        <p:txBody>
+          <a:bodyPr wrap="square" lIns="0" rIns="0" tIns="0" bIns="0" anchor="t">
+            <a:noAutofit/>
+          </a:bodyPr>
+          <a:lstStyle/>
+          <a:p>
+            <a:pPr algn="l">
+              <a:lnSpc>
+                <a:spcPts val="6000"/>
+              </a:lnSpc>
+            </a:pPr>
+            <a:r>
+              <a:rPr sz="6000" b="1" lang="zh-CN" altLang="en-US">
+                <a:solidFill>
+                  <a:srgbClr val="0FF796"/>
+                </a:solidFill>
+                <a:latin typeface="Consolas"/>
+                <a:ea typeface="微软雅黑"/>
+                <a:cs typeface="微软雅黑"/>
+              </a:rPr>
+              <a:t>149</a:t>
+            </a:r>
+            <a:r>
+              <a:rPr sz="3800" b="1" lang="zh-CN" altLang="en-US">
+                <a:solidFill>
+                  <a:srgbClr val="0FF796"/>
+                </a:solidFill>
+                <a:latin typeface="Consolas"/>
+                <a:ea typeface="微软雅黑"/>
+                <a:cs typeface="微软雅黑"/>
+              </a:rPr>
+              <a:t>/149</a:t>
+            </a:r>
+          </a:p>
+        </p:txBody>
+      </p:sp>
+      <p:sp>
+        <p:nvSpPr>
+          <p:cNvPr id="8" name="TextBox 7"/>
+          <p:cNvSpPr txBox="1"/>
+          <p:nvPr/>
+        </p:nvSpPr>
+        <p:spPr>
+          <a:xfrm>
+            <a:off x="609600" y="2540000"/>
+            <a:ext cx="4064000" cy="254000"/>
+          </a:xfrm>
+          <a:prstGeom prst="rect">
+            <a:avLst/>
+          </a:prstGeom>
+          <a:noFill/>
+        </p:spPr>
+        <p:txBody>
+          <a:bodyPr wrap="square" lIns="0" rIns="0" tIns="0" bIns="0" anchor="t">
+            <a:noAutofit/>
+          </a:bodyPr>
+          <a:lstStyle/>
+          <a:p>
+            <a:pPr algn="l">
+              <a:lnSpc>
+                <a:spcPts val="1950"/>
+              </a:lnSpc>
+            </a:pPr>
+            <a:r>
+              <a:rPr sz="1300" b="0" lang="zh-CN" altLang="en-US">
+                <a:solidFill>
+                  <a:srgbClr val="F5F5F5">
+                    <a:alpha val="70000"/>
+                  </a:srgbClr>
+                </a:solidFill>
+                <a:latin typeface="Consolas"/>
+                <a:ea typeface="微软雅黑"/>
+                <a:cs typeface="微软雅黑"/>
+              </a:rPr>
+              <a:t>张贴图批量重设，读回一致</a:t>
+            </a:r>
+          </a:p>
+        </p:txBody>
+      </p:sp>
+      <p:sp>
+        <p:nvSpPr>
+          <p:cNvPr id="9" name="Rectangle 8"/>
+          <p:cNvSpPr/>
+          <p:nvPr/>
+        </p:nvSpPr>
+        <p:spPr>
+          <a:xfrm>
+            <a:off x="609600" y="3048000"/>
+            <a:ext cx="4064000" cy="6350"/>
+          </a:xfrm>
+          <a:prstGeom prst="rect">
+            <a:avLst/>
+          </a:prstGeom>
+          <a:solidFill>
+            <a:srgbClr val="F5F5F5">
+              <a:alpha val="12000"/>
+            </a:srgbClr>
+          </a:solidFill>
+          <a:ln>
+            <a:noFill/>
+          </a:ln>
+        </p:spPr>
+        <p:txBody>
+          <a:bodyPr rtlCol="0" anchor="ctr"/>
+          <a:lstStyle/>
+          <a:p>
+            <a:pPr algn="ctr"/>
+          </a:p>
+        </p:txBody>
+      </p:sp>
+      <p:sp>
+        <p:nvSpPr>
+          <p:cNvPr id="10" name="TextBox 9"/>
+          <p:cNvSpPr txBox="1"/>
+          <p:nvPr/>
+        </p:nvSpPr>
+        <p:spPr>
+          <a:xfrm>
+            <a:off x="609600" y="3225800"/>
+            <a:ext cx="4064000" cy="228600"/>
+          </a:xfrm>
+          <a:prstGeom prst="rect">
+            <a:avLst/>
+          </a:prstGeom>
+          <a:noFill/>
+        </p:spPr>
+        <p:txBody>
+          <a:bodyPr wrap="square" lIns="0" rIns="0" tIns="0" bIns="0" anchor="t">
+            <a:noAutofit/>
+          </a:bodyPr>
+          <a:lstStyle/>
+          <a:p>
+            <a:pPr algn="l">
+              <a:lnSpc>
+                <a:spcPts val="1560"/>
+              </a:lnSpc>
+            </a:pPr>
+            <a:r>
+              <a:rPr sz="1200" b="1" lang="zh-CN" altLang="en-US" spc="100">
+                <a:solidFill>
+                  <a:srgbClr val="0FF796"/>
+                </a:solidFill>
+                <a:latin typeface="Consolas"/>
+                <a:ea typeface="微软雅黑"/>
+                <a:cs typeface="微软雅黑"/>
+              </a:rPr>
+              <a:t>更早一轮</a:t>
+            </a:r>
+          </a:p>
+        </p:txBody>
+      </p:sp>
+      <p:sp>
+        <p:nvSpPr>
+          <p:cNvPr id="11" name="TextBox 10"/>
+          <p:cNvSpPr txBox="1"/>
+          <p:nvPr/>
+        </p:nvSpPr>
+        <p:spPr>
+          <a:xfrm>
+            <a:off x="609600" y="3530600"/>
+            <a:ext cx="4064000" cy="571500"/>
+          </a:xfrm>
+          <a:prstGeom prst="rect">
+            <a:avLst/>
+          </a:prstGeom>
+          <a:noFill/>
+        </p:spPr>
+        <p:txBody>
+          <a:bodyPr wrap="square" lIns="0" rIns="0" tIns="0" bIns="0" anchor="t">
+            <a:noAutofit/>
+          </a:bodyPr>
+          <a:lstStyle/>
+          <a:p>
+            <a:pPr algn="l">
+              <a:lnSpc>
+                <a:spcPts val="3600"/>
+              </a:lnSpc>
+            </a:pPr>
+            <a:r>
+              <a:rPr sz="3600" b="1" lang="zh-CN" altLang="en-US">
+                <a:solidFill>
+                  <a:srgbClr val="F5F5F5"/>
+                </a:solidFill>
+                <a:latin typeface="Consolas"/>
+                <a:ea typeface="微软雅黑"/>
+                <a:cs typeface="微软雅黑"/>
+              </a:rPr>
+              <a:t>115</a:t>
+            </a:r>
+            <a:r>
+              <a:rPr sz="1500" b="1" lang="zh-CN" altLang="en-US">
+                <a:solidFill>
+                  <a:srgbClr val="F5F5F5"/>
+                </a:solidFill>
+                <a:latin typeface="微软雅黑"/>
+                <a:ea typeface="微软雅黑"/>
+                <a:cs typeface="微软雅黑"/>
+              </a:rPr>
+              <a:t> </a:t>
+            </a:r>
+            <a:r>
+              <a:rPr sz="1500" b="1" lang="zh-CN" altLang="en-US">
+                <a:solidFill>
+                  <a:srgbClr val="F5F5F5"/>
+                </a:solidFill>
+                <a:latin typeface="Consolas"/>
+                <a:ea typeface="微软雅黑"/>
+                <a:cs typeface="微软雅黑"/>
+              </a:rPr>
+              <a:t>个包</a:t>
+            </a:r>
+          </a:p>
+        </p:txBody>
+      </p:sp>
+      <p:sp>
+        <p:nvSpPr>
+          <p:cNvPr id="12" name="TextBox 11"/>
+          <p:cNvSpPr txBox="1"/>
+          <p:nvPr/>
+        </p:nvSpPr>
+        <p:spPr>
+          <a:xfrm>
+            <a:off x="609600" y="4114800"/>
+            <a:ext cx="4064000" cy="508000"/>
+          </a:xfrm>
+          <a:prstGeom prst="rect">
+            <a:avLst/>
+          </a:prstGeom>
+          <a:noFill/>
+        </p:spPr>
+        <p:txBody>
+          <a:bodyPr wrap="square" lIns="0" rIns="0" tIns="0" bIns="0" anchor="t">
+            <a:noAutofit/>
+          </a:bodyPr>
+          <a:lstStyle/>
+          <a:p>
+            <a:pPr algn="l">
+              <a:lnSpc>
+                <a:spcPts val="2080"/>
+              </a:lnSpc>
+            </a:pPr>
+            <a:r>
+              <a:rPr sz="1300" b="0" lang="zh-CN" altLang="en-US">
+                <a:solidFill>
+                  <a:srgbClr val="F5F5F5">
+                    <a:alpha val="70000"/>
+                  </a:srgbClr>
+                </a:solidFill>
+                <a:latin typeface="Consolas"/>
+                <a:ea typeface="微软雅黑"/>
+                <a:cs typeface="微软雅黑"/>
+              </a:rPr>
+              <a:t>粒子系统</a:t>
+            </a:r>
+            <a:r>
+              <a:rPr sz="1300" b="0" lang="zh-CN" altLang="en-US">
+                <a:solidFill>
+                  <a:srgbClr val="F5F5F5">
+                    <a:alpha val="70000"/>
+                  </a:srgbClr>
+                </a:solidFill>
+                <a:latin typeface="微软雅黑"/>
+                <a:ea typeface="微软雅黑"/>
+                <a:cs typeface="微软雅黑"/>
+              </a:rPr>
+              <a:t> </a:t>
+            </a:r>
+            <a:r>
+              <a:rPr sz="1300" b="0" lang="zh-CN" altLang="en-US">
+                <a:solidFill>
+                  <a:srgbClr val="F5F5F5">
+                    <a:alpha val="70000"/>
+                  </a:srgbClr>
+                </a:solidFill>
+                <a:latin typeface="Consolas"/>
+                <a:ea typeface="微软雅黑"/>
+                <a:cs typeface="微软雅黑"/>
+              </a:rPr>
+              <a:t>48</a:t>
+            </a:r>
+            <a:r>
+              <a:rPr sz="1300" b="0" lang="zh-CN" altLang="en-US">
+                <a:solidFill>
+                  <a:srgbClr val="F5F5F5">
+                    <a:alpha val="70000"/>
+                  </a:srgbClr>
+                </a:solidFill>
+                <a:latin typeface="微软雅黑"/>
+                <a:ea typeface="微软雅黑"/>
+                <a:cs typeface="微软雅黑"/>
+              </a:rPr>
+              <a:t> </a:t>
+            </a:r>
+            <a:r>
+              <a:rPr sz="1300" b="0" lang="zh-CN" altLang="en-US">
+                <a:solidFill>
+                  <a:srgbClr val="F5F5F5">
+                    <a:alpha val="70000"/>
+                  </a:srgbClr>
+                </a:solidFill>
+                <a:latin typeface="Consolas"/>
+                <a:ea typeface="微软雅黑"/>
+                <a:cs typeface="微软雅黑"/>
+              </a:rPr>
+              <a:t>个、材质实例</a:t>
+            </a:r>
+            <a:r>
+              <a:rPr sz="1300" b="0" lang="zh-CN" altLang="en-US">
+                <a:solidFill>
+                  <a:srgbClr val="F5F5F5">
+                    <a:alpha val="70000"/>
+                  </a:srgbClr>
+                </a:solidFill>
+                <a:latin typeface="微软雅黑"/>
+                <a:ea typeface="微软雅黑"/>
+                <a:cs typeface="微软雅黑"/>
+              </a:rPr>
+              <a:t> </a:t>
+            </a:r>
+            <a:r>
+              <a:rPr sz="1300" b="0" lang="zh-CN" altLang="en-US">
+                <a:solidFill>
+                  <a:srgbClr val="F5F5F5">
+                    <a:alpha val="70000"/>
+                  </a:srgbClr>
+                </a:solidFill>
+                <a:latin typeface="Consolas"/>
+                <a:ea typeface="微软雅黑"/>
+                <a:cs typeface="微软雅黑"/>
+              </a:rPr>
+              <a:t>67</a:t>
+            </a:r>
+            <a:r>
+              <a:rPr sz="1300" b="0" lang="zh-CN" altLang="en-US">
+                <a:solidFill>
+                  <a:srgbClr val="F5F5F5">
+                    <a:alpha val="70000"/>
+                  </a:srgbClr>
+                </a:solidFill>
+                <a:latin typeface="微软雅黑"/>
+                <a:ea typeface="微软雅黑"/>
+                <a:cs typeface="微软雅黑"/>
+              </a:rPr>
+              <a:t> </a:t>
+            </a:r>
+            <a:r>
+              <a:rPr sz="1300" b="0" lang="zh-CN" altLang="en-US">
+                <a:solidFill>
+                  <a:srgbClr val="F5F5F5">
+                    <a:alpha val="70000"/>
+                  </a:srgbClr>
+                </a:solidFill>
+                <a:latin typeface="Consolas"/>
+                <a:ea typeface="微软雅黑"/>
+                <a:cs typeface="微软雅黑"/>
+              </a:rPr>
+              <a:t>个，</a:t>
+            </a:r>
+          </a:p>
+          <a:p>
+            <a:pPr algn="l">
+              <a:lnSpc>
+                <a:spcPts val="2080"/>
+              </a:lnSpc>
+            </a:pPr>
+            <a:r>
+              <a:rPr sz="1300" b="0" lang="zh-CN" altLang="en-US">
+                <a:solidFill>
+                  <a:srgbClr val="F5F5F5">
+                    <a:alpha val="70000"/>
+                  </a:srgbClr>
+                </a:solidFill>
+                <a:latin typeface="Consolas"/>
+                <a:ea typeface="微软雅黑"/>
+                <a:cs typeface="微软雅黑"/>
+              </a:rPr>
+              <a:t>读回无错误</a:t>
+            </a:r>
+          </a:p>
+        </p:txBody>
+      </p:sp>
+      <p:sp>
+        <p:nvSpPr>
+          <p:cNvPr id="13" name="TextBox 12"/>
+          <p:cNvSpPr txBox="1"/>
+          <p:nvPr/>
+        </p:nvSpPr>
+        <p:spPr>
+          <a:xfrm>
+            <a:off x="609600" y="5334000"/>
+            <a:ext cx="4064000" cy="571500"/>
+          </a:xfrm>
+          <a:prstGeom prst="rect">
+            <a:avLst/>
+          </a:prstGeom>
+          <a:noFill/>
+        </p:spPr>
+        <p:txBody>
+          <a:bodyPr wrap="square" lIns="0" rIns="0" tIns="0" bIns="0" anchor="t">
+            <a:noAutofit/>
+          </a:bodyPr>
+          <a:lstStyle/>
+          <a:p>
+            <a:pPr algn="l">
+              <a:lnSpc>
+                <a:spcPts val="1950"/>
+              </a:lnSpc>
+            </a:pPr>
+            <a:r>
+              <a:rPr sz="1300" b="0" lang="zh-CN" altLang="en-US">
+                <a:solidFill>
+                  <a:srgbClr val="0FF796"/>
+                </a:solidFill>
+                <a:latin typeface="Consolas"/>
+                <a:ea typeface="微软雅黑"/>
+                <a:cs typeface="微软雅黑"/>
+              </a:rPr>
+              <a:t>规则已内置于导入器，</a:t>
+            </a:r>
+          </a:p>
+          <a:p>
+            <a:pPr algn="l">
+              <a:lnSpc>
+                <a:spcPts val="1950"/>
+              </a:lnSpc>
+            </a:pPr>
+            <a:r>
+              <a:rPr sz="1300" b="0" lang="zh-CN" altLang="en-US">
+                <a:solidFill>
+                  <a:srgbClr val="0FF796"/>
+                </a:solidFill>
+                <a:latin typeface="Consolas"/>
+                <a:ea typeface="微软雅黑"/>
+                <a:cs typeface="微软雅黑"/>
+              </a:rPr>
+              <a:t>新资源导入时自动执行</a:t>
+            </a:r>
+          </a:p>
+        </p:txBody>
+      </p:sp>
       <p:pic>
         <p:nvPicPr>
-          <p:cNvPr id="6" name="Picture 5" descr="p12_ue.jpg"/>
+          <p:cNvPr id="14" name="Picture 13" descr="p12_ue.jpg"/>
           <p:cNvPicPr>
             <a:picLocks noChangeAspect="1"/>
           </p:cNvPicPr>
@@ -10670,7 +11387,7 @@
         </p:blipFill>
         <p:spPr>
           <a:xfrm>
-            <a:off x="609600" y="1358900"/>
+            <a:off x="5181600" y="1358900"/>
             <a:ext cx="6400800" cy="3594100"/>
           </a:xfrm>
           <a:prstGeom prst="rect">
@@ -10680,13 +11397,13 @@
       </p:pic>
       <p:sp>
         <p:nvSpPr>
-          <p:cNvPr id="7" name="Rectangle 6"/>
+          <p:cNvPr id="15" name="Rectangle 14"/>
           <p:cNvSpPr/>
           <p:nvPr/>
         </p:nvSpPr>
         <p:spPr>
           <a:xfrm>
-            <a:off x="685800" y="4622800"/>
+            <a:off x="5257800" y="4622800"/>
             <a:ext cx="1353820" cy="254000"/>
           </a:xfrm>
           <a:prstGeom prst="rect">
@@ -10711,13 +11428,13 @@
       </p:sp>
       <p:sp>
         <p:nvSpPr>
-          <p:cNvPr id="8" name="source_tag"/>
-          <p:cNvSpPr txBox="1"/>
-          <p:nvPr/>
-        </p:nvSpPr>
-        <p:spPr>
-          <a:xfrm>
-            <a:off x="685800" y="4622800"/>
+          <p:cNvPr id="16" name="source_tag"/>
+          <p:cNvSpPr txBox="1"/>
+          <p:nvPr/>
+        </p:nvSpPr>
+        <p:spPr>
+          <a:xfrm>
+            <a:off x="5257800" y="4622800"/>
             <a:ext cx="1353820" cy="254000"/>
           </a:xfrm>
           <a:prstGeom prst="rect">
@@ -10832,14 +11549,14 @@
       </p:sp>
       <p:sp>
         <p:nvSpPr>
-          <p:cNvPr id="9" name="TextBox 8"/>
-          <p:cNvSpPr txBox="1"/>
-          <p:nvPr/>
-        </p:nvSpPr>
-        <p:spPr>
-          <a:xfrm>
-            <a:off x="609600" y="5143500"/>
-            <a:ext cx="6400800" cy="317500"/>
+          <p:cNvPr id="17" name="TextBox 16"/>
+          <p:cNvSpPr txBox="1"/>
+          <p:nvPr/>
+        </p:nvSpPr>
+        <p:spPr>
+          <a:xfrm>
+            <a:off x="5181600" y="5016500"/>
+            <a:ext cx="6400800" cy="190500"/>
           </a:xfrm>
           <a:prstGeom prst="rect">
             <a:avLst/>
@@ -10854,457 +11571,151 @@
           <a:p>
             <a:pPr algn="l">
               <a:lnSpc>
-                <a:spcPts val="1950"/>
-              </a:lnSpc>
-            </a:pPr>
-            <a:r>
-              <a:rPr sz="1300" b="0" lang="zh-CN" altLang="en-US">
-                <a:solidFill>
-                  <a:srgbClr val="0FF796"/>
-                </a:solidFill>
-                <a:latin typeface="Consolas"/>
-                <a:ea typeface="微软雅黑"/>
-                <a:cs typeface="微软雅黑"/>
-              </a:rPr>
-              <a:t>规则已内置于导入器，新资源导入时自动执行</a:t>
-            </a:r>
-          </a:p>
-        </p:txBody>
-      </p:sp>
-      <p:sp>
-        <p:nvSpPr>
-          <p:cNvPr id="10" name="TextBox 9"/>
-          <p:cNvSpPr txBox="1"/>
-          <p:nvPr/>
-        </p:nvSpPr>
-        <p:spPr>
-          <a:xfrm>
-            <a:off x="7315200" y="1358900"/>
-            <a:ext cx="4267200" cy="228600"/>
-          </a:xfrm>
-          <a:prstGeom prst="rect">
-            <a:avLst/>
-          </a:prstGeom>
-          <a:noFill/>
-        </p:spPr>
-        <p:txBody>
-          <a:bodyPr wrap="square" lIns="0" rIns="0" tIns="0" bIns="0" anchor="t">
-            <a:noAutofit/>
-          </a:bodyPr>
-          <a:lstStyle/>
-          <a:p>
-            <a:pPr algn="l">
-              <a:lnSpc>
-                <a:spcPts val="1560"/>
-              </a:lnSpc>
-            </a:pPr>
-            <a:r>
-              <a:rPr sz="1200" b="1" lang="zh-CN" altLang="en-US" spc="100">
-                <a:solidFill>
-                  <a:srgbClr val="0FF796"/>
-                </a:solidFill>
-                <a:latin typeface="Consolas"/>
-                <a:ea typeface="微软雅黑"/>
-                <a:cs typeface="微软雅黑"/>
-              </a:rPr>
-              <a:t>贴图规范确定后</a:t>
-            </a:r>
-          </a:p>
-        </p:txBody>
-      </p:sp>
-      <p:sp>
-        <p:nvSpPr>
-          <p:cNvPr id="11" name="TextBox 10"/>
-          <p:cNvSpPr txBox="1"/>
-          <p:nvPr/>
-        </p:nvSpPr>
-        <p:spPr>
-          <a:xfrm>
-            <a:off x="7315200" y="1663700"/>
-            <a:ext cx="4267200" cy="889000"/>
-          </a:xfrm>
-          <a:prstGeom prst="rect">
-            <a:avLst/>
-          </a:prstGeom>
-          <a:noFill/>
-        </p:spPr>
-        <p:txBody>
-          <a:bodyPr wrap="square" lIns="0" rIns="0" tIns="0" bIns="0" anchor="t">
-            <a:noAutofit/>
-          </a:bodyPr>
-          <a:lstStyle/>
-          <a:p>
-            <a:pPr algn="l">
-              <a:lnSpc>
-                <a:spcPts val="6000"/>
-              </a:lnSpc>
-            </a:pPr>
-            <a:r>
-              <a:rPr sz="6000" b="1" lang="zh-CN" altLang="en-US">
-                <a:solidFill>
-                  <a:srgbClr val="0FF796"/>
-                </a:solidFill>
-                <a:latin typeface="Consolas"/>
-                <a:ea typeface="微软雅黑"/>
-                <a:cs typeface="微软雅黑"/>
-              </a:rPr>
-              <a:t>149</a:t>
-            </a:r>
-            <a:r>
-              <a:rPr sz="3800" b="1" lang="zh-CN" altLang="en-US">
-                <a:solidFill>
-                  <a:srgbClr val="0FF796"/>
-                </a:solidFill>
-                <a:latin typeface="Consolas"/>
-                <a:ea typeface="微软雅黑"/>
-                <a:cs typeface="微软雅黑"/>
-              </a:rPr>
-              <a:t>/149</a:t>
-            </a:r>
-          </a:p>
-        </p:txBody>
-      </p:sp>
-      <p:sp>
-        <p:nvSpPr>
-          <p:cNvPr id="12" name="TextBox 11"/>
-          <p:cNvSpPr txBox="1"/>
-          <p:nvPr/>
-        </p:nvSpPr>
-        <p:spPr>
-          <a:xfrm>
-            <a:off x="7315200" y="2540000"/>
-            <a:ext cx="4267200" cy="254000"/>
-          </a:xfrm>
-          <a:prstGeom prst="rect">
-            <a:avLst/>
-          </a:prstGeom>
-          <a:noFill/>
-        </p:spPr>
-        <p:txBody>
-          <a:bodyPr wrap="square" lIns="0" rIns="0" tIns="0" bIns="0" anchor="t">
-            <a:noAutofit/>
-          </a:bodyPr>
-          <a:lstStyle/>
-          <a:p>
-            <a:pPr algn="l">
-              <a:lnSpc>
-                <a:spcPts val="1950"/>
-              </a:lnSpc>
-            </a:pPr>
-            <a:r>
-              <a:rPr sz="1300" b="0" lang="zh-CN" altLang="en-US">
-                <a:solidFill>
-                  <a:srgbClr val="F5F5F5">
-                    <a:alpha val="70000"/>
-                  </a:srgbClr>
-                </a:solidFill>
-                <a:latin typeface="Consolas"/>
-                <a:ea typeface="微软雅黑"/>
-                <a:cs typeface="微软雅黑"/>
-              </a:rPr>
-              <a:t>张贴图批量重设，读回一致</a:t>
-            </a:r>
-          </a:p>
-        </p:txBody>
-      </p:sp>
-      <p:sp>
-        <p:nvSpPr>
-          <p:cNvPr id="13" name="Rectangle 12"/>
-          <p:cNvSpPr/>
-          <p:nvPr/>
-        </p:nvSpPr>
-        <p:spPr>
-          <a:xfrm>
-            <a:off x="7315200" y="3048000"/>
-            <a:ext cx="4267200" cy="6350"/>
-          </a:xfrm>
-          <a:prstGeom prst="rect">
-            <a:avLst/>
-          </a:prstGeom>
-          <a:solidFill>
-            <a:srgbClr val="F5F5F5">
-              <a:alpha val="12000"/>
-            </a:srgbClr>
-          </a:solidFill>
-          <a:ln>
-            <a:noFill/>
-          </a:ln>
-        </p:spPr>
-        <p:txBody>
-          <a:bodyPr rtlCol="0" anchor="ctr"/>
-          <a:lstStyle/>
-          <a:p>
-            <a:pPr algn="ctr"/>
-          </a:p>
-        </p:txBody>
-      </p:sp>
-      <p:sp>
-        <p:nvSpPr>
-          <p:cNvPr id="14" name="TextBox 13"/>
-          <p:cNvSpPr txBox="1"/>
-          <p:nvPr/>
-        </p:nvSpPr>
-        <p:spPr>
-          <a:xfrm>
-            <a:off x="7315200" y="3225800"/>
-            <a:ext cx="4267200" cy="228600"/>
-          </a:xfrm>
-          <a:prstGeom prst="rect">
-            <a:avLst/>
-          </a:prstGeom>
-          <a:noFill/>
-        </p:spPr>
-        <p:txBody>
-          <a:bodyPr wrap="square" lIns="0" rIns="0" tIns="0" bIns="0" anchor="t">
-            <a:noAutofit/>
-          </a:bodyPr>
-          <a:lstStyle/>
-          <a:p>
-            <a:pPr algn="l">
-              <a:lnSpc>
-                <a:spcPts val="1560"/>
-              </a:lnSpc>
-            </a:pPr>
-            <a:r>
-              <a:rPr sz="1200" b="1" lang="zh-CN" altLang="en-US" spc="100">
-                <a:solidFill>
-                  <a:srgbClr val="0FF796"/>
-                </a:solidFill>
-                <a:latin typeface="Consolas"/>
-                <a:ea typeface="微软雅黑"/>
-                <a:cs typeface="微软雅黑"/>
-              </a:rPr>
-              <a:t>更早一轮</a:t>
-            </a:r>
-          </a:p>
-        </p:txBody>
-      </p:sp>
-      <p:sp>
-        <p:nvSpPr>
-          <p:cNvPr id="15" name="TextBox 14"/>
-          <p:cNvSpPr txBox="1"/>
-          <p:nvPr/>
-        </p:nvSpPr>
-        <p:spPr>
-          <a:xfrm>
-            <a:off x="7315200" y="3530600"/>
-            <a:ext cx="4267200" cy="571500"/>
-          </a:xfrm>
-          <a:prstGeom prst="rect">
-            <a:avLst/>
-          </a:prstGeom>
-          <a:noFill/>
-        </p:spPr>
-        <p:txBody>
-          <a:bodyPr wrap="square" lIns="0" rIns="0" tIns="0" bIns="0" anchor="t">
-            <a:noAutofit/>
-          </a:bodyPr>
-          <a:lstStyle/>
-          <a:p>
-            <a:pPr algn="l">
-              <a:lnSpc>
-                <a:spcPts val="3600"/>
-              </a:lnSpc>
-            </a:pPr>
-            <a:r>
-              <a:rPr sz="3600" b="1" lang="zh-CN" altLang="en-US">
-                <a:solidFill>
-                  <a:srgbClr val="F5F5F5"/>
-                </a:solidFill>
-                <a:latin typeface="Consolas"/>
-                <a:ea typeface="微软雅黑"/>
-                <a:cs typeface="微软雅黑"/>
-              </a:rPr>
-              <a:t>115</a:t>
-            </a:r>
-            <a:r>
-              <a:rPr sz="1500" b="1" lang="zh-CN" altLang="en-US">
-                <a:solidFill>
-                  <a:srgbClr val="F5F5F5"/>
-                </a:solidFill>
-                <a:latin typeface="微软雅黑"/>
-                <a:ea typeface="微软雅黑"/>
-                <a:cs typeface="微软雅黑"/>
-              </a:rPr>
-              <a:t> </a:t>
-            </a:r>
-            <a:r>
-              <a:rPr sz="1500" b="1" lang="zh-CN" altLang="en-US">
-                <a:solidFill>
-                  <a:srgbClr val="F5F5F5"/>
-                </a:solidFill>
-                <a:latin typeface="Consolas"/>
-                <a:ea typeface="微软雅黑"/>
-                <a:cs typeface="微软雅黑"/>
-              </a:rPr>
-              <a:t>个包</a:t>
-            </a:r>
-          </a:p>
-        </p:txBody>
-      </p:sp>
-      <p:sp>
-        <p:nvSpPr>
-          <p:cNvPr id="16" name="TextBox 15"/>
-          <p:cNvSpPr txBox="1"/>
-          <p:nvPr/>
-        </p:nvSpPr>
-        <p:spPr>
-          <a:xfrm>
-            <a:off x="7315200" y="4114800"/>
-            <a:ext cx="4267200" cy="508000"/>
-          </a:xfrm>
-          <a:prstGeom prst="rect">
-            <a:avLst/>
-          </a:prstGeom>
-          <a:noFill/>
-        </p:spPr>
-        <p:txBody>
-          <a:bodyPr wrap="square" lIns="0" rIns="0" tIns="0" bIns="0" anchor="t">
-            <a:noAutofit/>
-          </a:bodyPr>
-          <a:lstStyle/>
-          <a:p>
-            <a:pPr algn="l">
-              <a:lnSpc>
-                <a:spcPts val="2080"/>
-              </a:lnSpc>
-            </a:pPr>
-            <a:r>
-              <a:rPr sz="1300" b="0" lang="zh-CN" altLang="en-US">
-                <a:solidFill>
-                  <a:srgbClr val="F5F5F5">
-                    <a:alpha val="70000"/>
-                  </a:srgbClr>
-                </a:solidFill>
-                <a:latin typeface="Consolas"/>
-                <a:ea typeface="微软雅黑"/>
-                <a:cs typeface="微软雅黑"/>
-              </a:rPr>
-              <a:t>粒子系统</a:t>
-            </a:r>
-            <a:r>
-              <a:rPr sz="1300" b="0" lang="zh-CN" altLang="en-US">
-                <a:solidFill>
-                  <a:srgbClr val="F5F5F5">
-                    <a:alpha val="70000"/>
-                  </a:srgbClr>
-                </a:solidFill>
-                <a:latin typeface="微软雅黑"/>
-                <a:ea typeface="微软雅黑"/>
-                <a:cs typeface="微软雅黑"/>
-              </a:rPr>
-              <a:t> </a:t>
-            </a:r>
-            <a:r>
-              <a:rPr sz="1300" b="0" lang="zh-CN" altLang="en-US">
-                <a:solidFill>
-                  <a:srgbClr val="F5F5F5">
-                    <a:alpha val="70000"/>
-                  </a:srgbClr>
-                </a:solidFill>
-                <a:latin typeface="Consolas"/>
-                <a:ea typeface="微软雅黑"/>
-                <a:cs typeface="微软雅黑"/>
-              </a:rPr>
-              <a:t>48</a:t>
-            </a:r>
-            <a:r>
-              <a:rPr sz="1300" b="0" lang="zh-CN" altLang="en-US">
-                <a:solidFill>
-                  <a:srgbClr val="F5F5F5">
-                    <a:alpha val="70000"/>
-                  </a:srgbClr>
-                </a:solidFill>
-                <a:latin typeface="微软雅黑"/>
-                <a:ea typeface="微软雅黑"/>
-                <a:cs typeface="微软雅黑"/>
-              </a:rPr>
-              <a:t> </a:t>
-            </a:r>
-            <a:r>
-              <a:rPr sz="1300" b="0" lang="zh-CN" altLang="en-US">
-                <a:solidFill>
-                  <a:srgbClr val="F5F5F5">
-                    <a:alpha val="70000"/>
-                  </a:srgbClr>
-                </a:solidFill>
-                <a:latin typeface="Consolas"/>
-                <a:ea typeface="微软雅黑"/>
-                <a:cs typeface="微软雅黑"/>
-              </a:rPr>
-              <a:t>个、材质实例</a:t>
-            </a:r>
-            <a:r>
-              <a:rPr sz="1300" b="0" lang="zh-CN" altLang="en-US">
-                <a:solidFill>
-                  <a:srgbClr val="F5F5F5">
-                    <a:alpha val="70000"/>
-                  </a:srgbClr>
-                </a:solidFill>
-                <a:latin typeface="微软雅黑"/>
-                <a:ea typeface="微软雅黑"/>
-                <a:cs typeface="微软雅黑"/>
-              </a:rPr>
-              <a:t> </a:t>
-            </a:r>
-            <a:r>
-              <a:rPr sz="1300" b="0" lang="zh-CN" altLang="en-US">
-                <a:solidFill>
-                  <a:srgbClr val="F5F5F5">
-                    <a:alpha val="70000"/>
-                  </a:srgbClr>
-                </a:solidFill>
-                <a:latin typeface="Consolas"/>
-                <a:ea typeface="微软雅黑"/>
-                <a:cs typeface="微软雅黑"/>
-              </a:rPr>
-              <a:t>67</a:t>
-            </a:r>
-            <a:r>
-              <a:rPr sz="1300" b="0" lang="zh-CN" altLang="en-US">
-                <a:solidFill>
-                  <a:srgbClr val="F5F5F5">
-                    <a:alpha val="70000"/>
-                  </a:srgbClr>
-                </a:solidFill>
-                <a:latin typeface="微软雅黑"/>
-                <a:ea typeface="微软雅黑"/>
-                <a:cs typeface="微软雅黑"/>
-              </a:rPr>
-              <a:t> </a:t>
-            </a:r>
-            <a:r>
-              <a:rPr sz="1300" b="0" lang="zh-CN" altLang="en-US">
-                <a:solidFill>
-                  <a:srgbClr val="F5F5F5">
-                    <a:alpha val="70000"/>
-                  </a:srgbClr>
-                </a:solidFill>
-                <a:latin typeface="Consolas"/>
-                <a:ea typeface="微软雅黑"/>
-                <a:cs typeface="微软雅黑"/>
-              </a:rPr>
-              <a:t>个，</a:t>
-            </a:r>
-          </a:p>
-          <a:p>
-            <a:pPr algn="l">
-              <a:lnSpc>
-                <a:spcPts val="2080"/>
-              </a:lnSpc>
-            </a:pPr>
-            <a:r>
-              <a:rPr sz="1300" b="0" lang="zh-CN" altLang="en-US">
-                <a:solidFill>
-                  <a:srgbClr val="F5F5F5">
-                    <a:alpha val="70000"/>
-                  </a:srgbClr>
-                </a:solidFill>
-                <a:latin typeface="Consolas"/>
-                <a:ea typeface="微软雅黑"/>
-                <a:cs typeface="微软雅黑"/>
-              </a:rPr>
-              <a:t>读回无错误</a:t>
+                <a:spcPts val="1250"/>
+              </a:lnSpc>
+            </a:pPr>
+            <a:r>
+              <a:rPr sz="1000" b="0" lang="zh-CN" altLang="en-US">
+                <a:solidFill>
+                  <a:srgbClr val="F5F5F5">
+                    <a:alpha val="55000"/>
+                  </a:srgbClr>
+                </a:solidFill>
+                <a:latin typeface="Consolas"/>
+                <a:ea typeface="微软雅黑"/>
+                <a:cs typeface="微软雅黑"/>
+              </a:rPr>
+              <a:t>UE</a:t>
+            </a:r>
+            <a:r>
+              <a:rPr sz="1000" b="0" lang="zh-CN" altLang="en-US">
+                <a:solidFill>
+                  <a:srgbClr val="F5F5F5">
+                    <a:alpha val="55000"/>
+                  </a:srgbClr>
+                </a:solidFill>
+                <a:latin typeface="微软雅黑"/>
+                <a:ea typeface="微软雅黑"/>
+                <a:cs typeface="微软雅黑"/>
+              </a:rPr>
+              <a:t> </a:t>
+            </a:r>
+            <a:r>
+              <a:rPr sz="1000" b="0" lang="zh-CN" altLang="en-US">
+                <a:solidFill>
+                  <a:srgbClr val="F5F5F5">
+                    <a:alpha val="55000"/>
+                  </a:srgbClr>
+                </a:solidFill>
+                <a:latin typeface="Consolas"/>
+                <a:ea typeface="微软雅黑"/>
+                <a:cs typeface="微软雅黑"/>
+              </a:rPr>
+              <a:t>4.24</a:t>
+            </a:r>
+            <a:r>
+              <a:rPr sz="1000" b="0" lang="zh-CN" altLang="en-US">
+                <a:solidFill>
+                  <a:srgbClr val="F5F5F5">
+                    <a:alpha val="55000"/>
+                  </a:srgbClr>
+                </a:solidFill>
+                <a:latin typeface="微软雅黑"/>
+                <a:ea typeface="微软雅黑"/>
+                <a:cs typeface="微软雅黑"/>
+              </a:rPr>
+              <a:t> </a:t>
+            </a:r>
+            <a:r>
+              <a:rPr sz="1000" b="0" lang="zh-CN" altLang="en-US">
+                <a:solidFill>
+                  <a:srgbClr val="F5F5F5">
+                    <a:alpha val="55000"/>
+                  </a:srgbClr>
+                </a:solidFill>
+                <a:latin typeface="Consolas"/>
+                <a:ea typeface="微软雅黑"/>
+                <a:cs typeface="微软雅黑"/>
+              </a:rPr>
+              <a:t>实播</a:t>
+            </a:r>
+            <a:r>
+              <a:rPr sz="1000" b="0" lang="zh-CN" altLang="en-US">
+                <a:solidFill>
+                  <a:srgbClr val="F5F5F5">
+                    <a:alpha val="55000"/>
+                  </a:srgbClr>
+                </a:solidFill>
+                <a:latin typeface="微软雅黑"/>
+                <a:ea typeface="微软雅黑"/>
+                <a:cs typeface="微软雅黑"/>
+              </a:rPr>
+              <a:t> </a:t>
+            </a:r>
+            <a:r>
+              <a:rPr sz="1000" b="0" lang="zh-CN" altLang="en-US">
+                <a:solidFill>
+                  <a:srgbClr val="F5F5F5">
+                    <a:alpha val="55000"/>
+                  </a:srgbClr>
+                </a:solidFill>
+                <a:latin typeface="Consolas"/>
+                <a:ea typeface="微软雅黑"/>
+                <a:cs typeface="微软雅黑"/>
+              </a:rPr>
+              <a:t>·</a:t>
+            </a:r>
+            <a:r>
+              <a:rPr sz="1000" b="0" lang="zh-CN" altLang="en-US">
+                <a:solidFill>
+                  <a:srgbClr val="F5F5F5">
+                    <a:alpha val="55000"/>
+                  </a:srgbClr>
+                </a:solidFill>
+                <a:latin typeface="微软雅黑"/>
+                <a:ea typeface="微软雅黑"/>
+                <a:cs typeface="微软雅黑"/>
+              </a:rPr>
+              <a:t> </a:t>
+            </a:r>
+            <a:r>
+              <a:rPr sz="1000" b="0" lang="zh-CN" altLang="en-US">
+                <a:solidFill>
+                  <a:srgbClr val="F5F5F5">
+                    <a:alpha val="55000"/>
+                  </a:srgbClr>
+                </a:solidFill>
+                <a:latin typeface="Consolas"/>
+                <a:ea typeface="微软雅黑"/>
+                <a:cs typeface="微软雅黑"/>
+              </a:rPr>
+              <a:t>10-16</a:t>
+            </a:r>
+            <a:r>
+              <a:rPr sz="1000" b="0" lang="zh-CN" altLang="en-US">
+                <a:solidFill>
+                  <a:srgbClr val="F5F5F5">
+                    <a:alpha val="55000"/>
+                  </a:srgbClr>
+                </a:solidFill>
+                <a:latin typeface="微软雅黑"/>
+                <a:ea typeface="微软雅黑"/>
+                <a:cs typeface="微软雅黑"/>
+              </a:rPr>
+              <a:t> </a:t>
+            </a:r>
+            <a:r>
+              <a:rPr sz="1000" b="0" lang="zh-CN" altLang="en-US">
+                <a:solidFill>
+                  <a:srgbClr val="F5F5F5">
+                    <a:alpha val="55000"/>
+                  </a:srgbClr>
+                </a:solidFill>
+                <a:latin typeface="Consolas"/>
+                <a:ea typeface="微软雅黑"/>
+                <a:cs typeface="微软雅黑"/>
+              </a:rPr>
+              <a:t>修正后的金垂柳</a:t>
             </a:r>
           </a:p>
         </p:txBody>
@@ -11819,7 +12230,7 @@
                 <a:ea typeface="微软雅黑"/>
                 <a:cs typeface="微软雅黑"/>
               </a:rPr>
-              <a:t>1100</a:t>
+              <a:t>1150</a:t>
             </a:r>
           </a:p>
         </p:txBody>
@@ -13825,33 +14236,7 @@
                 <a:ea typeface="微软雅黑"/>
                 <a:cs typeface="微软雅黑"/>
               </a:rPr>
-              <a:t>16:9</a:t>
-            </a:r>
-            <a:r>
-              <a:rPr sz="1200" b="0" lang="zh-CN" altLang="en-US">
-                <a:solidFill>
-                  <a:srgbClr val="F5F5F5">
-                    <a:alpha val="55000"/>
-                  </a:srgbClr>
-                </a:solidFill>
-                <a:latin typeface="微软雅黑"/>
-                <a:ea typeface="微软雅黑"/>
-                <a:cs typeface="微软雅黑"/>
-              </a:rPr>
-              <a:t> </a:t>
-            </a:r>
-            <a:r>
-              <a:rPr sz="1200" b="0" lang="zh-CN" altLang="en-US">
-                <a:solidFill>
-                  <a:srgbClr val="F5F5F5">
-                    <a:alpha val="55000"/>
-                  </a:srgbClr>
-                </a:solidFill>
-                <a:latin typeface="Consolas"/>
-                <a:ea typeface="微软雅黑"/>
-                <a:cs typeface="微软雅黑"/>
-              </a:rPr>
-              <a:t>视频或动图</a:t>
+              <a:t>讲者补充；来不及可删除</a:t>
             </a:r>
           </a:p>
         </p:txBody>
@@ -14326,11 +14711,11 @@
           <a:p>
             <a:pPr algn="ctr">
               <a:lnSpc>
-                <a:spcPts val="1320"/>
-              </a:lnSpc>
-            </a:pPr>
-            <a:r>
-              <a:rPr sz="1100" b="1" lang="zh-CN" altLang="en-US">
+                <a:spcPts val="1200"/>
+              </a:lnSpc>
+            </a:pPr>
+            <a:r>
+              <a:rPr sz="1000" b="1" lang="zh-CN" altLang="en-US">
                 <a:solidFill>
                   <a:srgbClr val="0FF796"/>
                 </a:solidFill>
@@ -14341,7 +14726,7 @@
               <a:t>13</a:t>
             </a:r>
             <a:r>
-              <a:rPr sz="1100" b="1" lang="zh-CN" altLang="en-US">
+              <a:rPr sz="1000" b="1" lang="zh-CN" altLang="en-US">
                 <a:solidFill>
                   <a:srgbClr val="0FF796"/>
                 </a:solidFill>
@@ -14352,7 +14737,7 @@
               <a:t> </a:t>
             </a:r>
             <a:r>
-              <a:rPr sz="1100" b="1" lang="zh-CN" altLang="en-US">
+              <a:rPr sz="1000" b="1" lang="zh-CN" altLang="en-US">
                 <a:solidFill>
                   <a:srgbClr val="0FF796"/>
                 </a:solidFill>
@@ -14363,7 +14748,7 @@
               <a:t>合</a:t>
             </a:r>
             <a:r>
-              <a:rPr sz="1100" b="1" lang="zh-CN" altLang="en-US">
+              <a:rPr sz="1000" b="1" lang="zh-CN" altLang="en-US">
                 <a:solidFill>
                   <a:srgbClr val="0FF796"/>
                 </a:solidFill>
@@ -14374,7 +14759,7 @@
               <a:t> </a:t>
             </a:r>
             <a:r>
-              <a:rPr sz="1100" b="1" lang="zh-CN" altLang="en-US">
+              <a:rPr sz="1000" b="1" lang="zh-CN" altLang="en-US">
                 <a:solidFill>
                   <a:srgbClr val="0FF796"/>
                 </a:solidFill>
@@ -14383,6 +14768,50 @@
                 <a:cs typeface="微软雅黑"/>
               </a:rPr>
               <a:t>1</a:t>
+            </a:r>
+            <a:r>
+              <a:rPr sz="1000" b="1" lang="zh-CN" altLang="en-US">
+                <a:solidFill>
+                  <a:srgbClr val="0FF796"/>
+                </a:solidFill>
+                <a:latin typeface="微软雅黑"/>
+                <a:ea typeface="微软雅黑"/>
+                <a:cs typeface="微软雅黑"/>
+              </a:rPr>
+              <a:t> </a:t>
+            </a:r>
+            <a:r>
+              <a:rPr sz="1000" b="1" lang="zh-CN" altLang="en-US">
+                <a:solidFill>
+                  <a:srgbClr val="0FF796"/>
+                </a:solidFill>
+                <a:latin typeface="Consolas"/>
+                <a:ea typeface="微软雅黑"/>
+                <a:cs typeface="微软雅黑"/>
+              </a:rPr>
+              <a:t>·</a:t>
+            </a:r>
+            <a:r>
+              <a:rPr sz="1000" b="1" lang="zh-CN" altLang="en-US">
+                <a:solidFill>
+                  <a:srgbClr val="0FF796"/>
+                </a:solidFill>
+                <a:latin typeface="微软雅黑"/>
+                <a:ea typeface="微软雅黑"/>
+                <a:cs typeface="微软雅黑"/>
+              </a:rPr>
+              <a:t> </a:t>
+            </a:r>
+            <a:r>
+              <a:rPr sz="1000" b="1" lang="zh-CN" altLang="en-US">
+                <a:solidFill>
+                  <a:srgbClr val="0FF796"/>
+                </a:solidFill>
+                <a:latin typeface="Consolas"/>
+                <a:ea typeface="微软雅黑"/>
+                <a:cs typeface="微软雅黑"/>
+              </a:rPr>
+              <a:t>示意</a:t>
             </a:r>
           </a:p>
         </p:txBody>
@@ -14477,7 +14906,7 @@
                 <a:ea typeface="微软雅黑"/>
                 <a:cs typeface="微软雅黑"/>
               </a:rPr>
-              <a:t>帧主序列</a:t>
+              <a:t>帧主序列（按帧展开）·</a:t>
             </a:r>
             <a:r>
               <a:rPr sz="1200" b="1" lang="zh-CN" altLang="en-US">
@@ -14503,7 +14932,7 @@
                 <a:ea typeface="微软雅黑"/>
                 <a:cs typeface="微软雅黑"/>
               </a:rPr>
-              <a:t>·</a:t>
+              <a:t>导出贴图，UE</a:t>
             </a:r>
             <a:r>
               <a:rPr sz="1200" b="1" lang="zh-CN" altLang="en-US">
@@ -14529,33 +14958,7 @@
                 <a:ea typeface="微软雅黑"/>
                 <a:cs typeface="微软雅黑"/>
               </a:rPr>
-              <a:t>导出贴图（UE</a:t>
-            </a:r>
-            <a:r>
-              <a:rPr sz="1200" b="1" lang="zh-CN" altLang="en-US">
-                <a:solidFill>
-                  <a:srgbClr val="F5F5F5">
-                    <a:alpha val="70000"/>
-                  </a:srgbClr>
-                </a:solidFill>
-                <a:latin typeface="微软雅黑"/>
-                <a:ea typeface="微软雅黑"/>
-                <a:cs typeface="微软雅黑"/>
-              </a:rPr>
-              <a:t> </a:t>
-            </a:r>
-            <a:r>
-              <a:rPr sz="1200" b="1" lang="zh-CN" altLang="en-US">
-                <a:solidFill>
-                  <a:srgbClr val="F5F5F5">
-                    <a:alpha val="70000"/>
-                  </a:srgbClr>
-                </a:solidFill>
-                <a:latin typeface="Consolas"/>
-                <a:ea typeface="微软雅黑"/>
-                <a:cs typeface="微软雅黑"/>
-              </a:rPr>
-              <a:t>观感待验收）</a:t>
+              <a:t>观感待验收</a:t>
             </a:r>
           </a:p>
         </p:txBody>
@@ -15278,57 +15681,14 @@
                 <a:ea typeface="微软雅黑"/>
                 <a:cs typeface="微软雅黑"/>
               </a:rPr>
-              <a:t>一次性序列，表现留在空中、缓慢下落的老火星</a:t>
-            </a:r>
-          </a:p>
-        </p:txBody>
-      </p:sp>
-      <p:sp>
-        <p:nvSpPr>
-          <p:cNvPr id="15" name="TextBox 14"/>
-          <p:cNvSpPr txBox="1"/>
-          <p:nvPr/>
-        </p:nvSpPr>
-        <p:spPr>
-          <a:xfrm>
-            <a:off x="609600" y="5791200"/>
-            <a:ext cx="3556000" cy="190500"/>
-          </a:xfrm>
-          <a:prstGeom prst="rect">
-            <a:avLst/>
-          </a:prstGeom>
-          <a:noFill/>
-        </p:spPr>
-        <p:txBody>
-          <a:bodyPr wrap="square" lIns="0" rIns="0" tIns="0" bIns="0" anchor="t">
-            <a:noAutofit/>
-          </a:bodyPr>
-          <a:lstStyle/>
-          <a:p>
-            <a:pPr algn="l">
-              <a:lnSpc>
-                <a:spcPts val="1250"/>
-              </a:lnSpc>
-            </a:pPr>
-            <a:r>
-              <a:rPr sz="1000" b="0" lang="zh-CN" altLang="en-US">
-                <a:solidFill>
-                  <a:srgbClr val="F5F5F5">
-                    <a:alpha val="55000"/>
-                  </a:srgbClr>
-                </a:solidFill>
-                <a:latin typeface="Consolas"/>
-                <a:ea typeface="微软雅黑"/>
-                <a:cs typeface="微软雅黑"/>
-              </a:rPr>
-              <a:t>并非按相机距离切换</a:t>
+              <a:t>一次性序列，表现留在空中的老火星；按火星年龄拆分，非相机远近</a:t>
             </a:r>
           </a:p>
         </p:txBody>
       </p:sp>
       <p:pic>
         <p:nvPicPr>
-          <p:cNvPr id="16" name="Picture 15" descr="p15_trail_5t.gif"/>
+          <p:cNvPr id="15" name="Picture 14" descr="p15_trail_5t.gif"/>
           <p:cNvPicPr>
             <a:picLocks noChangeAspect="1"/>
           </p:cNvPicPr>
@@ -15352,7 +15712,7 @@
       </p:pic>
       <p:sp>
         <p:nvSpPr>
-          <p:cNvPr id="17" name="TextBox 16"/>
+          <p:cNvPr id="16" name="TextBox 15"/>
           <p:cNvSpPr txBox="1"/>
           <p:nvPr/>
         </p:nvSpPr>
@@ -15499,7 +15859,7 @@
       </p:sp>
       <p:sp>
         <p:nvSpPr>
-          <p:cNvPr id="18" name="TextBox 17"/>
+          <p:cNvPr id="17" name="TextBox 16"/>
           <p:cNvSpPr txBox="1"/>
           <p:nvPr/>
         </p:nvSpPr>
@@ -15540,14 +15900,187 @@
       </p:sp>
       <p:sp>
         <p:nvSpPr>
+          <p:cNvPr id="18" name="TextBox 17"/>
+          <p:cNvSpPr txBox="1"/>
+          <p:nvPr/>
+        </p:nvSpPr>
+        <p:spPr>
+          <a:xfrm>
+            <a:off x="6223000" y="1663700"/>
+            <a:ext cx="5359400" cy="317500"/>
+          </a:xfrm>
+          <a:prstGeom prst="rect">
+            <a:avLst/>
+          </a:prstGeom>
+          <a:noFill/>
+        </p:spPr>
+        <p:txBody>
+          <a:bodyPr wrap="square" lIns="0" rIns="0" tIns="0" bIns="0" anchor="t">
+            <a:noAutofit/>
+          </a:bodyPr>
+          <a:lstStyle/>
+          <a:p>
+            <a:pPr algn="l">
+              <a:lnSpc>
+                <a:spcPts val="2080"/>
+              </a:lnSpc>
+            </a:pPr>
+            <a:r>
+              <a:rPr sz="1600" b="1" lang="zh-CN" altLang="en-US">
+                <a:solidFill>
+                  <a:srgbClr val="F5F5F5"/>
+                </a:solidFill>
+                <a:latin typeface="Consolas"/>
+                <a:ea typeface="微软雅黑"/>
+                <a:cs typeface="微软雅黑"/>
+              </a:rPr>
+              <a:t>Δp</a:t>
+            </a:r>
+            <a:r>
+              <a:rPr sz="1600" b="1" lang="zh-CN" altLang="en-US">
+                <a:solidFill>
+                  <a:srgbClr val="F5F5F5"/>
+                </a:solidFill>
+                <a:latin typeface="微软雅黑"/>
+                <a:ea typeface="微软雅黑"/>
+                <a:cs typeface="微软雅黑"/>
+              </a:rPr>
+              <a:t> </a:t>
+            </a:r>
+            <a:r>
+              <a:rPr sz="1600" b="1" lang="zh-CN" altLang="en-US">
+                <a:solidFill>
+                  <a:srgbClr val="F5F5F5"/>
+                </a:solidFill>
+                <a:latin typeface="Consolas"/>
+                <a:ea typeface="微软雅黑"/>
+                <a:cs typeface="微软雅黑"/>
+              </a:rPr>
+              <a:t>=</a:t>
+            </a:r>
+            <a:r>
+              <a:rPr sz="1600" b="1" lang="zh-CN" altLang="en-US">
+                <a:solidFill>
+                  <a:srgbClr val="F5F5F5"/>
+                </a:solidFill>
+                <a:latin typeface="微软雅黑"/>
+                <a:ea typeface="微软雅黑"/>
+                <a:cs typeface="微软雅黑"/>
+              </a:rPr>
+              <a:t> </a:t>
+            </a:r>
+            <a:r>
+              <a:rPr sz="1600" b="1" lang="zh-CN" altLang="en-US">
+                <a:solidFill>
+                  <a:srgbClr val="F5F5F5"/>
+                </a:solidFill>
+                <a:latin typeface="Consolas"/>
+                <a:ea typeface="微软雅黑"/>
+                <a:cs typeface="微软雅黑"/>
+              </a:rPr>
+              <a:t>∫</a:t>
+            </a:r>
+            <a:r>
+              <a:rPr sz="1600" b="1" lang="zh-CN" altLang="en-US">
+                <a:solidFill>
+                  <a:srgbClr val="F5F5F5"/>
+                </a:solidFill>
+                <a:latin typeface="微软雅黑"/>
+                <a:ea typeface="微软雅黑"/>
+                <a:cs typeface="微软雅黑"/>
+              </a:rPr>
+              <a:t> </a:t>
+            </a:r>
+            <a:r>
+              <a:rPr sz="1600" b="1" lang="zh-CN" altLang="en-US">
+                <a:solidFill>
+                  <a:srgbClr val="F5F5F5"/>
+                </a:solidFill>
+                <a:latin typeface="Consolas"/>
+                <a:ea typeface="微软雅黑"/>
+                <a:cs typeface="微软雅黑"/>
+              </a:rPr>
+              <a:t>v(t)</a:t>
+            </a:r>
+            <a:r>
+              <a:rPr sz="1600" b="1" lang="zh-CN" altLang="en-US">
+                <a:solidFill>
+                  <a:srgbClr val="F5F5F5"/>
+                </a:solidFill>
+                <a:latin typeface="微软雅黑"/>
+                <a:ea typeface="微软雅黑"/>
+                <a:cs typeface="微软雅黑"/>
+              </a:rPr>
+              <a:t> </a:t>
+            </a:r>
+            <a:r>
+              <a:rPr sz="1600" b="1" lang="zh-CN" altLang="en-US">
+                <a:solidFill>
+                  <a:srgbClr val="F5F5F5"/>
+                </a:solidFill>
+                <a:latin typeface="Consolas"/>
+                <a:ea typeface="微软雅黑"/>
+                <a:cs typeface="微软雅黑"/>
+              </a:rPr>
+              <a:t>dt</a:t>
+            </a:r>
+            <a:r>
+              <a:rPr sz="1600" b="1" lang="zh-CN" altLang="en-US">
+                <a:solidFill>
+                  <a:srgbClr val="F5F5F5"/>
+                </a:solidFill>
+                <a:latin typeface="微软雅黑"/>
+                <a:ea typeface="微软雅黑"/>
+                <a:cs typeface="微软雅黑"/>
+              </a:rPr>
+              <a:t> </a:t>
+            </a:r>
+            <a:r>
+              <a:rPr sz="1600" b="1" lang="zh-CN" altLang="en-US">
+                <a:solidFill>
+                  <a:srgbClr val="F5F5F5"/>
+                </a:solidFill>
+                <a:latin typeface="Consolas"/>
+                <a:ea typeface="微软雅黑"/>
+                <a:cs typeface="微软雅黑"/>
+              </a:rPr>
+              <a:t>×</a:t>
+            </a:r>
+            <a:r>
+              <a:rPr sz="1600" b="1" lang="zh-CN" altLang="en-US">
+                <a:solidFill>
+                  <a:srgbClr val="F5F5F5"/>
+                </a:solidFill>
+                <a:latin typeface="微软雅黑"/>
+                <a:ea typeface="微软雅黑"/>
+                <a:cs typeface="微软雅黑"/>
+              </a:rPr>
+              <a:t> </a:t>
+            </a:r>
+            <a:r>
+              <a:rPr sz="1600" b="1" lang="zh-CN" altLang="en-US">
+                <a:solidFill>
+                  <a:srgbClr val="F5F5F5"/>
+                </a:solidFill>
+                <a:latin typeface="Consolas"/>
+                <a:ea typeface="微软雅黑"/>
+                <a:cs typeface="微软雅黑"/>
+              </a:rPr>
+              <a:t>每米像素</a:t>
+            </a:r>
+          </a:p>
+        </p:txBody>
+      </p:sp>
+      <p:sp>
+        <p:nvSpPr>
           <p:cNvPr id="19" name="TextBox 18"/>
           <p:cNvSpPr txBox="1"/>
           <p:nvPr/>
         </p:nvSpPr>
         <p:spPr>
           <a:xfrm>
-            <a:off x="6223000" y="1651000"/>
-            <a:ext cx="5359400" cy="317500"/>
+            <a:off x="6223000" y="2070100"/>
+            <a:ext cx="5359400" cy="508000"/>
           </a:xfrm>
           <a:prstGeom prst="rect">
             <a:avLst/>
@@ -15562,184 +16095,109 @@
           <a:p>
             <a:pPr algn="l">
               <a:lnSpc>
-                <a:spcPts val="1950"/>
-              </a:lnSpc>
-            </a:pPr>
-            <a:r>
-              <a:rPr sz="1500" b="1" lang="zh-CN" altLang="en-US">
-                <a:solidFill>
-                  <a:srgbClr val="F5F5F5"/>
-                </a:solidFill>
-                <a:latin typeface="Consolas"/>
-                <a:ea typeface="微软雅黑"/>
-                <a:cs typeface="微软雅黑"/>
-              </a:rPr>
-              <a:t>Δp</a:t>
-            </a:r>
-            <a:r>
-              <a:rPr sz="1500" b="1" lang="zh-CN" altLang="en-US">
-                <a:solidFill>
-                  <a:srgbClr val="F5F5F5"/>
-                </a:solidFill>
-                <a:latin typeface="微软雅黑"/>
-                <a:ea typeface="微软雅黑"/>
-                <a:cs typeface="微软雅黑"/>
-              </a:rPr>
-              <a:t> </a:t>
-            </a:r>
-            <a:r>
-              <a:rPr sz="1500" b="1" lang="zh-CN" altLang="en-US">
-                <a:solidFill>
-                  <a:srgbClr val="F5F5F5"/>
-                </a:solidFill>
-                <a:latin typeface="Consolas"/>
-                <a:ea typeface="微软雅黑"/>
-                <a:cs typeface="微软雅黑"/>
-              </a:rPr>
-              <a:t>=</a:t>
-            </a:r>
-            <a:r>
-              <a:rPr sz="1500" b="1" lang="zh-CN" altLang="en-US">
-                <a:solidFill>
-                  <a:srgbClr val="F5F5F5"/>
-                </a:solidFill>
-                <a:latin typeface="微软雅黑"/>
-                <a:ea typeface="微软雅黑"/>
-                <a:cs typeface="微软雅黑"/>
-              </a:rPr>
-              <a:t> </a:t>
-            </a:r>
-            <a:r>
-              <a:rPr sz="1500" b="1" lang="zh-CN" altLang="en-US">
-                <a:solidFill>
-                  <a:srgbClr val="F5F5F5"/>
-                </a:solidFill>
-                <a:latin typeface="Consolas"/>
-                <a:ea typeface="微软雅黑"/>
-                <a:cs typeface="微软雅黑"/>
-              </a:rPr>
-              <a:t>∫</a:t>
-            </a:r>
-            <a:r>
-              <a:rPr sz="1500" b="1" lang="zh-CN" altLang="en-US">
-                <a:solidFill>
-                  <a:srgbClr val="F5F5F5"/>
-                </a:solidFill>
-                <a:latin typeface="微软雅黑"/>
-                <a:ea typeface="微软雅黑"/>
-                <a:cs typeface="微软雅黑"/>
-              </a:rPr>
-              <a:t> </a:t>
-            </a:r>
-            <a:r>
-              <a:rPr sz="1500" b="1" lang="zh-CN" altLang="en-US">
-                <a:solidFill>
-                  <a:srgbClr val="F5F5F5"/>
-                </a:solidFill>
-                <a:latin typeface="Consolas"/>
-                <a:ea typeface="微软雅黑"/>
-                <a:cs typeface="微软雅黑"/>
-              </a:rPr>
-              <a:t>v(t)</a:t>
-            </a:r>
-            <a:r>
-              <a:rPr sz="1500" b="1" lang="zh-CN" altLang="en-US">
-                <a:solidFill>
-                  <a:srgbClr val="F5F5F5"/>
-                </a:solidFill>
-                <a:latin typeface="微软雅黑"/>
-                <a:ea typeface="微软雅黑"/>
-                <a:cs typeface="微软雅黑"/>
-              </a:rPr>
-              <a:t> </a:t>
-            </a:r>
-            <a:r>
-              <a:rPr sz="1500" b="1" lang="zh-CN" altLang="en-US">
-                <a:solidFill>
-                  <a:srgbClr val="F5F5F5"/>
-                </a:solidFill>
-                <a:latin typeface="Consolas"/>
-                <a:ea typeface="微软雅黑"/>
-                <a:cs typeface="微软雅黑"/>
-              </a:rPr>
-              <a:t>dt</a:t>
-            </a:r>
-            <a:r>
-              <a:rPr sz="1500" b="1" lang="zh-CN" altLang="en-US">
-                <a:solidFill>
-                  <a:srgbClr val="F5F5F5"/>
-                </a:solidFill>
-                <a:latin typeface="微软雅黑"/>
-                <a:ea typeface="微软雅黑"/>
-                <a:cs typeface="微软雅黑"/>
-              </a:rPr>
-              <a:t> </a:t>
-            </a:r>
-            <a:r>
-              <a:rPr sz="1500" b="1" lang="zh-CN" altLang="en-US">
-                <a:solidFill>
-                  <a:srgbClr val="F5F5F5"/>
-                </a:solidFill>
-                <a:latin typeface="Consolas"/>
-                <a:ea typeface="微软雅黑"/>
-                <a:cs typeface="微软雅黑"/>
-              </a:rPr>
-              <a:t>×</a:t>
-            </a:r>
-            <a:r>
-              <a:rPr sz="1500" b="1" lang="zh-CN" altLang="en-US">
-                <a:solidFill>
-                  <a:srgbClr val="F5F5F5"/>
-                </a:solidFill>
-                <a:latin typeface="微软雅黑"/>
-                <a:ea typeface="微软雅黑"/>
-                <a:cs typeface="微软雅黑"/>
-              </a:rPr>
-              <a:t> </a:t>
-            </a:r>
-            <a:r>
-              <a:rPr sz="1500" b="1" lang="zh-CN" altLang="en-US">
-                <a:solidFill>
-                  <a:srgbClr val="F5F5F5"/>
-                </a:solidFill>
-                <a:latin typeface="Consolas"/>
-                <a:ea typeface="微软雅黑"/>
-                <a:cs typeface="微软雅黑"/>
-              </a:rPr>
-              <a:t>每米像素</a:t>
-            </a:r>
-          </a:p>
-        </p:txBody>
-      </p:sp>
-      <p:sp>
-        <p:nvSpPr>
-          <p:cNvPr id="20" name="TextBox 19"/>
-          <p:cNvSpPr txBox="1"/>
-          <p:nvPr/>
-        </p:nvSpPr>
-        <p:spPr>
-          <a:xfrm>
-            <a:off x="6223000" y="2006600"/>
-            <a:ext cx="5359400" cy="444500"/>
-          </a:xfrm>
-          <a:prstGeom prst="rect">
-            <a:avLst/>
-          </a:prstGeom>
-          <a:noFill/>
-        </p:spPr>
-        <p:txBody>
-          <a:bodyPr wrap="square" lIns="0" rIns="0" tIns="0" bIns="0" anchor="t">
-            <a:noAutofit/>
-          </a:bodyPr>
-          <a:lstStyle/>
+                <a:spcPts val="1937"/>
+              </a:lnSpc>
+            </a:pPr>
+            <a:r>
+              <a:rPr sz="1250" b="0" lang="zh-CN" altLang="en-US">
+                <a:solidFill>
+                  <a:srgbClr val="F5F5F5">
+                    <a:alpha val="70000"/>
+                  </a:srgbClr>
+                </a:solidFill>
+                <a:latin typeface="Consolas"/>
+                <a:ea typeface="微软雅黑"/>
+                <a:cs typeface="微软雅黑"/>
+              </a:rPr>
+              <a:t>按</a:t>
+            </a:r>
+            <a:r>
+              <a:rPr sz="1250" b="0" lang="zh-CN" altLang="en-US">
+                <a:solidFill>
+                  <a:srgbClr val="F5F5F5">
+                    <a:alpha val="70000"/>
+                  </a:srgbClr>
+                </a:solidFill>
+                <a:latin typeface="微软雅黑"/>
+                <a:ea typeface="微软雅黑"/>
+                <a:cs typeface="微软雅黑"/>
+              </a:rPr>
+              <a:t> </a:t>
+            </a:r>
+            <a:r>
+              <a:rPr sz="1250" b="0" lang="zh-CN" altLang="en-US">
+                <a:solidFill>
+                  <a:srgbClr val="F5F5F5">
+                    <a:alpha val="70000"/>
+                  </a:srgbClr>
+                </a:solidFill>
+                <a:latin typeface="Consolas"/>
+                <a:ea typeface="微软雅黑"/>
+                <a:cs typeface="微软雅黑"/>
+              </a:rPr>
+              <a:t>800</a:t>
+            </a:r>
+            <a:r>
+              <a:rPr sz="1250" b="0" lang="zh-CN" altLang="en-US">
+                <a:solidFill>
+                  <a:srgbClr val="F5F5F5">
+                    <a:alpha val="70000"/>
+                  </a:srgbClr>
+                </a:solidFill>
+                <a:latin typeface="微软雅黑"/>
+                <a:ea typeface="微软雅黑"/>
+                <a:cs typeface="微软雅黑"/>
+              </a:rPr>
+              <a:t> </a:t>
+            </a:r>
+            <a:r>
+              <a:rPr sz="1250" b="0" lang="zh-CN" altLang="en-US">
+                <a:solidFill>
+                  <a:srgbClr val="F5F5F5">
+                    <a:alpha val="70000"/>
+                  </a:srgbClr>
+                </a:solidFill>
+                <a:latin typeface="Consolas"/>
+                <a:ea typeface="微软雅黑"/>
+                <a:cs typeface="微软雅黑"/>
+              </a:rPr>
+              <a:t>m、1080p</a:t>
+            </a:r>
+            <a:r>
+              <a:rPr sz="1250" b="0" lang="zh-CN" altLang="en-US">
+                <a:solidFill>
+                  <a:srgbClr val="F5F5F5">
+                    <a:alpha val="70000"/>
+                  </a:srgbClr>
+                </a:solidFill>
+                <a:latin typeface="微软雅黑"/>
+                <a:ea typeface="微软雅黑"/>
+                <a:cs typeface="微软雅黑"/>
+              </a:rPr>
+              <a:t> </a:t>
+            </a:r>
+            <a:r>
+              <a:rPr sz="1250" b="0" lang="zh-CN" altLang="en-US">
+                <a:solidFill>
+                  <a:srgbClr val="F5F5F5">
+                    <a:alpha val="70000"/>
+                  </a:srgbClr>
+                </a:solidFill>
+                <a:latin typeface="Consolas"/>
+                <a:ea typeface="微软雅黑"/>
+                <a:cs typeface="微软雅黑"/>
+              </a:rPr>
+              <a:t>观看条件换算每帧屏幕位移，</a:t>
+            </a:r>
+          </a:p>
           <a:p>
             <a:pPr algn="l">
               <a:lnSpc>
-                <a:spcPts val="1800"/>
-              </a:lnSpc>
-            </a:pPr>
-            <a:r>
-              <a:rPr sz="1200" b="0" lang="zh-CN" altLang="en-US">
+                <a:spcPts val="1937"/>
+              </a:lnSpc>
+            </a:pPr>
+            <a:r>
+              <a:rPr sz="1250" b="0" lang="zh-CN" altLang="en-US">
                 <a:solidFill>
                   <a:srgbClr val="F5F5F5">
                     <a:alpha val="70000"/>
@@ -15749,1115 +16207,21 @@
                 <a:ea typeface="微软雅黑"/>
                 <a:cs typeface="微软雅黑"/>
               </a:rPr>
-              <a:t>按</a:t>
-            </a:r>
-            <a:r>
-              <a:rPr sz="1200" b="0" lang="zh-CN" altLang="en-US">
-                <a:solidFill>
-                  <a:srgbClr val="F5F5F5">
-                    <a:alpha val="70000"/>
-                  </a:srgbClr>
-                </a:solidFill>
-                <a:latin typeface="微软雅黑"/>
-                <a:ea typeface="微软雅黑"/>
-                <a:cs typeface="微软雅黑"/>
-              </a:rPr>
-              <a:t> </a:t>
-            </a:r>
-            <a:r>
-              <a:rPr sz="1200" b="0" lang="zh-CN" altLang="en-US">
-                <a:solidFill>
-                  <a:srgbClr val="F5F5F5">
-                    <a:alpha val="70000"/>
-                  </a:srgbClr>
-                </a:solidFill>
-                <a:latin typeface="Consolas"/>
-                <a:ea typeface="微软雅黑"/>
-                <a:cs typeface="微软雅黑"/>
-              </a:rPr>
-              <a:t>800</a:t>
-            </a:r>
-            <a:r>
-              <a:rPr sz="1200" b="0" lang="zh-CN" altLang="en-US">
-                <a:solidFill>
-                  <a:srgbClr val="F5F5F5">
-                    <a:alpha val="70000"/>
-                  </a:srgbClr>
-                </a:solidFill>
-                <a:latin typeface="微软雅黑"/>
-                <a:ea typeface="微软雅黑"/>
-                <a:cs typeface="微软雅黑"/>
-              </a:rPr>
-              <a:t> </a:t>
-            </a:r>
-            <a:r>
-              <a:rPr sz="1200" b="0" lang="zh-CN" altLang="en-US">
-                <a:solidFill>
-                  <a:srgbClr val="F5F5F5">
-                    <a:alpha val="70000"/>
-                  </a:srgbClr>
-                </a:solidFill>
-                <a:latin typeface="Consolas"/>
-                <a:ea typeface="微软雅黑"/>
-                <a:cs typeface="微软雅黑"/>
-              </a:rPr>
-              <a:t>m、1080p</a:t>
-            </a:r>
-            <a:r>
-              <a:rPr sz="1200" b="0" lang="zh-CN" altLang="en-US">
-                <a:solidFill>
-                  <a:srgbClr val="F5F5F5">
-                    <a:alpha val="70000"/>
-                  </a:srgbClr>
-                </a:solidFill>
-                <a:latin typeface="微软雅黑"/>
-                <a:ea typeface="微软雅黑"/>
-                <a:cs typeface="微软雅黑"/>
-              </a:rPr>
-              <a:t> </a:t>
-            </a:r>
-            <a:r>
-              <a:rPr sz="1200" b="0" lang="zh-CN" altLang="en-US">
-                <a:solidFill>
-                  <a:srgbClr val="F5F5F5">
-                    <a:alpha val="70000"/>
-                  </a:srgbClr>
-                </a:solidFill>
-                <a:latin typeface="Consolas"/>
-                <a:ea typeface="微软雅黑"/>
-                <a:cs typeface="微软雅黑"/>
-              </a:rPr>
-              <a:t>观看条件换算每帧屏幕位移；</a:t>
-            </a:r>
-          </a:p>
-          <a:p>
-            <a:pPr algn="l">
-              <a:lnSpc>
-                <a:spcPts val="1800"/>
-              </a:lnSpc>
-            </a:pPr>
-            <a:r>
-              <a:rPr sz="1200" b="0" lang="zh-CN" altLang="en-US">
-                <a:solidFill>
-                  <a:srgbClr val="F5F5F5">
-                    <a:alpha val="70000"/>
-                  </a:srgbClr>
-                </a:solidFill>
-                <a:latin typeface="Consolas"/>
-                <a:ea typeface="微软雅黑"/>
-                <a:cs typeface="微软雅黑"/>
-              </a:rPr>
-              <a:t>约</a:t>
-            </a:r>
-            <a:r>
-              <a:rPr sz="1200" b="0" lang="zh-CN" altLang="en-US">
-                <a:solidFill>
-                  <a:srgbClr val="F5F5F5">
-                    <a:alpha val="70000"/>
-                  </a:srgbClr>
-                </a:solidFill>
-                <a:latin typeface="微软雅黑"/>
-                <a:ea typeface="微软雅黑"/>
-                <a:cs typeface="微软雅黑"/>
-              </a:rPr>
-              <a:t> </a:t>
-            </a:r>
-            <a:r>
-              <a:rPr sz="1200" b="0" lang="zh-CN" altLang="en-US">
-                <a:solidFill>
-                  <a:srgbClr val="F5F5F5">
-                    <a:alpha val="70000"/>
-                  </a:srgbClr>
-                </a:solidFill>
-                <a:latin typeface="Consolas"/>
-                <a:ea typeface="微软雅黑"/>
-                <a:cs typeface="微软雅黑"/>
-              </a:rPr>
-              <a:t>0.77</a:t>
-            </a:r>
-            <a:r>
-              <a:rPr sz="1200" b="0" lang="zh-CN" altLang="en-US">
-                <a:solidFill>
-                  <a:srgbClr val="F5F5F5">
-                    <a:alpha val="70000"/>
-                  </a:srgbClr>
-                </a:solidFill>
-                <a:latin typeface="微软雅黑"/>
-                <a:ea typeface="微软雅黑"/>
-                <a:cs typeface="微软雅黑"/>
-              </a:rPr>
-              <a:t> </a:t>
-            </a:r>
-            <a:r>
-              <a:rPr sz="1200" b="0" lang="zh-CN" altLang="en-US">
-                <a:solidFill>
-                  <a:srgbClr val="F5F5F5">
-                    <a:alpha val="70000"/>
-                  </a:srgbClr>
-                </a:solidFill>
-                <a:latin typeface="Consolas"/>
-                <a:ea typeface="微软雅黑"/>
-                <a:cs typeface="微软雅黑"/>
-              </a:rPr>
-              <a:t>像素为本项目经验线</a:t>
-            </a:r>
-          </a:p>
-        </p:txBody>
-      </p:sp>
-      <p:sp>
-        <p:nvSpPr>
-          <p:cNvPr id="21" name="TextBox 20"/>
-          <p:cNvSpPr txBox="1"/>
-          <p:nvPr/>
-        </p:nvSpPr>
-        <p:spPr>
-          <a:xfrm>
-            <a:off x="6223000" y="2603500"/>
-            <a:ext cx="1905000" cy="190500"/>
-          </a:xfrm>
-          <a:prstGeom prst="rect">
-            <a:avLst/>
-          </a:prstGeom>
-          <a:noFill/>
-        </p:spPr>
-        <p:txBody>
-          <a:bodyPr wrap="square" lIns="0" rIns="0" tIns="0" bIns="0" anchor="t">
-            <a:noAutofit/>
-          </a:bodyPr>
-          <a:lstStyle/>
-          <a:p>
-            <a:pPr algn="l">
-              <a:lnSpc>
-                <a:spcPts val="1200"/>
-              </a:lnSpc>
-            </a:pPr>
-            <a:r>
-              <a:rPr sz="1000" b="1" lang="zh-CN" altLang="en-US">
-                <a:solidFill>
-                  <a:srgbClr val="F5F5F5">
-                    <a:alpha val="40000"/>
-                  </a:srgbClr>
-                </a:solidFill>
-                <a:latin typeface="Consolas"/>
-                <a:ea typeface="微软雅黑"/>
-                <a:cs typeface="微软雅黑"/>
-              </a:rPr>
-              <a:t>版本</a:t>
-            </a:r>
-          </a:p>
-        </p:txBody>
-      </p:sp>
-      <p:sp>
-        <p:nvSpPr>
-          <p:cNvPr id="22" name="TextBox 21"/>
-          <p:cNvSpPr txBox="1"/>
-          <p:nvPr/>
-        </p:nvSpPr>
-        <p:spPr>
-          <a:xfrm>
-            <a:off x="7366000" y="2603500"/>
-            <a:ext cx="1905000" cy="190500"/>
-          </a:xfrm>
-          <a:prstGeom prst="rect">
-            <a:avLst/>
-          </a:prstGeom>
-          <a:noFill/>
-        </p:spPr>
-        <p:txBody>
-          <a:bodyPr wrap="square" lIns="0" rIns="0" tIns="0" bIns="0" anchor="t">
-            <a:noAutofit/>
-          </a:bodyPr>
-          <a:lstStyle/>
-          <a:p>
-            <a:pPr algn="l">
-              <a:lnSpc>
-                <a:spcPts val="1200"/>
-              </a:lnSpc>
-            </a:pPr>
-            <a:r>
-              <a:rPr sz="1000" b="1" lang="zh-CN" altLang="en-US">
-                <a:solidFill>
-                  <a:srgbClr val="F5F5F5">
-                    <a:alpha val="40000"/>
-                  </a:srgbClr>
-                </a:solidFill>
-                <a:latin typeface="Consolas"/>
-                <a:ea typeface="微软雅黑"/>
-                <a:cs typeface="微软雅黑"/>
-              </a:rPr>
-              <a:t>L</a:t>
-            </a:r>
-            <a:r>
-              <a:rPr sz="1000" b="1" lang="zh-CN" altLang="en-US">
-                <a:solidFill>
-                  <a:srgbClr val="F5F5F5">
-                    <a:alpha val="40000"/>
-                  </a:srgbClr>
-                </a:solidFill>
-                <a:latin typeface="微软雅黑"/>
-                <a:ea typeface="微软雅黑"/>
-                <a:cs typeface="微软雅黑"/>
-              </a:rPr>
-              <a:t> </a:t>
-            </a:r>
-            <a:r>
-              <a:rPr sz="1000" b="1" lang="zh-CN" altLang="en-US">
-                <a:solidFill>
-                  <a:srgbClr val="F5F5F5">
-                    <a:alpha val="40000"/>
-                  </a:srgbClr>
-                </a:solidFill>
-                <a:latin typeface="Consolas"/>
-                <a:ea typeface="微软雅黑"/>
-                <a:cs typeface="微软雅黑"/>
-              </a:rPr>
-              <a:t>/</a:t>
-            </a:r>
-            <a:r>
-              <a:rPr sz="1000" b="1" lang="zh-CN" altLang="en-US">
-                <a:solidFill>
-                  <a:srgbClr val="F5F5F5">
-                    <a:alpha val="40000"/>
-                  </a:srgbClr>
-                </a:solidFill>
-                <a:latin typeface="微软雅黑"/>
-                <a:ea typeface="微软雅黑"/>
-                <a:cs typeface="微软雅黑"/>
-              </a:rPr>
-              <a:t> </a:t>
-            </a:r>
-            <a:r>
-              <a:rPr sz="1000" b="1" lang="zh-CN" altLang="en-US">
-                <a:solidFill>
-                  <a:srgbClr val="F5F5F5">
-                    <a:alpha val="40000"/>
-                  </a:srgbClr>
-                </a:solidFill>
-                <a:latin typeface="Consolas"/>
-                <a:ea typeface="微软雅黑"/>
-                <a:cs typeface="微软雅黑"/>
-              </a:rPr>
-              <a:t>M</a:t>
-            </a:r>
-            <a:r>
-              <a:rPr sz="1000" b="1" lang="zh-CN" altLang="en-US">
-                <a:solidFill>
-                  <a:srgbClr val="F5F5F5">
-                    <a:alpha val="40000"/>
-                  </a:srgbClr>
-                </a:solidFill>
-                <a:latin typeface="微软雅黑"/>
-                <a:ea typeface="微软雅黑"/>
-                <a:cs typeface="微软雅黑"/>
-              </a:rPr>
-              <a:t> </a:t>
-            </a:r>
-            <a:r>
-              <a:rPr sz="1000" b="1" lang="zh-CN" altLang="en-US">
-                <a:solidFill>
-                  <a:srgbClr val="F5F5F5">
-                    <a:alpha val="40000"/>
-                  </a:srgbClr>
-                </a:solidFill>
-                <a:latin typeface="Consolas"/>
-                <a:ea typeface="微软雅黑"/>
-                <a:cs typeface="微软雅黑"/>
-              </a:rPr>
-              <a:t>/</a:t>
-            </a:r>
-            <a:r>
-              <a:rPr sz="1000" b="1" lang="zh-CN" altLang="en-US">
-                <a:solidFill>
-                  <a:srgbClr val="F5F5F5">
-                    <a:alpha val="40000"/>
-                  </a:srgbClr>
-                </a:solidFill>
-                <a:latin typeface="微软雅黑"/>
-                <a:ea typeface="微软雅黑"/>
-                <a:cs typeface="微软雅黑"/>
-              </a:rPr>
-              <a:t> </a:t>
-            </a:r>
-            <a:r>
-              <a:rPr sz="1000" b="1" lang="zh-CN" altLang="en-US">
-                <a:solidFill>
-                  <a:srgbClr val="F5F5F5">
-                    <a:alpha val="40000"/>
-                  </a:srgbClr>
-                </a:solidFill>
-                <a:latin typeface="Consolas"/>
-                <a:ea typeface="微软雅黑"/>
-                <a:cs typeface="微软雅黑"/>
-              </a:rPr>
-              <a:t>S</a:t>
-            </a:r>
-            <a:r>
-              <a:rPr sz="1000" b="1" lang="zh-CN" altLang="en-US">
-                <a:solidFill>
-                  <a:srgbClr val="F5F5F5">
-                    <a:alpha val="40000"/>
-                  </a:srgbClr>
-                </a:solidFill>
-                <a:latin typeface="微软雅黑"/>
-                <a:ea typeface="微软雅黑"/>
-                <a:cs typeface="微软雅黑"/>
-              </a:rPr>
-              <a:t> </a:t>
-            </a:r>
-            <a:r>
-              <a:rPr sz="1000" b="1" lang="zh-CN" altLang="en-US">
-                <a:solidFill>
-                  <a:srgbClr val="F5F5F5">
-                    <a:alpha val="40000"/>
-                  </a:srgbClr>
-                </a:solidFill>
-                <a:latin typeface="Consolas"/>
-                <a:ea typeface="微软雅黑"/>
-                <a:cs typeface="微软雅黑"/>
-              </a:rPr>
-              <a:t>总帧数</a:t>
-            </a:r>
-          </a:p>
-        </p:txBody>
-      </p:sp>
-      <p:sp>
-        <p:nvSpPr>
-          <p:cNvPr id="23" name="TextBox 22"/>
-          <p:cNvSpPr txBox="1"/>
-          <p:nvPr/>
-        </p:nvSpPr>
-        <p:spPr>
-          <a:xfrm>
-            <a:off x="9271000" y="2603500"/>
-            <a:ext cx="1905000" cy="190500"/>
-          </a:xfrm>
-          <a:prstGeom prst="rect">
-            <a:avLst/>
-          </a:prstGeom>
-          <a:noFill/>
-        </p:spPr>
-        <p:txBody>
-          <a:bodyPr wrap="square" lIns="0" rIns="0" tIns="0" bIns="0" anchor="t">
-            <a:noAutofit/>
-          </a:bodyPr>
-          <a:lstStyle/>
-          <a:p>
-            <a:pPr algn="l">
-              <a:lnSpc>
-                <a:spcPts val="1200"/>
-              </a:lnSpc>
-            </a:pPr>
-            <a:r>
-              <a:rPr sz="1000" b="1" lang="zh-CN" altLang="en-US">
-                <a:solidFill>
-                  <a:srgbClr val="F5F5F5">
-                    <a:alpha val="40000"/>
-                  </a:srgbClr>
-                </a:solidFill>
-                <a:latin typeface="Consolas"/>
-                <a:ea typeface="微软雅黑"/>
-                <a:cs typeface="微软雅黑"/>
-              </a:rPr>
-              <a:t>上升段最慢帧率</a:t>
-            </a:r>
-          </a:p>
-        </p:txBody>
-      </p:sp>
-      <p:sp>
-        <p:nvSpPr>
-          <p:cNvPr id="24" name="Rectangle 23"/>
+              <a:t>快的阶段多给帧，慢的阶段少给</a:t>
+            </a:r>
+          </a:p>
+        </p:txBody>
+      </p:sp>
+      <p:sp>
+        <p:nvSpPr>
+          <p:cNvPr id="20" name="Rectangle 19"/>
           <p:cNvSpPr/>
           <p:nvPr/>
         </p:nvSpPr>
         <p:spPr>
           <a:xfrm>
-            <a:off x="6223000" y="2832100"/>
-            <a:ext cx="5359400" cy="6350"/>
-          </a:xfrm>
-          <a:prstGeom prst="rect">
-            <a:avLst/>
-          </a:prstGeom>
-          <a:solidFill>
-            <a:srgbClr val="F5F5F5">
-              <a:alpha val="10000"/>
-            </a:srgbClr>
-          </a:solidFill>
-          <a:ln>
-            <a:noFill/>
-          </a:ln>
-        </p:spPr>
-        <p:txBody>
-          <a:bodyPr rtlCol="0" anchor="ctr"/>
-          <a:lstStyle/>
-          <a:p>
-            <a:pPr algn="ctr"/>
-          </a:p>
-        </p:txBody>
-      </p:sp>
-      <p:sp>
-        <p:nvSpPr>
-          <p:cNvPr id="25" name="TextBox 24"/>
-          <p:cNvSpPr txBox="1"/>
-          <p:nvPr/>
-        </p:nvSpPr>
-        <p:spPr>
-          <a:xfrm>
-            <a:off x="6223000" y="2908300"/>
-            <a:ext cx="1079500" cy="254000"/>
-          </a:xfrm>
-          <a:prstGeom prst="rect">
-            <a:avLst/>
-          </a:prstGeom>
-          <a:noFill/>
-        </p:spPr>
-        <p:txBody>
-          <a:bodyPr wrap="square" lIns="0" rIns="0" tIns="0" bIns="0" anchor="t">
-            <a:noAutofit/>
-          </a:bodyPr>
-          <a:lstStyle/>
-          <a:p>
-            <a:pPr algn="l">
-              <a:lnSpc>
-                <a:spcPts val="1690"/>
-              </a:lnSpc>
-            </a:pPr>
-            <a:r>
-              <a:rPr sz="1300" b="1" lang="zh-CN" altLang="en-US">
-                <a:solidFill>
-                  <a:srgbClr val="F5F5F5"/>
-                </a:solidFill>
-                <a:latin typeface="Consolas"/>
-                <a:ea typeface="微软雅黑"/>
-                <a:cs typeface="微软雅黑"/>
-              </a:rPr>
-              <a:t>4.9.26</a:t>
-            </a:r>
-          </a:p>
-        </p:txBody>
-      </p:sp>
-      <p:sp>
-        <p:nvSpPr>
-          <p:cNvPr id="26" name="TextBox 25"/>
-          <p:cNvSpPr txBox="1"/>
-          <p:nvPr/>
-        </p:nvSpPr>
-        <p:spPr>
-          <a:xfrm>
-            <a:off x="7366000" y="2908300"/>
-            <a:ext cx="1905000" cy="254000"/>
-          </a:xfrm>
-          <a:prstGeom prst="rect">
-            <a:avLst/>
-          </a:prstGeom>
-          <a:noFill/>
-        </p:spPr>
-        <p:txBody>
-          <a:bodyPr wrap="square" lIns="0" rIns="0" tIns="0" bIns="0" anchor="t">
-            <a:noAutofit/>
-          </a:bodyPr>
-          <a:lstStyle/>
-          <a:p>
-            <a:pPr algn="l">
-              <a:lnSpc>
-                <a:spcPts val="1690"/>
-              </a:lnSpc>
-            </a:pPr>
-            <a:r>
-              <a:rPr sz="1300" b="0" lang="zh-CN" altLang="en-US">
-                <a:solidFill>
-                  <a:srgbClr val="F5F5F5">
-                    <a:alpha val="70000"/>
-                  </a:srgbClr>
-                </a:solidFill>
-                <a:latin typeface="Consolas"/>
-                <a:ea typeface="微软雅黑"/>
-                <a:cs typeface="微软雅黑"/>
-              </a:rPr>
-              <a:t>253</a:t>
-            </a:r>
-            <a:r>
-              <a:rPr sz="1300" b="0" lang="zh-CN" altLang="en-US">
-                <a:solidFill>
-                  <a:srgbClr val="F5F5F5">
-                    <a:alpha val="70000"/>
-                  </a:srgbClr>
-                </a:solidFill>
-                <a:latin typeface="微软雅黑"/>
-                <a:ea typeface="微软雅黑"/>
-                <a:cs typeface="微软雅黑"/>
-              </a:rPr>
-              <a:t> </a:t>
-            </a:r>
-            <a:r>
-              <a:rPr sz="1300" b="0" lang="zh-CN" altLang="en-US">
-                <a:solidFill>
-                  <a:srgbClr val="F5F5F5">
-                    <a:alpha val="70000"/>
-                  </a:srgbClr>
-                </a:solidFill>
-                <a:latin typeface="Consolas"/>
-                <a:ea typeface="微软雅黑"/>
-                <a:cs typeface="微软雅黑"/>
-              </a:rPr>
-              <a:t>/</a:t>
-            </a:r>
-            <a:r>
-              <a:rPr sz="1300" b="0" lang="zh-CN" altLang="en-US">
-                <a:solidFill>
-                  <a:srgbClr val="F5F5F5">
-                    <a:alpha val="70000"/>
-                  </a:srgbClr>
-                </a:solidFill>
-                <a:latin typeface="微软雅黑"/>
-                <a:ea typeface="微软雅黑"/>
-                <a:cs typeface="微软雅黑"/>
-              </a:rPr>
-              <a:t> </a:t>
-            </a:r>
-            <a:r>
-              <a:rPr sz="1300" b="0" lang="zh-CN" altLang="en-US">
-                <a:solidFill>
-                  <a:srgbClr val="F5F5F5">
-                    <a:alpha val="70000"/>
-                  </a:srgbClr>
-                </a:solidFill>
-                <a:latin typeface="Consolas"/>
-                <a:ea typeface="微软雅黑"/>
-                <a:cs typeface="微软雅黑"/>
-              </a:rPr>
-              <a:t>126</a:t>
-            </a:r>
-            <a:r>
-              <a:rPr sz="1300" b="0" lang="zh-CN" altLang="en-US">
-                <a:solidFill>
-                  <a:srgbClr val="F5F5F5">
-                    <a:alpha val="70000"/>
-                  </a:srgbClr>
-                </a:solidFill>
-                <a:latin typeface="微软雅黑"/>
-                <a:ea typeface="微软雅黑"/>
-                <a:cs typeface="微软雅黑"/>
-              </a:rPr>
-              <a:t> </a:t>
-            </a:r>
-            <a:r>
-              <a:rPr sz="1300" b="0" lang="zh-CN" altLang="en-US">
-                <a:solidFill>
-                  <a:srgbClr val="F5F5F5">
-                    <a:alpha val="70000"/>
-                  </a:srgbClr>
-                </a:solidFill>
-                <a:latin typeface="Consolas"/>
-                <a:ea typeface="微软雅黑"/>
-                <a:cs typeface="微软雅黑"/>
-              </a:rPr>
-              <a:t>/</a:t>
-            </a:r>
-            <a:r>
-              <a:rPr sz="1300" b="0" lang="zh-CN" altLang="en-US">
-                <a:solidFill>
-                  <a:srgbClr val="F5F5F5">
-                    <a:alpha val="70000"/>
-                  </a:srgbClr>
-                </a:solidFill>
-                <a:latin typeface="微软雅黑"/>
-                <a:ea typeface="微软雅黑"/>
-                <a:cs typeface="微软雅黑"/>
-              </a:rPr>
-              <a:t> </a:t>
-            </a:r>
-            <a:r>
-              <a:rPr sz="1300" b="0" lang="zh-CN" altLang="en-US">
-                <a:solidFill>
-                  <a:srgbClr val="F5F5F5">
-                    <a:alpha val="70000"/>
-                  </a:srgbClr>
-                </a:solidFill>
-                <a:latin typeface="Consolas"/>
-                <a:ea typeface="微软雅黑"/>
-                <a:cs typeface="微软雅黑"/>
-              </a:rPr>
-              <a:t>102</a:t>
-            </a:r>
-          </a:p>
-        </p:txBody>
-      </p:sp>
-      <p:sp>
-        <p:nvSpPr>
-          <p:cNvPr id="27" name="TextBox 26"/>
-          <p:cNvSpPr txBox="1"/>
-          <p:nvPr/>
-        </p:nvSpPr>
-        <p:spPr>
-          <a:xfrm>
-            <a:off x="9271000" y="2908300"/>
-            <a:ext cx="2159000" cy="254000"/>
-          </a:xfrm>
-          <a:prstGeom prst="rect">
-            <a:avLst/>
-          </a:prstGeom>
-          <a:noFill/>
-        </p:spPr>
-        <p:txBody>
-          <a:bodyPr wrap="square" lIns="0" rIns="0" tIns="0" bIns="0" anchor="t">
-            <a:noAutofit/>
-          </a:bodyPr>
-          <a:lstStyle/>
-          <a:p>
-            <a:pPr algn="l">
-              <a:lnSpc>
-                <a:spcPts val="1690"/>
-              </a:lnSpc>
-            </a:pPr>
-            <a:r>
-              <a:rPr sz="1300" b="0" lang="zh-CN" altLang="en-US">
-                <a:solidFill>
-                  <a:srgbClr val="F5F5F5">
-                    <a:alpha val="70000"/>
-                  </a:srgbClr>
-                </a:solidFill>
-                <a:latin typeface="Consolas"/>
-                <a:ea typeface="微软雅黑"/>
-                <a:cs typeface="微软雅黑"/>
-              </a:rPr>
-              <a:t>按阶段重新分配</a:t>
-            </a:r>
-          </a:p>
-        </p:txBody>
-      </p:sp>
-      <p:sp>
-        <p:nvSpPr>
-          <p:cNvPr id="28" name="Rectangle 27"/>
-          <p:cNvSpPr/>
-          <p:nvPr/>
-        </p:nvSpPr>
-        <p:spPr>
-          <a:xfrm>
-            <a:off x="6223000" y="3225800"/>
-            <a:ext cx="5359400" cy="6350"/>
-          </a:xfrm>
-          <a:prstGeom prst="rect">
-            <a:avLst/>
-          </a:prstGeom>
-          <a:solidFill>
-            <a:srgbClr val="F5F5F5">
-              <a:alpha val="10000"/>
-            </a:srgbClr>
-          </a:solidFill>
-          <a:ln>
-            <a:noFill/>
-          </a:ln>
-        </p:spPr>
-        <p:txBody>
-          <a:bodyPr rtlCol="0" anchor="ctr"/>
-          <a:lstStyle/>
-          <a:p>
-            <a:pPr algn="ctr"/>
-          </a:p>
-        </p:txBody>
-      </p:sp>
-      <p:sp>
-        <p:nvSpPr>
-          <p:cNvPr id="29" name="TextBox 28"/>
-          <p:cNvSpPr txBox="1"/>
-          <p:nvPr/>
-        </p:nvSpPr>
-        <p:spPr>
-          <a:xfrm>
-            <a:off x="6223000" y="3302000"/>
-            <a:ext cx="1079500" cy="254000"/>
-          </a:xfrm>
-          <a:prstGeom prst="rect">
-            <a:avLst/>
-          </a:prstGeom>
-          <a:noFill/>
-        </p:spPr>
-        <p:txBody>
-          <a:bodyPr wrap="square" lIns="0" rIns="0" tIns="0" bIns="0" anchor="t">
-            <a:noAutofit/>
-          </a:bodyPr>
-          <a:lstStyle/>
-          <a:p>
-            <a:pPr algn="l">
-              <a:lnSpc>
-                <a:spcPts val="1690"/>
-              </a:lnSpc>
-            </a:pPr>
-            <a:r>
-              <a:rPr sz="1300" b="1" lang="zh-CN" altLang="en-US">
-                <a:solidFill>
-                  <a:srgbClr val="F5F5F5"/>
-                </a:solidFill>
-                <a:latin typeface="Consolas"/>
-                <a:ea typeface="微软雅黑"/>
-                <a:cs typeface="微软雅黑"/>
-              </a:rPr>
-              <a:t>4.9.31</a:t>
-            </a:r>
-          </a:p>
-        </p:txBody>
-      </p:sp>
-      <p:sp>
-        <p:nvSpPr>
-          <p:cNvPr id="30" name="TextBox 29"/>
-          <p:cNvSpPr txBox="1"/>
-          <p:nvPr/>
-        </p:nvSpPr>
-        <p:spPr>
-          <a:xfrm>
-            <a:off x="7366000" y="3302000"/>
-            <a:ext cx="1905000" cy="254000"/>
-          </a:xfrm>
-          <a:prstGeom prst="rect">
-            <a:avLst/>
-          </a:prstGeom>
-          <a:noFill/>
-        </p:spPr>
-        <p:txBody>
-          <a:bodyPr wrap="square" lIns="0" rIns="0" tIns="0" bIns="0" anchor="t">
-            <a:noAutofit/>
-          </a:bodyPr>
-          <a:lstStyle/>
-          <a:p>
-            <a:pPr algn="l">
-              <a:lnSpc>
-                <a:spcPts val="1690"/>
-              </a:lnSpc>
-            </a:pPr>
-            <a:r>
-              <a:rPr sz="1300" b="0" lang="zh-CN" altLang="en-US">
-                <a:solidFill>
-                  <a:srgbClr val="F5F5F5">
-                    <a:alpha val="70000"/>
-                  </a:srgbClr>
-                </a:solidFill>
-                <a:latin typeface="Consolas"/>
-                <a:ea typeface="微软雅黑"/>
-                <a:cs typeface="微软雅黑"/>
-              </a:rPr>
-              <a:t>256</a:t>
-            </a:r>
-            <a:r>
-              <a:rPr sz="1300" b="0" lang="zh-CN" altLang="en-US">
-                <a:solidFill>
-                  <a:srgbClr val="F5F5F5">
-                    <a:alpha val="70000"/>
-                  </a:srgbClr>
-                </a:solidFill>
-                <a:latin typeface="微软雅黑"/>
-                <a:ea typeface="微软雅黑"/>
-                <a:cs typeface="微软雅黑"/>
-              </a:rPr>
-              <a:t> </a:t>
-            </a:r>
-            <a:r>
-              <a:rPr sz="1300" b="0" lang="zh-CN" altLang="en-US">
-                <a:solidFill>
-                  <a:srgbClr val="F5F5F5">
-                    <a:alpha val="70000"/>
-                  </a:srgbClr>
-                </a:solidFill>
-                <a:latin typeface="Consolas"/>
-                <a:ea typeface="微软雅黑"/>
-                <a:cs typeface="微软雅黑"/>
-              </a:rPr>
-              <a:t>/</a:t>
-            </a:r>
-            <a:r>
-              <a:rPr sz="1300" b="0" lang="zh-CN" altLang="en-US">
-                <a:solidFill>
-                  <a:srgbClr val="F5F5F5">
-                    <a:alpha val="70000"/>
-                  </a:srgbClr>
-                </a:solidFill>
-                <a:latin typeface="微软雅黑"/>
-                <a:ea typeface="微软雅黑"/>
-                <a:cs typeface="微软雅黑"/>
-              </a:rPr>
-              <a:t> </a:t>
-            </a:r>
-            <a:r>
-              <a:rPr sz="1300" b="0" lang="zh-CN" altLang="en-US">
-                <a:solidFill>
-                  <a:srgbClr val="F5F5F5">
-                    <a:alpha val="70000"/>
-                  </a:srgbClr>
-                </a:solidFill>
-                <a:latin typeface="Consolas"/>
-                <a:ea typeface="微软雅黑"/>
-                <a:cs typeface="微软雅黑"/>
-              </a:rPr>
-              <a:t>128</a:t>
-            </a:r>
-            <a:r>
-              <a:rPr sz="1300" b="0" lang="zh-CN" altLang="en-US">
-                <a:solidFill>
-                  <a:srgbClr val="F5F5F5">
-                    <a:alpha val="70000"/>
-                  </a:srgbClr>
-                </a:solidFill>
-                <a:latin typeface="微软雅黑"/>
-                <a:ea typeface="微软雅黑"/>
-                <a:cs typeface="微软雅黑"/>
-              </a:rPr>
-              <a:t> </a:t>
-            </a:r>
-            <a:r>
-              <a:rPr sz="1300" b="0" lang="zh-CN" altLang="en-US">
-                <a:solidFill>
-                  <a:srgbClr val="F5F5F5">
-                    <a:alpha val="70000"/>
-                  </a:srgbClr>
-                </a:solidFill>
-                <a:latin typeface="Consolas"/>
-                <a:ea typeface="微软雅黑"/>
-                <a:cs typeface="微软雅黑"/>
-              </a:rPr>
-              <a:t>/</a:t>
-            </a:r>
-            <a:r>
-              <a:rPr sz="1300" b="0" lang="zh-CN" altLang="en-US">
-                <a:solidFill>
-                  <a:srgbClr val="F5F5F5">
-                    <a:alpha val="70000"/>
-                  </a:srgbClr>
-                </a:solidFill>
-                <a:latin typeface="微软雅黑"/>
-                <a:ea typeface="微软雅黑"/>
-                <a:cs typeface="微软雅黑"/>
-              </a:rPr>
-              <a:t> </a:t>
-            </a:r>
-            <a:r>
-              <a:rPr sz="1300" b="0" lang="zh-CN" altLang="en-US">
-                <a:solidFill>
-                  <a:srgbClr val="F5F5F5">
-                    <a:alpha val="70000"/>
-                  </a:srgbClr>
-                </a:solidFill>
-                <a:latin typeface="Consolas"/>
-                <a:ea typeface="微软雅黑"/>
-                <a:cs typeface="微软雅黑"/>
-              </a:rPr>
-              <a:t>96</a:t>
-            </a:r>
-          </a:p>
-        </p:txBody>
-      </p:sp>
-      <p:sp>
-        <p:nvSpPr>
-          <p:cNvPr id="31" name="TextBox 30"/>
-          <p:cNvSpPr txBox="1"/>
-          <p:nvPr/>
-        </p:nvSpPr>
-        <p:spPr>
-          <a:xfrm>
-            <a:off x="9271000" y="3302000"/>
-            <a:ext cx="2159000" cy="254000"/>
-          </a:xfrm>
-          <a:prstGeom prst="rect">
-            <a:avLst/>
-          </a:prstGeom>
-          <a:noFill/>
-        </p:spPr>
-        <p:txBody>
-          <a:bodyPr wrap="square" lIns="0" rIns="0" tIns="0" bIns="0" anchor="t">
-            <a:noAutofit/>
-          </a:bodyPr>
-          <a:lstStyle/>
-          <a:p>
-            <a:pPr algn="l">
-              <a:lnSpc>
-                <a:spcPts val="1690"/>
-              </a:lnSpc>
-            </a:pPr>
-            <a:r>
-              <a:rPr sz="1300" b="0" lang="zh-CN" altLang="en-US">
-                <a:solidFill>
-                  <a:srgbClr val="F5F5F5">
-                    <a:alpha val="70000"/>
-                  </a:srgbClr>
-                </a:solidFill>
-                <a:latin typeface="Consolas"/>
-                <a:ea typeface="微软雅黑"/>
-                <a:cs typeface="微软雅黑"/>
-              </a:rPr>
-              <a:t>30</a:t>
-            </a:r>
-            <a:r>
-              <a:rPr sz="1300" b="0" lang="zh-CN" altLang="en-US">
-                <a:solidFill>
-                  <a:srgbClr val="F5F5F5">
-                    <a:alpha val="70000"/>
-                  </a:srgbClr>
-                </a:solidFill>
-                <a:latin typeface="微软雅黑"/>
-                <a:ea typeface="微软雅黑"/>
-                <a:cs typeface="微软雅黑"/>
-              </a:rPr>
-              <a:t> </a:t>
-            </a:r>
-            <a:r>
-              <a:rPr sz="1300" b="0" lang="zh-CN" altLang="en-US">
-                <a:solidFill>
-                  <a:srgbClr val="F5F5F5">
-                    <a:alpha val="70000"/>
-                  </a:srgbClr>
-                </a:solidFill>
-                <a:latin typeface="Consolas"/>
-                <a:ea typeface="微软雅黑"/>
-                <a:cs typeface="微软雅黑"/>
-              </a:rPr>
-              <a:t>/</a:t>
-            </a:r>
-            <a:r>
-              <a:rPr sz="1300" b="0" lang="zh-CN" altLang="en-US">
-                <a:solidFill>
-                  <a:srgbClr val="F5F5F5">
-                    <a:alpha val="70000"/>
-                  </a:srgbClr>
-                </a:solidFill>
-                <a:latin typeface="微软雅黑"/>
-                <a:ea typeface="微软雅黑"/>
-                <a:cs typeface="微软雅黑"/>
-              </a:rPr>
-              <a:t> </a:t>
-            </a:r>
-            <a:r>
-              <a:rPr sz="1300" b="0" lang="zh-CN" altLang="en-US">
-                <a:solidFill>
-                  <a:srgbClr val="F5F5F5">
-                    <a:alpha val="70000"/>
-                  </a:srgbClr>
-                </a:solidFill>
-                <a:latin typeface="Consolas"/>
-                <a:ea typeface="微软雅黑"/>
-                <a:cs typeface="微软雅黑"/>
-              </a:rPr>
-              <a:t>15</a:t>
-            </a:r>
-            <a:r>
-              <a:rPr sz="1300" b="0" lang="zh-CN" altLang="en-US">
-                <a:solidFill>
-                  <a:srgbClr val="F5F5F5">
-                    <a:alpha val="70000"/>
-                  </a:srgbClr>
-                </a:solidFill>
-                <a:latin typeface="微软雅黑"/>
-                <a:ea typeface="微软雅黑"/>
-                <a:cs typeface="微软雅黑"/>
-              </a:rPr>
-              <a:t> </a:t>
-            </a:r>
-            <a:r>
-              <a:rPr sz="1300" b="0" lang="zh-CN" altLang="en-US">
-                <a:solidFill>
-                  <a:srgbClr val="F5F5F5">
-                    <a:alpha val="70000"/>
-                  </a:srgbClr>
-                </a:solidFill>
-                <a:latin typeface="Consolas"/>
-                <a:ea typeface="微软雅黑"/>
-                <a:cs typeface="微软雅黑"/>
-              </a:rPr>
-              <a:t>/</a:t>
-            </a:r>
-            <a:r>
-              <a:rPr sz="1300" b="0" lang="zh-CN" altLang="en-US">
-                <a:solidFill>
-                  <a:srgbClr val="F5F5F5">
-                    <a:alpha val="70000"/>
-                  </a:srgbClr>
-                </a:solidFill>
-                <a:latin typeface="微软雅黑"/>
-                <a:ea typeface="微软雅黑"/>
-                <a:cs typeface="微软雅黑"/>
-              </a:rPr>
-              <a:t> </a:t>
-            </a:r>
-            <a:r>
-              <a:rPr sz="1300" b="0" lang="zh-CN" altLang="en-US">
-                <a:solidFill>
-                  <a:srgbClr val="F5F5F5">
-                    <a:alpha val="70000"/>
-                  </a:srgbClr>
-                </a:solidFill>
-                <a:latin typeface="Consolas"/>
-                <a:ea typeface="微软雅黑"/>
-                <a:cs typeface="微软雅黑"/>
-              </a:rPr>
-              <a:t>30</a:t>
-            </a:r>
-            <a:r>
-              <a:rPr sz="1300" b="0" lang="zh-CN" altLang="en-US">
-                <a:solidFill>
-                  <a:srgbClr val="F5F5F5">
-                    <a:alpha val="70000"/>
-                  </a:srgbClr>
-                </a:solidFill>
-                <a:latin typeface="微软雅黑"/>
-                <a:ea typeface="微软雅黑"/>
-                <a:cs typeface="微软雅黑"/>
-              </a:rPr>
-              <a:t> </a:t>
-            </a:r>
-            <a:r>
-              <a:rPr sz="1300" b="0" lang="zh-CN" altLang="en-US">
-                <a:solidFill>
-                  <a:srgbClr val="F5F5F5">
-                    <a:alpha val="70000"/>
-                  </a:srgbClr>
-                </a:solidFill>
-                <a:latin typeface="Consolas"/>
-                <a:ea typeface="微软雅黑"/>
-                <a:cs typeface="微软雅黑"/>
-              </a:rPr>
-              <a:t>fps</a:t>
-            </a:r>
-          </a:p>
-        </p:txBody>
-      </p:sp>
-      <p:sp>
-        <p:nvSpPr>
-          <p:cNvPr id="32" name="Rectangle 31"/>
-          <p:cNvSpPr/>
-          <p:nvPr/>
-        </p:nvSpPr>
-        <p:spPr>
-          <a:xfrm>
-            <a:off x="6223000" y="3619500"/>
-            <a:ext cx="5359400" cy="6350"/>
-          </a:xfrm>
-          <a:prstGeom prst="rect">
-            <a:avLst/>
-          </a:prstGeom>
-          <a:solidFill>
-            <a:srgbClr val="F5F5F5">
-              <a:alpha val="10000"/>
-            </a:srgbClr>
-          </a:solidFill>
-          <a:ln>
-            <a:noFill/>
-          </a:ln>
-        </p:spPr>
-        <p:txBody>
-          <a:bodyPr rtlCol="0" anchor="ctr"/>
-          <a:lstStyle/>
-          <a:p>
-            <a:pPr algn="ctr"/>
-          </a:p>
-        </p:txBody>
-      </p:sp>
-      <p:sp>
-        <p:nvSpPr>
-          <p:cNvPr id="33" name="Rectangle 32"/>
-          <p:cNvSpPr/>
-          <p:nvPr/>
-        </p:nvSpPr>
-        <p:spPr>
-          <a:xfrm>
-            <a:off x="6223000" y="3937000"/>
-            <a:ext cx="5359400" cy="1016000"/>
+            <a:off x="6223000" y="2857500"/>
+            <a:ext cx="5359400" cy="1460500"/>
           </a:xfrm>
           <a:prstGeom prst="rect">
             <a:avLst/>
@@ -16883,14 +16247,14 @@
       </p:sp>
       <p:sp>
         <p:nvSpPr>
-          <p:cNvPr id="34" name="Rectangle 33"/>
+          <p:cNvPr id="21" name="Rectangle 20"/>
           <p:cNvSpPr/>
           <p:nvPr/>
         </p:nvSpPr>
         <p:spPr>
           <a:xfrm>
-            <a:off x="6223000" y="3937000"/>
-            <a:ext cx="38100" cy="1016000"/>
+            <a:off x="6223000" y="2857500"/>
+            <a:ext cx="38100" cy="1460500"/>
           </a:xfrm>
           <a:prstGeom prst="rect">
             <a:avLst/>
@@ -16912,13 +16276,98 @@
       </p:sp>
       <p:sp>
         <p:nvSpPr>
-          <p:cNvPr id="35" name="TextBox 34"/>
-          <p:cNvSpPr txBox="1"/>
-          <p:nvPr/>
-        </p:nvSpPr>
-        <p:spPr>
-          <a:xfrm>
-            <a:off x="6451600" y="4064000"/>
+          <p:cNvPr id="22" name="TextBox 21"/>
+          <p:cNvSpPr txBox="1"/>
+          <p:nvPr/>
+        </p:nvSpPr>
+        <p:spPr>
+          <a:xfrm>
+            <a:off x="6451600" y="3035300"/>
+            <a:ext cx="4978400" cy="571500"/>
+          </a:xfrm>
+          <a:prstGeom prst="rect">
+            <a:avLst/>
+          </a:prstGeom>
+          <a:noFill/>
+        </p:spPr>
+        <p:txBody>
+          <a:bodyPr wrap="square" lIns="0" rIns="0" tIns="0" bIns="0" anchor="t">
+            <a:noAutofit/>
+          </a:bodyPr>
+          <a:lstStyle/>
+          <a:p>
+            <a:pPr algn="l">
+              <a:lnSpc>
+                <a:spcPts val="4200"/>
+              </a:lnSpc>
+            </a:pPr>
+            <a:r>
+              <a:rPr sz="4200" b="1" lang="zh-CN" altLang="en-US">
+                <a:solidFill>
+                  <a:srgbClr val="0FF796"/>
+                </a:solidFill>
+                <a:latin typeface="Consolas"/>
+                <a:ea typeface="微软雅黑"/>
+                <a:cs typeface="微软雅黑"/>
+              </a:rPr>
+              <a:t>1.9</a:t>
+            </a:r>
+            <a:r>
+              <a:rPr sz="4200" b="1" lang="zh-CN" altLang="en-US">
+                <a:solidFill>
+                  <a:srgbClr val="0FF796"/>
+                </a:solidFill>
+                <a:latin typeface="微软雅黑"/>
+                <a:ea typeface="微软雅黑"/>
+                <a:cs typeface="微软雅黑"/>
+              </a:rPr>
+              <a:t> </a:t>
+            </a:r>
+            <a:r>
+              <a:rPr sz="4200" b="1" lang="zh-CN" altLang="en-US">
+                <a:solidFill>
+                  <a:srgbClr val="0FF796"/>
+                </a:solidFill>
+                <a:latin typeface="Consolas"/>
+                <a:ea typeface="微软雅黑"/>
+                <a:cs typeface="微软雅黑"/>
+              </a:rPr>
+              <a:t>→</a:t>
+            </a:r>
+            <a:r>
+              <a:rPr sz="4200" b="1" lang="zh-CN" altLang="en-US">
+                <a:solidFill>
+                  <a:srgbClr val="0FF796"/>
+                </a:solidFill>
+                <a:latin typeface="微软雅黑"/>
+                <a:ea typeface="微软雅黑"/>
+                <a:cs typeface="微软雅黑"/>
+              </a:rPr>
+              <a:t> </a:t>
+            </a:r>
+            <a:r>
+              <a:rPr sz="4200" b="1" lang="zh-CN" altLang="en-US">
+                <a:solidFill>
+                  <a:srgbClr val="0FF796"/>
+                </a:solidFill>
+                <a:latin typeface="Consolas"/>
+                <a:ea typeface="微软雅黑"/>
+                <a:cs typeface="微软雅黑"/>
+              </a:rPr>
+              <a:t>30</a:t>
+            </a:r>
+          </a:p>
+        </p:txBody>
+      </p:sp>
+      <p:sp>
+        <p:nvSpPr>
+          <p:cNvPr id="23" name="TextBox 22"/>
+          <p:cNvSpPr txBox="1"/>
+          <p:nvPr/>
+        </p:nvSpPr>
+        <p:spPr>
+          <a:xfrm>
+            <a:off x="6451600" y="3683000"/>
             <a:ext cx="4978400" cy="254000"/>
           </a:xfrm>
           <a:prstGeom prst="rect">
@@ -16934,181 +16383,142 @@
           <a:p>
             <a:pPr algn="l">
               <a:lnSpc>
-                <a:spcPts val="2640"/>
-              </a:lnSpc>
-            </a:pPr>
-            <a:r>
-              <a:rPr sz="2200" b="1" lang="zh-CN" altLang="en-US">
-                <a:solidFill>
-                  <a:srgbClr val="0FF796"/>
-                </a:solidFill>
-                <a:latin typeface="Consolas"/>
-                <a:ea typeface="微软雅黑"/>
-                <a:cs typeface="微软雅黑"/>
-              </a:rPr>
-              <a:t>1.9</a:t>
-            </a:r>
-            <a:r>
-              <a:rPr sz="2200" b="1" lang="zh-CN" altLang="en-US">
-                <a:solidFill>
-                  <a:srgbClr val="0FF796"/>
-                </a:solidFill>
-                <a:latin typeface="微软雅黑"/>
-                <a:ea typeface="微软雅黑"/>
-                <a:cs typeface="微软雅黑"/>
-              </a:rPr>
-              <a:t> </a:t>
-            </a:r>
-            <a:r>
-              <a:rPr sz="2200" b="1" lang="zh-CN" altLang="en-US">
-                <a:solidFill>
-                  <a:srgbClr val="0FF796"/>
-                </a:solidFill>
-                <a:latin typeface="Consolas"/>
-                <a:ea typeface="微软雅黑"/>
-                <a:cs typeface="微软雅黑"/>
-              </a:rPr>
-              <a:t>→</a:t>
-            </a:r>
-            <a:r>
-              <a:rPr sz="2200" b="1" lang="zh-CN" altLang="en-US">
-                <a:solidFill>
-                  <a:srgbClr val="0FF796"/>
-                </a:solidFill>
-                <a:latin typeface="微软雅黑"/>
-                <a:ea typeface="微软雅黑"/>
-                <a:cs typeface="微软雅黑"/>
-              </a:rPr>
-              <a:t> </a:t>
-            </a:r>
-            <a:r>
-              <a:rPr sz="2200" b="1" lang="zh-CN" altLang="en-US">
-                <a:solidFill>
-                  <a:srgbClr val="0FF796"/>
-                </a:solidFill>
-                <a:latin typeface="Consolas"/>
-                <a:ea typeface="微软雅黑"/>
-                <a:cs typeface="微软雅黑"/>
-              </a:rPr>
-              <a:t>30</a:t>
-            </a:r>
-            <a:r>
-              <a:rPr sz="1250" b="0" lang="zh-CN" altLang="en-US">
+                <a:spcPts val="1690"/>
+              </a:lnSpc>
+            </a:pPr>
+            <a:r>
+              <a:rPr sz="1300" b="0" lang="zh-CN" altLang="en-US">
+                <a:solidFill>
+                  <a:srgbClr val="F5F5F5"/>
+                </a:solidFill>
+                <a:latin typeface="Consolas"/>
+                <a:ea typeface="微软雅黑"/>
+                <a:cs typeface="微软雅黑"/>
+              </a:rPr>
+              <a:t>fps</a:t>
+            </a:r>
+            <a:r>
+              <a:rPr sz="1300" b="0" lang="zh-CN" altLang="en-US">
+                <a:solidFill>
+                  <a:srgbClr val="F5F5F5"/>
+                </a:solidFill>
+                <a:latin typeface="微软雅黑"/>
+                <a:ea typeface="微软雅黑"/>
+                <a:cs typeface="微软雅黑"/>
+              </a:rPr>
+              <a:t> </a:t>
+            </a:r>
+            <a:r>
+              <a:rPr sz="1300" b="0" lang="zh-CN" altLang="en-US">
+                <a:solidFill>
+                  <a:srgbClr val="F5F5F5"/>
+                </a:solidFill>
+                <a:latin typeface="Consolas"/>
+                <a:ea typeface="微软雅黑"/>
+                <a:cs typeface="微软雅黑"/>
+              </a:rPr>
+              <a:t>·</a:t>
+            </a:r>
+            <a:r>
+              <a:rPr sz="1300" b="0" lang="zh-CN" altLang="en-US">
+                <a:solidFill>
+                  <a:srgbClr val="F5F5F5"/>
+                </a:solidFill>
+                <a:latin typeface="微软雅黑"/>
+                <a:ea typeface="微软雅黑"/>
+                <a:cs typeface="微软雅黑"/>
+              </a:rPr>
+              <a:t> </a:t>
+            </a:r>
+            <a:r>
+              <a:rPr sz="1300" b="0" lang="zh-CN" altLang="en-US">
+                <a:solidFill>
+                  <a:srgbClr val="F5F5F5"/>
+                </a:solidFill>
+                <a:latin typeface="Consolas"/>
+                <a:ea typeface="微软雅黑"/>
+                <a:cs typeface="微软雅黑"/>
+              </a:rPr>
+              <a:t>L</a:t>
+            </a:r>
+            <a:r>
+              <a:rPr sz="1300" b="0" lang="zh-CN" altLang="en-US">
+                <a:solidFill>
+                  <a:srgbClr val="F5F5F5"/>
+                </a:solidFill>
+                <a:latin typeface="微软雅黑"/>
+                <a:ea typeface="微软雅黑"/>
+                <a:cs typeface="微软雅黑"/>
+              </a:rPr>
+              <a:t> </a:t>
+            </a:r>
+            <a:r>
+              <a:rPr sz="1300" b="0" lang="zh-CN" altLang="en-US">
+                <a:solidFill>
+                  <a:srgbClr val="F5F5F5"/>
+                </a:solidFill>
+                <a:latin typeface="Consolas"/>
+                <a:ea typeface="微软雅黑"/>
+                <a:cs typeface="微软雅黑"/>
+              </a:rPr>
+              <a:t>档远段上升段最慢帧率</a:t>
+            </a:r>
+          </a:p>
+        </p:txBody>
+      </p:sp>
+      <p:sp>
+        <p:nvSpPr>
+          <p:cNvPr id="24" name="TextBox 23"/>
+          <p:cNvSpPr txBox="1"/>
+          <p:nvPr/>
+        </p:nvSpPr>
+        <p:spPr>
+          <a:xfrm>
+            <a:off x="6451600" y="3975100"/>
+            <a:ext cx="4978400" cy="254000"/>
+          </a:xfrm>
+          <a:prstGeom prst="rect">
+            <a:avLst/>
+          </a:prstGeom>
+          <a:noFill/>
+        </p:spPr>
+        <p:txBody>
+          <a:bodyPr wrap="square" lIns="0" rIns="0" tIns="0" bIns="0" anchor="t">
+            <a:noAutofit/>
+          </a:bodyPr>
+          <a:lstStyle/>
+          <a:p>
+            <a:pPr algn="l">
+              <a:lnSpc>
+                <a:spcPts val="1679"/>
+              </a:lnSpc>
+            </a:pPr>
+            <a:r>
+              <a:rPr sz="1200" b="0" lang="zh-CN" altLang="en-US">
                 <a:solidFill>
                   <a:srgbClr val="F5F5F5">
                     <a:alpha val="70000"/>
                   </a:srgbClr>
                 </a:solidFill>
-                <a:latin typeface="微软雅黑"/>
-                <a:ea typeface="微软雅黑"/>
-                <a:cs typeface="微软雅黑"/>
-              </a:rPr>
-              <a:t>  </a:t>
-            </a:r>
-            <a:r>
-              <a:rPr sz="1250" b="0" lang="zh-CN" altLang="en-US">
-                <a:solidFill>
-                  <a:srgbClr val="F5F5F5">
-                    <a:alpha val="70000"/>
-                  </a:srgbClr>
-                </a:solidFill>
-                <a:latin typeface="Consolas"/>
-                <a:ea typeface="微软雅黑"/>
-                <a:cs typeface="微软雅黑"/>
-              </a:rPr>
-              <a:t>fps</a:t>
-            </a:r>
-            <a:r>
-              <a:rPr sz="1250" b="0" lang="zh-CN" altLang="en-US">
-                <a:solidFill>
-                  <a:srgbClr val="F5F5F5">
-                    <a:alpha val="70000"/>
-                  </a:srgbClr>
-                </a:solidFill>
-                <a:latin typeface="微软雅黑"/>
-                <a:ea typeface="微软雅黑"/>
-                <a:cs typeface="微软雅黑"/>
-              </a:rPr>
-              <a:t> </a:t>
-            </a:r>
-            <a:r>
-              <a:rPr sz="1250" b="0" lang="zh-CN" altLang="en-US">
-                <a:solidFill>
-                  <a:srgbClr val="F5F5F5">
-                    <a:alpha val="70000"/>
-                  </a:srgbClr>
-                </a:solidFill>
-                <a:latin typeface="Consolas"/>
-                <a:ea typeface="微软雅黑"/>
-                <a:cs typeface="微软雅黑"/>
-              </a:rPr>
-              <a:t>·</a:t>
-            </a:r>
-            <a:r>
-              <a:rPr sz="1250" b="0" lang="zh-CN" altLang="en-US">
-                <a:solidFill>
-                  <a:srgbClr val="F5F5F5">
-                    <a:alpha val="70000"/>
-                  </a:srgbClr>
-                </a:solidFill>
-                <a:latin typeface="微软雅黑"/>
-                <a:ea typeface="微软雅黑"/>
-                <a:cs typeface="微软雅黑"/>
-              </a:rPr>
-              <a:t> </a:t>
-            </a:r>
-            <a:r>
-              <a:rPr sz="1250" b="0" lang="zh-CN" altLang="en-US">
-                <a:solidFill>
-                  <a:srgbClr val="F5F5F5">
-                    <a:alpha val="70000"/>
-                  </a:srgbClr>
-                </a:solidFill>
-                <a:latin typeface="Consolas"/>
-                <a:ea typeface="微软雅黑"/>
-                <a:cs typeface="微软雅黑"/>
-              </a:rPr>
-              <a:t>L</a:t>
-            </a:r>
-            <a:r>
-              <a:rPr sz="1250" b="0" lang="zh-CN" altLang="en-US">
-                <a:solidFill>
-                  <a:srgbClr val="F5F5F5">
-                    <a:alpha val="70000"/>
-                  </a:srgbClr>
-                </a:solidFill>
-                <a:latin typeface="微软雅黑"/>
-                <a:ea typeface="微软雅黑"/>
-                <a:cs typeface="微软雅黑"/>
-              </a:rPr>
-              <a:t> </a:t>
-            </a:r>
-            <a:r>
-              <a:rPr sz="1250" b="0" lang="zh-CN" altLang="en-US">
-                <a:solidFill>
-                  <a:srgbClr val="F5F5F5">
-                    <a:alpha val="70000"/>
-                  </a:srgbClr>
-                </a:solidFill>
-                <a:latin typeface="Consolas"/>
-                <a:ea typeface="微软雅黑"/>
-                <a:cs typeface="微软雅黑"/>
-              </a:rPr>
-              <a:t>档上升段最慢帧率</a:t>
-            </a:r>
-          </a:p>
-        </p:txBody>
-      </p:sp>
-      <p:sp>
-        <p:nvSpPr>
-          <p:cNvPr id="36" name="TextBox 35"/>
-          <p:cNvSpPr txBox="1"/>
-          <p:nvPr/>
-        </p:nvSpPr>
-        <p:spPr>
-          <a:xfrm>
-            <a:off x="6451600" y="4521200"/>
-            <a:ext cx="4978400" cy="317500"/>
+                <a:latin typeface="Consolas"/>
+                <a:ea typeface="微软雅黑"/>
+                <a:cs typeface="微软雅黑"/>
+              </a:rPr>
+              <a:t>代价：单格高度降低，近看略软</a:t>
+            </a:r>
+          </a:p>
+        </p:txBody>
+      </p:sp>
+      <p:sp>
+        <p:nvSpPr>
+          <p:cNvPr id="25" name="TextBox 24"/>
+          <p:cNvSpPr txBox="1"/>
+          <p:nvPr/>
+        </p:nvSpPr>
+        <p:spPr>
+          <a:xfrm>
+            <a:off x="6223000" y="4572000"/>
+            <a:ext cx="5359400" cy="508000"/>
           </a:xfrm>
           <a:prstGeom prst="rect">
             <a:avLst/>
@@ -17123,50 +16533,157 @@
           <a:p>
             <a:pPr algn="l">
               <a:lnSpc>
-                <a:spcPts val="1750"/>
-              </a:lnSpc>
-            </a:pPr>
-            <a:r>
-              <a:rPr sz="1250" b="0" lang="zh-CN" altLang="en-US">
-                <a:solidFill>
-                  <a:srgbClr val="F5F5F5">
-                    <a:alpha val="70000"/>
-                  </a:srgbClr>
-                </a:solidFill>
-                <a:latin typeface="Consolas"/>
-                <a:ea typeface="微软雅黑"/>
-                <a:cs typeface="微软雅黑"/>
-              </a:rPr>
-              <a:t>远景流畅；代价是单格高度降低，近看略软</a:t>
-            </a:r>
-          </a:p>
-        </p:txBody>
-      </p:sp>
-      <p:sp>
-        <p:nvSpPr>
-          <p:cNvPr id="37" name="TextBox 36"/>
-          <p:cNvSpPr txBox="1"/>
-          <p:nvPr/>
-        </p:nvSpPr>
-        <p:spPr>
-          <a:xfrm>
-            <a:off x="6223000" y="5143500"/>
-            <a:ext cx="5359400" cy="444500"/>
-          </a:xfrm>
-          <a:prstGeom prst="rect">
-            <a:avLst/>
-          </a:prstGeom>
-          <a:noFill/>
-        </p:spPr>
-        <p:txBody>
-          <a:bodyPr wrap="square" lIns="0" rIns="0" tIns="0" bIns="0" anchor="t">
-            <a:noAutofit/>
-          </a:bodyPr>
-          <a:lstStyle/>
+                <a:spcPts val="1920"/>
+              </a:lnSpc>
+            </a:pPr>
+            <a:r>
+              <a:rPr sz="1200" b="0" lang="zh-CN" altLang="en-US">
+                <a:solidFill>
+                  <a:srgbClr val="F5F5F5">
+                    <a:alpha val="55000"/>
+                  </a:srgbClr>
+                </a:solidFill>
+                <a:latin typeface="Consolas"/>
+                <a:ea typeface="微软雅黑"/>
+                <a:cs typeface="微软雅黑"/>
+              </a:rPr>
+              <a:t>PC</a:t>
+            </a:r>
+            <a:r>
+              <a:rPr sz="1200" b="0" lang="zh-CN" altLang="en-US">
+                <a:solidFill>
+                  <a:srgbClr val="F5F5F5">
+                    <a:alpha val="55000"/>
+                  </a:srgbClr>
+                </a:solidFill>
+                <a:latin typeface="微软雅黑"/>
+                <a:ea typeface="微软雅黑"/>
+                <a:cs typeface="微软雅黑"/>
+              </a:rPr>
+              <a:t> </a:t>
+            </a:r>
+            <a:r>
+              <a:rPr sz="1200" b="0" lang="zh-CN" altLang="en-US">
+                <a:solidFill>
+                  <a:srgbClr val="F5F5F5">
+                    <a:alpha val="55000"/>
+                  </a:srgbClr>
+                </a:solidFill>
+                <a:latin typeface="Consolas"/>
+                <a:ea typeface="微软雅黑"/>
+                <a:cs typeface="微软雅黑"/>
+              </a:rPr>
+              <a:t>主档：近段</a:t>
+            </a:r>
+            <a:r>
+              <a:rPr sz="1200" b="0" lang="zh-CN" altLang="en-US">
+                <a:solidFill>
+                  <a:srgbClr val="F5F5F5">
+                    <a:alpha val="55000"/>
+                  </a:srgbClr>
+                </a:solidFill>
+                <a:latin typeface="微软雅黑"/>
+                <a:ea typeface="微软雅黑"/>
+                <a:cs typeface="微软雅黑"/>
+              </a:rPr>
+              <a:t> </a:t>
+            </a:r>
+            <a:r>
+              <a:rPr sz="1200" b="0" lang="zh-CN" altLang="en-US">
+                <a:solidFill>
+                  <a:srgbClr val="F5F5F5">
+                    <a:alpha val="55000"/>
+                  </a:srgbClr>
+                </a:solidFill>
+                <a:latin typeface="Consolas"/>
+                <a:ea typeface="微软雅黑"/>
+                <a:cs typeface="微软雅黑"/>
+              </a:rPr>
+              <a:t>+</a:t>
+            </a:r>
+            <a:r>
+              <a:rPr sz="1200" b="0" lang="zh-CN" altLang="en-US">
+                <a:solidFill>
+                  <a:srgbClr val="F5F5F5">
+                    <a:alpha val="55000"/>
+                  </a:srgbClr>
+                </a:solidFill>
+                <a:latin typeface="微软雅黑"/>
+                <a:ea typeface="微软雅黑"/>
+                <a:cs typeface="微软雅黑"/>
+              </a:rPr>
+              <a:t> </a:t>
+            </a:r>
+            <a:r>
+              <a:rPr sz="1200" b="0" lang="zh-CN" altLang="en-US">
+                <a:solidFill>
+                  <a:srgbClr val="F5F5F5">
+                    <a:alpha val="55000"/>
+                  </a:srgbClr>
+                </a:solidFill>
+                <a:latin typeface="Consolas"/>
+                <a:ea typeface="微软雅黑"/>
+                <a:cs typeface="微软雅黑"/>
+              </a:rPr>
+              <a:t>远段</a:t>
+            </a:r>
+            <a:r>
+              <a:rPr sz="1200" b="0" lang="zh-CN" altLang="en-US">
+                <a:solidFill>
+                  <a:srgbClr val="F5F5F5">
+                    <a:alpha val="55000"/>
+                  </a:srgbClr>
+                </a:solidFill>
+                <a:latin typeface="微软雅黑"/>
+                <a:ea typeface="微软雅黑"/>
+                <a:cs typeface="微软雅黑"/>
+              </a:rPr>
+              <a:t> </a:t>
+            </a:r>
+            <a:r>
+              <a:rPr sz="1200" b="0" lang="zh-CN" altLang="en-US">
+                <a:solidFill>
+                  <a:srgbClr val="F5F5F5">
+                    <a:alpha val="55000"/>
+                  </a:srgbClr>
+                </a:solidFill>
+                <a:latin typeface="Consolas"/>
+                <a:ea typeface="微软雅黑"/>
+                <a:cs typeface="微软雅黑"/>
+              </a:rPr>
+              <a:t>2</a:t>
+            </a:r>
+            <a:r>
+              <a:rPr sz="1200" b="0" lang="zh-CN" altLang="en-US">
+                <a:solidFill>
+                  <a:srgbClr val="F5F5F5">
+                    <a:alpha val="55000"/>
+                  </a:srgbClr>
+                </a:solidFill>
+                <a:latin typeface="微软雅黑"/>
+                <a:ea typeface="微软雅黑"/>
+                <a:cs typeface="微软雅黑"/>
+              </a:rPr>
+              <a:t> </a:t>
+            </a:r>
+            <a:r>
+              <a:rPr sz="1200" b="0" lang="zh-CN" altLang="en-US">
+                <a:solidFill>
+                  <a:srgbClr val="F5F5F5">
+                    <a:alpha val="55000"/>
+                  </a:srgbClr>
+                </a:solidFill>
+                <a:latin typeface="Consolas"/>
+                <a:ea typeface="微软雅黑"/>
+                <a:cs typeface="微软雅黑"/>
+              </a:rPr>
+              <a:t>个发射器；</a:t>
+            </a:r>
+          </a:p>
           <a:p>
             <a:pPr algn="l">
               <a:lnSpc>
-                <a:spcPts val="1800"/>
+                <a:spcPts val="1920"/>
               </a:lnSpc>
             </a:pPr>
             <a:r>
@@ -17180,7 +16697,7 @@
                 <a:ea typeface="微软雅黑"/>
                 <a:cs typeface="微软雅黑"/>
               </a:rPr>
-              <a:t>PC</a:t>
+              <a:t>小档与手游：1</a:t>
             </a:r>
             <a:r>
               <a:rPr sz="1200" b="0" lang="zh-CN" altLang="en-US">
@@ -17206,105 +16723,7 @@
                 <a:ea typeface="微软雅黑"/>
                 <a:cs typeface="微软雅黑"/>
               </a:rPr>
-              <a:t>大档：近段</a:t>
-            </a:r>
-            <a:r>
-              <a:rPr sz="1200" b="0" lang="zh-CN" altLang="en-US">
-                <a:solidFill>
-                  <a:srgbClr val="F5F5F5">
-                    <a:alpha val="55000"/>
-                  </a:srgbClr>
-                </a:solidFill>
-                <a:latin typeface="微软雅黑"/>
-                <a:ea typeface="微软雅黑"/>
-                <a:cs typeface="微软雅黑"/>
-              </a:rPr>
-              <a:t> </a:t>
-            </a:r>
-            <a:r>
-              <a:rPr sz="1200" b="0" lang="zh-CN" altLang="en-US">
-                <a:solidFill>
-                  <a:srgbClr val="F5F5F5">
-                    <a:alpha val="55000"/>
-                  </a:srgbClr>
-                </a:solidFill>
-                <a:latin typeface="Consolas"/>
-                <a:ea typeface="微软雅黑"/>
-                <a:cs typeface="微软雅黑"/>
-              </a:rPr>
-              <a:t>+</a:t>
-            </a:r>
-            <a:r>
-              <a:rPr sz="1200" b="0" lang="zh-CN" altLang="en-US">
-                <a:solidFill>
-                  <a:srgbClr val="F5F5F5">
-                    <a:alpha val="55000"/>
-                  </a:srgbClr>
-                </a:solidFill>
-                <a:latin typeface="微软雅黑"/>
-                <a:ea typeface="微软雅黑"/>
-                <a:cs typeface="微软雅黑"/>
-              </a:rPr>
-              <a:t> </a:t>
-            </a:r>
-            <a:r>
-              <a:rPr sz="1200" b="0" lang="zh-CN" altLang="en-US">
-                <a:solidFill>
-                  <a:srgbClr val="F5F5F5">
-                    <a:alpha val="55000"/>
-                  </a:srgbClr>
-                </a:solidFill>
-                <a:latin typeface="Consolas"/>
-                <a:ea typeface="微软雅黑"/>
-                <a:cs typeface="微软雅黑"/>
-              </a:rPr>
-              <a:t>远段两个发射器；</a:t>
-            </a:r>
-          </a:p>
-          <a:p>
-            <a:pPr algn="l">
-              <a:lnSpc>
-                <a:spcPts val="1800"/>
-              </a:lnSpc>
-            </a:pPr>
-            <a:r>
-              <a:rPr sz="1200" b="0" lang="zh-CN" altLang="en-US">
-                <a:solidFill>
-                  <a:srgbClr val="F5F5F5">
-                    <a:alpha val="55000"/>
-                  </a:srgbClr>
-                </a:solidFill>
-                <a:latin typeface="Consolas"/>
-                <a:ea typeface="微软雅黑"/>
-                <a:cs typeface="微软雅黑"/>
-              </a:rPr>
-              <a:t>Tiny、XS</a:t>
-            </a:r>
-            <a:r>
-              <a:rPr sz="1200" b="0" lang="zh-CN" altLang="en-US">
-                <a:solidFill>
-                  <a:srgbClr val="F5F5F5">
-                    <a:alpha val="55000"/>
-                  </a:srgbClr>
-                </a:solidFill>
-                <a:latin typeface="微软雅黑"/>
-                <a:ea typeface="微软雅黑"/>
-                <a:cs typeface="微软雅黑"/>
-              </a:rPr>
-              <a:t> </a:t>
-            </a:r>
-            <a:r>
-              <a:rPr sz="1200" b="0" lang="zh-CN" altLang="en-US">
-                <a:solidFill>
-                  <a:srgbClr val="F5F5F5">
-                    <a:alpha val="55000"/>
-                  </a:srgbClr>
-                </a:solidFill>
-                <a:latin typeface="Consolas"/>
-                <a:ea typeface="微软雅黑"/>
-                <a:cs typeface="微软雅黑"/>
-              </a:rPr>
-              <a:t>与手游：一个全段发射器</a:t>
+              <a:t>个全段发射器</a:t>
             </a:r>
           </a:p>
         </p:txBody>
@@ -17503,7 +16922,7 @@
                 <a:ea typeface="微软雅黑"/>
                 <a:cs typeface="微软雅黑"/>
               </a:rPr>
-              <a:t>方头与黑点：定位原因，写入导出与导入规则</a:t>
+              <a:t>方头与黑块：定位原因，写入导出与导入规则</a:t>
             </a:r>
           </a:p>
         </p:txBody>
@@ -18442,7 +17861,7 @@
                 <a:ea typeface="微软雅黑"/>
                 <a:cs typeface="微软雅黑"/>
               </a:rPr>
-              <a:t>黑点</a:t>
+              <a:t>黑块</a:t>
             </a:r>
             <a:r>
               <a:rPr sz="1200" b="1" lang="zh-CN" altLang="en-US" spc="200">
@@ -18486,7 +17905,7 @@
                 <a:ea typeface="微软雅黑"/>
                 <a:cs typeface="微软雅黑"/>
               </a:rPr>
-              <a:t>最亮处出现黑块</a:t>
+              <a:t>最亮处出现黑点</a:t>
             </a:r>
           </a:p>
         </p:txBody>
@@ -18507,8 +17926,8 @@
         </p:blipFill>
         <p:spPr>
           <a:xfrm>
-            <a:off x="4826000" y="1945368"/>
-            <a:ext cx="6756400" cy="2395764"/>
+            <a:off x="4826000" y="1651000"/>
+            <a:ext cx="6756400" cy="2857500"/>
           </a:xfrm>
           <a:prstGeom prst="rect">
             <a:avLst/>
@@ -18605,7 +18024,7 @@
                 <a:ea typeface="微软雅黑"/>
                 <a:cs typeface="微软雅黑"/>
               </a:rPr>
-              <a:t>旧序列</a:t>
+              <a:t>末格为黑的</a:t>
             </a:r>
             <a:r>
               <a:rPr sz="1000" b="0" lang="zh-CN" altLang="en-US">
@@ -18631,7 +18050,7 @@
                 <a:ea typeface="微软雅黑"/>
                 <a:cs typeface="微软雅黑"/>
               </a:rPr>
-              <a:t>+</a:t>
+              <a:t>Ramp</a:t>
             </a:r>
             <a:r>
               <a:rPr sz="1000" b="0" lang="zh-CN" altLang="en-US">
@@ -18657,7 +18076,7 @@
                 <a:ea typeface="微软雅黑"/>
                 <a:cs typeface="微软雅黑"/>
               </a:rPr>
-              <a:t>末格黑</a:t>
+              <a:t>出现黑点；右</a:t>
             </a:r>
             <a:r>
               <a:rPr sz="1000" b="0" lang="zh-CN" altLang="en-US">
@@ -18683,111 +18102,7 @@
                 <a:ea typeface="微软雅黑"/>
                 <a:cs typeface="微软雅黑"/>
               </a:rPr>
-              <a:t>Ramp；中</a:t>
-            </a:r>
-            <a:r>
-              <a:rPr sz="1000" b="0" lang="zh-CN" altLang="en-US">
-                <a:solidFill>
-                  <a:srgbClr val="F5F5F5">
-                    <a:alpha val="55000"/>
-                  </a:srgbClr>
-                </a:solidFill>
-                <a:latin typeface="微软雅黑"/>
-                <a:ea typeface="微软雅黑"/>
-                <a:cs typeface="微软雅黑"/>
-              </a:rPr>
-              <a:t> </a:t>
-            </a:r>
-            <a:r>
-              <a:rPr sz="1000" b="0" lang="zh-CN" altLang="en-US">
-                <a:solidFill>
-                  <a:srgbClr val="F5F5F5">
-                    <a:alpha val="55000"/>
-                  </a:srgbClr>
-                </a:solidFill>
-                <a:latin typeface="Consolas"/>
-                <a:ea typeface="微软雅黑"/>
-                <a:cs typeface="微软雅黑"/>
-              </a:rPr>
-              <a:t>末格不黑；右</a:t>
-            </a:r>
-            <a:r>
-              <a:rPr sz="1000" b="0" lang="zh-CN" altLang="en-US">
-                <a:solidFill>
-                  <a:srgbClr val="F5F5F5">
-                    <a:alpha val="55000"/>
-                  </a:srgbClr>
-                </a:solidFill>
-                <a:latin typeface="微软雅黑"/>
-                <a:ea typeface="微软雅黑"/>
-                <a:cs typeface="微软雅黑"/>
-              </a:rPr>
-              <a:t> </a:t>
-            </a:r>
-            <a:r>
-              <a:rPr sz="1000" b="0" lang="zh-CN" altLang="en-US">
-                <a:solidFill>
-                  <a:srgbClr val="F5F5F5">
-                    <a:alpha val="55000"/>
-                  </a:srgbClr>
-                </a:solidFill>
-                <a:latin typeface="Consolas"/>
-                <a:ea typeface="微软雅黑"/>
-                <a:cs typeface="微软雅黑"/>
-              </a:rPr>
-              <a:t>现序列</a:t>
-            </a:r>
-            <a:r>
-              <a:rPr sz="1000" b="0" lang="zh-CN" altLang="en-US">
-                <a:solidFill>
-                  <a:srgbClr val="F5F5F5">
-                    <a:alpha val="55000"/>
-                  </a:srgbClr>
-                </a:solidFill>
-                <a:latin typeface="微软雅黑"/>
-                <a:ea typeface="微软雅黑"/>
-                <a:cs typeface="微软雅黑"/>
-              </a:rPr>
-              <a:t> </a:t>
-            </a:r>
-            <a:r>
-              <a:rPr sz="1000" b="0" lang="zh-CN" altLang="en-US">
-                <a:solidFill>
-                  <a:srgbClr val="F5F5F5">
-                    <a:alpha val="55000"/>
-                  </a:srgbClr>
-                </a:solidFill>
-                <a:latin typeface="Consolas"/>
-                <a:ea typeface="微软雅黑"/>
-                <a:cs typeface="微软雅黑"/>
-              </a:rPr>
-              <a:t>+</a:t>
-            </a:r>
-            <a:r>
-              <a:rPr sz="1000" b="0" lang="zh-CN" altLang="en-US">
-                <a:solidFill>
-                  <a:srgbClr val="F5F5F5">
-                    <a:alpha val="55000"/>
-                  </a:srgbClr>
-                </a:solidFill>
-                <a:latin typeface="微软雅黑"/>
-                <a:ea typeface="微软雅黑"/>
-                <a:cs typeface="微软雅黑"/>
-              </a:rPr>
-              <a:t> </a:t>
-            </a:r>
-            <a:r>
-              <a:rPr sz="1000" b="0" lang="zh-CN" altLang="en-US">
-                <a:solidFill>
-                  <a:srgbClr val="F5F5F5">
-                    <a:alpha val="55000"/>
-                  </a:srgbClr>
-                </a:solidFill>
-                <a:latin typeface="Consolas"/>
-                <a:ea typeface="微软雅黑"/>
-                <a:cs typeface="微软雅黑"/>
-              </a:rPr>
-              <a:t>末格黑</a:t>
+              <a:t>末格不黑则没有</a:t>
             </a:r>
           </a:p>
         </p:txBody>
@@ -23590,7 +22905,139 @@
                 <a:ea typeface="微软雅黑"/>
                 <a:cs typeface="微软雅黑"/>
               </a:rPr>
-              <a:t>制作规模：种类、规格与时长都远超去年</a:t>
+              <a:t>制作规模：开花</a:t>
+            </a:r>
+            <a:r>
+              <a:rPr sz="2600" b="1" lang="zh-CN" altLang="en-US">
+                <a:solidFill>
+                  <a:srgbClr val="F5F5F5"/>
+                </a:solidFill>
+                <a:latin typeface="微软雅黑"/>
+                <a:ea typeface="微软雅黑"/>
+                <a:cs typeface="微软雅黑"/>
+              </a:rPr>
+              <a:t> </a:t>
+            </a:r>
+            <a:r>
+              <a:rPr sz="2600" b="1" lang="zh-CN" altLang="en-US">
+                <a:solidFill>
+                  <a:srgbClr val="F5F5F5"/>
+                </a:solidFill>
+                <a:latin typeface="Consolas"/>
+                <a:ea typeface="微软雅黑"/>
+                <a:cs typeface="微软雅黑"/>
+              </a:rPr>
+              <a:t>26</a:t>
+            </a:r>
+            <a:r>
+              <a:rPr sz="2600" b="1" lang="zh-CN" altLang="en-US">
+                <a:solidFill>
+                  <a:srgbClr val="F5F5F5"/>
+                </a:solidFill>
+                <a:latin typeface="微软雅黑"/>
+                <a:ea typeface="微软雅黑"/>
+                <a:cs typeface="微软雅黑"/>
+              </a:rPr>
+              <a:t> </a:t>
+            </a:r>
+            <a:r>
+              <a:rPr sz="2600" b="1" lang="zh-CN" altLang="en-US">
+                <a:solidFill>
+                  <a:srgbClr val="F5F5F5"/>
+                </a:solidFill>
+                <a:latin typeface="Consolas"/>
+                <a:ea typeface="微软雅黑"/>
+                <a:cs typeface="微软雅黑"/>
+              </a:rPr>
+              <a:t>种、尾缀</a:t>
+            </a:r>
+            <a:r>
+              <a:rPr sz="2600" b="1" lang="zh-CN" altLang="en-US">
+                <a:solidFill>
+                  <a:srgbClr val="F5F5F5"/>
+                </a:solidFill>
+                <a:latin typeface="微软雅黑"/>
+                <a:ea typeface="微软雅黑"/>
+                <a:cs typeface="微软雅黑"/>
+              </a:rPr>
+              <a:t> </a:t>
+            </a:r>
+            <a:r>
+              <a:rPr sz="2600" b="1" lang="zh-CN" altLang="en-US">
+                <a:solidFill>
+                  <a:srgbClr val="F5F5F5"/>
+                </a:solidFill>
+                <a:latin typeface="Consolas"/>
+                <a:ea typeface="微软雅黑"/>
+                <a:cs typeface="微软雅黑"/>
+              </a:rPr>
+              <a:t>6</a:t>
+            </a:r>
+            <a:r>
+              <a:rPr sz="2600" b="1" lang="zh-CN" altLang="en-US">
+                <a:solidFill>
+                  <a:srgbClr val="F5F5F5"/>
+                </a:solidFill>
+                <a:latin typeface="微软雅黑"/>
+                <a:ea typeface="微软雅黑"/>
+                <a:cs typeface="微软雅黑"/>
+              </a:rPr>
+              <a:t> </a:t>
+            </a:r>
+            <a:r>
+              <a:rPr sz="2600" b="1" lang="zh-CN" altLang="en-US">
+                <a:solidFill>
+                  <a:srgbClr val="F5F5F5"/>
+                </a:solidFill>
+                <a:latin typeface="Consolas"/>
+                <a:ea typeface="微软雅黑"/>
+                <a:cs typeface="微软雅黑"/>
+              </a:rPr>
+              <a:t>档、时长约</a:t>
+            </a:r>
+            <a:r>
+              <a:rPr sz="2600" b="1" lang="zh-CN" altLang="en-US">
+                <a:solidFill>
+                  <a:srgbClr val="F5F5F5"/>
+                </a:solidFill>
+                <a:latin typeface="微软雅黑"/>
+                <a:ea typeface="微软雅黑"/>
+                <a:cs typeface="微软雅黑"/>
+              </a:rPr>
+              <a:t> </a:t>
+            </a:r>
+            <a:r>
+              <a:rPr sz="2600" b="1" lang="zh-CN" altLang="en-US">
+                <a:solidFill>
+                  <a:srgbClr val="F5F5F5"/>
+                </a:solidFill>
+                <a:latin typeface="Consolas"/>
+                <a:ea typeface="微软雅黑"/>
+                <a:cs typeface="微软雅黑"/>
+              </a:rPr>
+              <a:t>220</a:t>
+            </a:r>
+            <a:r>
+              <a:rPr sz="2600" b="1" lang="zh-CN" altLang="en-US">
+                <a:solidFill>
+                  <a:srgbClr val="F5F5F5"/>
+                </a:solidFill>
+                <a:latin typeface="微软雅黑"/>
+                <a:ea typeface="微软雅黑"/>
+                <a:cs typeface="微软雅黑"/>
+              </a:rPr>
+              <a:t> </a:t>
+            </a:r>
+            <a:r>
+              <a:rPr sz="2600" b="1" lang="zh-CN" altLang="en-US">
+                <a:solidFill>
+                  <a:srgbClr val="F5F5F5"/>
+                </a:solidFill>
+                <a:latin typeface="Consolas"/>
+                <a:ea typeface="微软雅黑"/>
+                <a:cs typeface="微软雅黑"/>
+              </a:rPr>
+              <a:t>秒</a:t>
             </a:r>
           </a:p>
         </p:txBody>
@@ -24861,9 +24308,52 @@
           </a:p>
         </p:txBody>
       </p:sp>
+      <p:sp>
+        <p:nvSpPr>
+          <p:cNvPr id="18" name="TextBox 17"/>
+          <p:cNvSpPr txBox="1"/>
+          <p:nvPr/>
+        </p:nvSpPr>
+        <p:spPr>
+          <a:xfrm>
+            <a:off x="609600" y="5969000"/>
+            <a:ext cx="6400800" cy="190500"/>
+          </a:xfrm>
+          <a:prstGeom prst="rect">
+            <a:avLst/>
+          </a:prstGeom>
+          <a:noFill/>
+        </p:spPr>
+        <p:txBody>
+          <a:bodyPr wrap="square" lIns="0" rIns="0" tIns="0" bIns="0" anchor="t">
+            <a:noAutofit/>
+          </a:bodyPr>
+          <a:lstStyle/>
+          <a:p>
+            <a:pPr algn="l">
+              <a:lnSpc>
+                <a:spcPts val="1200"/>
+              </a:lnSpc>
+            </a:pPr>
+            <a:r>
+              <a:rPr sz="1000" b="0" lang="zh-CN" altLang="en-US">
+                <a:solidFill>
+                  <a:srgbClr val="F5F5F5">
+                    <a:alpha val="40000"/>
+                  </a:srgbClr>
+                </a:solidFill>
+                <a:latin typeface="Consolas"/>
+                <a:ea typeface="微软雅黑"/>
+                <a:cs typeface="微软雅黑"/>
+              </a:rPr>
+              <a:t>按花名计；去年数据为讲者统计</a:t>
+            </a:r>
+          </a:p>
+        </p:txBody>
+      </p:sp>
       <p:pic>
         <p:nvPicPr>
-          <p:cNvPr id="18" name="Picture 17" descr="p02_show.jpg"/>
+          <p:cNvPr id="19" name="Picture 18" descr="p02_show.jpg"/>
           <p:cNvPicPr>
             <a:picLocks noChangeAspect="1"/>
           </p:cNvPicPr>
@@ -24887,7 +24377,7 @@
       </p:pic>
       <p:sp>
         <p:nvSpPr>
-          <p:cNvPr id="19" name="Rectangle 18"/>
+          <p:cNvPr id="20" name="Rectangle 19"/>
           <p:cNvSpPr/>
           <p:nvPr/>
         </p:nvSpPr>
@@ -24918,7 +24408,7 @@
       </p:sp>
       <p:sp>
         <p:nvSpPr>
-          <p:cNvPr id="20" name="source_tag"/>
+          <p:cNvPr id="21" name="source_tag"/>
           <p:cNvSpPr txBox="1"/>
           <p:nvPr/>
         </p:nvSpPr>
@@ -31014,7 +30504,7 @@
                 <a:ea typeface="微软雅黑"/>
                 <a:cs typeface="微软雅黑"/>
               </a:rPr>
-              <a:t>原有方式</a:t>
+              <a:t>此前尝试</a:t>
             </a:r>
           </a:p>
         </p:txBody>
@@ -31403,7 +30893,7 @@
                 <a:ea typeface="微软雅黑"/>
                 <a:cs typeface="微软雅黑"/>
               </a:rPr>
-              <a:t>实时调参，导出后回放复核</a:t>
+              <a:t>实时调参；导出后在烘焙器内回放</a:t>
             </a:r>
           </a:p>
         </p:txBody>
@@ -31740,7 +31230,33 @@
                 <a:ea typeface="微软雅黑"/>
                 <a:cs typeface="微软雅黑"/>
               </a:rPr>
-              <a:t>种</a:t>
+              <a:t>种（4.9.18</a:t>
+            </a:r>
+            <a:r>
+              <a:rPr sz="1100" b="0" lang="zh-CN" altLang="en-US">
+                <a:solidFill>
+                  <a:srgbClr val="F5F5F5">
+                    <a:alpha val="55000"/>
+                  </a:srgbClr>
+                </a:solidFill>
+                <a:latin typeface="微软雅黑"/>
+                <a:ea typeface="微软雅黑"/>
+                <a:cs typeface="微软雅黑"/>
+              </a:rPr>
+              <a:t> </a:t>
+            </a:r>
+            <a:r>
+              <a:rPr sz="1100" b="0" lang="zh-CN" altLang="en-US">
+                <a:solidFill>
+                  <a:srgbClr val="F5F5F5">
+                    <a:alpha val="55000"/>
+                  </a:srgbClr>
+                </a:solidFill>
+                <a:latin typeface="Consolas"/>
+                <a:ea typeface="微软雅黑"/>
+                <a:cs typeface="微软雅黑"/>
+              </a:rPr>
+              <a:t>统计）</a:t>
             </a:r>
           </a:p>
         </p:txBody>
@@ -31861,7 +31377,33 @@
                 <a:ea typeface="微软雅黑"/>
                 <a:cs typeface="微软雅黑"/>
               </a:rPr>
-              <a:t>种</a:t>
+              <a:t>种（4.9.18</a:t>
+            </a:r>
+            <a:r>
+              <a:rPr sz="1100" b="0" lang="zh-CN" altLang="en-US">
+                <a:solidFill>
+                  <a:srgbClr val="F5F5F5">
+                    <a:alpha val="55000"/>
+                  </a:srgbClr>
+                </a:solidFill>
+                <a:latin typeface="微软雅黑"/>
+                <a:ea typeface="微软雅黑"/>
+                <a:cs typeface="微软雅黑"/>
+              </a:rPr>
+              <a:t> </a:t>
+            </a:r>
+            <a:r>
+              <a:rPr sz="1100" b="0" lang="zh-CN" altLang="en-US">
+                <a:solidFill>
+                  <a:srgbClr val="F5F5F5">
+                    <a:alpha val="55000"/>
+                  </a:srgbClr>
+                </a:solidFill>
+                <a:latin typeface="Consolas"/>
+                <a:ea typeface="微软雅黑"/>
+                <a:cs typeface="微软雅黑"/>
+              </a:rPr>
+              <a:t>统计）</a:t>
             </a:r>
           </a:p>
         </p:txBody>
@@ -32937,7 +32479,7 @@
         <p:spPr>
           <a:xfrm>
             <a:off x="609600" y="3162300"/>
-            <a:ext cx="1587500" cy="254000"/>
+            <a:ext cx="2286000" cy="254000"/>
           </a:xfrm>
           <a:prstGeom prst="rect">
             <a:avLst/>
@@ -32966,41 +32508,44 @@
               </a:rPr>
               <a:t>固定框（默认）</a:t>
             </a:r>
-          </a:p>
-        </p:txBody>
-      </p:sp>
-      <p:sp>
-        <p:nvSpPr>
-          <p:cNvPr id="8" name="TextBox 7"/>
-          <p:cNvSpPr txBox="1"/>
-          <p:nvPr/>
-        </p:nvSpPr>
-        <p:spPr>
-          <a:xfrm>
-            <a:off x="2197100" y="3149600"/>
-            <a:ext cx="698500" cy="279400"/>
-          </a:xfrm>
-          <a:prstGeom prst="rect">
-            <a:avLst/>
-          </a:prstGeom>
-          <a:noFill/>
-        </p:spPr>
-        <p:txBody>
-          <a:bodyPr wrap="square" lIns="0" rIns="0" tIns="0" bIns="0" anchor="t">
-            <a:noAutofit/>
-          </a:bodyPr>
-          <a:lstStyle/>
-          <a:p>
-            <a:pPr algn="r">
-              <a:lnSpc>
-                <a:spcPts val="1800"/>
-              </a:lnSpc>
-            </a:pPr>
-            <a:r>
-              <a:rPr sz="1500" b="1" lang="zh-CN" altLang="en-US">
+            <a:r>
+              <a:rPr sz="1300" b="1" lang="zh-CN" altLang="en-US">
                 <a:solidFill>
                   <a:srgbClr val="F5F5F5"/>
                 </a:solidFill>
+                <a:latin typeface="微软雅黑"/>
+                <a:ea typeface="微软雅黑"/>
+                <a:cs typeface="微软雅黑"/>
+              </a:rPr>
+              <a:t>  </a:t>
+            </a:r>
+            <a:r>
+              <a:rPr sz="1300" b="1" lang="zh-CN" altLang="en-US">
+                <a:solidFill>
+                  <a:srgbClr val="F5F5F5"/>
+                </a:solidFill>
+                <a:latin typeface="Consolas"/>
+                <a:ea typeface="微软雅黑"/>
+                <a:cs typeface="微软雅黑"/>
+              </a:rPr>
+              <a:t>·</a:t>
+            </a:r>
+            <a:r>
+              <a:rPr sz="1300" b="1" lang="zh-CN" altLang="en-US">
+                <a:solidFill>
+                  <a:srgbClr val="F5F5F5"/>
+                </a:solidFill>
+                <a:latin typeface="微软雅黑"/>
+                <a:ea typeface="微软雅黑"/>
+                <a:cs typeface="微软雅黑"/>
+              </a:rPr>
+              <a:t> </a:t>
+            </a:r>
+            <a:r>
+              <a:rPr sz="1300" b="1" lang="zh-CN" altLang="en-US">
+                <a:solidFill>
+                  <a:srgbClr val="F5F5F5"/>
+                </a:solidFill>
                 <a:latin typeface="Consolas"/>
                 <a:ea typeface="微软雅黑"/>
                 <a:cs typeface="微软雅黑"/>
@@ -33008,7 +32553,7 @@
               <a:t>约</a:t>
             </a:r>
             <a:r>
-              <a:rPr sz="1500" b="1" lang="zh-CN" altLang="en-US">
+              <a:rPr sz="1300" b="1" lang="zh-CN" altLang="en-US">
                 <a:solidFill>
                   <a:srgbClr val="F5F5F5"/>
                 </a:solidFill>
@@ -33019,7 +32564,7 @@
               <a:t> </a:t>
             </a:r>
             <a:r>
-              <a:rPr sz="1500" b="1" lang="zh-CN" altLang="en-US">
+              <a:rPr sz="1300" b="1" lang="zh-CN" altLang="en-US">
                 <a:solidFill>
                   <a:srgbClr val="F5F5F5"/>
                 </a:solidFill>
@@ -33030,7 +32575,7 @@
               <a:t>2</a:t>
             </a:r>
             <a:r>
-              <a:rPr sz="1500" b="1" lang="zh-CN" altLang="en-US">
+              <a:rPr sz="1300" b="1" lang="zh-CN" altLang="en-US">
                 <a:solidFill>
                   <a:srgbClr val="F5F5F5"/>
                 </a:solidFill>
@@ -33041,7 +32586,7 @@
               <a:t> </a:t>
             </a:r>
             <a:r>
-              <a:rPr sz="1500" b="1" lang="zh-CN" altLang="en-US">
+              <a:rPr sz="1300" b="1" lang="zh-CN" altLang="en-US">
                 <a:solidFill>
                   <a:srgbClr val="F5F5F5"/>
                 </a:solidFill>
@@ -33056,7 +32601,7 @@
       </p:sp>
       <p:pic>
         <p:nvPicPr>
-          <p:cNvPr id="9" name="Picture 8" descr="p06_zoom.jpg"/>
+          <p:cNvPr id="8" name="Picture 7" descr="p06_zoom.jpg"/>
           <p:cNvPicPr>
             <a:picLocks noChangeAspect="1"/>
           </p:cNvPicPr>
@@ -33080,14 +32625,14 @@
       </p:pic>
       <p:sp>
         <p:nvSpPr>
-          <p:cNvPr id="10" name="TextBox 9"/>
+          <p:cNvPr id="9" name="TextBox 8"/>
           <p:cNvSpPr txBox="1"/>
           <p:nvPr/>
         </p:nvSpPr>
         <p:spPr>
           <a:xfrm>
             <a:off x="3048000" y="3162300"/>
-            <a:ext cx="1587500" cy="254000"/>
+            <a:ext cx="2286000" cy="254000"/>
           </a:xfrm>
           <a:prstGeom prst="rect">
             <a:avLst/>
@@ -33116,41 +32661,44 @@
               </a:rPr>
               <a:t>随开花放大</a:t>
             </a:r>
-          </a:p>
-        </p:txBody>
-      </p:sp>
-      <p:sp>
-        <p:nvSpPr>
-          <p:cNvPr id="11" name="TextBox 10"/>
-          <p:cNvSpPr txBox="1"/>
-          <p:nvPr/>
-        </p:nvSpPr>
-        <p:spPr>
-          <a:xfrm>
-            <a:off x="4635500" y="3149600"/>
-            <a:ext cx="698500" cy="279400"/>
-          </a:xfrm>
-          <a:prstGeom prst="rect">
-            <a:avLst/>
-          </a:prstGeom>
-          <a:noFill/>
-        </p:spPr>
-        <p:txBody>
-          <a:bodyPr wrap="square" lIns="0" rIns="0" tIns="0" bIns="0" anchor="t">
-            <a:noAutofit/>
-          </a:bodyPr>
-          <a:lstStyle/>
-          <a:p>
-            <a:pPr algn="r">
-              <a:lnSpc>
-                <a:spcPts val="1800"/>
-              </a:lnSpc>
-            </a:pPr>
-            <a:r>
-              <a:rPr sz="1500" b="1" lang="zh-CN" altLang="en-US">
+            <a:r>
+              <a:rPr sz="1300" b="1" lang="zh-CN" altLang="en-US">
                 <a:solidFill>
                   <a:srgbClr val="F5F5F5"/>
                 </a:solidFill>
+                <a:latin typeface="微软雅黑"/>
+                <a:ea typeface="微软雅黑"/>
+                <a:cs typeface="微软雅黑"/>
+              </a:rPr>
+              <a:t>  </a:t>
+            </a:r>
+            <a:r>
+              <a:rPr sz="1300" b="1" lang="zh-CN" altLang="en-US">
+                <a:solidFill>
+                  <a:srgbClr val="F5F5F5"/>
+                </a:solidFill>
+                <a:latin typeface="Consolas"/>
+                <a:ea typeface="微软雅黑"/>
+                <a:cs typeface="微软雅黑"/>
+              </a:rPr>
+              <a:t>·</a:t>
+            </a:r>
+            <a:r>
+              <a:rPr sz="1300" b="1" lang="zh-CN" altLang="en-US">
+                <a:solidFill>
+                  <a:srgbClr val="F5F5F5"/>
+                </a:solidFill>
+                <a:latin typeface="微软雅黑"/>
+                <a:ea typeface="微软雅黑"/>
+                <a:cs typeface="微软雅黑"/>
+              </a:rPr>
+              <a:t> </a:t>
+            </a:r>
+            <a:r>
+              <a:rPr sz="1300" b="1" lang="zh-CN" altLang="en-US">
+                <a:solidFill>
+                  <a:srgbClr val="F5F5F5"/>
+                </a:solidFill>
                 <a:latin typeface="Consolas"/>
                 <a:ea typeface="微软雅黑"/>
                 <a:cs typeface="微软雅黑"/>
@@ -33158,7 +32706,7 @@
               <a:t>约</a:t>
             </a:r>
             <a:r>
-              <a:rPr sz="1500" b="1" lang="zh-CN" altLang="en-US">
+              <a:rPr sz="1300" b="1" lang="zh-CN" altLang="en-US">
                 <a:solidFill>
                   <a:srgbClr val="F5F5F5"/>
                 </a:solidFill>
@@ -33169,7 +32717,7 @@
               <a:t> </a:t>
             </a:r>
             <a:r>
-              <a:rPr sz="1500" b="1" lang="zh-CN" altLang="en-US">
+              <a:rPr sz="1300" b="1" lang="zh-CN" altLang="en-US">
                 <a:solidFill>
                   <a:srgbClr val="F5F5F5"/>
                 </a:solidFill>
@@ -33180,7 +32728,7 @@
               <a:t>2</a:t>
             </a:r>
             <a:r>
-              <a:rPr sz="1500" b="1" lang="zh-CN" altLang="en-US">
+              <a:rPr sz="1300" b="1" lang="zh-CN" altLang="en-US">
                 <a:solidFill>
                   <a:srgbClr val="F5F5F5"/>
                 </a:solidFill>
@@ -33191,7 +32739,7 @@
               <a:t> </a:t>
             </a:r>
             <a:r>
-              <a:rPr sz="1500" b="1" lang="zh-CN" altLang="en-US">
+              <a:rPr sz="1300" b="1" lang="zh-CN" altLang="en-US">
                 <a:solidFill>
                   <a:srgbClr val="F5F5F5"/>
                 </a:solidFill>
@@ -33206,7 +32754,7 @@
       </p:sp>
       <p:pic>
         <p:nvPicPr>
-          <p:cNvPr id="12" name="Picture 11" descr="p06_anchor.jpg"/>
+          <p:cNvPr id="10" name="Picture 9" descr="p06_anchor.jpg"/>
           <p:cNvPicPr>
             <a:picLocks noChangeAspect="1"/>
           </p:cNvPicPr>
@@ -33230,14 +32778,14 @@
       </p:pic>
       <p:sp>
         <p:nvSpPr>
-          <p:cNvPr id="13" name="TextBox 12"/>
+          <p:cNvPr id="11" name="TextBox 10"/>
           <p:cNvSpPr txBox="1"/>
           <p:nvPr/>
         </p:nvSpPr>
         <p:spPr>
           <a:xfrm>
             <a:off x="5486400" y="3162300"/>
-            <a:ext cx="1587500" cy="254000"/>
+            <a:ext cx="2286000" cy="254000"/>
           </a:xfrm>
           <a:prstGeom prst="rect">
             <a:avLst/>
@@ -33266,41 +32814,44 @@
               </a:rPr>
               <a:t>锚在爆点</a:t>
             </a:r>
-          </a:p>
-        </p:txBody>
-      </p:sp>
-      <p:sp>
-        <p:nvSpPr>
-          <p:cNvPr id="14" name="TextBox 13"/>
-          <p:cNvSpPr txBox="1"/>
-          <p:nvPr/>
-        </p:nvSpPr>
-        <p:spPr>
-          <a:xfrm>
-            <a:off x="7073900" y="3149600"/>
-            <a:ext cx="698500" cy="279400"/>
-          </a:xfrm>
-          <a:prstGeom prst="rect">
-            <a:avLst/>
-          </a:prstGeom>
-          <a:noFill/>
-        </p:spPr>
-        <p:txBody>
-          <a:bodyPr wrap="square" lIns="0" rIns="0" tIns="0" bIns="0" anchor="t">
-            <a:noAutofit/>
-          </a:bodyPr>
-          <a:lstStyle/>
-          <a:p>
-            <a:pPr algn="r">
-              <a:lnSpc>
-                <a:spcPts val="1800"/>
-              </a:lnSpc>
-            </a:pPr>
-            <a:r>
-              <a:rPr sz="1500" b="1" lang="zh-CN" altLang="en-US">
+            <a:r>
+              <a:rPr sz="1300" b="1" lang="zh-CN" altLang="en-US">
                 <a:solidFill>
                   <a:srgbClr val="0FF796"/>
                 </a:solidFill>
+                <a:latin typeface="微软雅黑"/>
+                <a:ea typeface="微软雅黑"/>
+                <a:cs typeface="微软雅黑"/>
+              </a:rPr>
+              <a:t>  </a:t>
+            </a:r>
+            <a:r>
+              <a:rPr sz="1300" b="1" lang="zh-CN" altLang="en-US">
+                <a:solidFill>
+                  <a:srgbClr val="0FF796"/>
+                </a:solidFill>
+                <a:latin typeface="Consolas"/>
+                <a:ea typeface="微软雅黑"/>
+                <a:cs typeface="微软雅黑"/>
+              </a:rPr>
+              <a:t>·</a:t>
+            </a:r>
+            <a:r>
+              <a:rPr sz="1300" b="1" lang="zh-CN" altLang="en-US">
+                <a:solidFill>
+                  <a:srgbClr val="0FF796"/>
+                </a:solidFill>
+                <a:latin typeface="微软雅黑"/>
+                <a:ea typeface="微软雅黑"/>
+                <a:cs typeface="微软雅黑"/>
+              </a:rPr>
+              <a:t> </a:t>
+            </a:r>
+            <a:r>
+              <a:rPr sz="1300" b="1" lang="zh-CN" altLang="en-US">
+                <a:solidFill>
+                  <a:srgbClr val="0FF796"/>
+                </a:solidFill>
                 <a:latin typeface="Consolas"/>
                 <a:ea typeface="微软雅黑"/>
                 <a:cs typeface="微软雅黑"/>
@@ -33308,7 +32859,7 @@
               <a:t>约</a:t>
             </a:r>
             <a:r>
-              <a:rPr sz="1500" b="1" lang="zh-CN" altLang="en-US">
+              <a:rPr sz="1300" b="1" lang="zh-CN" altLang="en-US">
                 <a:solidFill>
                   <a:srgbClr val="0FF796"/>
                 </a:solidFill>
@@ -33319,7 +32870,7 @@
               <a:t> </a:t>
             </a:r>
             <a:r>
-              <a:rPr sz="1500" b="1" lang="zh-CN" altLang="en-US">
+              <a:rPr sz="1300" b="1" lang="zh-CN" altLang="en-US">
                 <a:solidFill>
                   <a:srgbClr val="0FF796"/>
                 </a:solidFill>
@@ -33330,7 +32881,7 @@
               <a:t>4</a:t>
             </a:r>
             <a:r>
-              <a:rPr sz="1500" b="1" lang="zh-CN" altLang="en-US">
+              <a:rPr sz="1300" b="1" lang="zh-CN" altLang="en-US">
                 <a:solidFill>
                   <a:srgbClr val="0FF796"/>
                 </a:solidFill>
@@ -33341,7 +32892,7 @@
               <a:t> </a:t>
             </a:r>
             <a:r>
-              <a:rPr sz="1500" b="1" lang="zh-CN" altLang="en-US">
+              <a:rPr sz="1300" b="1" lang="zh-CN" altLang="en-US">
                 <a:solidFill>
                   <a:srgbClr val="0FF796"/>
                 </a:solidFill>
@@ -33356,7 +32907,7 @@
       </p:sp>
       <p:sp>
         <p:nvSpPr>
-          <p:cNvPr id="15" name="TextBox 14"/>
+          <p:cNvPr id="12" name="TextBox 11"/>
           <p:cNvSpPr txBox="1"/>
           <p:nvPr/>
         </p:nvSpPr>
@@ -33399,7 +32950,7 @@
       </p:sp>
       <p:pic>
         <p:nvPicPr>
-          <p:cNvPr id="16" name="Picture 15" descr="p06_pack.jpg"/>
+          <p:cNvPr id="13" name="Picture 12" descr="p06_pack.jpg"/>
           <p:cNvPicPr>
             <a:picLocks noChangeAspect="1"/>
           </p:cNvPicPr>
@@ -33423,7 +32974,7 @@
       </p:pic>
       <p:sp>
         <p:nvSpPr>
-          <p:cNvPr id="17" name="TextBox 16"/>
+          <p:cNvPr id="14" name="TextBox 13"/>
           <p:cNvSpPr txBox="1"/>
           <p:nvPr/>
         </p:nvSpPr>
@@ -33700,7 +33251,7 @@
       </p:sp>
       <p:sp>
         <p:nvSpPr>
-          <p:cNvPr id="18" name="Rectangle 17"/>
+          <p:cNvPr id="15" name="Rectangle 14"/>
           <p:cNvSpPr/>
           <p:nvPr/>
         </p:nvSpPr>
@@ -33733,7 +33284,7 @@
       </p:sp>
       <p:sp>
         <p:nvSpPr>
-          <p:cNvPr id="19" name="Rectangle 18"/>
+          <p:cNvPr id="16" name="Rectangle 15"/>
           <p:cNvSpPr/>
           <p:nvPr/>
         </p:nvSpPr>
@@ -33762,7 +33313,7 @@
       </p:sp>
       <p:sp>
         <p:nvSpPr>
-          <p:cNvPr id="20" name="TextBox 19"/>
+          <p:cNvPr id="17" name="TextBox 16"/>
           <p:cNvSpPr txBox="1"/>
           <p:nvPr/>
         </p:nvSpPr>
@@ -33803,7 +33354,7 @@
       </p:sp>
       <p:sp>
         <p:nvSpPr>
-          <p:cNvPr id="21" name="TextBox 20"/>
+          <p:cNvPr id="18" name="TextBox 17"/>
           <p:cNvSpPr txBox="1"/>
           <p:nvPr/>
         </p:nvSpPr>
@@ -33844,7 +33395,7 @@
       </p:sp>
       <p:sp>
         <p:nvSpPr>
-          <p:cNvPr id="22" name="TextBox 21"/>
+          <p:cNvPr id="19" name="TextBox 18"/>
           <p:cNvSpPr txBox="1"/>
           <p:nvPr/>
         </p:nvSpPr>
@@ -33880,14 +33431,28 @@
                 <a:ea typeface="微软雅黑"/>
                 <a:cs typeface="微软雅黑"/>
               </a:rPr>
-              <a:t>三种方式按花型选择</a:t>
-            </a:r>
-          </a:p>
-        </p:txBody>
-      </p:sp>
-      <p:sp>
-        <p:nvSpPr>
-          <p:cNvPr id="23" name="Rectangle 22"/>
+              <a:t>三种方式</a:t>
+            </a:r>
+            <a:br/>
+            <a:r>
+              <a:rPr sz="1200" b="0" lang="zh-CN" altLang="en-US">
+                <a:solidFill>
+                  <a:srgbClr val="F5F5F5">
+                    <a:alpha val="70000"/>
+                  </a:srgbClr>
+                </a:solidFill>
+                <a:latin typeface="Consolas"/>
+                <a:ea typeface="微软雅黑"/>
+                <a:cs typeface="微软雅黑"/>
+              </a:rPr>
+              <a:t>按花型选择</a:t>
+            </a:r>
+          </a:p>
+        </p:txBody>
+      </p:sp>
+      <p:sp>
+        <p:nvSpPr>
+          <p:cNvPr id="20" name="Rectangle 19"/>
           <p:cNvSpPr/>
           <p:nvPr/>
         </p:nvSpPr>
@@ -33920,7 +33485,7 @@
       </p:sp>
       <p:sp>
         <p:nvSpPr>
-          <p:cNvPr id="24" name="TextBox 23"/>
+          <p:cNvPr id="21" name="TextBox 20"/>
           <p:cNvSpPr txBox="1"/>
           <p:nvPr/>
         </p:nvSpPr>
@@ -33961,7 +33526,7 @@
       </p:sp>
       <p:sp>
         <p:nvSpPr>
-          <p:cNvPr id="25" name="TextBox 24"/>
+          <p:cNvPr id="22" name="TextBox 21"/>
           <p:cNvSpPr txBox="1"/>
           <p:nvPr/>
         </p:nvSpPr>
@@ -34002,7 +33567,7 @@
       </p:sp>
       <p:sp>
         <p:nvSpPr>
-          <p:cNvPr id="26" name="TextBox 25"/>
+          <p:cNvPr id="23" name="TextBox 22"/>
           <p:cNvSpPr txBox="1"/>
           <p:nvPr/>
         </p:nvSpPr>
@@ -34038,14 +33603,28 @@
                 <a:ea typeface="微软雅黑"/>
                 <a:cs typeface="微软雅黑"/>
               </a:rPr>
-              <a:t>按每帧内容二次收紧</a:t>
-            </a:r>
-          </a:p>
-        </p:txBody>
-      </p:sp>
-      <p:sp>
-        <p:nvSpPr>
-          <p:cNvPr id="27" name="Rectangle 26"/>
+              <a:t>按每帧内容</a:t>
+            </a:r>
+            <a:br/>
+            <a:r>
+              <a:rPr sz="1200" b="0" lang="zh-CN" altLang="en-US">
+                <a:solidFill>
+                  <a:srgbClr val="F5F5F5">
+                    <a:alpha val="70000"/>
+                  </a:srgbClr>
+                </a:solidFill>
+                <a:latin typeface="Consolas"/>
+                <a:ea typeface="微软雅黑"/>
+                <a:cs typeface="微软雅黑"/>
+              </a:rPr>
+              <a:t>二次收紧</a:t>
+            </a:r>
+          </a:p>
+        </p:txBody>
+      </p:sp>
+      <p:sp>
+        <p:nvSpPr>
+          <p:cNvPr id="24" name="Rectangle 23"/>
           <p:cNvSpPr/>
           <p:nvPr/>
         </p:nvSpPr>
@@ -34078,7 +33657,7 @@
       </p:sp>
       <p:sp>
         <p:nvSpPr>
-          <p:cNvPr id="28" name="TextBox 27"/>
+          <p:cNvPr id="25" name="TextBox 24"/>
           <p:cNvSpPr txBox="1"/>
           <p:nvPr/>
         </p:nvSpPr>
@@ -34119,7 +33698,7 @@
       </p:sp>
       <p:sp>
         <p:nvSpPr>
-          <p:cNvPr id="29" name="TextBox 28"/>
+          <p:cNvPr id="26" name="TextBox 25"/>
           <p:cNvSpPr txBox="1"/>
           <p:nvPr/>
         </p:nvSpPr>
@@ -34160,7 +33739,7 @@
       </p:sp>
       <p:sp>
         <p:nvSpPr>
-          <p:cNvPr id="30" name="TextBox 29"/>
+          <p:cNvPr id="27" name="TextBox 26"/>
           <p:cNvSpPr txBox="1"/>
           <p:nvPr/>
         </p:nvSpPr>
@@ -34196,8 +33775,9 @@
                 <a:ea typeface="微软雅黑"/>
                 <a:cs typeface="微软雅黑"/>
               </a:rPr>
-              <a:t>格子随形状，单张</a:t>
-            </a:r>
+              <a:t>按形状排格</a:t>
+            </a:r>
+            <a:br/>
             <a:r>
               <a:rPr sz="1200" b="0" lang="zh-CN" altLang="en-US">
                 <a:solidFill>
@@ -34205,11 +33785,11 @@
                     <a:alpha val="70000"/>
                   </a:srgbClr>
                 </a:solidFill>
-                <a:latin typeface="微软雅黑"/>
-                <a:ea typeface="微软雅黑"/>
-                <a:cs typeface="微软雅黑"/>
-              </a:rPr>
-              <a:t> </a:t>
+                <a:latin typeface="Consolas"/>
+                <a:ea typeface="微软雅黑"/>
+                <a:cs typeface="微软雅黑"/>
+              </a:rPr>
+              <a:t>每张</a:t>
             </a:r>
             <a:r>
               <a:rPr sz="1200" b="0" lang="zh-CN" altLang="en-US">
@@ -34218,6 +33798,19 @@
                     <a:alpha val="70000"/>
                   </a:srgbClr>
                 </a:solidFill>
+                <a:latin typeface="微软雅黑"/>
+                <a:ea typeface="微软雅黑"/>
+                <a:cs typeface="微软雅黑"/>
+              </a:rPr>
+              <a:t> </a:t>
+            </a:r>
+            <a:r>
+              <a:rPr sz="1200" b="0" lang="zh-CN" altLang="en-US">
+                <a:solidFill>
+                  <a:srgbClr val="F5F5F5">
+                    <a:alpha val="70000"/>
+                  </a:srgbClr>
+                </a:solidFill>
                 <a:latin typeface="Consolas"/>
                 <a:ea typeface="微软雅黑"/>
                 <a:cs typeface="微软雅黑"/>
@@ -34255,7 +33848,7 @@
       </p:sp>
       <p:sp>
         <p:nvSpPr>
-          <p:cNvPr id="31" name="Rectangle 30"/>
+          <p:cNvPr id="28" name="Rectangle 27"/>
           <p:cNvSpPr/>
           <p:nvPr/>
         </p:nvSpPr>
@@ -34288,7 +33881,7 @@
       </p:sp>
       <p:sp>
         <p:nvSpPr>
-          <p:cNvPr id="32" name="TextBox 31"/>
+          <p:cNvPr id="29" name="TextBox 28"/>
           <p:cNvSpPr txBox="1"/>
           <p:nvPr/>
         </p:nvSpPr>
@@ -34329,7 +33922,7 @@
       </p:sp>
       <p:sp>
         <p:nvSpPr>
-          <p:cNvPr id="33" name="TextBox 32"/>
+          <p:cNvPr id="30" name="TextBox 29"/>
           <p:cNvSpPr txBox="1"/>
           <p:nvPr/>
         </p:nvSpPr>
@@ -34414,7 +34007,7 @@
       </p:sp>
       <p:sp>
         <p:nvSpPr>
-          <p:cNvPr id="34" name="TextBox 33"/>
+          <p:cNvPr id="31" name="TextBox 30"/>
           <p:cNvSpPr txBox="1"/>
           <p:nvPr/>
         </p:nvSpPr>
@@ -34450,8 +34043,9 @@
                 <a:ea typeface="微软雅黑"/>
                 <a:cs typeface="微软雅黑"/>
               </a:rPr>
-              <a:t>灰度查色；收益不足一成不出</a:t>
-            </a:r>
+              <a:t>灰度查色</a:t>
+            </a:r>
+            <a:br/>
             <a:r>
               <a:rPr sz="1200" b="0" lang="zh-CN" altLang="en-US">
                 <a:solidFill>
@@ -34459,11 +34053,11 @@
                     <a:alpha val="70000"/>
                   </a:srgbClr>
                 </a:solidFill>
-                <a:latin typeface="微软雅黑"/>
-                <a:ea typeface="微软雅黑"/>
-                <a:cs typeface="微软雅黑"/>
-              </a:rPr>
-              <a:t> </a:t>
+                <a:latin typeface="Consolas"/>
+                <a:ea typeface="微软雅黑"/>
+                <a:cs typeface="微软雅黑"/>
+              </a:rPr>
+              <a:t>按收益生成</a:t>
             </a:r>
             <a:r>
               <a:rPr sz="1200" b="0" lang="zh-CN" altLang="en-US">
@@ -34472,6 +34066,19 @@
                     <a:alpha val="70000"/>
                   </a:srgbClr>
                 </a:solidFill>
+                <a:latin typeface="微软雅黑"/>
+                <a:ea typeface="微软雅黑"/>
+                <a:cs typeface="微软雅黑"/>
+              </a:rPr>
+              <a:t> </a:t>
+            </a:r>
+            <a:r>
+              <a:rPr sz="1200" b="0" lang="zh-CN" altLang="en-US">
+                <a:solidFill>
+                  <a:srgbClr val="F5F5F5">
+                    <a:alpha val="70000"/>
+                  </a:srgbClr>
+                </a:solidFill>
                 <a:latin typeface="Consolas"/>
                 <a:ea typeface="微软雅黑"/>
                 <a:cs typeface="微软雅黑"/>
@@ -34483,7 +34090,7 @@
       </p:sp>
       <p:sp>
         <p:nvSpPr>
-          <p:cNvPr id="35" name="Rectangle 34"/>
+          <p:cNvPr id="32" name="Rectangle 31"/>
           <p:cNvSpPr/>
           <p:nvPr/>
         </p:nvSpPr>
@@ -34516,7 +34123,7 @@
       </p:sp>
       <p:sp>
         <p:nvSpPr>
-          <p:cNvPr id="36" name="TextBox 35"/>
+          <p:cNvPr id="33" name="TextBox 32"/>
           <p:cNvSpPr txBox="1"/>
           <p:nvPr/>
         </p:nvSpPr>
@@ -34557,7 +34164,7 @@
       </p:sp>
       <p:sp>
         <p:nvSpPr>
-          <p:cNvPr id="37" name="TextBox 36"/>
+          <p:cNvPr id="34" name="TextBox 33"/>
           <p:cNvSpPr txBox="1"/>
           <p:nvPr/>
         </p:nvSpPr>
@@ -34598,7 +34205,7 @@
       </p:sp>
       <p:sp>
         <p:nvSpPr>
-          <p:cNvPr id="38" name="TextBox 37"/>
+          <p:cNvPr id="35" name="TextBox 34"/>
           <p:cNvSpPr txBox="1"/>
           <p:nvPr/>
         </p:nvSpPr>
@@ -34660,14 +34267,28 @@
                 <a:ea typeface="微软雅黑"/>
                 <a:cs typeface="微软雅黑"/>
               </a:rPr>
-              <a:t>与手游同时输出</a:t>
-            </a:r>
-          </a:p>
-        </p:txBody>
-      </p:sp>
-      <p:sp>
-        <p:nvSpPr>
-          <p:cNvPr id="39" name="Rectangle 38"/>
+              <a:t>与手游</a:t>
+            </a:r>
+            <a:br/>
+            <a:r>
+              <a:rPr sz="1200" b="0" lang="zh-CN" altLang="en-US">
+                <a:solidFill>
+                  <a:srgbClr val="F5F5F5">
+                    <a:alpha val="70000"/>
+                  </a:srgbClr>
+                </a:solidFill>
+                <a:latin typeface="Consolas"/>
+                <a:ea typeface="微软雅黑"/>
+                <a:cs typeface="微软雅黑"/>
+              </a:rPr>
+              <a:t>同时输出</a:t>
+            </a:r>
+          </a:p>
+        </p:txBody>
+      </p:sp>
+      <p:sp>
+        <p:nvSpPr>
+          <p:cNvPr id="36" name="Rectangle 35"/>
           <p:cNvSpPr/>
           <p:nvPr/>
         </p:nvSpPr>
@@ -34700,7 +34321,7 @@
       </p:sp>
       <p:sp>
         <p:nvSpPr>
-          <p:cNvPr id="40" name="TextBox 39"/>
+          <p:cNvPr id="37" name="TextBox 36"/>
           <p:cNvSpPr txBox="1"/>
           <p:nvPr/>
         </p:nvSpPr>
@@ -34741,7 +34362,7 @@
       </p:sp>
       <p:sp>
         <p:nvSpPr>
-          <p:cNvPr id="41" name="TextBox 40"/>
+          <p:cNvPr id="38" name="TextBox 37"/>
           <p:cNvSpPr txBox="1"/>
           <p:nvPr/>
         </p:nvSpPr>
@@ -34782,7 +34403,7 @@
       </p:sp>
       <p:sp>
         <p:nvSpPr>
-          <p:cNvPr id="42" name="TextBox 41"/>
+          <p:cNvPr id="39" name="TextBox 38"/>
           <p:cNvSpPr txBox="1"/>
           <p:nvPr/>
         </p:nvSpPr>
@@ -34818,14 +34439,28 @@
                 <a:ea typeface="微软雅黑"/>
                 <a:cs typeface="微软雅黑"/>
               </a:rPr>
-              <a:t>按导出贴图在引擎回放中检查</a:t>
-            </a:r>
-          </a:p>
-        </p:txBody>
-      </p:sp>
-      <p:sp>
-        <p:nvSpPr>
-          <p:cNvPr id="43" name="TextBox 42"/>
+              <a:t>在烘焙器内</a:t>
+            </a:r>
+            <a:br/>
+            <a:r>
+              <a:rPr sz="1200" b="0" lang="zh-CN" altLang="en-US">
+                <a:solidFill>
+                  <a:srgbClr val="F5F5F5">
+                    <a:alpha val="70000"/>
+                  </a:srgbClr>
+                </a:solidFill>
+                <a:latin typeface="Consolas"/>
+                <a:ea typeface="微软雅黑"/>
+                <a:cs typeface="微软雅黑"/>
+              </a:rPr>
+              <a:t>按导出贴图回放</a:t>
+            </a:r>
+          </a:p>
+        </p:txBody>
+      </p:sp>
+      <p:sp>
+        <p:nvSpPr>
+          <p:cNvPr id="40" name="TextBox 39"/>
           <p:cNvSpPr txBox="1"/>
           <p:nvPr/>
         </p:nvSpPr>
@@ -35919,14 +35554,12 @@
             <a:avLst/>
           </a:prstGeom>
           <a:solidFill>
-            <a:srgbClr val="0FF796">
-              <a:alpha val="10000"/>
-            </a:srgbClr>
+            <a:srgbClr val="161616"/>
           </a:solidFill>
           <a:ln w="6350">
             <a:solidFill>
-              <a:srgbClr val="0FF796">
-                <a:alpha val="35000"/>
+              <a:srgbClr val="F5F5F5">
+                <a:alpha val="8000"/>
               </a:srgbClr>
             </a:solidFill>
           </a:ln>
@@ -35967,9 +35600,11 @@
               </a:lnSpc>
             </a:pPr>
             <a:r>
-              <a:rPr sz="1100" b="1" lang="zh-CN" altLang="en-US">
-                <a:solidFill>
-                  <a:srgbClr val="0FF796"/>
+              <a:rPr sz="1100" b="0" lang="zh-CN" altLang="en-US">
+                <a:solidFill>
+                  <a:srgbClr val="F5F5F5">
+                    <a:alpha val="70000"/>
+                  </a:srgbClr>
                 </a:solidFill>
                 <a:latin typeface="Consolas"/>
                 <a:ea typeface="微软雅黑"/>
@@ -35978,20 +35613,24 @@
               <a:t>NeverStream</a:t>
             </a:r>
             <a:r>
-              <a:rPr sz="1100" b="1" lang="zh-CN" altLang="en-US">
-                <a:solidFill>
-                  <a:srgbClr val="0FF796"/>
-                </a:solidFill>
-                <a:latin typeface="微软雅黑"/>
-                <a:ea typeface="微软雅黑"/>
-                <a:cs typeface="微软雅黑"/>
-              </a:rPr>
-              <a:t> </a:t>
-            </a:r>
-            <a:r>
-              <a:rPr sz="1100" b="1" lang="zh-CN" altLang="en-US">
-                <a:solidFill>
-                  <a:srgbClr val="0FF796"/>
+              <a:rPr sz="1100" b="0" lang="zh-CN" altLang="en-US">
+                <a:solidFill>
+                  <a:srgbClr val="F5F5F5">
+                    <a:alpha val="70000"/>
+                  </a:srgbClr>
+                </a:solidFill>
+                <a:latin typeface="微软雅黑"/>
+                <a:ea typeface="微软雅黑"/>
+                <a:cs typeface="微软雅黑"/>
+              </a:rPr>
+              <a:t> </a:t>
+            </a:r>
+            <a:r>
+              <a:rPr sz="1100" b="0" lang="zh-CN" altLang="en-US">
+                <a:solidFill>
+                  <a:srgbClr val="F5F5F5">
+                    <a:alpha val="70000"/>
+                  </a:srgbClr>
                 </a:solidFill>
                 <a:latin typeface="Consolas"/>
                 <a:ea typeface="微软雅黑"/>
@@ -36017,14 +35656,12 @@
             <a:avLst/>
           </a:prstGeom>
           <a:solidFill>
-            <a:srgbClr val="0FF796">
-              <a:alpha val="10000"/>
-            </a:srgbClr>
+            <a:srgbClr val="161616"/>
           </a:solidFill>
           <a:ln w="6350">
             <a:solidFill>
-              <a:srgbClr val="0FF796">
-                <a:alpha val="35000"/>
+              <a:srgbClr val="F5F5F5">
+                <a:alpha val="8000"/>
               </a:srgbClr>
             </a:solidFill>
           </a:ln>
@@ -36065,9 +35702,11 @@
               </a:lnSpc>
             </a:pPr>
             <a:r>
-              <a:rPr sz="1100" b="1" lang="zh-CN" altLang="en-US">
-                <a:solidFill>
-                  <a:srgbClr val="0FF796"/>
+              <a:rPr sz="1100" b="0" lang="zh-CN" altLang="en-US">
+                <a:solidFill>
+                  <a:srgbClr val="F5F5F5">
+                    <a:alpha val="70000"/>
+                  </a:srgbClr>
                 </a:solidFill>
                 <a:latin typeface="Consolas"/>
                 <a:ea typeface="微软雅黑"/>
@@ -36076,20 +35715,24 @@
               <a:t>贴图组</a:t>
             </a:r>
             <a:r>
-              <a:rPr sz="1100" b="1" lang="zh-CN" altLang="en-US">
-                <a:solidFill>
-                  <a:srgbClr val="0FF796"/>
-                </a:solidFill>
-                <a:latin typeface="微软雅黑"/>
-                <a:ea typeface="微软雅黑"/>
-                <a:cs typeface="微软雅黑"/>
-              </a:rPr>
-              <a:t> </a:t>
-            </a:r>
-            <a:r>
-              <a:rPr sz="1100" b="1" lang="zh-CN" altLang="en-US">
-                <a:solidFill>
-                  <a:srgbClr val="0FF796"/>
+              <a:rPr sz="1100" b="0" lang="zh-CN" altLang="en-US">
+                <a:solidFill>
+                  <a:srgbClr val="F5F5F5">
+                    <a:alpha val="70000"/>
+                  </a:srgbClr>
+                </a:solidFill>
+                <a:latin typeface="微软雅黑"/>
+                <a:ea typeface="微软雅黑"/>
+                <a:cs typeface="微软雅黑"/>
+              </a:rPr>
+              <a:t> </a:t>
+            </a:r>
+            <a:r>
+              <a:rPr sz="1100" b="0" lang="zh-CN" altLang="en-US">
+                <a:solidFill>
+                  <a:srgbClr val="F5F5F5">
+                    <a:alpha val="70000"/>
+                  </a:srgbClr>
                 </a:solidFill>
                 <a:latin typeface="Consolas"/>
                 <a:ea typeface="微软雅黑"/>
@@ -36115,14 +35758,12 @@
             <a:avLst/>
           </a:prstGeom>
           <a:solidFill>
-            <a:srgbClr val="0FF796">
-              <a:alpha val="10000"/>
-            </a:srgbClr>
+            <a:srgbClr val="161616"/>
           </a:solidFill>
           <a:ln w="6350">
             <a:solidFill>
-              <a:srgbClr val="0FF796">
-                <a:alpha val="35000"/>
+              <a:srgbClr val="F5F5F5">
+                <a:alpha val="8000"/>
               </a:srgbClr>
             </a:solidFill>
           </a:ln>
@@ -36163,9 +35804,11 @@
               </a:lnSpc>
             </a:pPr>
             <a:r>
-              <a:rPr sz="1100" b="1" lang="zh-CN" altLang="en-US">
-                <a:solidFill>
-                  <a:srgbClr val="0FF796"/>
+              <a:rPr sz="1100" b="0" lang="zh-CN" altLang="en-US">
+                <a:solidFill>
+                  <a:srgbClr val="F5F5F5">
+                    <a:alpha val="70000"/>
+                  </a:srgbClr>
                 </a:solidFill>
                 <a:latin typeface="Consolas"/>
                 <a:ea typeface="微软雅黑"/>
@@ -36174,20 +35817,24 @@
               <a:t>PC</a:t>
             </a:r>
             <a:r>
-              <a:rPr sz="1100" b="1" lang="zh-CN" altLang="en-US">
-                <a:solidFill>
-                  <a:srgbClr val="0FF796"/>
-                </a:solidFill>
-                <a:latin typeface="微软雅黑"/>
-                <a:ea typeface="微软雅黑"/>
-                <a:cs typeface="微软雅黑"/>
-              </a:rPr>
-              <a:t> </a:t>
-            </a:r>
-            <a:r>
-              <a:rPr sz="1100" b="1" lang="zh-CN" altLang="en-US">
-                <a:solidFill>
-                  <a:srgbClr val="0FF796"/>
+              <a:rPr sz="1100" b="0" lang="zh-CN" altLang="en-US">
+                <a:solidFill>
+                  <a:srgbClr val="F5F5F5">
+                    <a:alpha val="70000"/>
+                  </a:srgbClr>
+                </a:solidFill>
+                <a:latin typeface="微软雅黑"/>
+                <a:ea typeface="微软雅黑"/>
+                <a:cs typeface="微软雅黑"/>
+              </a:rPr>
+              <a:t> </a:t>
+            </a:r>
+            <a:r>
+              <a:rPr sz="1100" b="0" lang="zh-CN" altLang="en-US">
+                <a:solidFill>
+                  <a:srgbClr val="F5F5F5">
+                    <a:alpha val="70000"/>
+                  </a:srgbClr>
                 </a:solidFill>
                 <a:latin typeface="Consolas"/>
                 <a:ea typeface="微软雅黑"/>
@@ -36196,20 +35843,24 @@
               <a:t>主序列</a:t>
             </a:r>
             <a:r>
-              <a:rPr sz="1100" b="1" lang="zh-CN" altLang="en-US">
-                <a:solidFill>
-                  <a:srgbClr val="0FF796"/>
-                </a:solidFill>
-                <a:latin typeface="微软雅黑"/>
-                <a:ea typeface="微软雅黑"/>
-                <a:cs typeface="微软雅黑"/>
-              </a:rPr>
-              <a:t> </a:t>
-            </a:r>
-            <a:r>
-              <a:rPr sz="1100" b="1" lang="zh-CN" altLang="en-US">
-                <a:solidFill>
-                  <a:srgbClr val="0FF796"/>
+              <a:rPr sz="1100" b="0" lang="zh-CN" altLang="en-US">
+                <a:solidFill>
+                  <a:srgbClr val="F5F5F5">
+                    <a:alpha val="70000"/>
+                  </a:srgbClr>
+                </a:solidFill>
+                <a:latin typeface="微软雅黑"/>
+                <a:ea typeface="微软雅黑"/>
+                <a:cs typeface="微软雅黑"/>
+              </a:rPr>
+              <a:t> </a:t>
+            </a:r>
+            <a:r>
+              <a:rPr sz="1100" b="0" lang="zh-CN" altLang="en-US">
+                <a:solidFill>
+                  <a:srgbClr val="F5F5F5">
+                    <a:alpha val="70000"/>
+                  </a:srgbClr>
                 </a:solidFill>
                 <a:latin typeface="Consolas"/>
                 <a:ea typeface="微软雅黑"/>
@@ -36235,14 +35886,12 @@
             <a:avLst/>
           </a:prstGeom>
           <a:solidFill>
-            <a:srgbClr val="0FF796">
-              <a:alpha val="10000"/>
-            </a:srgbClr>
+            <a:srgbClr val="161616"/>
           </a:solidFill>
           <a:ln w="6350">
             <a:solidFill>
-              <a:srgbClr val="0FF796">
-                <a:alpha val="35000"/>
+              <a:srgbClr val="F5F5F5">
+                <a:alpha val="8000"/>
               </a:srgbClr>
             </a:solidFill>
           </a:ln>
@@ -36283,9 +35932,11 @@
               </a:lnSpc>
             </a:pPr>
             <a:r>
-              <a:rPr sz="1100" b="1" lang="zh-CN" altLang="en-US">
-                <a:solidFill>
-                  <a:srgbClr val="0FF796"/>
+              <a:rPr sz="1100" b="0" lang="zh-CN" altLang="en-US">
+                <a:solidFill>
+                  <a:srgbClr val="F5F5F5">
+                    <a:alpha val="70000"/>
+                  </a:srgbClr>
                 </a:solidFill>
                 <a:latin typeface="Consolas"/>
                 <a:ea typeface="微软雅黑"/>
@@ -36294,20 +35945,24 @@
               <a:t>手游</a:t>
             </a:r>
             <a:r>
-              <a:rPr sz="1100" b="1" lang="zh-CN" altLang="en-US">
-                <a:solidFill>
-                  <a:srgbClr val="0FF796"/>
-                </a:solidFill>
-                <a:latin typeface="微软雅黑"/>
-                <a:ea typeface="微软雅黑"/>
-                <a:cs typeface="微软雅黑"/>
-              </a:rPr>
-              <a:t> </a:t>
-            </a:r>
-            <a:r>
-              <a:rPr sz="1100" b="1" lang="zh-CN" altLang="en-US">
-                <a:solidFill>
-                  <a:srgbClr val="0FF796"/>
+              <a:rPr sz="1100" b="0" lang="zh-CN" altLang="en-US">
+                <a:solidFill>
+                  <a:srgbClr val="F5F5F5">
+                    <a:alpha val="70000"/>
+                  </a:srgbClr>
+                </a:solidFill>
+                <a:latin typeface="微软雅黑"/>
+                <a:ea typeface="微软雅黑"/>
+                <a:cs typeface="微软雅黑"/>
+              </a:rPr>
+              <a:t> </a:t>
+            </a:r>
+            <a:r>
+              <a:rPr sz="1100" b="0" lang="zh-CN" altLang="en-US">
+                <a:solidFill>
+                  <a:srgbClr val="F5F5F5">
+                    <a:alpha val="70000"/>
+                  </a:srgbClr>
                 </a:solidFill>
                 <a:latin typeface="Consolas"/>
                 <a:ea typeface="微软雅黑"/>
@@ -36316,20 +35971,24 @@
               <a:t>Mip</a:t>
             </a:r>
             <a:r>
-              <a:rPr sz="1100" b="1" lang="zh-CN" altLang="en-US">
-                <a:solidFill>
-                  <a:srgbClr val="0FF796"/>
-                </a:solidFill>
-                <a:latin typeface="微软雅黑"/>
-                <a:ea typeface="微软雅黑"/>
-                <a:cs typeface="微软雅黑"/>
-              </a:rPr>
-              <a:t> </a:t>
-            </a:r>
-            <a:r>
-              <a:rPr sz="1100" b="1" lang="zh-CN" altLang="en-US">
-                <a:solidFill>
-                  <a:srgbClr val="0FF796"/>
+              <a:rPr sz="1100" b="0" lang="zh-CN" altLang="en-US">
+                <a:solidFill>
+                  <a:srgbClr val="F5F5F5">
+                    <a:alpha val="70000"/>
+                  </a:srgbClr>
+                </a:solidFill>
+                <a:latin typeface="微软雅黑"/>
+                <a:ea typeface="微软雅黑"/>
+                <a:cs typeface="微软雅黑"/>
+              </a:rPr>
+              <a:t> </a:t>
+            </a:r>
+            <a:r>
+              <a:rPr sz="1100" b="0" lang="zh-CN" altLang="en-US">
+                <a:solidFill>
+                  <a:srgbClr val="F5F5F5">
+                    <a:alpha val="70000"/>
+                  </a:srgbClr>
                 </a:solidFill>
                 <a:latin typeface="Consolas"/>
                 <a:ea typeface="微软雅黑"/>
@@ -36338,20 +35997,24 @@
               <a:t>≤</a:t>
             </a:r>
             <a:r>
-              <a:rPr sz="1100" b="1" lang="zh-CN" altLang="en-US">
-                <a:solidFill>
-                  <a:srgbClr val="0FF796"/>
-                </a:solidFill>
-                <a:latin typeface="微软雅黑"/>
-                <a:ea typeface="微软雅黑"/>
-                <a:cs typeface="微软雅黑"/>
-              </a:rPr>
-              <a:t> </a:t>
-            </a:r>
-            <a:r>
-              <a:rPr sz="1100" b="1" lang="zh-CN" altLang="en-US">
-                <a:solidFill>
-                  <a:srgbClr val="0FF796"/>
+              <a:rPr sz="1100" b="0" lang="zh-CN" altLang="en-US">
+                <a:solidFill>
+                  <a:srgbClr val="F5F5F5">
+                    <a:alpha val="70000"/>
+                  </a:srgbClr>
+                </a:solidFill>
+                <a:latin typeface="微软雅黑"/>
+                <a:ea typeface="微软雅黑"/>
+                <a:cs typeface="微软雅黑"/>
+              </a:rPr>
+              <a:t> </a:t>
+            </a:r>
+            <a:r>
+              <a:rPr sz="1100" b="0" lang="zh-CN" altLang="en-US">
+                <a:solidFill>
+                  <a:srgbClr val="F5F5F5">
+                    <a:alpha val="70000"/>
+                  </a:srgbClr>
                 </a:solidFill>
                 <a:latin typeface="Consolas"/>
                 <a:ea typeface="微软雅黑"/>
@@ -36377,14 +36040,12 @@
             <a:avLst/>
           </a:prstGeom>
           <a:solidFill>
-            <a:srgbClr val="0FF796">
-              <a:alpha val="10000"/>
-            </a:srgbClr>
+            <a:srgbClr val="161616"/>
           </a:solidFill>
           <a:ln w="6350">
             <a:solidFill>
-              <a:srgbClr val="0FF796">
-                <a:alpha val="35000"/>
+              <a:srgbClr val="F5F5F5">
+                <a:alpha val="8000"/>
               </a:srgbClr>
             </a:solidFill>
           </a:ln>
@@ -36425,9 +36086,11 @@
               </a:lnSpc>
             </a:pPr>
             <a:r>
-              <a:rPr sz="1100" b="1" lang="zh-CN" altLang="en-US">
-                <a:solidFill>
-                  <a:srgbClr val="0FF796"/>
+              <a:rPr sz="1100" b="0" lang="zh-CN" altLang="en-US">
+                <a:solidFill>
+                  <a:srgbClr val="F5F5F5">
+                    <a:alpha val="70000"/>
+                  </a:srgbClr>
                 </a:solidFill>
                 <a:latin typeface="Consolas"/>
                 <a:ea typeface="微软雅黑"/>
@@ -36436,20 +36099,24 @@
               <a:t>Ramp</a:t>
             </a:r>
             <a:r>
-              <a:rPr sz="1100" b="1" lang="zh-CN" altLang="en-US">
-                <a:solidFill>
-                  <a:srgbClr val="0FF796"/>
-                </a:solidFill>
-                <a:latin typeface="微软雅黑"/>
-                <a:ea typeface="微软雅黑"/>
-                <a:cs typeface="微软雅黑"/>
-              </a:rPr>
-              <a:t> </a:t>
-            </a:r>
-            <a:r>
-              <a:rPr sz="1100" b="1" lang="zh-CN" altLang="en-US">
-                <a:solidFill>
-                  <a:srgbClr val="0FF796"/>
+              <a:rPr sz="1100" b="0" lang="zh-CN" altLang="en-US">
+                <a:solidFill>
+                  <a:srgbClr val="F5F5F5">
+                    <a:alpha val="70000"/>
+                  </a:srgbClr>
+                </a:solidFill>
+                <a:latin typeface="微软雅黑"/>
+                <a:ea typeface="微软雅黑"/>
+                <a:cs typeface="微软雅黑"/>
+              </a:rPr>
+              <a:t> </a:t>
+            </a:r>
+            <a:r>
+              <a:rPr sz="1100" b="0" lang="zh-CN" altLang="en-US">
+                <a:solidFill>
+                  <a:srgbClr val="F5F5F5">
+                    <a:alpha val="70000"/>
+                  </a:srgbClr>
                 </a:solidFill>
                 <a:latin typeface="Consolas"/>
                 <a:ea typeface="微软雅黑"/>
@@ -36475,14 +36142,12 @@
             <a:avLst/>
           </a:prstGeom>
           <a:solidFill>
-            <a:srgbClr val="0FF796">
-              <a:alpha val="10000"/>
-            </a:srgbClr>
+            <a:srgbClr val="161616"/>
           </a:solidFill>
           <a:ln w="6350">
             <a:solidFill>
-              <a:srgbClr val="0FF796">
-                <a:alpha val="35000"/>
+              <a:srgbClr val="F5F5F5">
+                <a:alpha val="8000"/>
               </a:srgbClr>
             </a:solidFill>
           </a:ln>
@@ -36523,9 +36188,11 @@
               </a:lnSpc>
             </a:pPr>
             <a:r>
-              <a:rPr sz="1100" b="1" lang="zh-CN" altLang="en-US">
-                <a:solidFill>
-                  <a:srgbClr val="0FF796"/>
+              <a:rPr sz="1100" b="0" lang="zh-CN" altLang="en-US">
+                <a:solidFill>
+                  <a:srgbClr val="F5F5F5">
+                    <a:alpha val="70000"/>
+                  </a:srgbClr>
                 </a:solidFill>
                 <a:latin typeface="Consolas"/>
                 <a:ea typeface="微软雅黑"/>
@@ -36534,20 +36201,24 @@
               <a:t>EmissiveDissolve</a:t>
             </a:r>
             <a:r>
-              <a:rPr sz="1100" b="1" lang="zh-CN" altLang="en-US">
-                <a:solidFill>
-                  <a:srgbClr val="0FF796"/>
-                </a:solidFill>
-                <a:latin typeface="微软雅黑"/>
-                <a:ea typeface="微软雅黑"/>
-                <a:cs typeface="微软雅黑"/>
-              </a:rPr>
-              <a:t> </a:t>
-            </a:r>
-            <a:r>
-              <a:rPr sz="1100" b="1" lang="zh-CN" altLang="en-US">
-                <a:solidFill>
-                  <a:srgbClr val="0FF796"/>
+              <a:rPr sz="1100" b="0" lang="zh-CN" altLang="en-US">
+                <a:solidFill>
+                  <a:srgbClr val="F5F5F5">
+                    <a:alpha val="70000"/>
+                  </a:srgbClr>
+                </a:solidFill>
+                <a:latin typeface="微软雅黑"/>
+                <a:ea typeface="微软雅黑"/>
+                <a:cs typeface="微软雅黑"/>
+              </a:rPr>
+              <a:t> </a:t>
+            </a:r>
+            <a:r>
+              <a:rPr sz="1100" b="0" lang="zh-CN" altLang="en-US">
+                <a:solidFill>
+                  <a:srgbClr val="F5F5F5">
+                    <a:alpha val="70000"/>
+                  </a:srgbClr>
                 </a:solidFill>
                 <a:latin typeface="Consolas"/>
                 <a:ea typeface="微软雅黑"/>
@@ -36573,14 +36244,12 @@
             <a:avLst/>
           </a:prstGeom>
           <a:solidFill>
-            <a:srgbClr val="0FF796">
-              <a:alpha val="10000"/>
-            </a:srgbClr>
+            <a:srgbClr val="161616"/>
           </a:solidFill>
           <a:ln w="6350">
             <a:solidFill>
-              <a:srgbClr val="0FF796">
-                <a:alpha val="35000"/>
+              <a:srgbClr val="F5F5F5">
+                <a:alpha val="8000"/>
               </a:srgbClr>
             </a:solidFill>
           </a:ln>
@@ -36621,9 +36290,11 @@
               </a:lnSpc>
             </a:pPr>
             <a:r>
-              <a:rPr sz="1100" b="1" lang="zh-CN" altLang="en-US">
-                <a:solidFill>
-                  <a:srgbClr val="0FF796"/>
+              <a:rPr sz="1100" b="0" lang="zh-CN" altLang="en-US">
+                <a:solidFill>
+                  <a:srgbClr val="F5F5F5">
+                    <a:alpha val="70000"/>
+                  </a:srgbClr>
                 </a:solidFill>
                 <a:latin typeface="Consolas"/>
                 <a:ea typeface="微软雅黑"/>
@@ -36649,14 +36320,12 @@
             <a:avLst/>
           </a:prstGeom>
           <a:solidFill>
-            <a:srgbClr val="0FF796">
-              <a:alpha val="10000"/>
-            </a:srgbClr>
+            <a:srgbClr val="161616"/>
           </a:solidFill>
           <a:ln w="6350">
             <a:solidFill>
-              <a:srgbClr val="0FF796">
-                <a:alpha val="35000"/>
+              <a:srgbClr val="F5F5F5">
+                <a:alpha val="8000"/>
               </a:srgbClr>
             </a:solidFill>
           </a:ln>
@@ -36697,9 +36366,11 @@
               </a:lnSpc>
             </a:pPr>
             <a:r>
-              <a:rPr sz="1100" b="1" lang="zh-CN" altLang="en-US">
-                <a:solidFill>
-                  <a:srgbClr val="0FF796"/>
+              <a:rPr sz="1100" b="0" lang="zh-CN" altLang="en-US">
+                <a:solidFill>
+                  <a:srgbClr val="F5F5F5">
+                    <a:alpha val="70000"/>
+                  </a:srgbClr>
                 </a:solidFill>
                 <a:latin typeface="Consolas"/>
                 <a:ea typeface="微软雅黑"/>
@@ -36725,14 +36396,12 @@
             <a:avLst/>
           </a:prstGeom>
           <a:solidFill>
-            <a:srgbClr val="0FF796">
-              <a:alpha val="10000"/>
-            </a:srgbClr>
+            <a:srgbClr val="161616"/>
           </a:solidFill>
           <a:ln w="6350">
             <a:solidFill>
-              <a:srgbClr val="0FF796">
-                <a:alpha val="35000"/>
+              <a:srgbClr val="F5F5F5">
+                <a:alpha val="8000"/>
               </a:srgbClr>
             </a:solidFill>
           </a:ln>
@@ -36773,9 +36442,11 @@
               </a:lnSpc>
             </a:pPr>
             <a:r>
-              <a:rPr sz="1100" b="1" lang="zh-CN" altLang="en-US">
-                <a:solidFill>
-                  <a:srgbClr val="0FF796"/>
+              <a:rPr sz="1100" b="0" lang="zh-CN" altLang="en-US">
+                <a:solidFill>
+                  <a:srgbClr val="F5F5F5">
+                    <a:alpha val="70000"/>
+                  </a:srgbClr>
                 </a:solidFill>
                 <a:latin typeface="Consolas"/>
                 <a:ea typeface="微软雅黑"/>
@@ -36784,20 +36455,24 @@
               <a:t>UV</a:t>
             </a:r>
             <a:r>
-              <a:rPr sz="1100" b="1" lang="zh-CN" altLang="en-US">
-                <a:solidFill>
-                  <a:srgbClr val="0FF796"/>
-                </a:solidFill>
-                <a:latin typeface="微软雅黑"/>
-                <a:ea typeface="微软雅黑"/>
-                <a:cs typeface="微软雅黑"/>
-              </a:rPr>
-              <a:t> </a:t>
-            </a:r>
-            <a:r>
-              <a:rPr sz="1100" b="1" lang="zh-CN" altLang="en-US">
-                <a:solidFill>
-                  <a:srgbClr val="0FF796"/>
+              <a:rPr sz="1100" b="0" lang="zh-CN" altLang="en-US">
+                <a:solidFill>
+                  <a:srgbClr val="F5F5F5">
+                    <a:alpha val="70000"/>
+                  </a:srgbClr>
+                </a:solidFill>
+                <a:latin typeface="微软雅黑"/>
+                <a:ea typeface="微软雅黑"/>
+                <a:cs typeface="微软雅黑"/>
+              </a:rPr>
+              <a:t> </a:t>
+            </a:r>
+            <a:r>
+              <a:rPr sz="1100" b="0" lang="zh-CN" altLang="en-US">
+                <a:solidFill>
+                  <a:srgbClr val="F5F5F5">
+                    <a:alpha val="70000"/>
+                  </a:srgbClr>
                 </a:solidFill>
                 <a:latin typeface="Consolas"/>
                 <a:ea typeface="微软雅黑"/>
@@ -36823,14 +36498,12 @@
             <a:avLst/>
           </a:prstGeom>
           <a:solidFill>
-            <a:srgbClr val="0FF796">
-              <a:alpha val="10000"/>
-            </a:srgbClr>
+            <a:srgbClr val="161616"/>
           </a:solidFill>
           <a:ln w="6350">
             <a:solidFill>
-              <a:srgbClr val="0FF796">
-                <a:alpha val="35000"/>
+              <a:srgbClr val="F5F5F5">
+                <a:alpha val="8000"/>
               </a:srgbClr>
             </a:solidFill>
           </a:ln>
@@ -36871,9 +36544,11 @@
               </a:lnSpc>
             </a:pPr>
             <a:r>
-              <a:rPr sz="1100" b="1" lang="zh-CN" altLang="en-US">
-                <a:solidFill>
-                  <a:srgbClr val="0FF796"/>
+              <a:rPr sz="1100" b="0" lang="zh-CN" altLang="en-US">
+                <a:solidFill>
+                  <a:srgbClr val="F5F5F5">
+                    <a:alpha val="70000"/>
+                  </a:srgbClr>
                 </a:solidFill>
                 <a:latin typeface="Consolas"/>
                 <a:ea typeface="微软雅黑"/>
@@ -36882,20 +36557,24 @@
               <a:t>LOD</a:t>
             </a:r>
             <a:r>
-              <a:rPr sz="1100" b="1" lang="zh-CN" altLang="en-US">
-                <a:solidFill>
-                  <a:srgbClr val="0FF796"/>
-                </a:solidFill>
-                <a:latin typeface="微软雅黑"/>
-                <a:ea typeface="微软雅黑"/>
-                <a:cs typeface="微软雅黑"/>
-              </a:rPr>
-              <a:t> </a:t>
-            </a:r>
-            <a:r>
-              <a:rPr sz="1100" b="1" lang="zh-CN" altLang="en-US">
-                <a:solidFill>
-                  <a:srgbClr val="0FF796"/>
+              <a:rPr sz="1100" b="0" lang="zh-CN" altLang="en-US">
+                <a:solidFill>
+                  <a:srgbClr val="F5F5F5">
+                    <a:alpha val="70000"/>
+                  </a:srgbClr>
+                </a:solidFill>
+                <a:latin typeface="微软雅黑"/>
+                <a:ea typeface="微软雅黑"/>
+                <a:cs typeface="微软雅黑"/>
+              </a:rPr>
+              <a:t> </a:t>
+            </a:r>
+            <a:r>
+              <a:rPr sz="1100" b="0" lang="zh-CN" altLang="en-US">
+                <a:solidFill>
+                  <a:srgbClr val="F5F5F5">
+                    <a:alpha val="70000"/>
+                  </a:srgbClr>
                 </a:solidFill>
                 <a:latin typeface="Consolas"/>
                 <a:ea typeface="微软雅黑"/>

--- a/协作/提示词/分享PPT交接_2026-10-29/第四版交付_云端/烟花秀AI全流程_第四版.pptx
+++ b/协作/提示词/分享PPT交接_2026-10-29/第四版交付_云端/烟花秀AI全流程_第四版.pptx
@@ -760,19 +760,19 @@
           <a:lstStyle/>
           <a:p>
             <a:r>
-              <a:t>第 12 页 · 接入成果：两轮批量修正，读回一致（约 20 秒）</a:t>
+              <a:t>第 12 页 · 接入成果：两轮批量修正，读回一致（约 50 秒）</a:t>
             </a:r>
           </a:p>
           <a:p/>
           <a:p>
             <a:r>
-              <a:t>接入方面进行过两轮批量修正：贴图规范确定后，149 张贴图批量重设，读回一致；更早一轮修正了 115 个包，读回无错误。这些规则已经内置于导入器，新资源导入时自动执行。</a:t>
+              <a:t>接入方面进行过两轮批量修正。贴图规范确定后，149 张贴图批量重设：手游主序列 86 张、PC 主序列 40 张、Ramp 23 张，NeverStream 全部关闭、贴图组统一为 DistantVFX，读回一致。更早一轮修正了 115 个包，包括 67 个材质实例的 EmissiveDissolve、47 个粒子系统的固定包围盒，以及发射器的朝向与 UV 翻转，读回无错误。这些规则已经内置于导入器，新资源导入时自动执行。</a:t>
             </a:r>
           </a:p>
           <a:p/>
           <a:p>
             <a:r>
-              <a:t>依据：analysis/results/TEX_SPEC_20261018/verify.json；资源规范统一_20261016/改后读回.json。</a:t>
+              <a:t>依据：analysis/results/TEX_SPEC_20261018/verify.json（149 行读回，按路径分类：手游 86、PC 40、Ramp 23）；资源规范统一_20261016/说明.md（115 包 = 48 粒子系统 + 67 材质实例）。PC 主序列 NoMip 规则在 10-18 下午另行确定，不在这批读回内。</a:t>
             </a:r>
           </a:p>
         </p:txBody>
@@ -842,19 +842,19 @@
           <a:lstStyle/>
           <a:p>
             <a:r>
-              <a:t>第 13 页 · 编排成果：同一编排按平台与画质分档输出（约 25 秒）</a:t>
+              <a:t>第 13 页 · 编排成果：同一编排按平台与画质分档输出（约 30 秒）</a:t>
             </a:r>
           </a:p>
           <a:p/>
           <a:p>
             <a:r>
-              <a:t>编排方面，共迭代 11 个大版本，每版都有自动检查记录。同一编排按平台和画质分档输出，PC 每场约 1100 到 440 次播放，手游约 450 到 180 次，无需逐档编排。目前节拍对齐指标尚未达到宪章目标，仍在优化。</a:t>
+              <a:t>编排方面，共迭代 11 个大版本，每版都有自动检查记录。图中是同一份编排在工作台里切换平台和画质档：PC 高配一场 1145 次播放，手游低配只保留 181 次，中间各档自动筛出，无需逐档编排。目前节拍对齐指标尚未达到宪章目标，仍在优化。</a:t>
             </a:r>
           </a:p>
           <a:p/>
           <a:p>
             <a:r>
-              <a:t>依据：B11 修订 3 编排检查（PC 1145 / 852 / 438，手游 448 / 349 / 181）。</a:t>
+              <a:t>依据：B11 修订 3 编排检查（PC 1145 / 852 / 438，手游 448 / 349 / 181）；截图为云端打开离线工作台切换档位。节拍对齐尚未达到宪章目标。</a:t>
             </a:r>
           </a:p>
         </p:txBody>
@@ -1328,7 +1328,7 @@
           <a:lstStyle/>
           <a:p>
             <a:r>
-              <a:t>第 19 页 · Thank You（约 0 秒）</a:t>
+              <a:t>第 19 页 · Thank You（约 5 秒）</a:t>
             </a:r>
           </a:p>
           <a:p/>
@@ -1404,13 +1404,13 @@
           <a:lstStyle/>
           <a:p>
             <a:r>
-              <a:t>第 2 页 · 制作规模：开花 26 种、尾缀 6 档、时长约 220 秒（约 25 秒）</a:t>
+              <a:t>第 2 页 · 制作规模：开花 26 种、尾缀 6 档、时长约 220 秒（约 30 秒）</a:t>
             </a:r>
           </a:p>
           <a:p/>
           <a:p>
             <a:r>
-              <a:t>先看规模。去年只有 3 种烟花、1 条升空尾缀，节目约 70 秒；今年开花种类增加到 26 种，扇形也在其中，升空尾缀按开花高度分为 6 档，节目约 220 秒，约为去年的 3 倍。PC 与手游还要分别输出，各分画质档位。</a:t>
+              <a:t>先看规模。图中是今年节目的 UE 实机画面。去年只有 3 种烟花、1 条升空尾缀，节目约 70 秒；今年开花种类增加到 26 种，扇形也在其中，升空尾缀按开花高度分为 6 档，节目约 220 秒，约为去年的 3 倍。PC 与手游还要分别输出，各分画质档位。</a:t>
             </a:r>
           </a:p>
           <a:p/>
@@ -5004,159 +5004,9 @@
         <p:nvPr/>
       </p:nvGrpSpPr>
       <p:grpSpPr/>
-      <p:sp>
-        <p:nvSpPr>
-          <p:cNvPr id="2" name="footer_mark"/>
-          <p:cNvSpPr/>
-          <p:nvPr/>
-        </p:nvSpPr>
-        <p:spPr>
-          <a:xfrm>
-            <a:off x="609600" y="6515100"/>
-            <a:ext cx="114300" cy="114300"/>
-          </a:xfrm>
-          <a:prstGeom prst="rect">
-            <a:avLst/>
-          </a:prstGeom>
-          <a:solidFill>
-            <a:srgbClr val="0FF796"/>
-          </a:solidFill>
-          <a:ln>
-            <a:noFill/>
-          </a:ln>
-        </p:spPr>
-        <p:txBody>
-          <a:bodyPr rtlCol="0" anchor="ctr"/>
-          <a:lstStyle/>
-          <a:p>
-            <a:pPr algn="ctr"/>
-          </a:p>
-        </p:txBody>
-      </p:sp>
-      <p:sp>
-        <p:nvSpPr>
-          <p:cNvPr id="3" name="footer"/>
-          <p:cNvSpPr txBox="1"/>
-          <p:nvPr/>
-        </p:nvSpPr>
-        <p:spPr>
-          <a:xfrm>
-            <a:off x="825500" y="6445250"/>
-            <a:ext cx="7620000" cy="254000"/>
-          </a:xfrm>
-          <a:prstGeom prst="rect">
-            <a:avLst/>
-          </a:prstGeom>
-          <a:noFill/>
-        </p:spPr>
-        <p:txBody>
-          <a:bodyPr wrap="square" lIns="0" rIns="0" tIns="0" bIns="0" anchor="ctr">
-            <a:noAutofit/>
-          </a:bodyPr>
-          <a:lstStyle/>
-          <a:p>
-            <a:pPr algn="l">
-              <a:lnSpc>
-                <a:spcPts val="1920"/>
-              </a:lnSpc>
-            </a:pPr>
-            <a:r>
-              <a:rPr sz="1200" b="0" lang="zh-CN" altLang="en-US">
-                <a:solidFill>
-                  <a:srgbClr val="F5F5F5">
-                    <a:alpha val="40000"/>
-                  </a:srgbClr>
-                </a:solidFill>
-                <a:latin typeface="Consolas"/>
-                <a:ea typeface="微软雅黑"/>
-                <a:cs typeface="微软雅黑"/>
-              </a:rPr>
-              <a:t>三角洲行动</a:t>
-            </a:r>
-            <a:r>
-              <a:rPr sz="1200" b="0" lang="zh-CN" altLang="en-US">
-                <a:solidFill>
-                  <a:srgbClr val="F5F5F5">
-                    <a:alpha val="40000"/>
-                  </a:srgbClr>
-                </a:solidFill>
-                <a:latin typeface="微软雅黑"/>
-                <a:ea typeface="微软雅黑"/>
-                <a:cs typeface="微软雅黑"/>
-              </a:rPr>
-              <a:t> </a:t>
-            </a:r>
-            <a:r>
-              <a:rPr sz="1200" b="0" lang="zh-CN" altLang="en-US">
-                <a:solidFill>
-                  <a:srgbClr val="F5F5F5">
-                    <a:alpha val="40000"/>
-                  </a:srgbClr>
-                </a:solidFill>
-                <a:latin typeface="Consolas"/>
-                <a:ea typeface="微软雅黑"/>
-                <a:cs typeface="微软雅黑"/>
-              </a:rPr>
-              <a:t>VFX</a:t>
-            </a:r>
-            <a:r>
-              <a:rPr sz="1200" b="0" lang="zh-CN" altLang="en-US">
-                <a:solidFill>
-                  <a:srgbClr val="F5F5F5">
-                    <a:alpha val="40000"/>
-                  </a:srgbClr>
-                </a:solidFill>
-                <a:latin typeface="微软雅黑"/>
-                <a:ea typeface="微软雅黑"/>
-                <a:cs typeface="微软雅黑"/>
-              </a:rPr>
-              <a:t> </a:t>
-            </a:r>
-            <a:r>
-              <a:rPr sz="1200" b="0" lang="zh-CN" altLang="en-US">
-                <a:solidFill>
-                  <a:srgbClr val="F5F5F5">
-                    <a:alpha val="40000"/>
-                  </a:srgbClr>
-                </a:solidFill>
-                <a:latin typeface="Consolas"/>
-                <a:ea typeface="微软雅黑"/>
-                <a:cs typeface="微软雅黑"/>
-              </a:rPr>
-              <a:t>·</a:t>
-            </a:r>
-            <a:r>
-              <a:rPr sz="1200" b="0" lang="zh-CN" altLang="en-US">
-                <a:solidFill>
-                  <a:srgbClr val="F5F5F5">
-                    <a:alpha val="40000"/>
-                  </a:srgbClr>
-                </a:solidFill>
-                <a:latin typeface="微软雅黑"/>
-                <a:ea typeface="微软雅黑"/>
-                <a:cs typeface="微软雅黑"/>
-              </a:rPr>
-              <a:t> </a:t>
-            </a:r>
-            <a:r>
-              <a:rPr sz="1200" b="0" lang="zh-CN" altLang="en-US">
-                <a:solidFill>
-                  <a:srgbClr val="F5F5F5">
-                    <a:alpha val="40000"/>
-                  </a:srgbClr>
-                </a:solidFill>
-                <a:latin typeface="Consolas"/>
-                <a:ea typeface="微软雅黑"/>
-                <a:cs typeface="微软雅黑"/>
-              </a:rPr>
-              <a:t>烟花工具链与工作方法</a:t>
-            </a:r>
-          </a:p>
-        </p:txBody>
-      </p:sp>
       <p:pic>
         <p:nvPicPr>
-          <p:cNvPr id="4" name="Picture 3" descr="p01_cover.jpg"/>
+          <p:cNvPr id="2" name="Picture 1" descr="cover.jpg"/>
           <p:cNvPicPr>
             <a:picLocks noChangeAspect="1"/>
           </p:cNvPicPr>
@@ -5170,8 +5020,8 @@
         </p:blipFill>
         <p:spPr>
           <a:xfrm>
-            <a:off x="0" y="0"/>
-            <a:ext cx="12192000" cy="6858000"/>
+            <a:off x="5207000" y="0"/>
+            <a:ext cx="6985000" cy="6858000"/>
           </a:xfrm>
           <a:prstGeom prst="rect">
             <a:avLst/>
@@ -5180,14 +5030,14 @@
       </p:pic>
       <p:sp>
         <p:nvSpPr>
-          <p:cNvPr id="5" name="Rectangle 4"/>
+          <p:cNvPr id="3" name="Rectangle 2"/>
           <p:cNvSpPr/>
           <p:nvPr/>
         </p:nvSpPr>
         <p:spPr>
           <a:xfrm>
-            <a:off x="11455400" y="6527800"/>
-            <a:ext cx="660400" cy="254000"/>
+            <a:off x="11394440" y="6527800"/>
+            <a:ext cx="721360" cy="254000"/>
           </a:xfrm>
           <a:prstGeom prst="rect">
             <a:avLst/>
@@ -5211,14 +5061,14 @@
       </p:sp>
       <p:sp>
         <p:nvSpPr>
-          <p:cNvPr id="6" name="source_tag"/>
-          <p:cNvSpPr txBox="1"/>
-          <p:nvPr/>
-        </p:nvSpPr>
-        <p:spPr>
-          <a:xfrm>
-            <a:off x="11455400" y="6527800"/>
-            <a:ext cx="660400" cy="254000"/>
+          <p:cNvPr id="4" name="source_tag"/>
+          <p:cNvSpPr txBox="1"/>
+          <p:nvPr/>
+        </p:nvSpPr>
+        <p:spPr>
+          <a:xfrm>
+            <a:off x="11394440" y="6527800"/>
+            <a:ext cx="721360" cy="254000"/>
           </a:xfrm>
           <a:prstGeom prst="rect">
             <a:avLst/>
@@ -5247,21 +5097,382 @@
                 <a:ea typeface="微软雅黑"/>
                 <a:cs typeface="微软雅黑"/>
               </a:rPr>
-              <a:t>示意图</a:t>
-            </a:r>
-          </a:p>
-        </p:txBody>
-      </p:sp>
-      <p:sp>
-        <p:nvSpPr>
-          <p:cNvPr id="7" name="footer_mark"/>
+              <a:t>UE</a:t>
+            </a:r>
+            <a:r>
+              <a:rPr sz="1200" b="0" lang="zh-CN" altLang="en-US">
+                <a:solidFill>
+                  <a:srgbClr val="F5F5F5">
+                    <a:alpha val="70000"/>
+                  </a:srgbClr>
+                </a:solidFill>
+                <a:latin typeface="微软雅黑"/>
+                <a:ea typeface="微软雅黑"/>
+                <a:cs typeface="微软雅黑"/>
+              </a:rPr>
+              <a:t> </a:t>
+            </a:r>
+            <a:r>
+              <a:rPr sz="1200" b="0" lang="zh-CN" altLang="en-US">
+                <a:solidFill>
+                  <a:srgbClr val="F5F5F5">
+                    <a:alpha val="70000"/>
+                  </a:srgbClr>
+                </a:solidFill>
+                <a:latin typeface="Consolas"/>
+                <a:ea typeface="微软雅黑"/>
+                <a:cs typeface="微软雅黑"/>
+              </a:rPr>
+              <a:t>实机</a:t>
+            </a:r>
+          </a:p>
+        </p:txBody>
+      </p:sp>
+      <p:sp>
+        <p:nvSpPr>
+          <p:cNvPr id="5" name="TextBox 4"/>
+          <p:cNvSpPr txBox="1"/>
+          <p:nvPr/>
+        </p:nvSpPr>
+        <p:spPr>
+          <a:xfrm>
+            <a:off x="609600" y="1270000"/>
+            <a:ext cx="4445000" cy="228600"/>
+          </a:xfrm>
+          <a:prstGeom prst="rect">
+            <a:avLst/>
+          </a:prstGeom>
+          <a:noFill/>
+        </p:spPr>
+        <p:txBody>
+          <a:bodyPr wrap="square" lIns="0" rIns="0" tIns="0" bIns="0" anchor="t">
+            <a:noAutofit/>
+          </a:bodyPr>
+          <a:lstStyle/>
+          <a:p>
+            <a:pPr algn="l">
+              <a:lnSpc>
+                <a:spcPts val="1560"/>
+              </a:lnSpc>
+            </a:pPr>
+            <a:r>
+              <a:rPr sz="1200" b="1" lang="zh-CN" altLang="en-US" spc="200">
+                <a:solidFill>
+                  <a:srgbClr val="0FF796"/>
+                </a:solidFill>
+                <a:latin typeface="Consolas"/>
+                <a:ea typeface="微软雅黑"/>
+                <a:cs typeface="微软雅黑"/>
+              </a:rPr>
+              <a:t>VFX</a:t>
+            </a:r>
+            <a:r>
+              <a:rPr sz="1200" b="1" lang="zh-CN" altLang="en-US" spc="200">
+                <a:solidFill>
+                  <a:srgbClr val="0FF796"/>
+                </a:solidFill>
+                <a:latin typeface="微软雅黑"/>
+                <a:ea typeface="微软雅黑"/>
+                <a:cs typeface="微软雅黑"/>
+              </a:rPr>
+              <a:t> </a:t>
+            </a:r>
+            <a:r>
+              <a:rPr sz="1200" b="1" lang="zh-CN" altLang="en-US" spc="200">
+                <a:solidFill>
+                  <a:srgbClr val="0FF796"/>
+                </a:solidFill>
+                <a:latin typeface="Consolas"/>
+                <a:ea typeface="微软雅黑"/>
+                <a:cs typeface="微软雅黑"/>
+              </a:rPr>
+              <a:t>组内分享</a:t>
+            </a:r>
+            <a:r>
+              <a:rPr sz="1200" b="1" lang="zh-CN" altLang="en-US" spc="200">
+                <a:solidFill>
+                  <a:srgbClr val="0FF796"/>
+                </a:solidFill>
+                <a:latin typeface="微软雅黑"/>
+                <a:ea typeface="微软雅黑"/>
+                <a:cs typeface="微软雅黑"/>
+              </a:rPr>
+              <a:t> </a:t>
+            </a:r>
+            <a:r>
+              <a:rPr sz="1200" b="1" lang="zh-CN" altLang="en-US" spc="200">
+                <a:solidFill>
+                  <a:srgbClr val="0FF796"/>
+                </a:solidFill>
+                <a:latin typeface="Consolas"/>
+                <a:ea typeface="微软雅黑"/>
+                <a:cs typeface="微软雅黑"/>
+              </a:rPr>
+              <a:t>·</a:t>
+            </a:r>
+            <a:r>
+              <a:rPr sz="1200" b="1" lang="zh-CN" altLang="en-US" spc="200">
+                <a:solidFill>
+                  <a:srgbClr val="0FF796"/>
+                </a:solidFill>
+                <a:latin typeface="微软雅黑"/>
+                <a:ea typeface="微软雅黑"/>
+                <a:cs typeface="微软雅黑"/>
+              </a:rPr>
+              <a:t> </a:t>
+            </a:r>
+            <a:r>
+              <a:rPr sz="1200" b="1" lang="zh-CN" altLang="en-US" spc="200">
+                <a:solidFill>
+                  <a:srgbClr val="0FF796"/>
+                </a:solidFill>
+                <a:latin typeface="Consolas"/>
+                <a:ea typeface="微软雅黑"/>
+                <a:cs typeface="微软雅黑"/>
+              </a:rPr>
+              <a:t>2026.10.30</a:t>
+            </a:r>
+          </a:p>
+        </p:txBody>
+      </p:sp>
+      <p:sp>
+        <p:nvSpPr>
+          <p:cNvPr id="6" name="TextBox 5"/>
+          <p:cNvSpPr txBox="1"/>
+          <p:nvPr/>
+        </p:nvSpPr>
+        <p:spPr>
+          <a:xfrm>
+            <a:off x="609600" y="1625600"/>
+            <a:ext cx="4572000" cy="1714500"/>
+          </a:xfrm>
+          <a:prstGeom prst="rect">
+            <a:avLst/>
+          </a:prstGeom>
+          <a:noFill/>
+        </p:spPr>
+        <p:txBody>
+          <a:bodyPr wrap="square" lIns="0" rIns="0" tIns="0" bIns="0" anchor="t">
+            <a:noAutofit/>
+          </a:bodyPr>
+          <a:lstStyle/>
+          <a:p>
+            <a:pPr algn="l">
+              <a:lnSpc>
+                <a:spcPts val="6496"/>
+              </a:lnSpc>
+            </a:pPr>
+            <a:r>
+              <a:rPr sz="5800" b="1" lang="zh-CN" altLang="en-US">
+                <a:solidFill>
+                  <a:srgbClr val="F5F5F5"/>
+                </a:solidFill>
+                <a:latin typeface="Consolas"/>
+                <a:ea typeface="微软雅黑"/>
+                <a:cs typeface="微软雅黑"/>
+              </a:rPr>
+              <a:t>烟花秀</a:t>
+            </a:r>
+          </a:p>
+          <a:p>
+            <a:pPr algn="l">
+              <a:lnSpc>
+                <a:spcPts val="6496"/>
+              </a:lnSpc>
+            </a:pPr>
+            <a:r>
+              <a:rPr sz="5800" b="1" lang="zh-CN" altLang="en-US">
+                <a:solidFill>
+                  <a:srgbClr val="F5F5F5"/>
+                </a:solidFill>
+                <a:latin typeface="Consolas"/>
+                <a:ea typeface="微软雅黑"/>
+                <a:cs typeface="微软雅黑"/>
+              </a:rPr>
+              <a:t>AI</a:t>
+            </a:r>
+            <a:r>
+              <a:rPr sz="5800" b="1" lang="zh-CN" altLang="en-US">
+                <a:solidFill>
+                  <a:srgbClr val="F5F5F5"/>
+                </a:solidFill>
+                <a:latin typeface="微软雅黑"/>
+                <a:ea typeface="微软雅黑"/>
+                <a:cs typeface="微软雅黑"/>
+              </a:rPr>
+              <a:t> </a:t>
+            </a:r>
+            <a:r>
+              <a:rPr sz="5800" b="1" lang="zh-CN" altLang="en-US">
+                <a:solidFill>
+                  <a:srgbClr val="F5F5F5"/>
+                </a:solidFill>
+                <a:latin typeface="Consolas"/>
+                <a:ea typeface="微软雅黑"/>
+                <a:cs typeface="微软雅黑"/>
+              </a:rPr>
+              <a:t>全流程</a:t>
+            </a:r>
+          </a:p>
+        </p:txBody>
+      </p:sp>
+      <p:sp>
+        <p:nvSpPr>
+          <p:cNvPr id="7" name="TextBox 6"/>
+          <p:cNvSpPr txBox="1"/>
+          <p:nvPr/>
+        </p:nvSpPr>
+        <p:spPr>
+          <a:xfrm>
+            <a:off x="609600" y="3429000"/>
+            <a:ext cx="4445000" cy="317500"/>
+          </a:xfrm>
+          <a:prstGeom prst="rect">
+            <a:avLst/>
+          </a:prstGeom>
+          <a:noFill/>
+        </p:spPr>
+        <p:txBody>
+          <a:bodyPr wrap="square" lIns="0" rIns="0" tIns="0" bIns="0" anchor="t">
+            <a:noAutofit/>
+          </a:bodyPr>
+          <a:lstStyle/>
+          <a:p>
+            <a:pPr algn="l">
+              <a:lnSpc>
+                <a:spcPts val="1950"/>
+              </a:lnSpc>
+            </a:pPr>
+            <a:r>
+              <a:rPr sz="1500" b="0" lang="zh-CN" altLang="en-US">
+                <a:solidFill>
+                  <a:srgbClr val="F5F5F5">
+                    <a:alpha val="86000"/>
+                  </a:srgbClr>
+                </a:solidFill>
+                <a:latin typeface="Consolas"/>
+                <a:ea typeface="微软雅黑"/>
+                <a:cs typeface="微软雅黑"/>
+              </a:rPr>
+              <a:t>烟花烘焙器</a:t>
+            </a:r>
+            <a:r>
+              <a:rPr sz="1500" b="0" lang="zh-CN" altLang="en-US">
+                <a:solidFill>
+                  <a:srgbClr val="F5F5F5">
+                    <a:alpha val="86000"/>
+                  </a:srgbClr>
+                </a:solidFill>
+                <a:latin typeface="微软雅黑"/>
+                <a:ea typeface="微软雅黑"/>
+                <a:cs typeface="微软雅黑"/>
+              </a:rPr>
+              <a:t> </a:t>
+            </a:r>
+            <a:r>
+              <a:rPr sz="1500" b="0" lang="zh-CN" altLang="en-US">
+                <a:solidFill>
+                  <a:srgbClr val="F5F5F5">
+                    <a:alpha val="86000"/>
+                  </a:srgbClr>
+                </a:solidFill>
+                <a:latin typeface="Consolas"/>
+                <a:ea typeface="微软雅黑"/>
+                <a:cs typeface="微软雅黑"/>
+              </a:rPr>
+              <a:t>·</a:t>
+            </a:r>
+            <a:r>
+              <a:rPr sz="1500" b="0" lang="zh-CN" altLang="en-US">
+                <a:solidFill>
+                  <a:srgbClr val="F5F5F5">
+                    <a:alpha val="86000"/>
+                  </a:srgbClr>
+                </a:solidFill>
+                <a:latin typeface="微软雅黑"/>
+                <a:ea typeface="微软雅黑"/>
+                <a:cs typeface="微软雅黑"/>
+              </a:rPr>
+              <a:t> </a:t>
+            </a:r>
+            <a:r>
+              <a:rPr sz="1500" b="0" lang="zh-CN" altLang="en-US">
+                <a:solidFill>
+                  <a:srgbClr val="F5F5F5">
+                    <a:alpha val="86000"/>
+                  </a:srgbClr>
+                </a:solidFill>
+                <a:latin typeface="Consolas"/>
+                <a:ea typeface="微软雅黑"/>
+                <a:cs typeface="微软雅黑"/>
+              </a:rPr>
+              <a:t>导入器</a:t>
+            </a:r>
+            <a:r>
+              <a:rPr sz="1500" b="0" lang="zh-CN" altLang="en-US">
+                <a:solidFill>
+                  <a:srgbClr val="F5F5F5">
+                    <a:alpha val="86000"/>
+                  </a:srgbClr>
+                </a:solidFill>
+                <a:latin typeface="微软雅黑"/>
+                <a:ea typeface="微软雅黑"/>
+                <a:cs typeface="微软雅黑"/>
+              </a:rPr>
+              <a:t> </a:t>
+            </a:r>
+            <a:r>
+              <a:rPr sz="1500" b="0" lang="zh-CN" altLang="en-US">
+                <a:solidFill>
+                  <a:srgbClr val="F5F5F5">
+                    <a:alpha val="86000"/>
+                  </a:srgbClr>
+                </a:solidFill>
+                <a:latin typeface="Consolas"/>
+                <a:ea typeface="微软雅黑"/>
+                <a:cs typeface="微软雅黑"/>
+              </a:rPr>
+              <a:t>·</a:t>
+            </a:r>
+            <a:r>
+              <a:rPr sz="1500" b="0" lang="zh-CN" altLang="en-US">
+                <a:solidFill>
+                  <a:srgbClr val="F5F5F5">
+                    <a:alpha val="86000"/>
+                  </a:srgbClr>
+                </a:solidFill>
+                <a:latin typeface="微软雅黑"/>
+                <a:ea typeface="微软雅黑"/>
+                <a:cs typeface="微软雅黑"/>
+              </a:rPr>
+              <a:t> </a:t>
+            </a:r>
+            <a:r>
+              <a:rPr sz="1500" b="0" lang="zh-CN" altLang="en-US">
+                <a:solidFill>
+                  <a:srgbClr val="F5F5F5">
+                    <a:alpha val="86000"/>
+                  </a:srgbClr>
+                </a:solidFill>
+                <a:latin typeface="Consolas"/>
+                <a:ea typeface="微软雅黑"/>
+                <a:cs typeface="微软雅黑"/>
+              </a:rPr>
+              <a:t>烟花编排工作台</a:t>
+            </a:r>
+          </a:p>
+        </p:txBody>
+      </p:sp>
+      <p:sp>
+        <p:nvSpPr>
+          <p:cNvPr id="8" name="Rectangle 7"/>
           <p:cNvSpPr/>
           <p:nvPr/>
         </p:nvSpPr>
         <p:spPr>
           <a:xfrm>
-            <a:off x="609600" y="6515100"/>
-            <a:ext cx="114300" cy="114300"/>
+            <a:off x="609600" y="3911600"/>
+            <a:ext cx="457200" cy="38100"/>
           </a:xfrm>
           <a:prstGeom prst="rect">
             <a:avLst/>
@@ -5283,474 +5494,393 @@
       </p:sp>
       <p:sp>
         <p:nvSpPr>
-          <p:cNvPr id="8" name="footer"/>
-          <p:cNvSpPr txBox="1"/>
-          <p:nvPr/>
-        </p:nvSpPr>
-        <p:spPr>
-          <a:xfrm>
-            <a:off x="825500" y="6445250"/>
-            <a:ext cx="7620000" cy="254000"/>
-          </a:xfrm>
-          <a:prstGeom prst="rect">
-            <a:avLst/>
-          </a:prstGeom>
-          <a:noFill/>
-        </p:spPr>
-        <p:txBody>
-          <a:bodyPr wrap="square" lIns="0" rIns="0" tIns="0" bIns="0" anchor="ctr">
+          <p:cNvPr id="9" name="TextBox 8"/>
+          <p:cNvSpPr txBox="1"/>
+          <p:nvPr/>
+        </p:nvSpPr>
+        <p:spPr>
+          <a:xfrm>
+            <a:off x="609600" y="4127500"/>
+            <a:ext cx="3810000" cy="254000"/>
+          </a:xfrm>
+          <a:prstGeom prst="rect">
+            <a:avLst/>
+          </a:prstGeom>
+          <a:noFill/>
+        </p:spPr>
+        <p:txBody>
+          <a:bodyPr wrap="square" lIns="0" rIns="0" tIns="0" bIns="0" anchor="t">
             <a:noAutofit/>
           </a:bodyPr>
           <a:lstStyle/>
           <a:p>
             <a:pPr algn="l">
               <a:lnSpc>
-                <a:spcPts val="1920"/>
+                <a:spcPts val="1820"/>
+              </a:lnSpc>
+            </a:pPr>
+            <a:r>
+              <a:rPr sz="1300" b="0" lang="zh-CN" altLang="en-US">
+                <a:solidFill>
+                  <a:srgbClr val="F5F5F5">
+                    <a:alpha val="70000"/>
+                  </a:srgbClr>
+                </a:solidFill>
+                <a:latin typeface="Consolas"/>
+                <a:ea typeface="微软雅黑"/>
+                <a:cs typeface="微软雅黑"/>
+              </a:rPr>
+              <a:t>分享人：____</a:t>
+            </a:r>
+          </a:p>
+        </p:txBody>
+      </p:sp>
+      <p:sp>
+        <p:nvSpPr>
+          <p:cNvPr id="10" name="TextBox 9"/>
+          <p:cNvSpPr txBox="1"/>
+          <p:nvPr/>
+        </p:nvSpPr>
+        <p:spPr>
+          <a:xfrm>
+            <a:off x="609600" y="4914900"/>
+            <a:ext cx="279400" cy="254000"/>
+          </a:xfrm>
+          <a:prstGeom prst="rect">
+            <a:avLst/>
+          </a:prstGeom>
+          <a:noFill/>
+        </p:spPr>
+        <p:txBody>
+          <a:bodyPr wrap="square" lIns="0" rIns="0" tIns="0" bIns="0" anchor="t">
+            <a:noAutofit/>
+          </a:bodyPr>
+          <a:lstStyle/>
+          <a:p>
+            <a:pPr algn="l">
+              <a:lnSpc>
+                <a:spcPts val="1560"/>
+              </a:lnSpc>
+            </a:pPr>
+            <a:r>
+              <a:rPr sz="1200" b="1" lang="zh-CN" altLang="en-US">
+                <a:solidFill>
+                  <a:srgbClr val="0FF796"/>
+                </a:solidFill>
+                <a:latin typeface="Consolas"/>
+                <a:ea typeface="微软雅黑"/>
+                <a:cs typeface="微软雅黑"/>
+              </a:rPr>
+              <a:t>01</a:t>
+            </a:r>
+          </a:p>
+        </p:txBody>
+      </p:sp>
+      <p:sp>
+        <p:nvSpPr>
+          <p:cNvPr id="11" name="TextBox 10"/>
+          <p:cNvSpPr txBox="1"/>
+          <p:nvPr/>
+        </p:nvSpPr>
+        <p:spPr>
+          <a:xfrm>
+            <a:off x="927100" y="4914900"/>
+            <a:ext cx="1905000" cy="254000"/>
+          </a:xfrm>
+          <a:prstGeom prst="rect">
+            <a:avLst/>
+          </a:prstGeom>
+          <a:noFill/>
+        </p:spPr>
+        <p:txBody>
+          <a:bodyPr wrap="square" lIns="0" rIns="0" tIns="0" bIns="0" anchor="t">
+            <a:noAutofit/>
+          </a:bodyPr>
+          <a:lstStyle/>
+          <a:p>
+            <a:pPr algn="l">
+              <a:lnSpc>
+                <a:spcPts val="1560"/>
               </a:lnSpc>
             </a:pPr>
             <a:r>
               <a:rPr sz="1200" b="0" lang="zh-CN" altLang="en-US">
                 <a:solidFill>
                   <a:srgbClr val="F5F5F5">
-                    <a:alpha val="40000"/>
-                  </a:srgbClr>
-                </a:solidFill>
-                <a:latin typeface="Consolas"/>
-                <a:ea typeface="微软雅黑"/>
-                <a:cs typeface="微软雅黑"/>
-              </a:rPr>
-              <a:t>三角洲行动</a:t>
-            </a:r>
+                    <a:alpha val="70000"/>
+                  </a:srgbClr>
+                </a:solidFill>
+                <a:latin typeface="Consolas"/>
+                <a:ea typeface="微软雅黑"/>
+                <a:cs typeface="微软雅黑"/>
+              </a:rPr>
+              <a:t>制作与挑战</a:t>
+            </a:r>
+          </a:p>
+        </p:txBody>
+      </p:sp>
+      <p:sp>
+        <p:nvSpPr>
+          <p:cNvPr id="12" name="TextBox 11"/>
+          <p:cNvSpPr txBox="1"/>
+          <p:nvPr/>
+        </p:nvSpPr>
+        <p:spPr>
+          <a:xfrm>
+            <a:off x="609600" y="5194300"/>
+            <a:ext cx="279400" cy="254000"/>
+          </a:xfrm>
+          <a:prstGeom prst="rect">
+            <a:avLst/>
+          </a:prstGeom>
+          <a:noFill/>
+        </p:spPr>
+        <p:txBody>
+          <a:bodyPr wrap="square" lIns="0" rIns="0" tIns="0" bIns="0" anchor="t">
+            <a:noAutofit/>
+          </a:bodyPr>
+          <a:lstStyle/>
+          <a:p>
+            <a:pPr algn="l">
+              <a:lnSpc>
+                <a:spcPts val="1560"/>
+              </a:lnSpc>
+            </a:pPr>
+            <a:r>
+              <a:rPr sz="1200" b="1" lang="zh-CN" altLang="en-US">
+                <a:solidFill>
+                  <a:srgbClr val="0FF796"/>
+                </a:solidFill>
+                <a:latin typeface="Consolas"/>
+                <a:ea typeface="微软雅黑"/>
+                <a:cs typeface="微软雅黑"/>
+              </a:rPr>
+              <a:t>02</a:t>
+            </a:r>
+          </a:p>
+        </p:txBody>
+      </p:sp>
+      <p:sp>
+        <p:nvSpPr>
+          <p:cNvPr id="13" name="TextBox 12"/>
+          <p:cNvSpPr txBox="1"/>
+          <p:nvPr/>
+        </p:nvSpPr>
+        <p:spPr>
+          <a:xfrm>
+            <a:off x="927100" y="5194300"/>
+            <a:ext cx="1905000" cy="254000"/>
+          </a:xfrm>
+          <a:prstGeom prst="rect">
+            <a:avLst/>
+          </a:prstGeom>
+          <a:noFill/>
+        </p:spPr>
+        <p:txBody>
+          <a:bodyPr wrap="square" lIns="0" rIns="0" tIns="0" bIns="0" anchor="t">
+            <a:noAutofit/>
+          </a:bodyPr>
+          <a:lstStyle/>
+          <a:p>
+            <a:pPr algn="l">
+              <a:lnSpc>
+                <a:spcPts val="1560"/>
+              </a:lnSpc>
+            </a:pPr>
             <a:r>
               <a:rPr sz="1200" b="0" lang="zh-CN" altLang="en-US">
                 <a:solidFill>
                   <a:srgbClr val="F5F5F5">
-                    <a:alpha val="40000"/>
-                  </a:srgbClr>
-                </a:solidFill>
-                <a:latin typeface="微软雅黑"/>
-                <a:ea typeface="微软雅黑"/>
-                <a:cs typeface="微软雅黑"/>
-              </a:rPr>
-              <a:t> </a:t>
-            </a:r>
+                    <a:alpha val="70000"/>
+                  </a:srgbClr>
+                </a:solidFill>
+                <a:latin typeface="Consolas"/>
+                <a:ea typeface="微软雅黑"/>
+                <a:cs typeface="微软雅黑"/>
+              </a:rPr>
+              <a:t>解决思路</a:t>
+            </a:r>
+          </a:p>
+        </p:txBody>
+      </p:sp>
+      <p:sp>
+        <p:nvSpPr>
+          <p:cNvPr id="14" name="TextBox 13"/>
+          <p:cNvSpPr txBox="1"/>
+          <p:nvPr/>
+        </p:nvSpPr>
+        <p:spPr>
+          <a:xfrm>
+            <a:off x="609600" y="5473700"/>
+            <a:ext cx="279400" cy="254000"/>
+          </a:xfrm>
+          <a:prstGeom prst="rect">
+            <a:avLst/>
+          </a:prstGeom>
+          <a:noFill/>
+        </p:spPr>
+        <p:txBody>
+          <a:bodyPr wrap="square" lIns="0" rIns="0" tIns="0" bIns="0" anchor="t">
+            <a:noAutofit/>
+          </a:bodyPr>
+          <a:lstStyle/>
+          <a:p>
+            <a:pPr algn="l">
+              <a:lnSpc>
+                <a:spcPts val="1560"/>
+              </a:lnSpc>
+            </a:pPr>
+            <a:r>
+              <a:rPr sz="1200" b="1" lang="zh-CN" altLang="en-US">
+                <a:solidFill>
+                  <a:srgbClr val="0FF796"/>
+                </a:solidFill>
+                <a:latin typeface="Consolas"/>
+                <a:ea typeface="微软雅黑"/>
+                <a:cs typeface="微软雅黑"/>
+              </a:rPr>
+              <a:t>03</a:t>
+            </a:r>
+          </a:p>
+        </p:txBody>
+      </p:sp>
+      <p:sp>
+        <p:nvSpPr>
+          <p:cNvPr id="15" name="TextBox 14"/>
+          <p:cNvSpPr txBox="1"/>
+          <p:nvPr/>
+        </p:nvSpPr>
+        <p:spPr>
+          <a:xfrm>
+            <a:off x="927100" y="5473700"/>
+            <a:ext cx="1905000" cy="254000"/>
+          </a:xfrm>
+          <a:prstGeom prst="rect">
+            <a:avLst/>
+          </a:prstGeom>
+          <a:noFill/>
+        </p:spPr>
+        <p:txBody>
+          <a:bodyPr wrap="square" lIns="0" rIns="0" tIns="0" bIns="0" anchor="t">
+            <a:noAutofit/>
+          </a:bodyPr>
+          <a:lstStyle/>
+          <a:p>
+            <a:pPr algn="l">
+              <a:lnSpc>
+                <a:spcPts val="1560"/>
+              </a:lnSpc>
+            </a:pPr>
             <a:r>
               <a:rPr sz="1200" b="0" lang="zh-CN" altLang="en-US">
                 <a:solidFill>
                   <a:srgbClr val="F5F5F5">
-                    <a:alpha val="40000"/>
-                  </a:srgbClr>
-                </a:solidFill>
-                <a:latin typeface="Consolas"/>
-                <a:ea typeface="微软雅黑"/>
-                <a:cs typeface="微软雅黑"/>
-              </a:rPr>
-              <a:t>VFX</a:t>
-            </a:r>
+                    <a:alpha val="70000"/>
+                  </a:srgbClr>
+                </a:solidFill>
+                <a:latin typeface="Consolas"/>
+                <a:ea typeface="微软雅黑"/>
+                <a:cs typeface="微软雅黑"/>
+              </a:rPr>
+              <a:t>实践成果</a:t>
+            </a:r>
+          </a:p>
+        </p:txBody>
+      </p:sp>
+      <p:sp>
+        <p:nvSpPr>
+          <p:cNvPr id="16" name="TextBox 15"/>
+          <p:cNvSpPr txBox="1"/>
+          <p:nvPr/>
+        </p:nvSpPr>
+        <p:spPr>
+          <a:xfrm>
+            <a:off x="609600" y="5753100"/>
+            <a:ext cx="279400" cy="254000"/>
+          </a:xfrm>
+          <a:prstGeom prst="rect">
+            <a:avLst/>
+          </a:prstGeom>
+          <a:noFill/>
+        </p:spPr>
+        <p:txBody>
+          <a:bodyPr wrap="square" lIns="0" rIns="0" tIns="0" bIns="0" anchor="t">
+            <a:noAutofit/>
+          </a:bodyPr>
+          <a:lstStyle/>
+          <a:p>
+            <a:pPr algn="l">
+              <a:lnSpc>
+                <a:spcPts val="1560"/>
+              </a:lnSpc>
+            </a:pPr>
+            <a:r>
+              <a:rPr sz="1200" b="1" lang="zh-CN" altLang="en-US">
+                <a:solidFill>
+                  <a:srgbClr val="0FF796"/>
+                </a:solidFill>
+                <a:latin typeface="Consolas"/>
+                <a:ea typeface="微软雅黑"/>
+                <a:cs typeface="微软雅黑"/>
+              </a:rPr>
+              <a:t>04</a:t>
+            </a:r>
+          </a:p>
+        </p:txBody>
+      </p:sp>
+      <p:sp>
+        <p:nvSpPr>
+          <p:cNvPr id="17" name="TextBox 16"/>
+          <p:cNvSpPr txBox="1"/>
+          <p:nvPr/>
+        </p:nvSpPr>
+        <p:spPr>
+          <a:xfrm>
+            <a:off x="927100" y="5753100"/>
+            <a:ext cx="1905000" cy="254000"/>
+          </a:xfrm>
+          <a:prstGeom prst="rect">
+            <a:avLst/>
+          </a:prstGeom>
+          <a:noFill/>
+        </p:spPr>
+        <p:txBody>
+          <a:bodyPr wrap="square" lIns="0" rIns="0" tIns="0" bIns="0" anchor="t">
+            <a:noAutofit/>
+          </a:bodyPr>
+          <a:lstStyle/>
+          <a:p>
+            <a:pPr algn="l">
+              <a:lnSpc>
+                <a:spcPts val="1560"/>
+              </a:lnSpc>
+            </a:pPr>
             <a:r>
               <a:rPr sz="1200" b="0" lang="zh-CN" altLang="en-US">
                 <a:solidFill>
                   <a:srgbClr val="F5F5F5">
-                    <a:alpha val="40000"/>
-                  </a:srgbClr>
-                </a:solidFill>
-                <a:latin typeface="微软雅黑"/>
-                <a:ea typeface="微软雅黑"/>
-                <a:cs typeface="微软雅黑"/>
-              </a:rPr>
-              <a:t> </a:t>
-            </a:r>
-            <a:r>
-              <a:rPr sz="1200" b="0" lang="zh-CN" altLang="en-US">
-                <a:solidFill>
-                  <a:srgbClr val="F5F5F5">
-                    <a:alpha val="40000"/>
-                  </a:srgbClr>
-                </a:solidFill>
-                <a:latin typeface="Consolas"/>
-                <a:ea typeface="微软雅黑"/>
-                <a:cs typeface="微软雅黑"/>
-              </a:rPr>
-              <a:t>·</a:t>
-            </a:r>
-            <a:r>
-              <a:rPr sz="1200" b="0" lang="zh-CN" altLang="en-US">
-                <a:solidFill>
-                  <a:srgbClr val="F5F5F5">
-                    <a:alpha val="40000"/>
-                  </a:srgbClr>
-                </a:solidFill>
-                <a:latin typeface="微软雅黑"/>
-                <a:ea typeface="微软雅黑"/>
-                <a:cs typeface="微软雅黑"/>
-              </a:rPr>
-              <a:t> </a:t>
-            </a:r>
-            <a:r>
-              <a:rPr sz="1200" b="0" lang="zh-CN" altLang="en-US">
-                <a:solidFill>
-                  <a:srgbClr val="F5F5F5">
-                    <a:alpha val="40000"/>
-                  </a:srgbClr>
-                </a:solidFill>
-                <a:latin typeface="Consolas"/>
-                <a:ea typeface="微软雅黑"/>
-                <a:cs typeface="微软雅黑"/>
-              </a:rPr>
-              <a:t>烟花工具链与工作方法</a:t>
-            </a:r>
-          </a:p>
-        </p:txBody>
-      </p:sp>
-      <p:sp>
-        <p:nvSpPr>
-          <p:cNvPr id="9" name="TextBox 8"/>
-          <p:cNvSpPr txBox="1"/>
-          <p:nvPr/>
-        </p:nvSpPr>
-        <p:spPr>
-          <a:xfrm>
-            <a:off x="609600" y="1117600"/>
-            <a:ext cx="6985000" cy="228600"/>
-          </a:xfrm>
-          <a:prstGeom prst="rect">
-            <a:avLst/>
-          </a:prstGeom>
-          <a:noFill/>
-        </p:spPr>
-        <p:txBody>
-          <a:bodyPr wrap="square" lIns="0" rIns="0" tIns="0" bIns="0" anchor="t">
-            <a:noAutofit/>
-          </a:bodyPr>
-          <a:lstStyle/>
-          <a:p>
-            <a:pPr algn="l">
-              <a:lnSpc>
-                <a:spcPts val="1560"/>
-              </a:lnSpc>
-            </a:pPr>
-            <a:r>
-              <a:rPr sz="1200" b="1" lang="zh-CN" altLang="en-US" spc="200">
-                <a:solidFill>
-                  <a:srgbClr val="0FF796"/>
-                </a:solidFill>
-                <a:latin typeface="Consolas"/>
-                <a:ea typeface="微软雅黑"/>
-                <a:cs typeface="微软雅黑"/>
-              </a:rPr>
-              <a:t>VFX</a:t>
-            </a:r>
-            <a:r>
-              <a:rPr sz="1200" b="1" lang="zh-CN" altLang="en-US" spc="200">
-                <a:solidFill>
-                  <a:srgbClr val="0FF796"/>
-                </a:solidFill>
-                <a:latin typeface="微软雅黑"/>
-                <a:ea typeface="微软雅黑"/>
-                <a:cs typeface="微软雅黑"/>
-              </a:rPr>
-              <a:t> </a:t>
-            </a:r>
-            <a:r>
-              <a:rPr sz="1200" b="1" lang="zh-CN" altLang="en-US" spc="200">
-                <a:solidFill>
-                  <a:srgbClr val="0FF796"/>
-                </a:solidFill>
-                <a:latin typeface="Consolas"/>
-                <a:ea typeface="微软雅黑"/>
-                <a:cs typeface="微软雅黑"/>
-              </a:rPr>
-              <a:t>组内分享</a:t>
-            </a:r>
-            <a:r>
-              <a:rPr sz="1200" b="1" lang="zh-CN" altLang="en-US" spc="200">
-                <a:solidFill>
-                  <a:srgbClr val="0FF796"/>
-                </a:solidFill>
-                <a:latin typeface="微软雅黑"/>
-                <a:ea typeface="微软雅黑"/>
-                <a:cs typeface="微软雅黑"/>
-              </a:rPr>
-              <a:t> </a:t>
-            </a:r>
-            <a:r>
-              <a:rPr sz="1200" b="1" lang="zh-CN" altLang="en-US" spc="200">
-                <a:solidFill>
-                  <a:srgbClr val="0FF796"/>
-                </a:solidFill>
-                <a:latin typeface="Consolas"/>
-                <a:ea typeface="微软雅黑"/>
-                <a:cs typeface="微软雅黑"/>
-              </a:rPr>
-              <a:t>·</a:t>
-            </a:r>
-            <a:r>
-              <a:rPr sz="1200" b="1" lang="zh-CN" altLang="en-US" spc="200">
-                <a:solidFill>
-                  <a:srgbClr val="0FF796"/>
-                </a:solidFill>
-                <a:latin typeface="微软雅黑"/>
-                <a:ea typeface="微软雅黑"/>
-                <a:cs typeface="微软雅黑"/>
-              </a:rPr>
-              <a:t> </a:t>
-            </a:r>
-            <a:r>
-              <a:rPr sz="1200" b="1" lang="zh-CN" altLang="en-US" spc="200">
-                <a:solidFill>
-                  <a:srgbClr val="0FF796"/>
-                </a:solidFill>
-                <a:latin typeface="Consolas"/>
-                <a:ea typeface="微软雅黑"/>
-                <a:cs typeface="微软雅黑"/>
-              </a:rPr>
-              <a:t>2026.10.30</a:t>
-            </a:r>
-          </a:p>
-        </p:txBody>
-      </p:sp>
-      <p:sp>
-        <p:nvSpPr>
-          <p:cNvPr id="10" name="TextBox 9"/>
-          <p:cNvSpPr txBox="1"/>
-          <p:nvPr/>
-        </p:nvSpPr>
-        <p:spPr>
-          <a:xfrm>
-            <a:off x="609600" y="1435100"/>
-            <a:ext cx="8255000" cy="889000"/>
-          </a:xfrm>
-          <a:prstGeom prst="rect">
-            <a:avLst/>
-          </a:prstGeom>
-          <a:noFill/>
-        </p:spPr>
-        <p:txBody>
-          <a:bodyPr wrap="square" lIns="0" rIns="0" tIns="0" bIns="0" anchor="t">
-            <a:noAutofit/>
-          </a:bodyPr>
-          <a:lstStyle/>
-          <a:p>
-            <a:pPr algn="l">
-              <a:lnSpc>
-                <a:spcPts val="6439"/>
-              </a:lnSpc>
-            </a:pPr>
-            <a:r>
-              <a:rPr sz="5600" b="1" lang="zh-CN" altLang="en-US">
-                <a:solidFill>
-                  <a:srgbClr val="F5F5F5"/>
-                </a:solidFill>
-                <a:latin typeface="Consolas"/>
-                <a:ea typeface="微软雅黑"/>
-                <a:cs typeface="微软雅黑"/>
-              </a:rPr>
-              <a:t>烟花秀</a:t>
-            </a:r>
-            <a:r>
-              <a:rPr sz="5600" b="1" lang="zh-CN" altLang="en-US">
-                <a:solidFill>
-                  <a:srgbClr val="F5F5F5"/>
-                </a:solidFill>
-                <a:latin typeface="微软雅黑"/>
-                <a:ea typeface="微软雅黑"/>
-                <a:cs typeface="微软雅黑"/>
-              </a:rPr>
-              <a:t> </a:t>
-            </a:r>
-            <a:r>
-              <a:rPr sz="5600" b="1" lang="zh-CN" altLang="en-US">
-                <a:solidFill>
-                  <a:srgbClr val="F5F5F5"/>
-                </a:solidFill>
-                <a:latin typeface="Consolas"/>
-                <a:ea typeface="微软雅黑"/>
-                <a:cs typeface="微软雅黑"/>
-              </a:rPr>
-              <a:t>AI</a:t>
-            </a:r>
-            <a:r>
-              <a:rPr sz="5600" b="1" lang="zh-CN" altLang="en-US">
-                <a:solidFill>
-                  <a:srgbClr val="F5F5F5"/>
-                </a:solidFill>
-                <a:latin typeface="微软雅黑"/>
-                <a:ea typeface="微软雅黑"/>
-                <a:cs typeface="微软雅黑"/>
-              </a:rPr>
-              <a:t> </a:t>
-            </a:r>
-            <a:r>
-              <a:rPr sz="5600" b="1" lang="zh-CN" altLang="en-US">
-                <a:solidFill>
-                  <a:srgbClr val="F5F5F5"/>
-                </a:solidFill>
-                <a:latin typeface="Consolas"/>
-                <a:ea typeface="微软雅黑"/>
-                <a:cs typeface="微软雅黑"/>
-              </a:rPr>
-              <a:t>全流程</a:t>
-            </a:r>
-          </a:p>
-        </p:txBody>
-      </p:sp>
-      <p:sp>
-        <p:nvSpPr>
-          <p:cNvPr id="11" name="TextBox 10"/>
-          <p:cNvSpPr txBox="1"/>
-          <p:nvPr/>
-        </p:nvSpPr>
-        <p:spPr>
-          <a:xfrm>
-            <a:off x="609600" y="2451100"/>
-            <a:ext cx="6985000" cy="355600"/>
-          </a:xfrm>
-          <a:prstGeom prst="rect">
-            <a:avLst/>
-          </a:prstGeom>
-          <a:noFill/>
-        </p:spPr>
-        <p:txBody>
-          <a:bodyPr wrap="square" lIns="0" rIns="0" tIns="0" bIns="0" anchor="t">
-            <a:noAutofit/>
-          </a:bodyPr>
-          <a:lstStyle/>
-          <a:p>
-            <a:pPr algn="l">
-              <a:lnSpc>
-                <a:spcPts val="2340"/>
-              </a:lnSpc>
-            </a:pPr>
-            <a:r>
-              <a:rPr sz="1800" b="0" lang="zh-CN" altLang="en-US">
-                <a:solidFill>
-                  <a:srgbClr val="F5F5F5">
-                    <a:alpha val="86000"/>
-                  </a:srgbClr>
-                </a:solidFill>
-                <a:latin typeface="Consolas"/>
-                <a:ea typeface="微软雅黑"/>
-                <a:cs typeface="微软雅黑"/>
-              </a:rPr>
-              <a:t>烟花烘焙器</a:t>
-            </a:r>
-            <a:r>
-              <a:rPr sz="1800" b="0" lang="zh-CN" altLang="en-US">
-                <a:solidFill>
-                  <a:srgbClr val="F5F5F5">
-                    <a:alpha val="86000"/>
-                  </a:srgbClr>
-                </a:solidFill>
-                <a:latin typeface="微软雅黑"/>
-                <a:ea typeface="微软雅黑"/>
-                <a:cs typeface="微软雅黑"/>
-              </a:rPr>
-              <a:t> </a:t>
-            </a:r>
-            <a:r>
-              <a:rPr sz="1800" b="0" lang="zh-CN" altLang="en-US">
-                <a:solidFill>
-                  <a:srgbClr val="F5F5F5">
-                    <a:alpha val="86000"/>
-                  </a:srgbClr>
-                </a:solidFill>
-                <a:latin typeface="Consolas"/>
-                <a:ea typeface="微软雅黑"/>
-                <a:cs typeface="微软雅黑"/>
-              </a:rPr>
-              <a:t>·</a:t>
-            </a:r>
-            <a:r>
-              <a:rPr sz="1800" b="0" lang="zh-CN" altLang="en-US">
-                <a:solidFill>
-                  <a:srgbClr val="F5F5F5">
-                    <a:alpha val="86000"/>
-                  </a:srgbClr>
-                </a:solidFill>
-                <a:latin typeface="微软雅黑"/>
-                <a:ea typeface="微软雅黑"/>
-                <a:cs typeface="微软雅黑"/>
-              </a:rPr>
-              <a:t> </a:t>
-            </a:r>
-            <a:r>
-              <a:rPr sz="1800" b="0" lang="zh-CN" altLang="en-US">
-                <a:solidFill>
-                  <a:srgbClr val="F5F5F5">
-                    <a:alpha val="86000"/>
-                  </a:srgbClr>
-                </a:solidFill>
-                <a:latin typeface="Consolas"/>
-                <a:ea typeface="微软雅黑"/>
-                <a:cs typeface="微软雅黑"/>
-              </a:rPr>
-              <a:t>导入器</a:t>
-            </a:r>
-            <a:r>
-              <a:rPr sz="1800" b="0" lang="zh-CN" altLang="en-US">
-                <a:solidFill>
-                  <a:srgbClr val="F5F5F5">
-                    <a:alpha val="86000"/>
-                  </a:srgbClr>
-                </a:solidFill>
-                <a:latin typeface="微软雅黑"/>
-                <a:ea typeface="微软雅黑"/>
-                <a:cs typeface="微软雅黑"/>
-              </a:rPr>
-              <a:t> </a:t>
-            </a:r>
-            <a:r>
-              <a:rPr sz="1800" b="0" lang="zh-CN" altLang="en-US">
-                <a:solidFill>
-                  <a:srgbClr val="F5F5F5">
-                    <a:alpha val="86000"/>
-                  </a:srgbClr>
-                </a:solidFill>
-                <a:latin typeface="Consolas"/>
-                <a:ea typeface="微软雅黑"/>
-                <a:cs typeface="微软雅黑"/>
-              </a:rPr>
-              <a:t>·</a:t>
-            </a:r>
-            <a:r>
-              <a:rPr sz="1800" b="0" lang="zh-CN" altLang="en-US">
-                <a:solidFill>
-                  <a:srgbClr val="F5F5F5">
-                    <a:alpha val="86000"/>
-                  </a:srgbClr>
-                </a:solidFill>
-                <a:latin typeface="微软雅黑"/>
-                <a:ea typeface="微软雅黑"/>
-                <a:cs typeface="微软雅黑"/>
-              </a:rPr>
-              <a:t> </a:t>
-            </a:r>
-            <a:r>
-              <a:rPr sz="1800" b="0" lang="zh-CN" altLang="en-US">
-                <a:solidFill>
-                  <a:srgbClr val="F5F5F5">
-                    <a:alpha val="86000"/>
-                  </a:srgbClr>
-                </a:solidFill>
-                <a:latin typeface="Consolas"/>
-                <a:ea typeface="微软雅黑"/>
-                <a:cs typeface="微软雅黑"/>
-              </a:rPr>
-              <a:t>烟花编排工作台</a:t>
-            </a:r>
-          </a:p>
-        </p:txBody>
-      </p:sp>
-      <p:sp>
-        <p:nvSpPr>
-          <p:cNvPr id="12" name="Rectangle 11"/>
+                    <a:alpha val="70000"/>
+                  </a:srgbClr>
+                </a:solidFill>
+                <a:latin typeface="Consolas"/>
+                <a:ea typeface="微软雅黑"/>
+                <a:cs typeface="微软雅黑"/>
+              </a:rPr>
+              <a:t>分享与方法</a:t>
+            </a:r>
+          </a:p>
+        </p:txBody>
+      </p:sp>
+      <p:sp>
+        <p:nvSpPr>
+          <p:cNvPr id="18" name="footer_mark"/>
           <p:cNvSpPr/>
           <p:nvPr/>
         </p:nvSpPr>
         <p:spPr>
           <a:xfrm>
-            <a:off x="609600" y="3022600"/>
-            <a:ext cx="457200" cy="38100"/>
+            <a:off x="609600" y="6515100"/>
+            <a:ext cx="114300" cy="114300"/>
           </a:xfrm>
           <a:prstGeom prst="rect">
             <a:avLst/>
@@ -5772,410 +5902,121 @@
       </p:sp>
       <p:sp>
         <p:nvSpPr>
-          <p:cNvPr id="13" name="TextBox 12"/>
-          <p:cNvSpPr txBox="1"/>
-          <p:nvPr/>
-        </p:nvSpPr>
-        <p:spPr>
-          <a:xfrm>
-            <a:off x="609600" y="3251200"/>
-            <a:ext cx="3810000" cy="254000"/>
-          </a:xfrm>
-          <a:prstGeom prst="rect">
-            <a:avLst/>
-          </a:prstGeom>
-          <a:noFill/>
-        </p:spPr>
-        <p:txBody>
-          <a:bodyPr wrap="square" lIns="0" rIns="0" tIns="0" bIns="0" anchor="t">
+          <p:cNvPr id="19" name="footer"/>
+          <p:cNvSpPr txBox="1"/>
+          <p:nvPr/>
+        </p:nvSpPr>
+        <p:spPr>
+          <a:xfrm>
+            <a:off x="825500" y="6445250"/>
+            <a:ext cx="7620000" cy="254000"/>
+          </a:xfrm>
+          <a:prstGeom prst="rect">
+            <a:avLst/>
+          </a:prstGeom>
+          <a:noFill/>
+        </p:spPr>
+        <p:txBody>
+          <a:bodyPr wrap="square" lIns="0" rIns="0" tIns="0" bIns="0" anchor="ctr">
             <a:noAutofit/>
           </a:bodyPr>
           <a:lstStyle/>
           <a:p>
             <a:pPr algn="l">
               <a:lnSpc>
-                <a:spcPts val="1820"/>
-              </a:lnSpc>
-            </a:pPr>
-            <a:r>
-              <a:rPr sz="1300" b="0" lang="zh-CN" altLang="en-US">
-                <a:solidFill>
-                  <a:srgbClr val="F5F5F5">
-                    <a:alpha val="70000"/>
-                  </a:srgbClr>
-                </a:solidFill>
-                <a:latin typeface="Consolas"/>
-                <a:ea typeface="微软雅黑"/>
-                <a:cs typeface="微软雅黑"/>
-              </a:rPr>
-              <a:t>分享人：____</a:t>
-            </a:r>
-          </a:p>
-        </p:txBody>
-      </p:sp>
-      <p:sp>
-        <p:nvSpPr>
-          <p:cNvPr id="14" name="Rectangle 13"/>
-          <p:cNvSpPr/>
-          <p:nvPr/>
-        </p:nvSpPr>
-        <p:spPr>
-          <a:xfrm>
-            <a:off x="609600" y="4660900"/>
-            <a:ext cx="2032000" cy="6350"/>
-          </a:xfrm>
-          <a:prstGeom prst="rect">
-            <a:avLst/>
-          </a:prstGeom>
-          <a:solidFill>
-            <a:srgbClr val="F5F5F5">
-              <a:alpha val="14000"/>
-            </a:srgbClr>
-          </a:solidFill>
-          <a:ln>
-            <a:noFill/>
-          </a:ln>
-        </p:spPr>
-        <p:txBody>
-          <a:bodyPr rtlCol="0" anchor="ctr"/>
-          <a:lstStyle/>
-          <a:p>
-            <a:pPr algn="ctr"/>
-          </a:p>
-        </p:txBody>
-      </p:sp>
-      <p:sp>
-        <p:nvSpPr>
-          <p:cNvPr id="15" name="TextBox 14"/>
-          <p:cNvSpPr txBox="1"/>
-          <p:nvPr/>
-        </p:nvSpPr>
-        <p:spPr>
-          <a:xfrm>
-            <a:off x="609600" y="4787900"/>
-            <a:ext cx="279400" cy="254000"/>
-          </a:xfrm>
-          <a:prstGeom prst="rect">
-            <a:avLst/>
-          </a:prstGeom>
-          <a:noFill/>
-        </p:spPr>
-        <p:txBody>
-          <a:bodyPr wrap="square" lIns="0" rIns="0" tIns="0" bIns="0" anchor="t">
-            <a:noAutofit/>
-          </a:bodyPr>
-          <a:lstStyle/>
-          <a:p>
-            <a:pPr algn="l">
-              <a:lnSpc>
-                <a:spcPts val="1690"/>
-              </a:lnSpc>
-            </a:pPr>
-            <a:r>
-              <a:rPr sz="1300" b="1" lang="zh-CN" altLang="en-US">
-                <a:solidFill>
-                  <a:srgbClr val="0FF796"/>
-                </a:solidFill>
-                <a:latin typeface="Consolas"/>
-                <a:ea typeface="微软雅黑"/>
-                <a:cs typeface="微软雅黑"/>
-              </a:rPr>
-              <a:t>01</a:t>
-            </a:r>
-          </a:p>
-        </p:txBody>
-      </p:sp>
-      <p:sp>
-        <p:nvSpPr>
-          <p:cNvPr id="16" name="TextBox 15"/>
-          <p:cNvSpPr txBox="1"/>
-          <p:nvPr/>
-        </p:nvSpPr>
-        <p:spPr>
-          <a:xfrm>
-            <a:off x="939800" y="4787900"/>
-            <a:ext cx="1905000" cy="254000"/>
-          </a:xfrm>
-          <a:prstGeom prst="rect">
-            <a:avLst/>
-          </a:prstGeom>
-          <a:noFill/>
-        </p:spPr>
-        <p:txBody>
-          <a:bodyPr wrap="square" lIns="0" rIns="0" tIns="0" bIns="0" anchor="t">
-            <a:noAutofit/>
-          </a:bodyPr>
-          <a:lstStyle/>
-          <a:p>
-            <a:pPr algn="l">
-              <a:lnSpc>
-                <a:spcPts val="1690"/>
-              </a:lnSpc>
-            </a:pPr>
-            <a:r>
-              <a:rPr sz="1300" b="0" lang="zh-CN" altLang="en-US">
-                <a:solidFill>
-                  <a:srgbClr val="F5F5F5">
-                    <a:alpha val="70000"/>
-                  </a:srgbClr>
-                </a:solidFill>
-                <a:latin typeface="Consolas"/>
-                <a:ea typeface="微软雅黑"/>
-                <a:cs typeface="微软雅黑"/>
-              </a:rPr>
-              <a:t>制作与挑战</a:t>
-            </a:r>
-          </a:p>
-        </p:txBody>
-      </p:sp>
-      <p:sp>
-        <p:nvSpPr>
-          <p:cNvPr id="17" name="TextBox 16"/>
-          <p:cNvSpPr txBox="1"/>
-          <p:nvPr/>
-        </p:nvSpPr>
-        <p:spPr>
-          <a:xfrm>
-            <a:off x="609600" y="5080000"/>
-            <a:ext cx="279400" cy="254000"/>
-          </a:xfrm>
-          <a:prstGeom prst="rect">
-            <a:avLst/>
-          </a:prstGeom>
-          <a:noFill/>
-        </p:spPr>
-        <p:txBody>
-          <a:bodyPr wrap="square" lIns="0" rIns="0" tIns="0" bIns="0" anchor="t">
-            <a:noAutofit/>
-          </a:bodyPr>
-          <a:lstStyle/>
-          <a:p>
-            <a:pPr algn="l">
-              <a:lnSpc>
-                <a:spcPts val="1690"/>
-              </a:lnSpc>
-            </a:pPr>
-            <a:r>
-              <a:rPr sz="1300" b="1" lang="zh-CN" altLang="en-US">
-                <a:solidFill>
-                  <a:srgbClr val="0FF796"/>
-                </a:solidFill>
-                <a:latin typeface="Consolas"/>
-                <a:ea typeface="微软雅黑"/>
-                <a:cs typeface="微软雅黑"/>
-              </a:rPr>
-              <a:t>02</a:t>
-            </a:r>
-          </a:p>
-        </p:txBody>
-      </p:sp>
-      <p:sp>
-        <p:nvSpPr>
-          <p:cNvPr id="18" name="TextBox 17"/>
-          <p:cNvSpPr txBox="1"/>
-          <p:nvPr/>
-        </p:nvSpPr>
-        <p:spPr>
-          <a:xfrm>
-            <a:off x="939800" y="5080000"/>
-            <a:ext cx="1905000" cy="254000"/>
-          </a:xfrm>
-          <a:prstGeom prst="rect">
-            <a:avLst/>
-          </a:prstGeom>
-          <a:noFill/>
-        </p:spPr>
-        <p:txBody>
-          <a:bodyPr wrap="square" lIns="0" rIns="0" tIns="0" bIns="0" anchor="t">
-            <a:noAutofit/>
-          </a:bodyPr>
-          <a:lstStyle/>
-          <a:p>
-            <a:pPr algn="l">
-              <a:lnSpc>
-                <a:spcPts val="1690"/>
-              </a:lnSpc>
-            </a:pPr>
-            <a:r>
-              <a:rPr sz="1300" b="0" lang="zh-CN" altLang="en-US">
-                <a:solidFill>
-                  <a:srgbClr val="F5F5F5">
-                    <a:alpha val="70000"/>
-                  </a:srgbClr>
-                </a:solidFill>
-                <a:latin typeface="Consolas"/>
-                <a:ea typeface="微软雅黑"/>
-                <a:cs typeface="微软雅黑"/>
-              </a:rPr>
-              <a:t>解决思路</a:t>
-            </a:r>
-          </a:p>
-        </p:txBody>
-      </p:sp>
-      <p:sp>
-        <p:nvSpPr>
-          <p:cNvPr id="19" name="TextBox 18"/>
-          <p:cNvSpPr txBox="1"/>
-          <p:nvPr/>
-        </p:nvSpPr>
-        <p:spPr>
-          <a:xfrm>
-            <a:off x="609600" y="5372100"/>
-            <a:ext cx="279400" cy="254000"/>
-          </a:xfrm>
-          <a:prstGeom prst="rect">
-            <a:avLst/>
-          </a:prstGeom>
-          <a:noFill/>
-        </p:spPr>
-        <p:txBody>
-          <a:bodyPr wrap="square" lIns="0" rIns="0" tIns="0" bIns="0" anchor="t">
-            <a:noAutofit/>
-          </a:bodyPr>
-          <a:lstStyle/>
-          <a:p>
-            <a:pPr algn="l">
-              <a:lnSpc>
-                <a:spcPts val="1690"/>
-              </a:lnSpc>
-            </a:pPr>
-            <a:r>
-              <a:rPr sz="1300" b="1" lang="zh-CN" altLang="en-US">
-                <a:solidFill>
-                  <a:srgbClr val="0FF796"/>
-                </a:solidFill>
-                <a:latin typeface="Consolas"/>
-                <a:ea typeface="微软雅黑"/>
-                <a:cs typeface="微软雅黑"/>
-              </a:rPr>
-              <a:t>03</a:t>
-            </a:r>
-          </a:p>
-        </p:txBody>
-      </p:sp>
-      <p:sp>
-        <p:nvSpPr>
-          <p:cNvPr id="20" name="TextBox 19"/>
-          <p:cNvSpPr txBox="1"/>
-          <p:nvPr/>
-        </p:nvSpPr>
-        <p:spPr>
-          <a:xfrm>
-            <a:off x="939800" y="5372100"/>
-            <a:ext cx="1905000" cy="254000"/>
-          </a:xfrm>
-          <a:prstGeom prst="rect">
-            <a:avLst/>
-          </a:prstGeom>
-          <a:noFill/>
-        </p:spPr>
-        <p:txBody>
-          <a:bodyPr wrap="square" lIns="0" rIns="0" tIns="0" bIns="0" anchor="t">
-            <a:noAutofit/>
-          </a:bodyPr>
-          <a:lstStyle/>
-          <a:p>
-            <a:pPr algn="l">
-              <a:lnSpc>
-                <a:spcPts val="1690"/>
-              </a:lnSpc>
-            </a:pPr>
-            <a:r>
-              <a:rPr sz="1300" b="0" lang="zh-CN" altLang="en-US">
-                <a:solidFill>
-                  <a:srgbClr val="F5F5F5">
-                    <a:alpha val="70000"/>
-                  </a:srgbClr>
-                </a:solidFill>
-                <a:latin typeface="Consolas"/>
-                <a:ea typeface="微软雅黑"/>
-                <a:cs typeface="微软雅黑"/>
-              </a:rPr>
-              <a:t>实践成果</a:t>
-            </a:r>
-          </a:p>
-        </p:txBody>
-      </p:sp>
-      <p:sp>
-        <p:nvSpPr>
-          <p:cNvPr id="21" name="TextBox 20"/>
-          <p:cNvSpPr txBox="1"/>
-          <p:nvPr/>
-        </p:nvSpPr>
-        <p:spPr>
-          <a:xfrm>
-            <a:off x="609600" y="5664200"/>
-            <a:ext cx="279400" cy="254000"/>
-          </a:xfrm>
-          <a:prstGeom prst="rect">
-            <a:avLst/>
-          </a:prstGeom>
-          <a:noFill/>
-        </p:spPr>
-        <p:txBody>
-          <a:bodyPr wrap="square" lIns="0" rIns="0" tIns="0" bIns="0" anchor="t">
-            <a:noAutofit/>
-          </a:bodyPr>
-          <a:lstStyle/>
-          <a:p>
-            <a:pPr algn="l">
-              <a:lnSpc>
-                <a:spcPts val="1690"/>
-              </a:lnSpc>
-            </a:pPr>
-            <a:r>
-              <a:rPr sz="1300" b="1" lang="zh-CN" altLang="en-US">
-                <a:solidFill>
-                  <a:srgbClr val="0FF796"/>
-                </a:solidFill>
-                <a:latin typeface="Consolas"/>
-                <a:ea typeface="微软雅黑"/>
-                <a:cs typeface="微软雅黑"/>
-              </a:rPr>
-              <a:t>04</a:t>
-            </a:r>
-          </a:p>
-        </p:txBody>
-      </p:sp>
-      <p:sp>
-        <p:nvSpPr>
-          <p:cNvPr id="22" name="TextBox 21"/>
-          <p:cNvSpPr txBox="1"/>
-          <p:nvPr/>
-        </p:nvSpPr>
-        <p:spPr>
-          <a:xfrm>
-            <a:off x="939800" y="5664200"/>
-            <a:ext cx="1905000" cy="254000"/>
-          </a:xfrm>
-          <a:prstGeom prst="rect">
-            <a:avLst/>
-          </a:prstGeom>
-          <a:noFill/>
-        </p:spPr>
-        <p:txBody>
-          <a:bodyPr wrap="square" lIns="0" rIns="0" tIns="0" bIns="0" anchor="t">
-            <a:noAutofit/>
-          </a:bodyPr>
-          <a:lstStyle/>
-          <a:p>
-            <a:pPr algn="l">
-              <a:lnSpc>
-                <a:spcPts val="1690"/>
-              </a:lnSpc>
-            </a:pPr>
-            <a:r>
-              <a:rPr sz="1300" b="0" lang="zh-CN" altLang="en-US">
-                <a:solidFill>
-                  <a:srgbClr val="F5F5F5">
-                    <a:alpha val="70000"/>
-                  </a:srgbClr>
-                </a:solidFill>
-                <a:latin typeface="Consolas"/>
-                <a:ea typeface="微软雅黑"/>
-                <a:cs typeface="微软雅黑"/>
-              </a:rPr>
-              <a:t>分享与方法</a:t>
+                <a:spcPts val="1920"/>
+              </a:lnSpc>
+            </a:pPr>
+            <a:r>
+              <a:rPr sz="1200" b="0" lang="zh-CN" altLang="en-US">
+                <a:solidFill>
+                  <a:srgbClr val="F5F5F5">
+                    <a:alpha val="40000"/>
+                  </a:srgbClr>
+                </a:solidFill>
+                <a:latin typeface="Consolas"/>
+                <a:ea typeface="微软雅黑"/>
+                <a:cs typeface="微软雅黑"/>
+              </a:rPr>
+              <a:t>三角洲行动</a:t>
+            </a:r>
+            <a:r>
+              <a:rPr sz="1200" b="0" lang="zh-CN" altLang="en-US">
+                <a:solidFill>
+                  <a:srgbClr val="F5F5F5">
+                    <a:alpha val="40000"/>
+                  </a:srgbClr>
+                </a:solidFill>
+                <a:latin typeface="微软雅黑"/>
+                <a:ea typeface="微软雅黑"/>
+                <a:cs typeface="微软雅黑"/>
+              </a:rPr>
+              <a:t> </a:t>
+            </a:r>
+            <a:r>
+              <a:rPr sz="1200" b="0" lang="zh-CN" altLang="en-US">
+                <a:solidFill>
+                  <a:srgbClr val="F5F5F5">
+                    <a:alpha val="40000"/>
+                  </a:srgbClr>
+                </a:solidFill>
+                <a:latin typeface="Consolas"/>
+                <a:ea typeface="微软雅黑"/>
+                <a:cs typeface="微软雅黑"/>
+              </a:rPr>
+              <a:t>VFX</a:t>
+            </a:r>
+            <a:r>
+              <a:rPr sz="1200" b="0" lang="zh-CN" altLang="en-US">
+                <a:solidFill>
+                  <a:srgbClr val="F5F5F5">
+                    <a:alpha val="40000"/>
+                  </a:srgbClr>
+                </a:solidFill>
+                <a:latin typeface="微软雅黑"/>
+                <a:ea typeface="微软雅黑"/>
+                <a:cs typeface="微软雅黑"/>
+              </a:rPr>
+              <a:t> </a:t>
+            </a:r>
+            <a:r>
+              <a:rPr sz="1200" b="0" lang="zh-CN" altLang="en-US">
+                <a:solidFill>
+                  <a:srgbClr val="F5F5F5">
+                    <a:alpha val="40000"/>
+                  </a:srgbClr>
+                </a:solidFill>
+                <a:latin typeface="Consolas"/>
+                <a:ea typeface="微软雅黑"/>
+                <a:cs typeface="微软雅黑"/>
+              </a:rPr>
+              <a:t>·</a:t>
+            </a:r>
+            <a:r>
+              <a:rPr sz="1200" b="0" lang="zh-CN" altLang="en-US">
+                <a:solidFill>
+                  <a:srgbClr val="F5F5F5">
+                    <a:alpha val="40000"/>
+                  </a:srgbClr>
+                </a:solidFill>
+                <a:latin typeface="微软雅黑"/>
+                <a:ea typeface="微软雅黑"/>
+                <a:cs typeface="微软雅黑"/>
+              </a:rPr>
+              <a:t> </a:t>
+            </a:r>
+            <a:r>
+              <a:rPr sz="1200" b="0" lang="zh-CN" altLang="en-US">
+                <a:solidFill>
+                  <a:srgbClr val="F5F5F5">
+                    <a:alpha val="40000"/>
+                  </a:srgbClr>
+                </a:solidFill>
+                <a:latin typeface="Consolas"/>
+                <a:ea typeface="微软雅黑"/>
+                <a:cs typeface="微软雅黑"/>
+              </a:rPr>
+              <a:t>烟花工具链与工作方法</a:t>
             </a:r>
           </a:p>
         </p:txBody>
@@ -7841,7 +7682,7 @@
       </p:sp>
       <p:pic>
         <p:nvPicPr>
-          <p:cNvPr id="37" name="Picture 36" descr="p06_ue.jpg"/>
+          <p:cNvPr id="37" name="Picture 36" descr="p10_ue.jpg"/>
           <p:cNvPicPr>
             <a:picLocks noChangeAspect="1"/>
           </p:cNvPicPr>
@@ -9264,58 +9105,6 @@
               </a:rPr>
               <a:t>扇形</a:t>
             </a:r>
-            <a:r>
-              <a:rPr sz="1200" b="0" lang="zh-CN" altLang="en-US">
-                <a:solidFill>
-                  <a:srgbClr val="F5F5F5">
-                    <a:alpha val="70000"/>
-                  </a:srgbClr>
-                </a:solidFill>
-                <a:latin typeface="微软雅黑"/>
-                <a:ea typeface="微软雅黑"/>
-                <a:cs typeface="微软雅黑"/>
-              </a:rPr>
-              <a:t> </a:t>
-            </a:r>
-            <a:r>
-              <a:rPr sz="1200" b="0" lang="zh-CN" altLang="en-US">
-                <a:solidFill>
-                  <a:srgbClr val="F5F5F5">
-                    <a:alpha val="70000"/>
-                  </a:srgbClr>
-                </a:solidFill>
-                <a:latin typeface="Consolas"/>
-                <a:ea typeface="微软雅黑"/>
-                <a:cs typeface="微软雅黑"/>
-              </a:rPr>
-              <a:t>·</a:t>
-            </a:r>
-            <a:r>
-              <a:rPr sz="1200" b="0" lang="zh-CN" altLang="en-US">
-                <a:solidFill>
-                  <a:srgbClr val="F5F5F5">
-                    <a:alpha val="70000"/>
-                  </a:srgbClr>
-                </a:solidFill>
-                <a:latin typeface="微软雅黑"/>
-                <a:ea typeface="微软雅黑"/>
-                <a:cs typeface="微软雅黑"/>
-              </a:rPr>
-              <a:t> </a:t>
-            </a:r>
-            <a:r>
-              <a:rPr sz="1200" b="0" lang="zh-CN" altLang="en-US">
-                <a:solidFill>
-                  <a:srgbClr val="F5F5F5">
-                    <a:alpha val="70000"/>
-                  </a:srgbClr>
-                </a:solidFill>
-                <a:latin typeface="Consolas"/>
-                <a:ea typeface="微软雅黑"/>
-                <a:cs typeface="微软雅黑"/>
-              </a:rPr>
-              <a:t>整场</a:t>
-            </a:r>
           </a:p>
         </p:txBody>
       </p:sp>
@@ -10883,7 +10672,7 @@
         <p:spPr>
           <a:xfrm>
             <a:off x="609600" y="1358900"/>
-            <a:ext cx="4064000" cy="228600"/>
+            <a:ext cx="4953000" cy="228600"/>
           </a:xfrm>
           <a:prstGeom prst="rect">
             <a:avLst/>
@@ -10902,7 +10691,7 @@
               </a:lnSpc>
             </a:pPr>
             <a:r>
-              <a:rPr sz="1200" b="1" lang="zh-CN" altLang="en-US" spc="100">
+              <a:rPr sz="1200" b="1" lang="zh-CN" altLang="en-US" spc="200">
                 <a:solidFill>
                   <a:srgbClr val="0FF796"/>
                 </a:solidFill>
@@ -10923,8 +10712,8 @@
         </p:nvSpPr>
         <p:spPr>
           <a:xfrm>
-            <a:off x="609600" y="1663700"/>
-            <a:ext cx="4064000" cy="889000"/>
+            <a:off x="609600" y="1638300"/>
+            <a:ext cx="4953000" cy="825500"/>
           </a:xfrm>
           <a:prstGeom prst="rect">
             <a:avLst/>
@@ -10939,11 +10728,11 @@
           <a:p>
             <a:pPr algn="l">
               <a:lnSpc>
-                <a:spcPts val="6000"/>
-              </a:lnSpc>
-            </a:pPr>
-            <a:r>
-              <a:rPr sz="6000" b="1" lang="zh-CN" altLang="en-US">
+                <a:spcPts val="5600"/>
+              </a:lnSpc>
+            </a:pPr>
+            <a:r>
+              <a:rPr sz="5600" b="1" lang="zh-CN" altLang="en-US">
                 <a:solidFill>
                   <a:srgbClr val="0FF796"/>
                 </a:solidFill>
@@ -10954,15 +10743,74 @@
               <a:t>149</a:t>
             </a:r>
             <a:r>
-              <a:rPr sz="3800" b="1" lang="zh-CN" altLang="en-US">
+              <a:rPr sz="2800" b="1" lang="zh-CN" altLang="en-US">
                 <a:solidFill>
                   <a:srgbClr val="0FF796"/>
                 </a:solidFill>
-                <a:latin typeface="Consolas"/>
-                <a:ea typeface="微软雅黑"/>
-                <a:cs typeface="微软雅黑"/>
-              </a:rPr>
-              <a:t>/149</a:t>
+                <a:latin typeface="微软雅黑"/>
+                <a:ea typeface="微软雅黑"/>
+                <a:cs typeface="微软雅黑"/>
+              </a:rPr>
+              <a:t> </a:t>
+            </a:r>
+            <a:r>
+              <a:rPr sz="2800" b="1" lang="zh-CN" altLang="en-US">
+                <a:solidFill>
+                  <a:srgbClr val="0FF796"/>
+                </a:solidFill>
+                <a:latin typeface="Consolas"/>
+                <a:ea typeface="微软雅黑"/>
+                <a:cs typeface="微软雅黑"/>
+              </a:rPr>
+              <a:t>/</a:t>
+            </a:r>
+            <a:r>
+              <a:rPr sz="2800" b="1" lang="zh-CN" altLang="en-US">
+                <a:solidFill>
+                  <a:srgbClr val="0FF796"/>
+                </a:solidFill>
+                <a:latin typeface="微软雅黑"/>
+                <a:ea typeface="微软雅黑"/>
+                <a:cs typeface="微软雅黑"/>
+              </a:rPr>
+              <a:t> </a:t>
+            </a:r>
+            <a:r>
+              <a:rPr sz="2800" b="1" lang="zh-CN" altLang="en-US">
+                <a:solidFill>
+                  <a:srgbClr val="0FF796"/>
+                </a:solidFill>
+                <a:latin typeface="Consolas"/>
+                <a:ea typeface="微软雅黑"/>
+                <a:cs typeface="微软雅黑"/>
+              </a:rPr>
+              <a:t>149</a:t>
+            </a:r>
+            <a:r>
+              <a:rPr sz="1300" b="0" lang="zh-CN" altLang="en-US">
+                <a:solidFill>
+                  <a:srgbClr val="F5F5F5">
+                    <a:alpha val="70000"/>
+                  </a:srgbClr>
+                </a:solidFill>
+                <a:latin typeface="微软雅黑"/>
+                <a:ea typeface="微软雅黑"/>
+                <a:cs typeface="微软雅黑"/>
+              </a:rPr>
+              <a:t>  </a:t>
+            </a:r>
+            <a:r>
+              <a:rPr sz="1300" b="0" lang="zh-CN" altLang="en-US">
+                <a:solidFill>
+                  <a:srgbClr val="F5F5F5">
+                    <a:alpha val="70000"/>
+                  </a:srgbClr>
+                </a:solidFill>
+                <a:latin typeface="Consolas"/>
+                <a:ea typeface="微软雅黑"/>
+                <a:cs typeface="微软雅黑"/>
+              </a:rPr>
+              <a:t>张贴图读回一致</a:t>
             </a:r>
           </a:p>
         </p:txBody>
@@ -10975,8 +10823,8 @@
         </p:nvSpPr>
         <p:spPr>
           <a:xfrm>
-            <a:off x="609600" y="2540000"/>
-            <a:ext cx="4064000" cy="254000"/>
+            <a:off x="609600" y="2667000"/>
+            <a:ext cx="1397000" cy="190500"/>
           </a:xfrm>
           <a:prstGeom prst="rect">
             <a:avLst/>
@@ -10991,42 +10839,266 @@
           <a:p>
             <a:pPr algn="l">
               <a:lnSpc>
-                <a:spcPts val="1950"/>
-              </a:lnSpc>
-            </a:pPr>
-            <a:r>
-              <a:rPr sz="1300" b="0" lang="zh-CN" altLang="en-US">
-                <a:solidFill>
-                  <a:srgbClr val="F5F5F5">
-                    <a:alpha val="70000"/>
-                  </a:srgbClr>
-                </a:solidFill>
-                <a:latin typeface="Consolas"/>
-                <a:ea typeface="微软雅黑"/>
-                <a:cs typeface="微软雅黑"/>
-              </a:rPr>
-              <a:t>张贴图批量重设，读回一致</a:t>
-            </a:r>
-          </a:p>
-        </p:txBody>
-      </p:sp>
-      <p:sp>
-        <p:nvSpPr>
-          <p:cNvPr id="9" name="Rectangle 8"/>
+                <a:spcPts val="1200"/>
+              </a:lnSpc>
+            </a:pPr>
+            <a:r>
+              <a:rPr sz="1000" b="1" lang="zh-CN" altLang="en-US">
+                <a:solidFill>
+                  <a:srgbClr val="F5F5F5">
+                    <a:alpha val="40000"/>
+                  </a:srgbClr>
+                </a:solidFill>
+                <a:latin typeface="Consolas"/>
+                <a:ea typeface="微软雅黑"/>
+                <a:cs typeface="微软雅黑"/>
+              </a:rPr>
+              <a:t>类别</a:t>
+            </a:r>
+          </a:p>
+        </p:txBody>
+      </p:sp>
+      <p:sp>
+        <p:nvSpPr>
+          <p:cNvPr id="9" name="TextBox 8"/>
+          <p:cNvSpPr txBox="1"/>
+          <p:nvPr/>
+        </p:nvSpPr>
+        <p:spPr>
+          <a:xfrm>
+            <a:off x="1816100" y="2667000"/>
+            <a:ext cx="1397000" cy="190500"/>
+          </a:xfrm>
+          <a:prstGeom prst="rect">
+            <a:avLst/>
+          </a:prstGeom>
+          <a:noFill/>
+        </p:spPr>
+        <p:txBody>
+          <a:bodyPr wrap="square" lIns="0" rIns="0" tIns="0" bIns="0" anchor="t">
+            <a:noAutofit/>
+          </a:bodyPr>
+          <a:lstStyle/>
+          <a:p>
+            <a:pPr algn="l">
+              <a:lnSpc>
+                <a:spcPts val="1200"/>
+              </a:lnSpc>
+            </a:pPr>
+            <a:r>
+              <a:rPr sz="1000" b="1" lang="zh-CN" altLang="en-US">
+                <a:solidFill>
+                  <a:srgbClr val="F5F5F5">
+                    <a:alpha val="40000"/>
+                  </a:srgbClr>
+                </a:solidFill>
+                <a:latin typeface="Consolas"/>
+                <a:ea typeface="微软雅黑"/>
+                <a:cs typeface="微软雅黑"/>
+              </a:rPr>
+              <a:t>数量</a:t>
+            </a:r>
+          </a:p>
+        </p:txBody>
+      </p:sp>
+      <p:sp>
+        <p:nvSpPr>
+          <p:cNvPr id="10" name="TextBox 9"/>
+          <p:cNvSpPr txBox="1"/>
+          <p:nvPr/>
+        </p:nvSpPr>
+        <p:spPr>
+          <a:xfrm>
+            <a:off x="2387600" y="2667000"/>
+            <a:ext cx="1397000" cy="190500"/>
+          </a:xfrm>
+          <a:prstGeom prst="rect">
+            <a:avLst/>
+          </a:prstGeom>
+          <a:noFill/>
+        </p:spPr>
+        <p:txBody>
+          <a:bodyPr wrap="square" lIns="0" rIns="0" tIns="0" bIns="0" anchor="t">
+            <a:noAutofit/>
+          </a:bodyPr>
+          <a:lstStyle/>
+          <a:p>
+            <a:pPr algn="l">
+              <a:lnSpc>
+                <a:spcPts val="1200"/>
+              </a:lnSpc>
+            </a:pPr>
+            <a:r>
+              <a:rPr sz="1000" b="1" lang="zh-CN" altLang="en-US">
+                <a:solidFill>
+                  <a:srgbClr val="F5F5F5">
+                    <a:alpha val="40000"/>
+                  </a:srgbClr>
+                </a:solidFill>
+                <a:latin typeface="Consolas"/>
+                <a:ea typeface="微软雅黑"/>
+                <a:cs typeface="微软雅黑"/>
+              </a:rPr>
+              <a:t>NeverStream</a:t>
+            </a:r>
+          </a:p>
+        </p:txBody>
+      </p:sp>
+      <p:sp>
+        <p:nvSpPr>
+          <p:cNvPr id="11" name="TextBox 10"/>
+          <p:cNvSpPr txBox="1"/>
+          <p:nvPr/>
+        </p:nvSpPr>
+        <p:spPr>
+          <a:xfrm>
+            <a:off x="3467100" y="2667000"/>
+            <a:ext cx="1397000" cy="190500"/>
+          </a:xfrm>
+          <a:prstGeom prst="rect">
+            <a:avLst/>
+          </a:prstGeom>
+          <a:noFill/>
+        </p:spPr>
+        <p:txBody>
+          <a:bodyPr wrap="square" lIns="0" rIns="0" tIns="0" bIns="0" anchor="t">
+            <a:noAutofit/>
+          </a:bodyPr>
+          <a:lstStyle/>
+          <a:p>
+            <a:pPr algn="l">
+              <a:lnSpc>
+                <a:spcPts val="1200"/>
+              </a:lnSpc>
+            </a:pPr>
+            <a:r>
+              <a:rPr sz="1000" b="1" lang="zh-CN" altLang="en-US">
+                <a:solidFill>
+                  <a:srgbClr val="F5F5F5">
+                    <a:alpha val="40000"/>
+                  </a:srgbClr>
+                </a:solidFill>
+                <a:latin typeface="Consolas"/>
+                <a:ea typeface="微软雅黑"/>
+                <a:cs typeface="微软雅黑"/>
+              </a:rPr>
+              <a:t>贴图组</a:t>
+            </a:r>
+          </a:p>
+        </p:txBody>
+      </p:sp>
+      <p:sp>
+        <p:nvSpPr>
+          <p:cNvPr id="12" name="TextBox 11"/>
+          <p:cNvSpPr txBox="1"/>
+          <p:nvPr/>
+        </p:nvSpPr>
+        <p:spPr>
+          <a:xfrm>
+            <a:off x="4483100" y="2667000"/>
+            <a:ext cx="1397000" cy="190500"/>
+          </a:xfrm>
+          <a:prstGeom prst="rect">
+            <a:avLst/>
+          </a:prstGeom>
+          <a:noFill/>
+        </p:spPr>
+        <p:txBody>
+          <a:bodyPr wrap="square" lIns="0" rIns="0" tIns="0" bIns="0" anchor="t">
+            <a:noAutofit/>
+          </a:bodyPr>
+          <a:lstStyle/>
+          <a:p>
+            <a:pPr algn="l">
+              <a:lnSpc>
+                <a:spcPts val="1200"/>
+              </a:lnSpc>
+            </a:pPr>
+            <a:r>
+              <a:rPr sz="1000" b="1" lang="zh-CN" altLang="en-US">
+                <a:solidFill>
+                  <a:srgbClr val="F5F5F5">
+                    <a:alpha val="40000"/>
+                  </a:srgbClr>
+                </a:solidFill>
+                <a:latin typeface="Consolas"/>
+                <a:ea typeface="微软雅黑"/>
+                <a:cs typeface="微软雅黑"/>
+              </a:rPr>
+              <a:t>寻址</a:t>
+            </a:r>
+            <a:r>
+              <a:rPr sz="1000" b="1" lang="zh-CN" altLang="en-US">
+                <a:solidFill>
+                  <a:srgbClr val="F5F5F5">
+                    <a:alpha val="40000"/>
+                  </a:srgbClr>
+                </a:solidFill>
+                <a:latin typeface="微软雅黑"/>
+                <a:ea typeface="微软雅黑"/>
+                <a:cs typeface="微软雅黑"/>
+              </a:rPr>
+              <a:t> </a:t>
+            </a:r>
+            <a:r>
+              <a:rPr sz="1000" b="1" lang="zh-CN" altLang="en-US">
+                <a:solidFill>
+                  <a:srgbClr val="F5F5F5">
+                    <a:alpha val="40000"/>
+                  </a:srgbClr>
+                </a:solidFill>
+                <a:latin typeface="Consolas"/>
+                <a:ea typeface="微软雅黑"/>
+                <a:cs typeface="微软雅黑"/>
+              </a:rPr>
+              <a:t>/</a:t>
+            </a:r>
+            <a:r>
+              <a:rPr sz="1000" b="1" lang="zh-CN" altLang="en-US">
+                <a:solidFill>
+                  <a:srgbClr val="F5F5F5">
+                    <a:alpha val="40000"/>
+                  </a:srgbClr>
+                </a:solidFill>
+                <a:latin typeface="微软雅黑"/>
+                <a:ea typeface="微软雅黑"/>
+                <a:cs typeface="微软雅黑"/>
+              </a:rPr>
+              <a:t> </a:t>
+            </a:r>
+            <a:r>
+              <a:rPr sz="1000" b="1" lang="zh-CN" altLang="en-US">
+                <a:solidFill>
+                  <a:srgbClr val="F5F5F5">
+                    <a:alpha val="40000"/>
+                  </a:srgbClr>
+                </a:solidFill>
+                <a:latin typeface="Consolas"/>
+                <a:ea typeface="微软雅黑"/>
+                <a:cs typeface="微软雅黑"/>
+              </a:rPr>
+              <a:t>Mip</a:t>
+            </a:r>
+          </a:p>
+        </p:txBody>
+      </p:sp>
+      <p:sp>
+        <p:nvSpPr>
+          <p:cNvPr id="13" name="Rectangle 12"/>
           <p:cNvSpPr/>
           <p:nvPr/>
         </p:nvSpPr>
         <p:spPr>
           <a:xfrm>
-            <a:off x="609600" y="3048000"/>
-            <a:ext cx="4064000" cy="6350"/>
+            <a:off x="609600" y="2895600"/>
+            <a:ext cx="4953000" cy="6350"/>
           </a:xfrm>
           <a:prstGeom prst="rect">
             <a:avLst/>
           </a:prstGeom>
           <a:solidFill>
             <a:srgbClr val="F5F5F5">
-              <a:alpha val="12000"/>
+              <a:alpha val="10000"/>
             </a:srgbClr>
           </a:solidFill>
           <a:ln>
@@ -11043,14 +11115,14 @@
       </p:sp>
       <p:sp>
         <p:nvSpPr>
-          <p:cNvPr id="10" name="TextBox 9"/>
-          <p:cNvSpPr txBox="1"/>
-          <p:nvPr/>
-        </p:nvSpPr>
-        <p:spPr>
-          <a:xfrm>
-            <a:off x="609600" y="3225800"/>
-            <a:ext cx="4064000" cy="228600"/>
+          <p:cNvPr id="14" name="TextBox 13"/>
+          <p:cNvSpPr txBox="1"/>
+          <p:nvPr/>
+        </p:nvSpPr>
+        <p:spPr>
+          <a:xfrm>
+            <a:off x="609600" y="2971800"/>
+            <a:ext cx="1270000" cy="254000"/>
           </a:xfrm>
           <a:prstGeom prst="rect">
             <a:avLst/>
@@ -11069,29 +11141,29 @@
               </a:lnSpc>
             </a:pPr>
             <a:r>
-              <a:rPr sz="1200" b="1" lang="zh-CN" altLang="en-US" spc="100">
-                <a:solidFill>
-                  <a:srgbClr val="0FF796"/>
-                </a:solidFill>
-                <a:latin typeface="Consolas"/>
-                <a:ea typeface="微软雅黑"/>
-                <a:cs typeface="微软雅黑"/>
-              </a:rPr>
-              <a:t>更早一轮</a:t>
-            </a:r>
-          </a:p>
-        </p:txBody>
-      </p:sp>
-      <p:sp>
-        <p:nvSpPr>
-          <p:cNvPr id="11" name="TextBox 10"/>
-          <p:cNvSpPr txBox="1"/>
-          <p:nvPr/>
-        </p:nvSpPr>
-        <p:spPr>
-          <a:xfrm>
-            <a:off x="609600" y="3530600"/>
-            <a:ext cx="4064000" cy="571500"/>
+              <a:rPr sz="1200" b="1" lang="zh-CN" altLang="en-US">
+                <a:solidFill>
+                  <a:srgbClr val="F5F5F5"/>
+                </a:solidFill>
+                <a:latin typeface="Consolas"/>
+                <a:ea typeface="微软雅黑"/>
+                <a:cs typeface="微软雅黑"/>
+              </a:rPr>
+              <a:t>手游主序列</a:t>
+            </a:r>
+          </a:p>
+        </p:txBody>
+      </p:sp>
+      <p:sp>
+        <p:nvSpPr>
+          <p:cNvPr id="15" name="TextBox 14"/>
+          <p:cNvSpPr txBox="1"/>
+          <p:nvPr/>
+        </p:nvSpPr>
+        <p:spPr>
+          <a:xfrm>
+            <a:off x="1816100" y="2971800"/>
+            <a:ext cx="1270000" cy="254000"/>
           </a:xfrm>
           <a:prstGeom prst="rect">
             <a:avLst/>
@@ -11106,55 +11178,35 @@
           <a:p>
             <a:pPr algn="l">
               <a:lnSpc>
-                <a:spcPts val="3600"/>
-              </a:lnSpc>
-            </a:pPr>
-            <a:r>
-              <a:rPr sz="3600" b="1" lang="zh-CN" altLang="en-US">
-                <a:solidFill>
-                  <a:srgbClr val="F5F5F5"/>
-                </a:solidFill>
-                <a:latin typeface="Consolas"/>
-                <a:ea typeface="微软雅黑"/>
-                <a:cs typeface="微软雅黑"/>
-              </a:rPr>
-              <a:t>115</a:t>
-            </a:r>
-            <a:r>
-              <a:rPr sz="1500" b="1" lang="zh-CN" altLang="en-US">
-                <a:solidFill>
-                  <a:srgbClr val="F5F5F5"/>
-                </a:solidFill>
-                <a:latin typeface="微软雅黑"/>
-                <a:ea typeface="微软雅黑"/>
-                <a:cs typeface="微软雅黑"/>
-              </a:rPr>
-              <a:t> </a:t>
-            </a:r>
-            <a:r>
-              <a:rPr sz="1500" b="1" lang="zh-CN" altLang="en-US">
-                <a:solidFill>
-                  <a:srgbClr val="F5F5F5"/>
-                </a:solidFill>
-                <a:latin typeface="Consolas"/>
-                <a:ea typeface="微软雅黑"/>
-                <a:cs typeface="微软雅黑"/>
-              </a:rPr>
-              <a:t>个包</a:t>
-            </a:r>
-          </a:p>
-        </p:txBody>
-      </p:sp>
-      <p:sp>
-        <p:nvSpPr>
-          <p:cNvPr id="12" name="TextBox 11"/>
-          <p:cNvSpPr txBox="1"/>
-          <p:nvPr/>
-        </p:nvSpPr>
-        <p:spPr>
-          <a:xfrm>
-            <a:off x="609600" y="4114800"/>
-            <a:ext cx="4064000" cy="508000"/>
+                <a:spcPts val="1560"/>
+              </a:lnSpc>
+            </a:pPr>
+            <a:r>
+              <a:rPr sz="1200" b="0" lang="zh-CN" altLang="en-US">
+                <a:solidFill>
+                  <a:srgbClr val="F5F5F5">
+                    <a:alpha val="70000"/>
+                  </a:srgbClr>
+                </a:solidFill>
+                <a:latin typeface="Consolas"/>
+                <a:ea typeface="微软雅黑"/>
+                <a:cs typeface="微软雅黑"/>
+              </a:rPr>
+              <a:t>86</a:t>
+            </a:r>
+          </a:p>
+        </p:txBody>
+      </p:sp>
+      <p:sp>
+        <p:nvSpPr>
+          <p:cNvPr id="16" name="TextBox 15"/>
+          <p:cNvSpPr txBox="1"/>
+          <p:nvPr/>
+        </p:nvSpPr>
+        <p:spPr>
+          <a:xfrm>
+            <a:off x="2387600" y="2971800"/>
+            <a:ext cx="1270000" cy="254000"/>
           </a:xfrm>
           <a:prstGeom prst="rect">
             <a:avLst/>
@@ -11169,11 +11221,11 @@
           <a:p>
             <a:pPr algn="l">
               <a:lnSpc>
-                <a:spcPts val="2080"/>
-              </a:lnSpc>
-            </a:pPr>
-            <a:r>
-              <a:rPr sz="1300" b="0" lang="zh-CN" altLang="en-US">
+                <a:spcPts val="1560"/>
+              </a:lnSpc>
+            </a:pPr>
+            <a:r>
+              <a:rPr sz="1200" b="0" lang="zh-CN" altLang="en-US">
                 <a:solidFill>
                   <a:srgbClr val="F5F5F5">
                     <a:alpha val="70000"/>
@@ -11183,23 +11235,83 @@
                 <a:ea typeface="微软雅黑"/>
                 <a:cs typeface="微软雅黑"/>
               </a:rPr>
-              <a:t>粒子系统</a:t>
-            </a:r>
-            <a:r>
-              <a:rPr sz="1300" b="0" lang="zh-CN" altLang="en-US">
+              <a:t>关闭</a:t>
+            </a:r>
+          </a:p>
+        </p:txBody>
+      </p:sp>
+      <p:sp>
+        <p:nvSpPr>
+          <p:cNvPr id="17" name="TextBox 16"/>
+          <p:cNvSpPr txBox="1"/>
+          <p:nvPr/>
+        </p:nvSpPr>
+        <p:spPr>
+          <a:xfrm>
+            <a:off x="3467100" y="2971800"/>
+            <a:ext cx="1270000" cy="254000"/>
+          </a:xfrm>
+          <a:prstGeom prst="rect">
+            <a:avLst/>
+          </a:prstGeom>
+          <a:noFill/>
+        </p:spPr>
+        <p:txBody>
+          <a:bodyPr wrap="square" lIns="0" rIns="0" tIns="0" bIns="0" anchor="t">
+            <a:noAutofit/>
+          </a:bodyPr>
+          <a:lstStyle/>
+          <a:p>
+            <a:pPr algn="l">
+              <a:lnSpc>
+                <a:spcPts val="1560"/>
+              </a:lnSpc>
+            </a:pPr>
+            <a:r>
+              <a:rPr sz="1200" b="0" lang="zh-CN" altLang="en-US">
                 <a:solidFill>
                   <a:srgbClr val="F5F5F5">
                     <a:alpha val="70000"/>
                   </a:srgbClr>
                 </a:solidFill>
-                <a:latin typeface="微软雅黑"/>
-                <a:ea typeface="微软雅黑"/>
-                <a:cs typeface="微软雅黑"/>
-              </a:rPr>
-              <a:t> </a:t>
-            </a:r>
-            <a:r>
-              <a:rPr sz="1300" b="0" lang="zh-CN" altLang="en-US">
+                <a:latin typeface="Consolas"/>
+                <a:ea typeface="微软雅黑"/>
+                <a:cs typeface="微软雅黑"/>
+              </a:rPr>
+              <a:t>DistantVFX</a:t>
+            </a:r>
+          </a:p>
+        </p:txBody>
+      </p:sp>
+      <p:sp>
+        <p:nvSpPr>
+          <p:cNvPr id="18" name="TextBox 17"/>
+          <p:cNvSpPr txBox="1"/>
+          <p:nvPr/>
+        </p:nvSpPr>
+        <p:spPr>
+          <a:xfrm>
+            <a:off x="4483100" y="2971800"/>
+            <a:ext cx="1270000" cy="254000"/>
+          </a:xfrm>
+          <a:prstGeom prst="rect">
+            <a:avLst/>
+          </a:prstGeom>
+          <a:noFill/>
+        </p:spPr>
+        <p:txBody>
+          <a:bodyPr wrap="square" lIns="0" rIns="0" tIns="0" bIns="0" anchor="t">
+            <a:noAutofit/>
+          </a:bodyPr>
+          <a:lstStyle/>
+          <a:p>
+            <a:pPr algn="l">
+              <a:lnSpc>
+                <a:spcPts val="1560"/>
+              </a:lnSpc>
+            </a:pPr>
+            <a:r>
+              <a:rPr sz="1200" b="0" lang="zh-CN" altLang="en-US">
                 <a:solidFill>
                   <a:srgbClr val="F5F5F5">
                     <a:alpha val="70000"/>
@@ -11209,209 +11321,28 @@
                 <a:ea typeface="微软雅黑"/>
                 <a:cs typeface="微软雅黑"/>
               </a:rPr>
-              <a:t>48</a:t>
-            </a:r>
-            <a:r>
-              <a:rPr sz="1300" b="0" lang="zh-CN" altLang="en-US">
-                <a:solidFill>
-                  <a:srgbClr val="F5F5F5">
-                    <a:alpha val="70000"/>
-                  </a:srgbClr>
-                </a:solidFill>
-                <a:latin typeface="微软雅黑"/>
-                <a:ea typeface="微软雅黑"/>
-                <a:cs typeface="微软雅黑"/>
-              </a:rPr>
-              <a:t> </a:t>
-            </a:r>
-            <a:r>
-              <a:rPr sz="1300" b="0" lang="zh-CN" altLang="en-US">
-                <a:solidFill>
-                  <a:srgbClr val="F5F5F5">
-                    <a:alpha val="70000"/>
-                  </a:srgbClr>
-                </a:solidFill>
-                <a:latin typeface="Consolas"/>
-                <a:ea typeface="微软雅黑"/>
-                <a:cs typeface="微软雅黑"/>
-              </a:rPr>
-              <a:t>个、材质实例</a:t>
-            </a:r>
-            <a:r>
-              <a:rPr sz="1300" b="0" lang="zh-CN" altLang="en-US">
-                <a:solidFill>
-                  <a:srgbClr val="F5F5F5">
-                    <a:alpha val="70000"/>
-                  </a:srgbClr>
-                </a:solidFill>
-                <a:latin typeface="微软雅黑"/>
-                <a:ea typeface="微软雅黑"/>
-                <a:cs typeface="微软雅黑"/>
-              </a:rPr>
-              <a:t> </a:t>
-            </a:r>
-            <a:r>
-              <a:rPr sz="1300" b="0" lang="zh-CN" altLang="en-US">
-                <a:solidFill>
-                  <a:srgbClr val="F5F5F5">
-                    <a:alpha val="70000"/>
-                  </a:srgbClr>
-                </a:solidFill>
-                <a:latin typeface="Consolas"/>
-                <a:ea typeface="微软雅黑"/>
-                <a:cs typeface="微软雅黑"/>
-              </a:rPr>
-              <a:t>67</a:t>
-            </a:r>
-            <a:r>
-              <a:rPr sz="1300" b="0" lang="zh-CN" altLang="en-US">
-                <a:solidFill>
-                  <a:srgbClr val="F5F5F5">
-                    <a:alpha val="70000"/>
-                  </a:srgbClr>
-                </a:solidFill>
-                <a:latin typeface="微软雅黑"/>
-                <a:ea typeface="微软雅黑"/>
-                <a:cs typeface="微软雅黑"/>
-              </a:rPr>
-              <a:t> </a:t>
-            </a:r>
-            <a:r>
-              <a:rPr sz="1300" b="0" lang="zh-CN" altLang="en-US">
-                <a:solidFill>
-                  <a:srgbClr val="F5F5F5">
-                    <a:alpha val="70000"/>
-                  </a:srgbClr>
-                </a:solidFill>
-                <a:latin typeface="Consolas"/>
-                <a:ea typeface="微软雅黑"/>
-                <a:cs typeface="微软雅黑"/>
-              </a:rPr>
-              <a:t>个，</a:t>
-            </a:r>
-          </a:p>
-          <a:p>
-            <a:pPr algn="l">
-              <a:lnSpc>
-                <a:spcPts val="2080"/>
-              </a:lnSpc>
-            </a:pPr>
-            <a:r>
-              <a:rPr sz="1300" b="0" lang="zh-CN" altLang="en-US">
-                <a:solidFill>
-                  <a:srgbClr val="F5F5F5">
-                    <a:alpha val="70000"/>
-                  </a:srgbClr>
-                </a:solidFill>
-                <a:latin typeface="Consolas"/>
-                <a:ea typeface="微软雅黑"/>
-                <a:cs typeface="微软雅黑"/>
-              </a:rPr>
-              <a:t>读回无错误</a:t>
-            </a:r>
-          </a:p>
-        </p:txBody>
-      </p:sp>
-      <p:sp>
-        <p:nvSpPr>
-          <p:cNvPr id="13" name="TextBox 12"/>
-          <p:cNvSpPr txBox="1"/>
-          <p:nvPr/>
-        </p:nvSpPr>
-        <p:spPr>
-          <a:xfrm>
-            <a:off x="609600" y="5334000"/>
-            <a:ext cx="4064000" cy="571500"/>
-          </a:xfrm>
-          <a:prstGeom prst="rect">
-            <a:avLst/>
-          </a:prstGeom>
-          <a:noFill/>
-        </p:spPr>
-        <p:txBody>
-          <a:bodyPr wrap="square" lIns="0" rIns="0" tIns="0" bIns="0" anchor="t">
-            <a:noAutofit/>
-          </a:bodyPr>
-          <a:lstStyle/>
-          <a:p>
-            <a:pPr algn="l">
-              <a:lnSpc>
-                <a:spcPts val="1950"/>
-              </a:lnSpc>
-            </a:pPr>
-            <a:r>
-              <a:rPr sz="1300" b="0" lang="zh-CN" altLang="en-US">
-                <a:solidFill>
-                  <a:srgbClr val="0FF796"/>
-                </a:solidFill>
-                <a:latin typeface="Consolas"/>
-                <a:ea typeface="微软雅黑"/>
-                <a:cs typeface="微软雅黑"/>
-              </a:rPr>
-              <a:t>规则已内置于导入器，</a:t>
-            </a:r>
-          </a:p>
-          <a:p>
-            <a:pPr algn="l">
-              <a:lnSpc>
-                <a:spcPts val="1950"/>
-              </a:lnSpc>
-            </a:pPr>
-            <a:r>
-              <a:rPr sz="1300" b="0" lang="zh-CN" altLang="en-US">
-                <a:solidFill>
-                  <a:srgbClr val="0FF796"/>
-                </a:solidFill>
-                <a:latin typeface="Consolas"/>
-                <a:ea typeface="微软雅黑"/>
-                <a:cs typeface="微软雅黑"/>
-              </a:rPr>
-              <a:t>新资源导入时自动执行</a:t>
-            </a:r>
-          </a:p>
-        </p:txBody>
-      </p:sp>
-      <p:pic>
-        <p:nvPicPr>
-          <p:cNvPr id="14" name="Picture 13" descr="p12_ue.jpg"/>
-          <p:cNvPicPr>
-            <a:picLocks noChangeAspect="1"/>
-          </p:cNvPicPr>
-          <p:nvPr/>
-        </p:nvPicPr>
-        <p:blipFill>
-          <a:blip r:embed="rId2"/>
-          <a:stretch>
-            <a:fillRect/>
-          </a:stretch>
-        </p:blipFill>
-        <p:spPr>
-          <a:xfrm>
-            <a:off x="5181600" y="1358900"/>
-            <a:ext cx="6400800" cy="3594100"/>
-          </a:xfrm>
-          <a:prstGeom prst="rect">
-            <a:avLst/>
-          </a:prstGeom>
-        </p:spPr>
-      </p:pic>
-      <p:sp>
-        <p:nvSpPr>
-          <p:cNvPr id="15" name="Rectangle 14"/>
+              <a:t>Wrap</a:t>
+            </a:r>
+          </a:p>
+        </p:txBody>
+      </p:sp>
+      <p:sp>
+        <p:nvSpPr>
+          <p:cNvPr id="19" name="Rectangle 18"/>
           <p:cNvSpPr/>
           <p:nvPr/>
         </p:nvSpPr>
         <p:spPr>
           <a:xfrm>
-            <a:off x="5257800" y="4622800"/>
-            <a:ext cx="1353820" cy="254000"/>
+            <a:off x="609600" y="3276600"/>
+            <a:ext cx="4953000" cy="6350"/>
           </a:xfrm>
           <a:prstGeom prst="rect">
             <a:avLst/>
           </a:prstGeom>
           <a:solidFill>
-            <a:srgbClr val="0A0A0A">
-              <a:alpha val="72000"/>
+            <a:srgbClr val="F5F5F5">
+              <a:alpha val="10000"/>
             </a:srgbClr>
           </a:solidFill>
           <a:ln>
@@ -11428,14 +11359,1636 @@
       </p:sp>
       <p:sp>
         <p:nvSpPr>
-          <p:cNvPr id="16" name="source_tag"/>
-          <p:cNvSpPr txBox="1"/>
-          <p:nvPr/>
-        </p:nvSpPr>
-        <p:spPr>
-          <a:xfrm>
-            <a:off x="5257800" y="4622800"/>
-            <a:ext cx="1353820" cy="254000"/>
+          <p:cNvPr id="20" name="TextBox 19"/>
+          <p:cNvSpPr txBox="1"/>
+          <p:nvPr/>
+        </p:nvSpPr>
+        <p:spPr>
+          <a:xfrm>
+            <a:off x="609600" y="3352800"/>
+            <a:ext cx="1270000" cy="254000"/>
+          </a:xfrm>
+          <a:prstGeom prst="rect">
+            <a:avLst/>
+          </a:prstGeom>
+          <a:noFill/>
+        </p:spPr>
+        <p:txBody>
+          <a:bodyPr wrap="square" lIns="0" rIns="0" tIns="0" bIns="0" anchor="t">
+            <a:noAutofit/>
+          </a:bodyPr>
+          <a:lstStyle/>
+          <a:p>
+            <a:pPr algn="l">
+              <a:lnSpc>
+                <a:spcPts val="1560"/>
+              </a:lnSpc>
+            </a:pPr>
+            <a:r>
+              <a:rPr sz="1200" b="1" lang="zh-CN" altLang="en-US">
+                <a:solidFill>
+                  <a:srgbClr val="F5F5F5"/>
+                </a:solidFill>
+                <a:latin typeface="Consolas"/>
+                <a:ea typeface="微软雅黑"/>
+                <a:cs typeface="微软雅黑"/>
+              </a:rPr>
+              <a:t>PC</a:t>
+            </a:r>
+            <a:r>
+              <a:rPr sz="1200" b="1" lang="zh-CN" altLang="en-US">
+                <a:solidFill>
+                  <a:srgbClr val="F5F5F5"/>
+                </a:solidFill>
+                <a:latin typeface="微软雅黑"/>
+                <a:ea typeface="微软雅黑"/>
+                <a:cs typeface="微软雅黑"/>
+              </a:rPr>
+              <a:t> </a:t>
+            </a:r>
+            <a:r>
+              <a:rPr sz="1200" b="1" lang="zh-CN" altLang="en-US">
+                <a:solidFill>
+                  <a:srgbClr val="F5F5F5"/>
+                </a:solidFill>
+                <a:latin typeface="Consolas"/>
+                <a:ea typeface="微软雅黑"/>
+                <a:cs typeface="微软雅黑"/>
+              </a:rPr>
+              <a:t>主序列</a:t>
+            </a:r>
+          </a:p>
+        </p:txBody>
+      </p:sp>
+      <p:sp>
+        <p:nvSpPr>
+          <p:cNvPr id="21" name="TextBox 20"/>
+          <p:cNvSpPr txBox="1"/>
+          <p:nvPr/>
+        </p:nvSpPr>
+        <p:spPr>
+          <a:xfrm>
+            <a:off x="1816100" y="3352800"/>
+            <a:ext cx="1270000" cy="254000"/>
+          </a:xfrm>
+          <a:prstGeom prst="rect">
+            <a:avLst/>
+          </a:prstGeom>
+          <a:noFill/>
+        </p:spPr>
+        <p:txBody>
+          <a:bodyPr wrap="square" lIns="0" rIns="0" tIns="0" bIns="0" anchor="t">
+            <a:noAutofit/>
+          </a:bodyPr>
+          <a:lstStyle/>
+          <a:p>
+            <a:pPr algn="l">
+              <a:lnSpc>
+                <a:spcPts val="1560"/>
+              </a:lnSpc>
+            </a:pPr>
+            <a:r>
+              <a:rPr sz="1200" b="0" lang="zh-CN" altLang="en-US">
+                <a:solidFill>
+                  <a:srgbClr val="F5F5F5">
+                    <a:alpha val="70000"/>
+                  </a:srgbClr>
+                </a:solidFill>
+                <a:latin typeface="Consolas"/>
+                <a:ea typeface="微软雅黑"/>
+                <a:cs typeface="微软雅黑"/>
+              </a:rPr>
+              <a:t>40</a:t>
+            </a:r>
+          </a:p>
+        </p:txBody>
+      </p:sp>
+      <p:sp>
+        <p:nvSpPr>
+          <p:cNvPr id="22" name="TextBox 21"/>
+          <p:cNvSpPr txBox="1"/>
+          <p:nvPr/>
+        </p:nvSpPr>
+        <p:spPr>
+          <a:xfrm>
+            <a:off x="2387600" y="3352800"/>
+            <a:ext cx="1270000" cy="254000"/>
+          </a:xfrm>
+          <a:prstGeom prst="rect">
+            <a:avLst/>
+          </a:prstGeom>
+          <a:noFill/>
+        </p:spPr>
+        <p:txBody>
+          <a:bodyPr wrap="square" lIns="0" rIns="0" tIns="0" bIns="0" anchor="t">
+            <a:noAutofit/>
+          </a:bodyPr>
+          <a:lstStyle/>
+          <a:p>
+            <a:pPr algn="l">
+              <a:lnSpc>
+                <a:spcPts val="1560"/>
+              </a:lnSpc>
+            </a:pPr>
+            <a:r>
+              <a:rPr sz="1200" b="0" lang="zh-CN" altLang="en-US">
+                <a:solidFill>
+                  <a:srgbClr val="F5F5F5">
+                    <a:alpha val="70000"/>
+                  </a:srgbClr>
+                </a:solidFill>
+                <a:latin typeface="Consolas"/>
+                <a:ea typeface="微软雅黑"/>
+                <a:cs typeface="微软雅黑"/>
+              </a:rPr>
+              <a:t>关闭</a:t>
+            </a:r>
+          </a:p>
+        </p:txBody>
+      </p:sp>
+      <p:sp>
+        <p:nvSpPr>
+          <p:cNvPr id="23" name="TextBox 22"/>
+          <p:cNvSpPr txBox="1"/>
+          <p:nvPr/>
+        </p:nvSpPr>
+        <p:spPr>
+          <a:xfrm>
+            <a:off x="3467100" y="3352800"/>
+            <a:ext cx="1270000" cy="254000"/>
+          </a:xfrm>
+          <a:prstGeom prst="rect">
+            <a:avLst/>
+          </a:prstGeom>
+          <a:noFill/>
+        </p:spPr>
+        <p:txBody>
+          <a:bodyPr wrap="square" lIns="0" rIns="0" tIns="0" bIns="0" anchor="t">
+            <a:noAutofit/>
+          </a:bodyPr>
+          <a:lstStyle/>
+          <a:p>
+            <a:pPr algn="l">
+              <a:lnSpc>
+                <a:spcPts val="1560"/>
+              </a:lnSpc>
+            </a:pPr>
+            <a:r>
+              <a:rPr sz="1200" b="0" lang="zh-CN" altLang="en-US">
+                <a:solidFill>
+                  <a:srgbClr val="F5F5F5">
+                    <a:alpha val="70000"/>
+                  </a:srgbClr>
+                </a:solidFill>
+                <a:latin typeface="Consolas"/>
+                <a:ea typeface="微软雅黑"/>
+                <a:cs typeface="微软雅黑"/>
+              </a:rPr>
+              <a:t>DistantVFX</a:t>
+            </a:r>
+          </a:p>
+        </p:txBody>
+      </p:sp>
+      <p:sp>
+        <p:nvSpPr>
+          <p:cNvPr id="24" name="TextBox 23"/>
+          <p:cNvSpPr txBox="1"/>
+          <p:nvPr/>
+        </p:nvSpPr>
+        <p:spPr>
+          <a:xfrm>
+            <a:off x="4483100" y="3352800"/>
+            <a:ext cx="1270000" cy="254000"/>
+          </a:xfrm>
+          <a:prstGeom prst="rect">
+            <a:avLst/>
+          </a:prstGeom>
+          <a:noFill/>
+        </p:spPr>
+        <p:txBody>
+          <a:bodyPr wrap="square" lIns="0" rIns="0" tIns="0" bIns="0" anchor="t">
+            <a:noAutofit/>
+          </a:bodyPr>
+          <a:lstStyle/>
+          <a:p>
+            <a:pPr algn="l">
+              <a:lnSpc>
+                <a:spcPts val="1560"/>
+              </a:lnSpc>
+            </a:pPr>
+            <a:r>
+              <a:rPr sz="1200" b="0" lang="zh-CN" altLang="en-US">
+                <a:solidFill>
+                  <a:srgbClr val="F5F5F5">
+                    <a:alpha val="70000"/>
+                  </a:srgbClr>
+                </a:solidFill>
+                <a:latin typeface="Consolas"/>
+                <a:ea typeface="微软雅黑"/>
+                <a:cs typeface="微软雅黑"/>
+              </a:rPr>
+              <a:t>Wrap</a:t>
+            </a:r>
+          </a:p>
+        </p:txBody>
+      </p:sp>
+      <p:sp>
+        <p:nvSpPr>
+          <p:cNvPr id="25" name="Rectangle 24"/>
+          <p:cNvSpPr/>
+          <p:nvPr/>
+        </p:nvSpPr>
+        <p:spPr>
+          <a:xfrm>
+            <a:off x="609600" y="3657600"/>
+            <a:ext cx="4953000" cy="6350"/>
+          </a:xfrm>
+          <a:prstGeom prst="rect">
+            <a:avLst/>
+          </a:prstGeom>
+          <a:solidFill>
+            <a:srgbClr val="F5F5F5">
+              <a:alpha val="10000"/>
+            </a:srgbClr>
+          </a:solidFill>
+          <a:ln>
+            <a:noFill/>
+          </a:ln>
+        </p:spPr>
+        <p:txBody>
+          <a:bodyPr rtlCol="0" anchor="ctr"/>
+          <a:lstStyle/>
+          <a:p>
+            <a:pPr algn="ctr"/>
+          </a:p>
+        </p:txBody>
+      </p:sp>
+      <p:sp>
+        <p:nvSpPr>
+          <p:cNvPr id="26" name="TextBox 25"/>
+          <p:cNvSpPr txBox="1"/>
+          <p:nvPr/>
+        </p:nvSpPr>
+        <p:spPr>
+          <a:xfrm>
+            <a:off x="609600" y="3733800"/>
+            <a:ext cx="1270000" cy="254000"/>
+          </a:xfrm>
+          <a:prstGeom prst="rect">
+            <a:avLst/>
+          </a:prstGeom>
+          <a:noFill/>
+        </p:spPr>
+        <p:txBody>
+          <a:bodyPr wrap="square" lIns="0" rIns="0" tIns="0" bIns="0" anchor="t">
+            <a:noAutofit/>
+          </a:bodyPr>
+          <a:lstStyle/>
+          <a:p>
+            <a:pPr algn="l">
+              <a:lnSpc>
+                <a:spcPts val="1560"/>
+              </a:lnSpc>
+            </a:pPr>
+            <a:r>
+              <a:rPr sz="1200" b="1" lang="zh-CN" altLang="en-US">
+                <a:solidFill>
+                  <a:srgbClr val="F5F5F5"/>
+                </a:solidFill>
+                <a:latin typeface="Consolas"/>
+                <a:ea typeface="微软雅黑"/>
+                <a:cs typeface="微软雅黑"/>
+              </a:rPr>
+              <a:t>Ramp</a:t>
+            </a:r>
+          </a:p>
+        </p:txBody>
+      </p:sp>
+      <p:sp>
+        <p:nvSpPr>
+          <p:cNvPr id="27" name="TextBox 26"/>
+          <p:cNvSpPr txBox="1"/>
+          <p:nvPr/>
+        </p:nvSpPr>
+        <p:spPr>
+          <a:xfrm>
+            <a:off x="1816100" y="3733800"/>
+            <a:ext cx="1270000" cy="254000"/>
+          </a:xfrm>
+          <a:prstGeom prst="rect">
+            <a:avLst/>
+          </a:prstGeom>
+          <a:noFill/>
+        </p:spPr>
+        <p:txBody>
+          <a:bodyPr wrap="square" lIns="0" rIns="0" tIns="0" bIns="0" anchor="t">
+            <a:noAutofit/>
+          </a:bodyPr>
+          <a:lstStyle/>
+          <a:p>
+            <a:pPr algn="l">
+              <a:lnSpc>
+                <a:spcPts val="1560"/>
+              </a:lnSpc>
+            </a:pPr>
+            <a:r>
+              <a:rPr sz="1200" b="0" lang="zh-CN" altLang="en-US">
+                <a:solidFill>
+                  <a:srgbClr val="F5F5F5">
+                    <a:alpha val="70000"/>
+                  </a:srgbClr>
+                </a:solidFill>
+                <a:latin typeface="Consolas"/>
+                <a:ea typeface="微软雅黑"/>
+                <a:cs typeface="微软雅黑"/>
+              </a:rPr>
+              <a:t>23</a:t>
+            </a:r>
+          </a:p>
+        </p:txBody>
+      </p:sp>
+      <p:sp>
+        <p:nvSpPr>
+          <p:cNvPr id="28" name="TextBox 27"/>
+          <p:cNvSpPr txBox="1"/>
+          <p:nvPr/>
+        </p:nvSpPr>
+        <p:spPr>
+          <a:xfrm>
+            <a:off x="2387600" y="3733800"/>
+            <a:ext cx="1270000" cy="254000"/>
+          </a:xfrm>
+          <a:prstGeom prst="rect">
+            <a:avLst/>
+          </a:prstGeom>
+          <a:noFill/>
+        </p:spPr>
+        <p:txBody>
+          <a:bodyPr wrap="square" lIns="0" rIns="0" tIns="0" bIns="0" anchor="t">
+            <a:noAutofit/>
+          </a:bodyPr>
+          <a:lstStyle/>
+          <a:p>
+            <a:pPr algn="l">
+              <a:lnSpc>
+                <a:spcPts val="1560"/>
+              </a:lnSpc>
+            </a:pPr>
+            <a:r>
+              <a:rPr sz="1200" b="0" lang="zh-CN" altLang="en-US">
+                <a:solidFill>
+                  <a:srgbClr val="F5F5F5">
+                    <a:alpha val="70000"/>
+                  </a:srgbClr>
+                </a:solidFill>
+                <a:latin typeface="Consolas"/>
+                <a:ea typeface="微软雅黑"/>
+                <a:cs typeface="微软雅黑"/>
+              </a:rPr>
+              <a:t>关闭</a:t>
+            </a:r>
+          </a:p>
+        </p:txBody>
+      </p:sp>
+      <p:sp>
+        <p:nvSpPr>
+          <p:cNvPr id="29" name="TextBox 28"/>
+          <p:cNvSpPr txBox="1"/>
+          <p:nvPr/>
+        </p:nvSpPr>
+        <p:spPr>
+          <a:xfrm>
+            <a:off x="3467100" y="3733800"/>
+            <a:ext cx="1270000" cy="254000"/>
+          </a:xfrm>
+          <a:prstGeom prst="rect">
+            <a:avLst/>
+          </a:prstGeom>
+          <a:noFill/>
+        </p:spPr>
+        <p:txBody>
+          <a:bodyPr wrap="square" lIns="0" rIns="0" tIns="0" bIns="0" anchor="t">
+            <a:noAutofit/>
+          </a:bodyPr>
+          <a:lstStyle/>
+          <a:p>
+            <a:pPr algn="l">
+              <a:lnSpc>
+                <a:spcPts val="1560"/>
+              </a:lnSpc>
+            </a:pPr>
+            <a:r>
+              <a:rPr sz="1200" b="0" lang="zh-CN" altLang="en-US">
+                <a:solidFill>
+                  <a:srgbClr val="F5F5F5">
+                    <a:alpha val="70000"/>
+                  </a:srgbClr>
+                </a:solidFill>
+                <a:latin typeface="Consolas"/>
+                <a:ea typeface="微软雅黑"/>
+                <a:cs typeface="微软雅黑"/>
+              </a:rPr>
+              <a:t>DistantVFX</a:t>
+            </a:r>
+          </a:p>
+        </p:txBody>
+      </p:sp>
+      <p:sp>
+        <p:nvSpPr>
+          <p:cNvPr id="30" name="TextBox 29"/>
+          <p:cNvSpPr txBox="1"/>
+          <p:nvPr/>
+        </p:nvSpPr>
+        <p:spPr>
+          <a:xfrm>
+            <a:off x="4483100" y="3733800"/>
+            <a:ext cx="1270000" cy="254000"/>
+          </a:xfrm>
+          <a:prstGeom prst="rect">
+            <a:avLst/>
+          </a:prstGeom>
+          <a:noFill/>
+        </p:spPr>
+        <p:txBody>
+          <a:bodyPr wrap="square" lIns="0" rIns="0" tIns="0" bIns="0" anchor="t">
+            <a:noAutofit/>
+          </a:bodyPr>
+          <a:lstStyle/>
+          <a:p>
+            <a:pPr algn="l">
+              <a:lnSpc>
+                <a:spcPts val="1560"/>
+              </a:lnSpc>
+            </a:pPr>
+            <a:r>
+              <a:rPr sz="1200" b="0" lang="zh-CN" altLang="en-US">
+                <a:solidFill>
+                  <a:srgbClr val="F5F5F5">
+                    <a:alpha val="70000"/>
+                  </a:srgbClr>
+                </a:solidFill>
+                <a:latin typeface="Consolas"/>
+                <a:ea typeface="微软雅黑"/>
+                <a:cs typeface="微软雅黑"/>
+              </a:rPr>
+              <a:t>Clamp</a:t>
+            </a:r>
+            <a:r>
+              <a:rPr sz="1200" b="0" lang="zh-CN" altLang="en-US">
+                <a:solidFill>
+                  <a:srgbClr val="F5F5F5">
+                    <a:alpha val="70000"/>
+                  </a:srgbClr>
+                </a:solidFill>
+                <a:latin typeface="微软雅黑"/>
+                <a:ea typeface="微软雅黑"/>
+                <a:cs typeface="微软雅黑"/>
+              </a:rPr>
+              <a:t> </a:t>
+            </a:r>
+            <a:r>
+              <a:rPr sz="1200" b="0" lang="zh-CN" altLang="en-US">
+                <a:solidFill>
+                  <a:srgbClr val="F5F5F5">
+                    <a:alpha val="70000"/>
+                  </a:srgbClr>
+                </a:solidFill>
+                <a:latin typeface="Consolas"/>
+                <a:ea typeface="微软雅黑"/>
+                <a:cs typeface="微软雅黑"/>
+              </a:rPr>
+              <a:t>·</a:t>
+            </a:r>
+            <a:r>
+              <a:rPr sz="1200" b="0" lang="zh-CN" altLang="en-US">
+                <a:solidFill>
+                  <a:srgbClr val="F5F5F5">
+                    <a:alpha val="70000"/>
+                  </a:srgbClr>
+                </a:solidFill>
+                <a:latin typeface="微软雅黑"/>
+                <a:ea typeface="微软雅黑"/>
+                <a:cs typeface="微软雅黑"/>
+              </a:rPr>
+              <a:t> </a:t>
+            </a:r>
+            <a:r>
+              <a:rPr sz="1200" b="0" lang="zh-CN" altLang="en-US">
+                <a:solidFill>
+                  <a:srgbClr val="F5F5F5">
+                    <a:alpha val="70000"/>
+                  </a:srgbClr>
+                </a:solidFill>
+                <a:latin typeface="Consolas"/>
+                <a:ea typeface="微软雅黑"/>
+                <a:cs typeface="微软雅黑"/>
+              </a:rPr>
+              <a:t>NoMip</a:t>
+            </a:r>
+          </a:p>
+        </p:txBody>
+      </p:sp>
+      <p:sp>
+        <p:nvSpPr>
+          <p:cNvPr id="31" name="Rectangle 30"/>
+          <p:cNvSpPr/>
+          <p:nvPr/>
+        </p:nvSpPr>
+        <p:spPr>
+          <a:xfrm>
+            <a:off x="609600" y="4038600"/>
+            <a:ext cx="4953000" cy="6350"/>
+          </a:xfrm>
+          <a:prstGeom prst="rect">
+            <a:avLst/>
+          </a:prstGeom>
+          <a:solidFill>
+            <a:srgbClr val="F5F5F5">
+              <a:alpha val="10000"/>
+            </a:srgbClr>
+          </a:solidFill>
+          <a:ln>
+            <a:noFill/>
+          </a:ln>
+        </p:spPr>
+        <p:txBody>
+          <a:bodyPr rtlCol="0" anchor="ctr"/>
+          <a:lstStyle/>
+          <a:p>
+            <a:pPr algn="ctr"/>
+          </a:p>
+        </p:txBody>
+      </p:sp>
+      <p:sp>
+        <p:nvSpPr>
+          <p:cNvPr id="32" name="TextBox 31"/>
+          <p:cNvSpPr txBox="1"/>
+          <p:nvPr/>
+        </p:nvSpPr>
+        <p:spPr>
+          <a:xfrm>
+            <a:off x="609600" y="4102100"/>
+            <a:ext cx="4953000" cy="190500"/>
+          </a:xfrm>
+          <a:prstGeom prst="rect">
+            <a:avLst/>
+          </a:prstGeom>
+          <a:noFill/>
+        </p:spPr>
+        <p:txBody>
+          <a:bodyPr wrap="square" lIns="0" rIns="0" tIns="0" bIns="0" anchor="t">
+            <a:noAutofit/>
+          </a:bodyPr>
+          <a:lstStyle/>
+          <a:p>
+            <a:pPr algn="l">
+              <a:lnSpc>
+                <a:spcPts val="1250"/>
+              </a:lnSpc>
+            </a:pPr>
+            <a:r>
+              <a:rPr sz="1000" b="0" lang="zh-CN" altLang="en-US">
+                <a:solidFill>
+                  <a:srgbClr val="F5F5F5">
+                    <a:alpha val="55000"/>
+                  </a:srgbClr>
+                </a:solidFill>
+                <a:latin typeface="Consolas"/>
+                <a:ea typeface="微软雅黑"/>
+                <a:cs typeface="微软雅黑"/>
+              </a:rPr>
+              <a:t>UE</a:t>
+            </a:r>
+            <a:r>
+              <a:rPr sz="1000" b="0" lang="zh-CN" altLang="en-US">
+                <a:solidFill>
+                  <a:srgbClr val="F5F5F5">
+                    <a:alpha val="55000"/>
+                  </a:srgbClr>
+                </a:solidFill>
+                <a:latin typeface="微软雅黑"/>
+                <a:ea typeface="微软雅黑"/>
+                <a:cs typeface="微软雅黑"/>
+              </a:rPr>
+              <a:t> </a:t>
+            </a:r>
+            <a:r>
+              <a:rPr sz="1000" b="0" lang="zh-CN" altLang="en-US">
+                <a:solidFill>
+                  <a:srgbClr val="F5F5F5">
+                    <a:alpha val="55000"/>
+                  </a:srgbClr>
+                </a:solidFill>
+                <a:latin typeface="Consolas"/>
+                <a:ea typeface="微软雅黑"/>
+                <a:cs typeface="微软雅黑"/>
+              </a:rPr>
+              <a:t>读回</a:t>
+            </a:r>
+            <a:r>
+              <a:rPr sz="1000" b="0" lang="zh-CN" altLang="en-US">
+                <a:solidFill>
+                  <a:srgbClr val="F5F5F5">
+                    <a:alpha val="55000"/>
+                  </a:srgbClr>
+                </a:solidFill>
+                <a:latin typeface="微软雅黑"/>
+                <a:ea typeface="微软雅黑"/>
+                <a:cs typeface="微软雅黑"/>
+              </a:rPr>
+              <a:t> </a:t>
+            </a:r>
+            <a:r>
+              <a:rPr sz="1000" b="0" lang="zh-CN" altLang="en-US">
+                <a:solidFill>
+                  <a:srgbClr val="F5F5F5">
+                    <a:alpha val="55000"/>
+                  </a:srgbClr>
+                </a:solidFill>
+                <a:latin typeface="Consolas"/>
+                <a:ea typeface="微软雅黑"/>
+                <a:cs typeface="微软雅黑"/>
+              </a:rPr>
+              <a:t>·</a:t>
+            </a:r>
+            <a:r>
+              <a:rPr sz="1000" b="0" lang="zh-CN" altLang="en-US">
+                <a:solidFill>
+                  <a:srgbClr val="F5F5F5">
+                    <a:alpha val="55000"/>
+                  </a:srgbClr>
+                </a:solidFill>
+                <a:latin typeface="微软雅黑"/>
+                <a:ea typeface="微软雅黑"/>
+                <a:cs typeface="微软雅黑"/>
+              </a:rPr>
+              <a:t> </a:t>
+            </a:r>
+            <a:r>
+              <a:rPr sz="1000" b="0" lang="zh-CN" altLang="en-US">
+                <a:solidFill>
+                  <a:srgbClr val="F5F5F5">
+                    <a:alpha val="55000"/>
+                  </a:srgbClr>
+                </a:solidFill>
+                <a:latin typeface="Consolas"/>
+                <a:ea typeface="微软雅黑"/>
+                <a:cs typeface="微软雅黑"/>
+              </a:rPr>
+              <a:t>共用贴图单独列出，不随之修改</a:t>
+            </a:r>
+          </a:p>
+        </p:txBody>
+      </p:sp>
+      <p:sp>
+        <p:nvSpPr>
+          <p:cNvPr id="33" name="TextBox 32"/>
+          <p:cNvSpPr txBox="1"/>
+          <p:nvPr/>
+        </p:nvSpPr>
+        <p:spPr>
+          <a:xfrm>
+            <a:off x="6324600" y="1358900"/>
+            <a:ext cx="5257800" cy="228600"/>
+          </a:xfrm>
+          <a:prstGeom prst="rect">
+            <a:avLst/>
+          </a:prstGeom>
+          <a:noFill/>
+        </p:spPr>
+        <p:txBody>
+          <a:bodyPr wrap="square" lIns="0" rIns="0" tIns="0" bIns="0" anchor="t">
+            <a:noAutofit/>
+          </a:bodyPr>
+          <a:lstStyle/>
+          <a:p>
+            <a:pPr algn="l">
+              <a:lnSpc>
+                <a:spcPts val="1560"/>
+              </a:lnSpc>
+            </a:pPr>
+            <a:r>
+              <a:rPr sz="1200" b="1" lang="zh-CN" altLang="en-US" spc="200">
+                <a:solidFill>
+                  <a:srgbClr val="0FF796"/>
+                </a:solidFill>
+                <a:latin typeface="Consolas"/>
+                <a:ea typeface="微软雅黑"/>
+                <a:cs typeface="微软雅黑"/>
+              </a:rPr>
+              <a:t>更早一轮</a:t>
+            </a:r>
+            <a:r>
+              <a:rPr sz="1200" b="1" lang="zh-CN" altLang="en-US" spc="200">
+                <a:solidFill>
+                  <a:srgbClr val="0FF796"/>
+                </a:solidFill>
+                <a:latin typeface="微软雅黑"/>
+                <a:ea typeface="微软雅黑"/>
+                <a:cs typeface="微软雅黑"/>
+              </a:rPr>
+              <a:t> </a:t>
+            </a:r>
+            <a:r>
+              <a:rPr sz="1200" b="1" lang="zh-CN" altLang="en-US" spc="200">
+                <a:solidFill>
+                  <a:srgbClr val="0FF796"/>
+                </a:solidFill>
+                <a:latin typeface="Consolas"/>
+                <a:ea typeface="微软雅黑"/>
+                <a:cs typeface="微软雅黑"/>
+              </a:rPr>
+              <a:t>·</a:t>
+            </a:r>
+            <a:r>
+              <a:rPr sz="1200" b="1" lang="zh-CN" altLang="en-US" spc="200">
+                <a:solidFill>
+                  <a:srgbClr val="0FF796"/>
+                </a:solidFill>
+                <a:latin typeface="微软雅黑"/>
+                <a:ea typeface="微软雅黑"/>
+                <a:cs typeface="微软雅黑"/>
+              </a:rPr>
+              <a:t> </a:t>
+            </a:r>
+            <a:r>
+              <a:rPr sz="1200" b="1" lang="zh-CN" altLang="en-US" spc="200">
+                <a:solidFill>
+                  <a:srgbClr val="0FF796"/>
+                </a:solidFill>
+                <a:latin typeface="Consolas"/>
+                <a:ea typeface="微软雅黑"/>
+                <a:cs typeface="微软雅黑"/>
+              </a:rPr>
+              <a:t>粒子与材质</a:t>
+            </a:r>
+          </a:p>
+        </p:txBody>
+      </p:sp>
+      <p:sp>
+        <p:nvSpPr>
+          <p:cNvPr id="34" name="TextBox 33"/>
+          <p:cNvSpPr txBox="1"/>
+          <p:nvPr/>
+        </p:nvSpPr>
+        <p:spPr>
+          <a:xfrm>
+            <a:off x="6324600" y="1638300"/>
+            <a:ext cx="5257800" cy="825500"/>
+          </a:xfrm>
+          <a:prstGeom prst="rect">
+            <a:avLst/>
+          </a:prstGeom>
+          <a:noFill/>
+        </p:spPr>
+        <p:txBody>
+          <a:bodyPr wrap="square" lIns="0" rIns="0" tIns="0" bIns="0" anchor="t">
+            <a:noAutofit/>
+          </a:bodyPr>
+          <a:lstStyle/>
+          <a:p>
+            <a:pPr algn="l">
+              <a:lnSpc>
+                <a:spcPts val="5600"/>
+              </a:lnSpc>
+            </a:pPr>
+            <a:r>
+              <a:rPr sz="5600" b="1" lang="zh-CN" altLang="en-US">
+                <a:solidFill>
+                  <a:srgbClr val="F5F5F5"/>
+                </a:solidFill>
+                <a:latin typeface="Consolas"/>
+                <a:ea typeface="微软雅黑"/>
+                <a:cs typeface="微软雅黑"/>
+              </a:rPr>
+              <a:t>115</a:t>
+            </a:r>
+            <a:r>
+              <a:rPr sz="1300" b="0" lang="zh-CN" altLang="en-US">
+                <a:solidFill>
+                  <a:srgbClr val="F5F5F5">
+                    <a:alpha val="70000"/>
+                  </a:srgbClr>
+                </a:solidFill>
+                <a:latin typeface="微软雅黑"/>
+                <a:ea typeface="微软雅黑"/>
+                <a:cs typeface="微软雅黑"/>
+              </a:rPr>
+              <a:t>  </a:t>
+            </a:r>
+            <a:r>
+              <a:rPr sz="1300" b="0" lang="zh-CN" altLang="en-US">
+                <a:solidFill>
+                  <a:srgbClr val="F5F5F5">
+                    <a:alpha val="70000"/>
+                  </a:srgbClr>
+                </a:solidFill>
+                <a:latin typeface="Consolas"/>
+                <a:ea typeface="微软雅黑"/>
+                <a:cs typeface="微软雅黑"/>
+              </a:rPr>
+              <a:t>个包读回无错误</a:t>
+            </a:r>
+          </a:p>
+        </p:txBody>
+      </p:sp>
+      <p:sp>
+        <p:nvSpPr>
+          <p:cNvPr id="35" name="TextBox 34"/>
+          <p:cNvSpPr txBox="1"/>
+          <p:nvPr/>
+        </p:nvSpPr>
+        <p:spPr>
+          <a:xfrm>
+            <a:off x="6324600" y="2667000"/>
+            <a:ext cx="1905000" cy="190500"/>
+          </a:xfrm>
+          <a:prstGeom prst="rect">
+            <a:avLst/>
+          </a:prstGeom>
+          <a:noFill/>
+        </p:spPr>
+        <p:txBody>
+          <a:bodyPr wrap="square" lIns="0" rIns="0" tIns="0" bIns="0" anchor="t">
+            <a:noAutofit/>
+          </a:bodyPr>
+          <a:lstStyle/>
+          <a:p>
+            <a:pPr algn="l">
+              <a:lnSpc>
+                <a:spcPts val="1200"/>
+              </a:lnSpc>
+            </a:pPr>
+            <a:r>
+              <a:rPr sz="1000" b="1" lang="zh-CN" altLang="en-US">
+                <a:solidFill>
+                  <a:srgbClr val="F5F5F5">
+                    <a:alpha val="40000"/>
+                  </a:srgbClr>
+                </a:solidFill>
+                <a:latin typeface="Consolas"/>
+                <a:ea typeface="微软雅黑"/>
+                <a:cs typeface="微软雅黑"/>
+              </a:rPr>
+              <a:t>设置项</a:t>
+            </a:r>
+          </a:p>
+        </p:txBody>
+      </p:sp>
+      <p:sp>
+        <p:nvSpPr>
+          <p:cNvPr id="36" name="TextBox 35"/>
+          <p:cNvSpPr txBox="1"/>
+          <p:nvPr/>
+        </p:nvSpPr>
+        <p:spPr>
+          <a:xfrm>
+            <a:off x="8864600" y="2667000"/>
+            <a:ext cx="1905000" cy="190500"/>
+          </a:xfrm>
+          <a:prstGeom prst="rect">
+            <a:avLst/>
+          </a:prstGeom>
+          <a:noFill/>
+        </p:spPr>
+        <p:txBody>
+          <a:bodyPr wrap="square" lIns="0" rIns="0" tIns="0" bIns="0" anchor="t">
+            <a:noAutofit/>
+          </a:bodyPr>
+          <a:lstStyle/>
+          <a:p>
+            <a:pPr algn="l">
+              <a:lnSpc>
+                <a:spcPts val="1200"/>
+              </a:lnSpc>
+            </a:pPr>
+            <a:r>
+              <a:rPr sz="1000" b="1" lang="zh-CN" altLang="en-US">
+                <a:solidFill>
+                  <a:srgbClr val="F5F5F5">
+                    <a:alpha val="40000"/>
+                  </a:srgbClr>
+                </a:solidFill>
+                <a:latin typeface="Consolas"/>
+                <a:ea typeface="微软雅黑"/>
+                <a:cs typeface="微软雅黑"/>
+              </a:rPr>
+              <a:t>数量</a:t>
+            </a:r>
+          </a:p>
+        </p:txBody>
+      </p:sp>
+      <p:sp>
+        <p:nvSpPr>
+          <p:cNvPr id="37" name="Rectangle 36"/>
+          <p:cNvSpPr/>
+          <p:nvPr/>
+        </p:nvSpPr>
+        <p:spPr>
+          <a:xfrm>
+            <a:off x="6324600" y="2895600"/>
+            <a:ext cx="5257800" cy="6350"/>
+          </a:xfrm>
+          <a:prstGeom prst="rect">
+            <a:avLst/>
+          </a:prstGeom>
+          <a:solidFill>
+            <a:srgbClr val="F5F5F5">
+              <a:alpha val="10000"/>
+            </a:srgbClr>
+          </a:solidFill>
+          <a:ln>
+            <a:noFill/>
+          </a:ln>
+        </p:spPr>
+        <p:txBody>
+          <a:bodyPr rtlCol="0" anchor="ctr"/>
+          <a:lstStyle/>
+          <a:p>
+            <a:pPr algn="ctr"/>
+          </a:p>
+        </p:txBody>
+      </p:sp>
+      <p:sp>
+        <p:nvSpPr>
+          <p:cNvPr id="38" name="TextBox 37"/>
+          <p:cNvSpPr txBox="1"/>
+          <p:nvPr/>
+        </p:nvSpPr>
+        <p:spPr>
+          <a:xfrm>
+            <a:off x="6324600" y="2971800"/>
+            <a:ext cx="2540000" cy="254000"/>
+          </a:xfrm>
+          <a:prstGeom prst="rect">
+            <a:avLst/>
+          </a:prstGeom>
+          <a:noFill/>
+        </p:spPr>
+        <p:txBody>
+          <a:bodyPr wrap="square" lIns="0" rIns="0" tIns="0" bIns="0" anchor="t">
+            <a:noAutofit/>
+          </a:bodyPr>
+          <a:lstStyle/>
+          <a:p>
+            <a:pPr algn="l">
+              <a:lnSpc>
+                <a:spcPts val="1560"/>
+              </a:lnSpc>
+            </a:pPr>
+            <a:r>
+              <a:rPr sz="1200" b="1" lang="zh-CN" altLang="en-US">
+                <a:solidFill>
+                  <a:srgbClr val="F5F5F5"/>
+                </a:solidFill>
+                <a:latin typeface="Consolas"/>
+                <a:ea typeface="微软雅黑"/>
+                <a:cs typeface="微软雅黑"/>
+              </a:rPr>
+              <a:t>EmissiveDissolve</a:t>
+            </a:r>
+            <a:r>
+              <a:rPr sz="1200" b="1" lang="zh-CN" altLang="en-US">
+                <a:solidFill>
+                  <a:srgbClr val="F5F5F5"/>
+                </a:solidFill>
+                <a:latin typeface="微软雅黑"/>
+                <a:ea typeface="微软雅黑"/>
+                <a:cs typeface="微软雅黑"/>
+              </a:rPr>
+              <a:t> </a:t>
+            </a:r>
+            <a:r>
+              <a:rPr sz="1200" b="1" lang="zh-CN" altLang="en-US">
+                <a:solidFill>
+                  <a:srgbClr val="F5F5F5"/>
+                </a:solidFill>
+                <a:latin typeface="Consolas"/>
+                <a:ea typeface="微软雅黑"/>
+                <a:cs typeface="微软雅黑"/>
+              </a:rPr>
+              <a:t>0.98</a:t>
+            </a:r>
+          </a:p>
+        </p:txBody>
+      </p:sp>
+      <p:sp>
+        <p:nvSpPr>
+          <p:cNvPr id="39" name="TextBox 38"/>
+          <p:cNvSpPr txBox="1"/>
+          <p:nvPr/>
+        </p:nvSpPr>
+        <p:spPr>
+          <a:xfrm>
+            <a:off x="8864600" y="2971800"/>
+            <a:ext cx="2717800" cy="254000"/>
+          </a:xfrm>
+          <a:prstGeom prst="rect">
+            <a:avLst/>
+          </a:prstGeom>
+          <a:noFill/>
+        </p:spPr>
+        <p:txBody>
+          <a:bodyPr wrap="square" lIns="0" rIns="0" tIns="0" bIns="0" anchor="t">
+            <a:noAutofit/>
+          </a:bodyPr>
+          <a:lstStyle/>
+          <a:p>
+            <a:pPr algn="l">
+              <a:lnSpc>
+                <a:spcPts val="1560"/>
+              </a:lnSpc>
+            </a:pPr>
+            <a:r>
+              <a:rPr sz="1200" b="0" lang="zh-CN" altLang="en-US">
+                <a:solidFill>
+                  <a:srgbClr val="F5F5F5">
+                    <a:alpha val="70000"/>
+                  </a:srgbClr>
+                </a:solidFill>
+                <a:latin typeface="Consolas"/>
+                <a:ea typeface="微软雅黑"/>
+                <a:cs typeface="微软雅黑"/>
+              </a:rPr>
+              <a:t>67</a:t>
+            </a:r>
+            <a:r>
+              <a:rPr sz="1200" b="0" lang="zh-CN" altLang="en-US">
+                <a:solidFill>
+                  <a:srgbClr val="F5F5F5">
+                    <a:alpha val="70000"/>
+                  </a:srgbClr>
+                </a:solidFill>
+                <a:latin typeface="微软雅黑"/>
+                <a:ea typeface="微软雅黑"/>
+                <a:cs typeface="微软雅黑"/>
+              </a:rPr>
+              <a:t> </a:t>
+            </a:r>
+            <a:r>
+              <a:rPr sz="1200" b="0" lang="zh-CN" altLang="en-US">
+                <a:solidFill>
+                  <a:srgbClr val="F5F5F5">
+                    <a:alpha val="70000"/>
+                  </a:srgbClr>
+                </a:solidFill>
+                <a:latin typeface="Consolas"/>
+                <a:ea typeface="微软雅黑"/>
+                <a:cs typeface="微软雅黑"/>
+              </a:rPr>
+              <a:t>个材质实例</a:t>
+            </a:r>
+          </a:p>
+        </p:txBody>
+      </p:sp>
+      <p:sp>
+        <p:nvSpPr>
+          <p:cNvPr id="40" name="Rectangle 39"/>
+          <p:cNvSpPr/>
+          <p:nvPr/>
+        </p:nvSpPr>
+        <p:spPr>
+          <a:xfrm>
+            <a:off x="6324600" y="3276600"/>
+            <a:ext cx="5257800" cy="6350"/>
+          </a:xfrm>
+          <a:prstGeom prst="rect">
+            <a:avLst/>
+          </a:prstGeom>
+          <a:solidFill>
+            <a:srgbClr val="F5F5F5">
+              <a:alpha val="10000"/>
+            </a:srgbClr>
+          </a:solidFill>
+          <a:ln>
+            <a:noFill/>
+          </a:ln>
+        </p:spPr>
+        <p:txBody>
+          <a:bodyPr rtlCol="0" anchor="ctr"/>
+          <a:lstStyle/>
+          <a:p>
+            <a:pPr algn="ctr"/>
+          </a:p>
+        </p:txBody>
+      </p:sp>
+      <p:sp>
+        <p:nvSpPr>
+          <p:cNvPr id="41" name="TextBox 40"/>
+          <p:cNvSpPr txBox="1"/>
+          <p:nvPr/>
+        </p:nvSpPr>
+        <p:spPr>
+          <a:xfrm>
+            <a:off x="6324600" y="3352800"/>
+            <a:ext cx="2540000" cy="254000"/>
+          </a:xfrm>
+          <a:prstGeom prst="rect">
+            <a:avLst/>
+          </a:prstGeom>
+          <a:noFill/>
+        </p:spPr>
+        <p:txBody>
+          <a:bodyPr wrap="square" lIns="0" rIns="0" tIns="0" bIns="0" anchor="t">
+            <a:noAutofit/>
+          </a:bodyPr>
+          <a:lstStyle/>
+          <a:p>
+            <a:pPr algn="l">
+              <a:lnSpc>
+                <a:spcPts val="1560"/>
+              </a:lnSpc>
+            </a:pPr>
+            <a:r>
+              <a:rPr sz="1200" b="1" lang="zh-CN" altLang="en-US">
+                <a:solidFill>
+                  <a:srgbClr val="F5F5F5"/>
+                </a:solidFill>
+                <a:latin typeface="Consolas"/>
+                <a:ea typeface="微软雅黑"/>
+                <a:cs typeface="微软雅黑"/>
+              </a:rPr>
+              <a:t>固定包围盒</a:t>
+            </a:r>
+          </a:p>
+        </p:txBody>
+      </p:sp>
+      <p:sp>
+        <p:nvSpPr>
+          <p:cNvPr id="42" name="TextBox 41"/>
+          <p:cNvSpPr txBox="1"/>
+          <p:nvPr/>
+        </p:nvSpPr>
+        <p:spPr>
+          <a:xfrm>
+            <a:off x="8864600" y="3352800"/>
+            <a:ext cx="2717800" cy="254000"/>
+          </a:xfrm>
+          <a:prstGeom prst="rect">
+            <a:avLst/>
+          </a:prstGeom>
+          <a:noFill/>
+        </p:spPr>
+        <p:txBody>
+          <a:bodyPr wrap="square" lIns="0" rIns="0" tIns="0" bIns="0" anchor="t">
+            <a:noAutofit/>
+          </a:bodyPr>
+          <a:lstStyle/>
+          <a:p>
+            <a:pPr algn="l">
+              <a:lnSpc>
+                <a:spcPts val="1560"/>
+              </a:lnSpc>
+            </a:pPr>
+            <a:r>
+              <a:rPr sz="1200" b="0" lang="zh-CN" altLang="en-US">
+                <a:solidFill>
+                  <a:srgbClr val="F5F5F5">
+                    <a:alpha val="70000"/>
+                  </a:srgbClr>
+                </a:solidFill>
+                <a:latin typeface="Consolas"/>
+                <a:ea typeface="微软雅黑"/>
+                <a:cs typeface="微软雅黑"/>
+              </a:rPr>
+              <a:t>47</a:t>
+            </a:r>
+            <a:r>
+              <a:rPr sz="1200" b="0" lang="zh-CN" altLang="en-US">
+                <a:solidFill>
+                  <a:srgbClr val="F5F5F5">
+                    <a:alpha val="70000"/>
+                  </a:srgbClr>
+                </a:solidFill>
+                <a:latin typeface="微软雅黑"/>
+                <a:ea typeface="微软雅黑"/>
+                <a:cs typeface="微软雅黑"/>
+              </a:rPr>
+              <a:t> </a:t>
+            </a:r>
+            <a:r>
+              <a:rPr sz="1200" b="0" lang="zh-CN" altLang="en-US">
+                <a:solidFill>
+                  <a:srgbClr val="F5F5F5">
+                    <a:alpha val="70000"/>
+                  </a:srgbClr>
+                </a:solidFill>
+                <a:latin typeface="Consolas"/>
+                <a:ea typeface="微软雅黑"/>
+                <a:cs typeface="微软雅黑"/>
+              </a:rPr>
+              <a:t>个粒子系统</a:t>
+            </a:r>
+          </a:p>
+        </p:txBody>
+      </p:sp>
+      <p:sp>
+        <p:nvSpPr>
+          <p:cNvPr id="43" name="Rectangle 42"/>
+          <p:cNvSpPr/>
+          <p:nvPr/>
+        </p:nvSpPr>
+        <p:spPr>
+          <a:xfrm>
+            <a:off x="6324600" y="3657600"/>
+            <a:ext cx="5257800" cy="6350"/>
+          </a:xfrm>
+          <a:prstGeom prst="rect">
+            <a:avLst/>
+          </a:prstGeom>
+          <a:solidFill>
+            <a:srgbClr val="F5F5F5">
+              <a:alpha val="10000"/>
+            </a:srgbClr>
+          </a:solidFill>
+          <a:ln>
+            <a:noFill/>
+          </a:ln>
+        </p:spPr>
+        <p:txBody>
+          <a:bodyPr rtlCol="0" anchor="ctr"/>
+          <a:lstStyle/>
+          <a:p>
+            <a:pPr algn="ctr"/>
+          </a:p>
+        </p:txBody>
+      </p:sp>
+      <p:sp>
+        <p:nvSpPr>
+          <p:cNvPr id="44" name="TextBox 43"/>
+          <p:cNvSpPr txBox="1"/>
+          <p:nvPr/>
+        </p:nvSpPr>
+        <p:spPr>
+          <a:xfrm>
+            <a:off x="6324600" y="3733800"/>
+            <a:ext cx="2540000" cy="254000"/>
+          </a:xfrm>
+          <a:prstGeom prst="rect">
+            <a:avLst/>
+          </a:prstGeom>
+          <a:noFill/>
+        </p:spPr>
+        <p:txBody>
+          <a:bodyPr wrap="square" lIns="0" rIns="0" tIns="0" bIns="0" anchor="t">
+            <a:noAutofit/>
+          </a:bodyPr>
+          <a:lstStyle/>
+          <a:p>
+            <a:pPr algn="l">
+              <a:lnSpc>
+                <a:spcPts val="1560"/>
+              </a:lnSpc>
+            </a:pPr>
+            <a:r>
+              <a:rPr sz="1200" b="1" lang="zh-CN" altLang="en-US">
+                <a:solidFill>
+                  <a:srgbClr val="F5F5F5"/>
+                </a:solidFill>
+                <a:latin typeface="Consolas"/>
+                <a:ea typeface="微软雅黑"/>
+                <a:cs typeface="微软雅黑"/>
+              </a:rPr>
+              <a:t>FacingCameraPosition</a:t>
+            </a:r>
+          </a:p>
+        </p:txBody>
+      </p:sp>
+      <p:sp>
+        <p:nvSpPr>
+          <p:cNvPr id="45" name="TextBox 44"/>
+          <p:cNvSpPr txBox="1"/>
+          <p:nvPr/>
+        </p:nvSpPr>
+        <p:spPr>
+          <a:xfrm>
+            <a:off x="8864600" y="3733800"/>
+            <a:ext cx="2717800" cy="254000"/>
+          </a:xfrm>
+          <a:prstGeom prst="rect">
+            <a:avLst/>
+          </a:prstGeom>
+          <a:noFill/>
+        </p:spPr>
+        <p:txBody>
+          <a:bodyPr wrap="square" lIns="0" rIns="0" tIns="0" bIns="0" anchor="t">
+            <a:noAutofit/>
+          </a:bodyPr>
+          <a:lstStyle/>
+          <a:p>
+            <a:pPr algn="l">
+              <a:lnSpc>
+                <a:spcPts val="1560"/>
+              </a:lnSpc>
+            </a:pPr>
+            <a:r>
+              <a:rPr sz="1200" b="0" lang="zh-CN" altLang="en-US">
+                <a:solidFill>
+                  <a:srgbClr val="F5F5F5">
+                    <a:alpha val="70000"/>
+                  </a:srgbClr>
+                </a:solidFill>
+                <a:latin typeface="Consolas"/>
+                <a:ea typeface="微软雅黑"/>
+                <a:cs typeface="微软雅黑"/>
+              </a:rPr>
+              <a:t>12</a:t>
+            </a:r>
+            <a:r>
+              <a:rPr sz="1200" b="0" lang="zh-CN" altLang="en-US">
+                <a:solidFill>
+                  <a:srgbClr val="F5F5F5">
+                    <a:alpha val="70000"/>
+                  </a:srgbClr>
+                </a:solidFill>
+                <a:latin typeface="微软雅黑"/>
+                <a:ea typeface="微软雅黑"/>
+                <a:cs typeface="微软雅黑"/>
+              </a:rPr>
+              <a:t> </a:t>
+            </a:r>
+            <a:r>
+              <a:rPr sz="1200" b="0" lang="zh-CN" altLang="en-US">
+                <a:solidFill>
+                  <a:srgbClr val="F5F5F5">
+                    <a:alpha val="70000"/>
+                  </a:srgbClr>
+                </a:solidFill>
+                <a:latin typeface="Consolas"/>
+                <a:ea typeface="微软雅黑"/>
+                <a:cs typeface="微软雅黑"/>
+              </a:rPr>
+              <a:t>个发射器</a:t>
+            </a:r>
+          </a:p>
+        </p:txBody>
+      </p:sp>
+      <p:sp>
+        <p:nvSpPr>
+          <p:cNvPr id="46" name="Rectangle 45"/>
+          <p:cNvSpPr/>
+          <p:nvPr/>
+        </p:nvSpPr>
+        <p:spPr>
+          <a:xfrm>
+            <a:off x="6324600" y="4038600"/>
+            <a:ext cx="5257800" cy="6350"/>
+          </a:xfrm>
+          <a:prstGeom prst="rect">
+            <a:avLst/>
+          </a:prstGeom>
+          <a:solidFill>
+            <a:srgbClr val="F5F5F5">
+              <a:alpha val="10000"/>
+            </a:srgbClr>
+          </a:solidFill>
+          <a:ln>
+            <a:noFill/>
+          </a:ln>
+        </p:spPr>
+        <p:txBody>
+          <a:bodyPr rtlCol="0" anchor="ctr"/>
+          <a:lstStyle/>
+          <a:p>
+            <a:pPr algn="ctr"/>
+          </a:p>
+        </p:txBody>
+      </p:sp>
+      <p:sp>
+        <p:nvSpPr>
+          <p:cNvPr id="47" name="TextBox 46"/>
+          <p:cNvSpPr txBox="1"/>
+          <p:nvPr/>
+        </p:nvSpPr>
+        <p:spPr>
+          <a:xfrm>
+            <a:off x="6324600" y="4114800"/>
+            <a:ext cx="2540000" cy="254000"/>
+          </a:xfrm>
+          <a:prstGeom prst="rect">
+            <a:avLst/>
+          </a:prstGeom>
+          <a:noFill/>
+        </p:spPr>
+        <p:txBody>
+          <a:bodyPr wrap="square" lIns="0" rIns="0" tIns="0" bIns="0" anchor="t">
+            <a:noAutofit/>
+          </a:bodyPr>
+          <a:lstStyle/>
+          <a:p>
+            <a:pPr algn="l">
+              <a:lnSpc>
+                <a:spcPts val="1560"/>
+              </a:lnSpc>
+            </a:pPr>
+            <a:r>
+              <a:rPr sz="1200" b="1" lang="zh-CN" altLang="en-US">
+                <a:solidFill>
+                  <a:srgbClr val="F5F5F5"/>
+                </a:solidFill>
+                <a:latin typeface="Consolas"/>
+                <a:ea typeface="微软雅黑"/>
+                <a:cs typeface="微软雅黑"/>
+              </a:rPr>
+              <a:t>UV</a:t>
+            </a:r>
+            <a:r>
+              <a:rPr sz="1200" b="1" lang="zh-CN" altLang="en-US">
+                <a:solidFill>
+                  <a:srgbClr val="F5F5F5"/>
+                </a:solidFill>
+                <a:latin typeface="微软雅黑"/>
+                <a:ea typeface="微软雅黑"/>
+                <a:cs typeface="微软雅黑"/>
+              </a:rPr>
+              <a:t> </a:t>
+            </a:r>
+            <a:r>
+              <a:rPr sz="1200" b="1" lang="zh-CN" altLang="en-US">
+                <a:solidFill>
+                  <a:srgbClr val="F5F5F5"/>
+                </a:solidFill>
+                <a:latin typeface="Consolas"/>
+                <a:ea typeface="微软雅黑"/>
+                <a:cs typeface="微软雅黑"/>
+              </a:rPr>
+              <a:t>随机翻转</a:t>
+            </a:r>
+          </a:p>
+        </p:txBody>
+      </p:sp>
+      <p:sp>
+        <p:nvSpPr>
+          <p:cNvPr id="48" name="TextBox 47"/>
+          <p:cNvSpPr txBox="1"/>
+          <p:nvPr/>
+        </p:nvSpPr>
+        <p:spPr>
+          <a:xfrm>
+            <a:off x="8864600" y="4114800"/>
+            <a:ext cx="2717800" cy="254000"/>
+          </a:xfrm>
+          <a:prstGeom prst="rect">
+            <a:avLst/>
+          </a:prstGeom>
+          <a:noFill/>
+        </p:spPr>
+        <p:txBody>
+          <a:bodyPr wrap="square" lIns="0" rIns="0" tIns="0" bIns="0" anchor="t">
+            <a:noAutofit/>
+          </a:bodyPr>
+          <a:lstStyle/>
+          <a:p>
+            <a:pPr algn="l">
+              <a:lnSpc>
+                <a:spcPts val="1560"/>
+              </a:lnSpc>
+            </a:pPr>
+            <a:r>
+              <a:rPr sz="1200" b="0" lang="zh-CN" altLang="en-US">
+                <a:solidFill>
+                  <a:srgbClr val="F5F5F5">
+                    <a:alpha val="70000"/>
+                  </a:srgbClr>
+                </a:solidFill>
+                <a:latin typeface="Consolas"/>
+                <a:ea typeface="微软雅黑"/>
+                <a:cs typeface="微软雅黑"/>
+              </a:rPr>
+              <a:t>28</a:t>
+            </a:r>
+            <a:r>
+              <a:rPr sz="1200" b="0" lang="zh-CN" altLang="en-US">
+                <a:solidFill>
+                  <a:srgbClr val="F5F5F5">
+                    <a:alpha val="70000"/>
+                  </a:srgbClr>
+                </a:solidFill>
+                <a:latin typeface="微软雅黑"/>
+                <a:ea typeface="微软雅黑"/>
+                <a:cs typeface="微软雅黑"/>
+              </a:rPr>
+              <a:t> </a:t>
+            </a:r>
+            <a:r>
+              <a:rPr sz="1200" b="0" lang="zh-CN" altLang="en-US">
+                <a:solidFill>
+                  <a:srgbClr val="F5F5F5">
+                    <a:alpha val="70000"/>
+                  </a:srgbClr>
+                </a:solidFill>
+                <a:latin typeface="Consolas"/>
+                <a:ea typeface="微软雅黑"/>
+                <a:cs typeface="微软雅黑"/>
+              </a:rPr>
+              <a:t>个发射器</a:t>
+            </a:r>
+          </a:p>
+        </p:txBody>
+      </p:sp>
+      <p:sp>
+        <p:nvSpPr>
+          <p:cNvPr id="49" name="Rectangle 48"/>
+          <p:cNvSpPr/>
+          <p:nvPr/>
+        </p:nvSpPr>
+        <p:spPr>
+          <a:xfrm>
+            <a:off x="6324600" y="4419600"/>
+            <a:ext cx="5257800" cy="6350"/>
+          </a:xfrm>
+          <a:prstGeom prst="rect">
+            <a:avLst/>
+          </a:prstGeom>
+          <a:solidFill>
+            <a:srgbClr val="F5F5F5">
+              <a:alpha val="10000"/>
+            </a:srgbClr>
+          </a:solidFill>
+          <a:ln>
+            <a:noFill/>
+          </a:ln>
+        </p:spPr>
+        <p:txBody>
+          <a:bodyPr rtlCol="0" anchor="ctr"/>
+          <a:lstStyle/>
+          <a:p>
+            <a:pPr algn="ctr"/>
+          </a:p>
+        </p:txBody>
+      </p:sp>
+      <p:sp>
+        <p:nvSpPr>
+          <p:cNvPr id="50" name="Rectangle 49"/>
+          <p:cNvSpPr/>
+          <p:nvPr/>
+        </p:nvSpPr>
+        <p:spPr>
+          <a:xfrm>
+            <a:off x="609600" y="5207000"/>
+            <a:ext cx="10972800" cy="863600"/>
+          </a:xfrm>
+          <a:prstGeom prst="rect">
+            <a:avLst/>
+          </a:prstGeom>
+          <a:solidFill>
+            <a:srgbClr val="161616"/>
+          </a:solidFill>
+          <a:ln w="6350">
+            <a:solidFill>
+              <a:srgbClr val="F5F5F5">
+                <a:alpha val="8000"/>
+              </a:srgbClr>
+            </a:solidFill>
+          </a:ln>
+        </p:spPr>
+        <p:txBody>
+          <a:bodyPr rtlCol="0" anchor="ctr"/>
+          <a:lstStyle/>
+          <a:p>
+            <a:pPr algn="ctr"/>
+          </a:p>
+        </p:txBody>
+      </p:sp>
+      <p:sp>
+        <p:nvSpPr>
+          <p:cNvPr id="51" name="Rectangle 50"/>
+          <p:cNvSpPr/>
+          <p:nvPr/>
+        </p:nvSpPr>
+        <p:spPr>
+          <a:xfrm>
+            <a:off x="609600" y="5207000"/>
+            <a:ext cx="38100" cy="863600"/>
+          </a:xfrm>
+          <a:prstGeom prst="rect">
+            <a:avLst/>
+          </a:prstGeom>
+          <a:solidFill>
+            <a:srgbClr val="0FF796"/>
+          </a:solidFill>
+          <a:ln>
+            <a:noFill/>
+          </a:ln>
+        </p:spPr>
+        <p:txBody>
+          <a:bodyPr rtlCol="0" anchor="ctr"/>
+          <a:lstStyle/>
+          <a:p>
+            <a:pPr algn="ctr"/>
+          </a:p>
+        </p:txBody>
+      </p:sp>
+      <p:sp>
+        <p:nvSpPr>
+          <p:cNvPr id="52" name="TextBox 51"/>
+          <p:cNvSpPr txBox="1"/>
+          <p:nvPr/>
+        </p:nvSpPr>
+        <p:spPr>
+          <a:xfrm>
+            <a:off x="863600" y="5207000"/>
+            <a:ext cx="10464800" cy="863600"/>
           </a:xfrm>
           <a:prstGeom prst="rect">
             <a:avLst/>
@@ -11448,274 +13001,21 @@
           </a:bodyPr>
           <a:lstStyle/>
           <a:p>
-            <a:pPr algn="ctr">
-              <a:lnSpc>
-                <a:spcPts val="1439"/>
-              </a:lnSpc>
-            </a:pPr>
-            <a:r>
-              <a:rPr sz="1200" b="0" lang="zh-CN" altLang="en-US">
-                <a:solidFill>
-                  <a:srgbClr val="F5F5F5">
-                    <a:alpha val="70000"/>
-                  </a:srgbClr>
-                </a:solidFill>
-                <a:latin typeface="Consolas"/>
-                <a:ea typeface="微软雅黑"/>
-                <a:cs typeface="微软雅黑"/>
-              </a:rPr>
-              <a:t>UE</a:t>
-            </a:r>
-            <a:r>
-              <a:rPr sz="1200" b="0" lang="zh-CN" altLang="en-US">
-                <a:solidFill>
-                  <a:srgbClr val="F5F5F5">
-                    <a:alpha val="70000"/>
-                  </a:srgbClr>
-                </a:solidFill>
-                <a:latin typeface="微软雅黑"/>
-                <a:ea typeface="微软雅黑"/>
-                <a:cs typeface="微软雅黑"/>
-              </a:rPr>
-              <a:t> </a:t>
-            </a:r>
-            <a:r>
-              <a:rPr sz="1200" b="0" lang="zh-CN" altLang="en-US">
-                <a:solidFill>
-                  <a:srgbClr val="F5F5F5">
-                    <a:alpha val="70000"/>
-                  </a:srgbClr>
-                </a:solidFill>
-                <a:latin typeface="Consolas"/>
-                <a:ea typeface="微软雅黑"/>
-                <a:cs typeface="微软雅黑"/>
-              </a:rPr>
-              <a:t>实机</a:t>
-            </a:r>
-            <a:r>
-              <a:rPr sz="1200" b="0" lang="zh-CN" altLang="en-US">
-                <a:solidFill>
-                  <a:srgbClr val="F5F5F5">
-                    <a:alpha val="70000"/>
-                  </a:srgbClr>
-                </a:solidFill>
-                <a:latin typeface="微软雅黑"/>
-                <a:ea typeface="微软雅黑"/>
-                <a:cs typeface="微软雅黑"/>
-              </a:rPr>
-              <a:t> </a:t>
-            </a:r>
-            <a:r>
-              <a:rPr sz="1200" b="0" lang="zh-CN" altLang="en-US">
-                <a:solidFill>
-                  <a:srgbClr val="F5F5F5">
-                    <a:alpha val="70000"/>
-                  </a:srgbClr>
-                </a:solidFill>
-                <a:latin typeface="Consolas"/>
-                <a:ea typeface="微软雅黑"/>
-                <a:cs typeface="微软雅黑"/>
-              </a:rPr>
-              <a:t>·</a:t>
-            </a:r>
-            <a:r>
-              <a:rPr sz="1200" b="0" lang="zh-CN" altLang="en-US">
-                <a:solidFill>
-                  <a:srgbClr val="F5F5F5">
-                    <a:alpha val="70000"/>
-                  </a:srgbClr>
-                </a:solidFill>
-                <a:latin typeface="微软雅黑"/>
-                <a:ea typeface="微软雅黑"/>
-                <a:cs typeface="微软雅黑"/>
-              </a:rPr>
-              <a:t> </a:t>
-            </a:r>
-            <a:r>
-              <a:rPr sz="1200" b="0" lang="zh-CN" altLang="en-US">
-                <a:solidFill>
-                  <a:srgbClr val="F5F5F5">
-                    <a:alpha val="70000"/>
-                  </a:srgbClr>
-                </a:solidFill>
-                <a:latin typeface="Consolas"/>
-                <a:ea typeface="微软雅黑"/>
-                <a:cs typeface="微软雅黑"/>
-              </a:rPr>
-              <a:t>修正后</a:t>
-            </a:r>
-          </a:p>
-        </p:txBody>
-      </p:sp>
-      <p:sp>
-        <p:nvSpPr>
-          <p:cNvPr id="17" name="TextBox 16"/>
-          <p:cNvSpPr txBox="1"/>
-          <p:nvPr/>
-        </p:nvSpPr>
-        <p:spPr>
-          <a:xfrm>
-            <a:off x="5181600" y="5016500"/>
-            <a:ext cx="6400800" cy="190500"/>
-          </a:xfrm>
-          <a:prstGeom prst="rect">
-            <a:avLst/>
-          </a:prstGeom>
-          <a:noFill/>
-        </p:spPr>
-        <p:txBody>
-          <a:bodyPr wrap="square" lIns="0" rIns="0" tIns="0" bIns="0" anchor="t">
-            <a:noAutofit/>
-          </a:bodyPr>
-          <a:lstStyle/>
-          <a:p>
             <a:pPr algn="l">
               <a:lnSpc>
-                <a:spcPts val="1250"/>
-              </a:lnSpc>
-            </a:pPr>
-            <a:r>
-              <a:rPr sz="1000" b="0" lang="zh-CN" altLang="en-US">
-                <a:solidFill>
-                  <a:srgbClr val="F5F5F5">
-                    <a:alpha val="55000"/>
-                  </a:srgbClr>
-                </a:solidFill>
-                <a:latin typeface="Consolas"/>
-                <a:ea typeface="微软雅黑"/>
-                <a:cs typeface="微软雅黑"/>
-              </a:rPr>
-              <a:t>UE</a:t>
-            </a:r>
-            <a:r>
-              <a:rPr sz="1000" b="0" lang="zh-CN" altLang="en-US">
-                <a:solidFill>
-                  <a:srgbClr val="F5F5F5">
-                    <a:alpha val="55000"/>
-                  </a:srgbClr>
-                </a:solidFill>
-                <a:latin typeface="微软雅黑"/>
-                <a:ea typeface="微软雅黑"/>
-                <a:cs typeface="微软雅黑"/>
-              </a:rPr>
-              <a:t> </a:t>
-            </a:r>
-            <a:r>
-              <a:rPr sz="1000" b="0" lang="zh-CN" altLang="en-US">
-                <a:solidFill>
-                  <a:srgbClr val="F5F5F5">
-                    <a:alpha val="55000"/>
-                  </a:srgbClr>
-                </a:solidFill>
-                <a:latin typeface="Consolas"/>
-                <a:ea typeface="微软雅黑"/>
-                <a:cs typeface="微软雅黑"/>
-              </a:rPr>
-              <a:t>4.24</a:t>
-            </a:r>
-            <a:r>
-              <a:rPr sz="1000" b="0" lang="zh-CN" altLang="en-US">
-                <a:solidFill>
-                  <a:srgbClr val="F5F5F5">
-                    <a:alpha val="55000"/>
-                  </a:srgbClr>
-                </a:solidFill>
-                <a:latin typeface="微软雅黑"/>
-                <a:ea typeface="微软雅黑"/>
-                <a:cs typeface="微软雅黑"/>
-              </a:rPr>
-              <a:t> </a:t>
-            </a:r>
-            <a:r>
-              <a:rPr sz="1000" b="0" lang="zh-CN" altLang="en-US">
-                <a:solidFill>
-                  <a:srgbClr val="F5F5F5">
-                    <a:alpha val="55000"/>
-                  </a:srgbClr>
-                </a:solidFill>
-                <a:latin typeface="Consolas"/>
-                <a:ea typeface="微软雅黑"/>
-                <a:cs typeface="微软雅黑"/>
-              </a:rPr>
-              <a:t>实播</a:t>
-            </a:r>
-            <a:r>
-              <a:rPr sz="1000" b="0" lang="zh-CN" altLang="en-US">
-                <a:solidFill>
-                  <a:srgbClr val="F5F5F5">
-                    <a:alpha val="55000"/>
-                  </a:srgbClr>
-                </a:solidFill>
-                <a:latin typeface="微软雅黑"/>
-                <a:ea typeface="微软雅黑"/>
-                <a:cs typeface="微软雅黑"/>
-              </a:rPr>
-              <a:t> </a:t>
-            </a:r>
-            <a:r>
-              <a:rPr sz="1000" b="0" lang="zh-CN" altLang="en-US">
-                <a:solidFill>
-                  <a:srgbClr val="F5F5F5">
-                    <a:alpha val="55000"/>
-                  </a:srgbClr>
-                </a:solidFill>
-                <a:latin typeface="Consolas"/>
-                <a:ea typeface="微软雅黑"/>
-                <a:cs typeface="微软雅黑"/>
-              </a:rPr>
-              <a:t>·</a:t>
-            </a:r>
-            <a:r>
-              <a:rPr sz="1000" b="0" lang="zh-CN" altLang="en-US">
-                <a:solidFill>
-                  <a:srgbClr val="F5F5F5">
-                    <a:alpha val="55000"/>
-                  </a:srgbClr>
-                </a:solidFill>
-                <a:latin typeface="微软雅黑"/>
-                <a:ea typeface="微软雅黑"/>
-                <a:cs typeface="微软雅黑"/>
-              </a:rPr>
-              <a:t> </a:t>
-            </a:r>
-            <a:r>
-              <a:rPr sz="1000" b="0" lang="zh-CN" altLang="en-US">
-                <a:solidFill>
-                  <a:srgbClr val="F5F5F5">
-                    <a:alpha val="55000"/>
-                  </a:srgbClr>
-                </a:solidFill>
-                <a:latin typeface="Consolas"/>
-                <a:ea typeface="微软雅黑"/>
-                <a:cs typeface="微软雅黑"/>
-              </a:rPr>
-              <a:t>10-16</a:t>
-            </a:r>
-            <a:r>
-              <a:rPr sz="1000" b="0" lang="zh-CN" altLang="en-US">
-                <a:solidFill>
-                  <a:srgbClr val="F5F5F5">
-                    <a:alpha val="55000"/>
-                  </a:srgbClr>
-                </a:solidFill>
-                <a:latin typeface="微软雅黑"/>
-                <a:ea typeface="微软雅黑"/>
-                <a:cs typeface="微软雅黑"/>
-              </a:rPr>
-              <a:t> </a:t>
-            </a:r>
-            <a:r>
-              <a:rPr sz="1000" b="0" lang="zh-CN" altLang="en-US">
-                <a:solidFill>
-                  <a:srgbClr val="F5F5F5">
-                    <a:alpha val="55000"/>
-                  </a:srgbClr>
-                </a:solidFill>
-                <a:latin typeface="Consolas"/>
-                <a:ea typeface="微软雅黑"/>
-                <a:cs typeface="微软雅黑"/>
-              </a:rPr>
-              <a:t>修正后的金垂柳</a:t>
+                <a:spcPts val="1959"/>
+              </a:lnSpc>
+            </a:pPr>
+            <a:r>
+              <a:rPr sz="1400" b="0" lang="zh-CN" altLang="en-US">
+                <a:solidFill>
+                  <a:srgbClr val="F5F5F5"/>
+                </a:solidFill>
+                <a:latin typeface="Consolas"/>
+                <a:ea typeface="微软雅黑"/>
+                <a:cs typeface="微软雅黑"/>
+              </a:rPr>
+              <a:t>以上规则已内置于导入器：新资源导入时按平台自动设置，并读回核对</a:t>
             </a:r>
           </a:p>
         </p:txBody>
@@ -12071,47 +13371,14 @@
       </p:sp>
       <p:sp>
         <p:nvSpPr>
-          <p:cNvPr id="6" name="Rectangle 5"/>
-          <p:cNvSpPr/>
+          <p:cNvPr id="6" name="TextBox 5"/>
+          <p:cNvSpPr txBox="1"/>
           <p:nvPr/>
         </p:nvSpPr>
         <p:spPr>
           <a:xfrm>
             <a:off x="609600" y="1358900"/>
-            <a:ext cx="10972800" cy="2984500"/>
-          </a:xfrm>
-          <a:prstGeom prst="rect">
-            <a:avLst/>
-          </a:prstGeom>
-          <a:solidFill>
-            <a:srgbClr val="161616"/>
-          </a:solidFill>
-          <a:ln w="6350">
-            <a:solidFill>
-              <a:srgbClr val="F5F5F5">
-                <a:alpha val="8000"/>
-              </a:srgbClr>
-            </a:solidFill>
-          </a:ln>
-        </p:spPr>
-        <p:txBody>
-          <a:bodyPr rtlCol="0" anchor="ctr"/>
-          <a:lstStyle/>
-          <a:p>
-            <a:pPr algn="ctr"/>
-          </a:p>
-        </p:txBody>
-      </p:sp>
-      <p:sp>
-        <p:nvSpPr>
-          <p:cNvPr id="7" name="TextBox 6"/>
-          <p:cNvSpPr txBox="1"/>
-          <p:nvPr/>
-        </p:nvSpPr>
-        <p:spPr>
-          <a:xfrm>
-            <a:off x="863600" y="1524000"/>
-            <a:ext cx="7620000" cy="254000"/>
+            <a:ext cx="7620000" cy="228600"/>
           </a:xfrm>
           <a:prstGeom prst="rect">
             <a:avLst/>
@@ -12126,11 +13393,11 @@
           <a:p>
             <a:pPr algn="l">
               <a:lnSpc>
-                <a:spcPts val="1820"/>
-              </a:lnSpc>
-            </a:pPr>
-            <a:r>
-              <a:rPr sz="1400" b="1" lang="zh-CN" altLang="en-US">
+                <a:spcPts val="1690"/>
+              </a:lnSpc>
+            </a:pPr>
+            <a:r>
+              <a:rPr sz="1300" b="1" lang="zh-CN" altLang="en-US">
                 <a:solidFill>
                   <a:srgbClr val="F5F5F5"/>
                 </a:solidFill>
@@ -12138,50 +13405,100 @@
                 <a:ea typeface="微软雅黑"/>
                 <a:cs typeface="微软雅黑"/>
               </a:rPr>
-              <a:t>各档一场的播放次数</a:t>
-            </a:r>
-          </a:p>
-        </p:txBody>
-      </p:sp>
-      <p:sp>
-        <p:nvSpPr>
-          <p:cNvPr id="8" name="Rectangle 7"/>
-          <p:cNvSpPr/>
-          <p:nvPr/>
-        </p:nvSpPr>
-        <p:spPr>
-          <a:xfrm>
-            <a:off x="1625600" y="2095500"/>
-            <a:ext cx="952500" cy="1714500"/>
-          </a:xfrm>
-          <a:prstGeom prst="rect">
-            <a:avLst/>
-          </a:prstGeom>
-          <a:solidFill>
-            <a:srgbClr val="0FF796"/>
-          </a:solidFill>
-          <a:ln>
-            <a:noFill/>
-          </a:ln>
-        </p:spPr>
-        <p:txBody>
-          <a:bodyPr rtlCol="0" anchor="ctr"/>
-          <a:lstStyle/>
-          <a:p>
-            <a:pPr algn="ctr"/>
-          </a:p>
-        </p:txBody>
-      </p:sp>
-      <p:sp>
-        <p:nvSpPr>
-          <p:cNvPr id="9" name="TextBox 8"/>
-          <p:cNvSpPr txBox="1"/>
-          <p:nvPr/>
-        </p:nvSpPr>
-        <p:spPr>
-          <a:xfrm>
-            <a:off x="1498600" y="1828800"/>
-            <a:ext cx="1206500" cy="228600"/>
+              <a:t>PC</a:t>
+            </a:r>
+            <a:r>
+              <a:rPr sz="1300" b="1" lang="zh-CN" altLang="en-US">
+                <a:solidFill>
+                  <a:srgbClr val="F5F5F5"/>
+                </a:solidFill>
+                <a:latin typeface="微软雅黑"/>
+                <a:ea typeface="微软雅黑"/>
+                <a:cs typeface="微软雅黑"/>
+              </a:rPr>
+              <a:t> </a:t>
+            </a:r>
+            <a:r>
+              <a:rPr sz="1300" b="1" lang="zh-CN" altLang="en-US">
+                <a:solidFill>
+                  <a:srgbClr val="F5F5F5"/>
+                </a:solidFill>
+                <a:latin typeface="Consolas"/>
+                <a:ea typeface="微软雅黑"/>
+                <a:cs typeface="微软雅黑"/>
+              </a:rPr>
+              <a:t>高配</a:t>
+            </a:r>
+            <a:r>
+              <a:rPr sz="1300" b="1" lang="zh-CN" altLang="en-US">
+                <a:solidFill>
+                  <a:srgbClr val="0FF796"/>
+                </a:solidFill>
+                <a:latin typeface="Consolas"/>
+                <a:ea typeface="微软雅黑"/>
+                <a:cs typeface="微软雅黑"/>
+              </a:rPr>
+              <a:t>　1145</a:t>
+            </a:r>
+            <a:r>
+              <a:rPr sz="1300" b="1" lang="zh-CN" altLang="en-US">
+                <a:solidFill>
+                  <a:srgbClr val="0FF796"/>
+                </a:solidFill>
+                <a:latin typeface="微软雅黑"/>
+                <a:ea typeface="微软雅黑"/>
+                <a:cs typeface="微软雅黑"/>
+              </a:rPr>
+              <a:t> </a:t>
+            </a:r>
+            <a:r>
+              <a:rPr sz="1300" b="1" lang="zh-CN" altLang="en-US">
+                <a:solidFill>
+                  <a:srgbClr val="0FF796"/>
+                </a:solidFill>
+                <a:latin typeface="Consolas"/>
+                <a:ea typeface="微软雅黑"/>
+                <a:cs typeface="微软雅黑"/>
+              </a:rPr>
+              <a:t>次播放</a:t>
+            </a:r>
+          </a:p>
+        </p:txBody>
+      </p:sp>
+      <p:pic>
+        <p:nvPicPr>
+          <p:cNvPr id="7" name="Picture 6" descr="p13_pc_high.jpg"/>
+          <p:cNvPicPr>
+            <a:picLocks noChangeAspect="1"/>
+          </p:cNvPicPr>
+          <p:nvPr/>
+        </p:nvPicPr>
+        <p:blipFill>
+          <a:blip r:embed="rId2"/>
+          <a:stretch>
+            <a:fillRect/>
+          </a:stretch>
+        </p:blipFill>
+        <p:spPr>
+          <a:xfrm>
+            <a:off x="609600" y="1638300"/>
+            <a:ext cx="10972800" cy="1943100"/>
+          </a:xfrm>
+          <a:prstGeom prst="rect">
+            <a:avLst/>
+          </a:prstGeom>
+        </p:spPr>
+      </p:pic>
+      <p:sp>
+        <p:nvSpPr>
+          <p:cNvPr id="8" name="TextBox 7"/>
+          <p:cNvSpPr txBox="1"/>
+          <p:nvPr/>
+        </p:nvSpPr>
+        <p:spPr>
+          <a:xfrm>
+            <a:off x="609600" y="3721100"/>
+            <a:ext cx="7620000" cy="228600"/>
           </a:xfrm>
           <a:prstGeom prst="rect">
             <a:avLst/>
@@ -12194,13 +13511,13 @@
           </a:bodyPr>
           <a:lstStyle/>
           <a:p>
-            <a:pPr algn="ctr">
-              <a:lnSpc>
-                <a:spcPts val="1439"/>
-              </a:lnSpc>
-            </a:pPr>
-            <a:r>
-              <a:rPr sz="1200" b="1" lang="zh-CN" altLang="en-US">
+            <a:pPr algn="l">
+              <a:lnSpc>
+                <a:spcPts val="1690"/>
+              </a:lnSpc>
+            </a:pPr>
+            <a:r>
+              <a:rPr sz="1300" b="1" lang="zh-CN" altLang="en-US">
                 <a:solidFill>
                   <a:srgbClr val="F5F5F5"/>
                 </a:solidFill>
@@ -12208,33 +13525,74 @@
                 <a:ea typeface="微软雅黑"/>
                 <a:cs typeface="微软雅黑"/>
               </a:rPr>
-              <a:t>约</a:t>
-            </a:r>
-            <a:r>
-              <a:rPr sz="1200" b="1" lang="zh-CN" altLang="en-US">
-                <a:solidFill>
-                  <a:srgbClr val="F5F5F5"/>
-                </a:solidFill>
-                <a:latin typeface="微软雅黑"/>
-                <a:ea typeface="微软雅黑"/>
-                <a:cs typeface="微软雅黑"/>
-              </a:rPr>
-              <a:t> </a:t>
-            </a:r>
-            <a:r>
-              <a:rPr sz="1200" b="1" lang="zh-CN" altLang="en-US">
-                <a:solidFill>
-                  <a:srgbClr val="F5F5F5"/>
-                </a:solidFill>
-                <a:latin typeface="Consolas"/>
-                <a:ea typeface="微软雅黑"/>
-                <a:cs typeface="微软雅黑"/>
-              </a:rPr>
-              <a:t>1150</a:t>
-            </a:r>
-          </a:p>
-        </p:txBody>
-      </p:sp>
+              <a:t>手游低配</a:t>
+            </a:r>
+            <a:r>
+              <a:rPr sz="1300" b="1" lang="zh-CN" altLang="en-US">
+                <a:solidFill>
+                  <a:srgbClr val="F5F5F5">
+                    <a:alpha val="70000"/>
+                  </a:srgbClr>
+                </a:solidFill>
+                <a:latin typeface="Consolas"/>
+                <a:ea typeface="微软雅黑"/>
+                <a:cs typeface="微软雅黑"/>
+              </a:rPr>
+              <a:t>　181</a:t>
+            </a:r>
+            <a:r>
+              <a:rPr sz="1300" b="1" lang="zh-CN" altLang="en-US">
+                <a:solidFill>
+                  <a:srgbClr val="F5F5F5">
+                    <a:alpha val="70000"/>
+                  </a:srgbClr>
+                </a:solidFill>
+                <a:latin typeface="微软雅黑"/>
+                <a:ea typeface="微软雅黑"/>
+                <a:cs typeface="微软雅黑"/>
+              </a:rPr>
+              <a:t> </a:t>
+            </a:r>
+            <a:r>
+              <a:rPr sz="1300" b="1" lang="zh-CN" altLang="en-US">
+                <a:solidFill>
+                  <a:srgbClr val="F5F5F5">
+                    <a:alpha val="70000"/>
+                  </a:srgbClr>
+                </a:solidFill>
+                <a:latin typeface="Consolas"/>
+                <a:ea typeface="微软雅黑"/>
+                <a:cs typeface="微软雅黑"/>
+              </a:rPr>
+              <a:t>次播放</a:t>
+            </a:r>
+          </a:p>
+        </p:txBody>
+      </p:sp>
+      <p:pic>
+        <p:nvPicPr>
+          <p:cNvPr id="9" name="Picture 8" descr="p13_m_low.jpg"/>
+          <p:cNvPicPr>
+            <a:picLocks noChangeAspect="1"/>
+          </p:cNvPicPr>
+          <p:nvPr/>
+        </p:nvPicPr>
+        <p:blipFill>
+          <a:blip r:embed="rId3"/>
+          <a:stretch>
+            <a:fillRect/>
+          </a:stretch>
+        </p:blipFill>
+        <p:spPr>
+          <a:xfrm>
+            <a:off x="609600" y="4000500"/>
+            <a:ext cx="10972800" cy="1943100"/>
+          </a:xfrm>
+          <a:prstGeom prst="rect">
+            <a:avLst/>
+          </a:prstGeom>
+        </p:spPr>
+      </p:pic>
       <p:sp>
         <p:nvSpPr>
           <p:cNvPr id="10" name="TextBox 9"/>
@@ -12243,8 +13601,8 @@
         </p:nvSpPr>
         <p:spPr>
           <a:xfrm>
-            <a:off x="1625600" y="3860800"/>
-            <a:ext cx="952500" cy="203200"/>
+            <a:off x="609600" y="5994400"/>
+            <a:ext cx="8890000" cy="190500"/>
           </a:xfrm>
           <a:prstGeom prst="rect">
             <a:avLst/>
@@ -12257,55 +13615,585 @@
           </a:bodyPr>
           <a:lstStyle/>
           <a:p>
-            <a:pPr algn="ctr">
-              <a:lnSpc>
-                <a:spcPts val="1320"/>
-              </a:lnSpc>
-            </a:pPr>
-            <a:r>
-              <a:rPr sz="1100" b="0" lang="zh-CN" altLang="en-US">
+            <a:pPr algn="l">
+              <a:lnSpc>
+                <a:spcPts val="1250"/>
+              </a:lnSpc>
+            </a:pPr>
+            <a:r>
+              <a:rPr sz="1000" b="0" lang="zh-CN" altLang="en-US">
+                <a:solidFill>
+                  <a:srgbClr val="F5F5F5">
+                    <a:alpha val="55000"/>
+                  </a:srgbClr>
+                </a:solidFill>
+                <a:latin typeface="Consolas"/>
+                <a:ea typeface="微软雅黑"/>
+                <a:cs typeface="微软雅黑"/>
+              </a:rPr>
+              <a:t>工具界面</a:t>
+            </a:r>
+            <a:r>
+              <a:rPr sz="1000" b="0" lang="zh-CN" altLang="en-US">
+                <a:solidFill>
+                  <a:srgbClr val="F5F5F5">
+                    <a:alpha val="55000"/>
+                  </a:srgbClr>
+                </a:solidFill>
+                <a:latin typeface="微软雅黑"/>
+                <a:ea typeface="微软雅黑"/>
+                <a:cs typeface="微软雅黑"/>
+              </a:rPr>
+              <a:t> </a:t>
+            </a:r>
+            <a:r>
+              <a:rPr sz="1000" b="0" lang="zh-CN" altLang="en-US">
+                <a:solidFill>
+                  <a:srgbClr val="F5F5F5">
+                    <a:alpha val="55000"/>
+                  </a:srgbClr>
+                </a:solidFill>
+                <a:latin typeface="Consolas"/>
+                <a:ea typeface="微软雅黑"/>
+                <a:cs typeface="微软雅黑"/>
+              </a:rPr>
+              <a:t>·</a:t>
+            </a:r>
+            <a:r>
+              <a:rPr sz="1000" b="0" lang="zh-CN" altLang="en-US">
+                <a:solidFill>
+                  <a:srgbClr val="F5F5F5">
+                    <a:alpha val="55000"/>
+                  </a:srgbClr>
+                </a:solidFill>
+                <a:latin typeface="微软雅黑"/>
+                <a:ea typeface="微软雅黑"/>
+                <a:cs typeface="微软雅黑"/>
+              </a:rPr>
+              <a:t> </a:t>
+            </a:r>
+            <a:r>
+              <a:rPr sz="1000" b="0" lang="zh-CN" altLang="en-US">
+                <a:solidFill>
+                  <a:srgbClr val="F5F5F5">
+                    <a:alpha val="55000"/>
+                  </a:srgbClr>
+                </a:solidFill>
+                <a:latin typeface="Consolas"/>
+                <a:ea typeface="微软雅黑"/>
+                <a:cs typeface="微软雅黑"/>
+              </a:rPr>
+              <a:t>烟花编排工作台</a:t>
+            </a:r>
+            <a:r>
+              <a:rPr sz="1000" b="0" lang="zh-CN" altLang="en-US">
+                <a:solidFill>
+                  <a:srgbClr val="F5F5F5">
+                    <a:alpha val="55000"/>
+                  </a:srgbClr>
+                </a:solidFill>
+                <a:latin typeface="微软雅黑"/>
+                <a:ea typeface="微软雅黑"/>
+                <a:cs typeface="微软雅黑"/>
+              </a:rPr>
+              <a:t> </a:t>
+            </a:r>
+            <a:r>
+              <a:rPr sz="1000" b="0" lang="zh-CN" altLang="en-US">
+                <a:solidFill>
+                  <a:srgbClr val="F5F5F5">
+                    <a:alpha val="55000"/>
+                  </a:srgbClr>
+                </a:solidFill>
+                <a:latin typeface="Consolas"/>
+                <a:ea typeface="微软雅黑"/>
+                <a:cs typeface="微软雅黑"/>
+              </a:rPr>
+              <a:t>·</a:t>
+            </a:r>
+            <a:r>
+              <a:rPr sz="1000" b="0" lang="zh-CN" altLang="en-US">
+                <a:solidFill>
+                  <a:srgbClr val="F5F5F5">
+                    <a:alpha val="55000"/>
+                  </a:srgbClr>
+                </a:solidFill>
+                <a:latin typeface="微软雅黑"/>
+                <a:ea typeface="微软雅黑"/>
+                <a:cs typeface="微软雅黑"/>
+              </a:rPr>
+              <a:t> </a:t>
+            </a:r>
+            <a:r>
+              <a:rPr sz="1000" b="0" lang="zh-CN" altLang="en-US">
+                <a:solidFill>
+                  <a:srgbClr val="F5F5F5">
+                    <a:alpha val="55000"/>
+                  </a:srgbClr>
+                </a:solidFill>
+                <a:latin typeface="Consolas"/>
+                <a:ea typeface="微软雅黑"/>
+                <a:cs typeface="微软雅黑"/>
+              </a:rPr>
+              <a:t>同一份编排（B11</a:t>
+            </a:r>
+            <a:r>
+              <a:rPr sz="1000" b="0" lang="zh-CN" altLang="en-US">
+                <a:solidFill>
+                  <a:srgbClr val="F5F5F5">
+                    <a:alpha val="55000"/>
+                  </a:srgbClr>
+                </a:solidFill>
+                <a:latin typeface="微软雅黑"/>
+                <a:ea typeface="微软雅黑"/>
+                <a:cs typeface="微软雅黑"/>
+              </a:rPr>
+              <a:t> </a:t>
+            </a:r>
+            <a:r>
+              <a:rPr sz="1000" b="0" lang="zh-CN" altLang="en-US">
+                <a:solidFill>
+                  <a:srgbClr val="F5F5F5">
+                    <a:alpha val="55000"/>
+                  </a:srgbClr>
+                </a:solidFill>
+                <a:latin typeface="Consolas"/>
+                <a:ea typeface="微软雅黑"/>
+                <a:cs typeface="微软雅黑"/>
+              </a:rPr>
+              <a:t>修订</a:t>
+            </a:r>
+            <a:r>
+              <a:rPr sz="1000" b="0" lang="zh-CN" altLang="en-US">
+                <a:solidFill>
+                  <a:srgbClr val="F5F5F5">
+                    <a:alpha val="55000"/>
+                  </a:srgbClr>
+                </a:solidFill>
+                <a:latin typeface="微软雅黑"/>
+                <a:ea typeface="微软雅黑"/>
+                <a:cs typeface="微软雅黑"/>
+              </a:rPr>
+              <a:t> </a:t>
+            </a:r>
+            <a:r>
+              <a:rPr sz="1000" b="0" lang="zh-CN" altLang="en-US">
+                <a:solidFill>
+                  <a:srgbClr val="F5F5F5">
+                    <a:alpha val="55000"/>
+                  </a:srgbClr>
+                </a:solidFill>
+                <a:latin typeface="Consolas"/>
+                <a:ea typeface="微软雅黑"/>
+                <a:cs typeface="微软雅黑"/>
+              </a:rPr>
+              <a:t>3）切换平台与画质档；PC</a:t>
+            </a:r>
+            <a:r>
+              <a:rPr sz="1000" b="0" lang="zh-CN" altLang="en-US">
+                <a:solidFill>
+                  <a:srgbClr val="F5F5F5">
+                    <a:alpha val="55000"/>
+                  </a:srgbClr>
+                </a:solidFill>
+                <a:latin typeface="微软雅黑"/>
+                <a:ea typeface="微软雅黑"/>
+                <a:cs typeface="微软雅黑"/>
+              </a:rPr>
+              <a:t> </a:t>
+            </a:r>
+            <a:r>
+              <a:rPr sz="1000" b="0" lang="zh-CN" altLang="en-US">
+                <a:solidFill>
+                  <a:srgbClr val="F5F5F5">
+                    <a:alpha val="55000"/>
+                  </a:srgbClr>
+                </a:solidFill>
+                <a:latin typeface="Consolas"/>
+                <a:ea typeface="微软雅黑"/>
+                <a:cs typeface="微软雅黑"/>
+              </a:rPr>
+              <a:t>中</a:t>
+            </a:r>
+            <a:r>
+              <a:rPr sz="1000" b="0" lang="zh-CN" altLang="en-US">
+                <a:solidFill>
+                  <a:srgbClr val="F5F5F5">
+                    <a:alpha val="55000"/>
+                  </a:srgbClr>
+                </a:solidFill>
+                <a:latin typeface="微软雅黑"/>
+                <a:ea typeface="微软雅黑"/>
+                <a:cs typeface="微软雅黑"/>
+              </a:rPr>
+              <a:t> </a:t>
+            </a:r>
+            <a:r>
+              <a:rPr sz="1000" b="0" lang="zh-CN" altLang="en-US">
+                <a:solidFill>
+                  <a:srgbClr val="F5F5F5">
+                    <a:alpha val="55000"/>
+                  </a:srgbClr>
+                </a:solidFill>
+                <a:latin typeface="Consolas"/>
+                <a:ea typeface="微软雅黑"/>
+                <a:cs typeface="微软雅黑"/>
+              </a:rPr>
+              <a:t>/</a:t>
+            </a:r>
+            <a:r>
+              <a:rPr sz="1000" b="0" lang="zh-CN" altLang="en-US">
+                <a:solidFill>
+                  <a:srgbClr val="F5F5F5">
+                    <a:alpha val="55000"/>
+                  </a:srgbClr>
+                </a:solidFill>
+                <a:latin typeface="微软雅黑"/>
+                <a:ea typeface="微软雅黑"/>
+                <a:cs typeface="微软雅黑"/>
+              </a:rPr>
+              <a:t> </a:t>
+            </a:r>
+            <a:r>
+              <a:rPr sz="1000" b="0" lang="zh-CN" altLang="en-US">
+                <a:solidFill>
+                  <a:srgbClr val="F5F5F5">
+                    <a:alpha val="55000"/>
+                  </a:srgbClr>
+                </a:solidFill>
+                <a:latin typeface="Consolas"/>
+                <a:ea typeface="微软雅黑"/>
+                <a:cs typeface="微软雅黑"/>
+              </a:rPr>
+              <a:t>低</a:t>
+            </a:r>
+            <a:r>
+              <a:rPr sz="1000" b="0" lang="zh-CN" altLang="en-US">
+                <a:solidFill>
+                  <a:srgbClr val="F5F5F5">
+                    <a:alpha val="55000"/>
+                  </a:srgbClr>
+                </a:solidFill>
+                <a:latin typeface="微软雅黑"/>
+                <a:ea typeface="微软雅黑"/>
+                <a:cs typeface="微软雅黑"/>
+              </a:rPr>
+              <a:t> </a:t>
+            </a:r>
+            <a:r>
+              <a:rPr sz="1000" b="0" lang="zh-CN" altLang="en-US">
+                <a:solidFill>
+                  <a:srgbClr val="F5F5F5">
+                    <a:alpha val="55000"/>
+                  </a:srgbClr>
+                </a:solidFill>
+                <a:latin typeface="Consolas"/>
+                <a:ea typeface="微软雅黑"/>
+                <a:cs typeface="微软雅黑"/>
+              </a:rPr>
+              <a:t>852</a:t>
+            </a:r>
+            <a:r>
+              <a:rPr sz="1000" b="0" lang="zh-CN" altLang="en-US">
+                <a:solidFill>
+                  <a:srgbClr val="F5F5F5">
+                    <a:alpha val="55000"/>
+                  </a:srgbClr>
+                </a:solidFill>
+                <a:latin typeface="微软雅黑"/>
+                <a:ea typeface="微软雅黑"/>
+                <a:cs typeface="微软雅黑"/>
+              </a:rPr>
+              <a:t> </a:t>
+            </a:r>
+            <a:r>
+              <a:rPr sz="1000" b="0" lang="zh-CN" altLang="en-US">
+                <a:solidFill>
+                  <a:srgbClr val="F5F5F5">
+                    <a:alpha val="55000"/>
+                  </a:srgbClr>
+                </a:solidFill>
+                <a:latin typeface="Consolas"/>
+                <a:ea typeface="微软雅黑"/>
+                <a:cs typeface="微软雅黑"/>
+              </a:rPr>
+              <a:t>/</a:t>
+            </a:r>
+            <a:r>
+              <a:rPr sz="1000" b="0" lang="zh-CN" altLang="en-US">
+                <a:solidFill>
+                  <a:srgbClr val="F5F5F5">
+                    <a:alpha val="55000"/>
+                  </a:srgbClr>
+                </a:solidFill>
+                <a:latin typeface="微软雅黑"/>
+                <a:ea typeface="微软雅黑"/>
+                <a:cs typeface="微软雅黑"/>
+              </a:rPr>
+              <a:t> </a:t>
+            </a:r>
+            <a:r>
+              <a:rPr sz="1000" b="0" lang="zh-CN" altLang="en-US">
+                <a:solidFill>
+                  <a:srgbClr val="F5F5F5">
+                    <a:alpha val="55000"/>
+                  </a:srgbClr>
+                </a:solidFill>
+                <a:latin typeface="Consolas"/>
+                <a:ea typeface="微软雅黑"/>
+                <a:cs typeface="微软雅黑"/>
+              </a:rPr>
+              <a:t>438，手游高</a:t>
+            </a:r>
+            <a:r>
+              <a:rPr sz="1000" b="0" lang="zh-CN" altLang="en-US">
+                <a:solidFill>
+                  <a:srgbClr val="F5F5F5">
+                    <a:alpha val="55000"/>
+                  </a:srgbClr>
+                </a:solidFill>
+                <a:latin typeface="微软雅黑"/>
+                <a:ea typeface="微软雅黑"/>
+                <a:cs typeface="微软雅黑"/>
+              </a:rPr>
+              <a:t> </a:t>
+            </a:r>
+            <a:r>
+              <a:rPr sz="1000" b="0" lang="zh-CN" altLang="en-US">
+                <a:solidFill>
+                  <a:srgbClr val="F5F5F5">
+                    <a:alpha val="55000"/>
+                  </a:srgbClr>
+                </a:solidFill>
+                <a:latin typeface="Consolas"/>
+                <a:ea typeface="微软雅黑"/>
+                <a:cs typeface="微软雅黑"/>
+              </a:rPr>
+              <a:t>/</a:t>
+            </a:r>
+            <a:r>
+              <a:rPr sz="1000" b="0" lang="zh-CN" altLang="en-US">
+                <a:solidFill>
+                  <a:srgbClr val="F5F5F5">
+                    <a:alpha val="55000"/>
+                  </a:srgbClr>
+                </a:solidFill>
+                <a:latin typeface="微软雅黑"/>
+                <a:ea typeface="微软雅黑"/>
+                <a:cs typeface="微软雅黑"/>
+              </a:rPr>
+              <a:t> </a:t>
+            </a:r>
+            <a:r>
+              <a:rPr sz="1000" b="0" lang="zh-CN" altLang="en-US">
+                <a:solidFill>
+                  <a:srgbClr val="F5F5F5">
+                    <a:alpha val="55000"/>
+                  </a:srgbClr>
+                </a:solidFill>
+                <a:latin typeface="Consolas"/>
+                <a:ea typeface="微软雅黑"/>
+                <a:cs typeface="微软雅黑"/>
+              </a:rPr>
+              <a:t>中</a:t>
+            </a:r>
+            <a:r>
+              <a:rPr sz="1000" b="0" lang="zh-CN" altLang="en-US">
+                <a:solidFill>
+                  <a:srgbClr val="F5F5F5">
+                    <a:alpha val="55000"/>
+                  </a:srgbClr>
+                </a:solidFill>
+                <a:latin typeface="微软雅黑"/>
+                <a:ea typeface="微软雅黑"/>
+                <a:cs typeface="微软雅黑"/>
+              </a:rPr>
+              <a:t> </a:t>
+            </a:r>
+            <a:r>
+              <a:rPr sz="1000" b="0" lang="zh-CN" altLang="en-US">
+                <a:solidFill>
+                  <a:srgbClr val="F5F5F5">
+                    <a:alpha val="55000"/>
+                  </a:srgbClr>
+                </a:solidFill>
+                <a:latin typeface="Consolas"/>
+                <a:ea typeface="微软雅黑"/>
+                <a:cs typeface="微软雅黑"/>
+              </a:rPr>
+              <a:t>448</a:t>
+            </a:r>
+            <a:r>
+              <a:rPr sz="1000" b="0" lang="zh-CN" altLang="en-US">
+                <a:solidFill>
+                  <a:srgbClr val="F5F5F5">
+                    <a:alpha val="55000"/>
+                  </a:srgbClr>
+                </a:solidFill>
+                <a:latin typeface="微软雅黑"/>
+                <a:ea typeface="微软雅黑"/>
+                <a:cs typeface="微软雅黑"/>
+              </a:rPr>
+              <a:t> </a:t>
+            </a:r>
+            <a:r>
+              <a:rPr sz="1000" b="0" lang="zh-CN" altLang="en-US">
+                <a:solidFill>
+                  <a:srgbClr val="F5F5F5">
+                    <a:alpha val="55000"/>
+                  </a:srgbClr>
+                </a:solidFill>
+                <a:latin typeface="Consolas"/>
+                <a:ea typeface="微软雅黑"/>
+                <a:cs typeface="微软雅黑"/>
+              </a:rPr>
+              <a:t>/</a:t>
+            </a:r>
+            <a:r>
+              <a:rPr sz="1000" b="0" lang="zh-CN" altLang="en-US">
+                <a:solidFill>
+                  <a:srgbClr val="F5F5F5">
+                    <a:alpha val="55000"/>
+                  </a:srgbClr>
+                </a:solidFill>
+                <a:latin typeface="微软雅黑"/>
+                <a:ea typeface="微软雅黑"/>
+                <a:cs typeface="微软雅黑"/>
+              </a:rPr>
+              <a:t> </a:t>
+            </a:r>
+            <a:r>
+              <a:rPr sz="1000" b="0" lang="zh-CN" altLang="en-US">
+                <a:solidFill>
+                  <a:srgbClr val="F5F5F5">
+                    <a:alpha val="55000"/>
+                  </a:srgbClr>
+                </a:solidFill>
+                <a:latin typeface="Consolas"/>
+                <a:ea typeface="微软雅黑"/>
+                <a:cs typeface="微软雅黑"/>
+              </a:rPr>
+              <a:t>349</a:t>
+            </a:r>
+          </a:p>
+        </p:txBody>
+      </p:sp>
+      <p:sp>
+        <p:nvSpPr>
+          <p:cNvPr id="11" name="TextBox 10"/>
+          <p:cNvSpPr txBox="1"/>
+          <p:nvPr/>
+        </p:nvSpPr>
+        <p:spPr>
+          <a:xfrm>
+            <a:off x="8255000" y="1358900"/>
+            <a:ext cx="3327400" cy="228600"/>
+          </a:xfrm>
+          <a:prstGeom prst="rect">
+            <a:avLst/>
+          </a:prstGeom>
+          <a:noFill/>
+        </p:spPr>
+        <p:txBody>
+          <a:bodyPr wrap="square" lIns="0" rIns="0" tIns="0" bIns="0" anchor="t">
+            <a:noAutofit/>
+          </a:bodyPr>
+          <a:lstStyle/>
+          <a:p>
+            <a:pPr algn="r">
+              <a:lnSpc>
+                <a:spcPts val="2000"/>
+              </a:lnSpc>
+            </a:pPr>
+            <a:r>
+              <a:rPr sz="2000" b="1" lang="zh-CN" altLang="en-US">
+                <a:solidFill>
+                  <a:srgbClr val="0FF796"/>
+                </a:solidFill>
+                <a:latin typeface="Consolas"/>
+                <a:ea typeface="微软雅黑"/>
+                <a:cs typeface="微软雅黑"/>
+              </a:rPr>
+              <a:t>11</a:t>
+            </a:r>
+            <a:r>
+              <a:rPr sz="1200" b="0" lang="zh-CN" altLang="en-US">
                 <a:solidFill>
                   <a:srgbClr val="F5F5F5">
                     <a:alpha val="70000"/>
                   </a:srgbClr>
                 </a:solidFill>
-                <a:latin typeface="Consolas"/>
-                <a:ea typeface="微软雅黑"/>
-                <a:cs typeface="微软雅黑"/>
-              </a:rPr>
-              <a:t>高</a:t>
-            </a:r>
-          </a:p>
-        </p:txBody>
-      </p:sp>
-      <p:sp>
-        <p:nvSpPr>
-          <p:cNvPr id="11" name="Rectangle 10"/>
-          <p:cNvSpPr/>
-          <p:nvPr/>
-        </p:nvSpPr>
-        <p:spPr>
-          <a:xfrm>
-            <a:off x="2832100" y="2534232"/>
-            <a:ext cx="952500" cy="1275768"/>
-          </a:xfrm>
-          <a:prstGeom prst="rect">
-            <a:avLst/>
-          </a:prstGeom>
-          <a:solidFill>
-            <a:srgbClr val="F5F5F5">
-              <a:alpha val="32000"/>
-            </a:srgbClr>
-          </a:solidFill>
-          <a:ln>
-            <a:noFill/>
-          </a:ln>
-        </p:spPr>
-        <p:txBody>
-          <a:bodyPr rtlCol="0" anchor="ctr"/>
-          <a:lstStyle/>
-          <a:p>
-            <a:pPr algn="ctr"/>
+                <a:latin typeface="微软雅黑"/>
+                <a:ea typeface="微软雅黑"/>
+                <a:cs typeface="微软雅黑"/>
+              </a:rPr>
+              <a:t> </a:t>
+            </a:r>
+            <a:r>
+              <a:rPr sz="1200" b="0" lang="zh-CN" altLang="en-US">
+                <a:solidFill>
+                  <a:srgbClr val="F5F5F5">
+                    <a:alpha val="70000"/>
+                  </a:srgbClr>
+                </a:solidFill>
+                <a:latin typeface="Consolas"/>
+                <a:ea typeface="微软雅黑"/>
+                <a:cs typeface="微软雅黑"/>
+              </a:rPr>
+              <a:t>个大版本</a:t>
+            </a:r>
+            <a:r>
+              <a:rPr sz="1200" b="0" lang="zh-CN" altLang="en-US">
+                <a:solidFill>
+                  <a:srgbClr val="F5F5F5">
+                    <a:alpha val="70000"/>
+                  </a:srgbClr>
+                </a:solidFill>
+                <a:latin typeface="微软雅黑"/>
+                <a:ea typeface="微软雅黑"/>
+                <a:cs typeface="微软雅黑"/>
+              </a:rPr>
+              <a:t> </a:t>
+            </a:r>
+            <a:r>
+              <a:rPr sz="1200" b="0" lang="zh-CN" altLang="en-US">
+                <a:solidFill>
+                  <a:srgbClr val="F5F5F5">
+                    <a:alpha val="70000"/>
+                  </a:srgbClr>
+                </a:solidFill>
+                <a:latin typeface="Consolas"/>
+                <a:ea typeface="微软雅黑"/>
+                <a:cs typeface="微软雅黑"/>
+              </a:rPr>
+              <a:t>·</a:t>
+            </a:r>
+            <a:r>
+              <a:rPr sz="1200" b="0" lang="zh-CN" altLang="en-US">
+                <a:solidFill>
+                  <a:srgbClr val="F5F5F5">
+                    <a:alpha val="70000"/>
+                  </a:srgbClr>
+                </a:solidFill>
+                <a:latin typeface="微软雅黑"/>
+                <a:ea typeface="微软雅黑"/>
+                <a:cs typeface="微软雅黑"/>
+              </a:rPr>
+              <a:t> </a:t>
+            </a:r>
+            <a:r>
+              <a:rPr sz="1200" b="0" lang="zh-CN" altLang="en-US">
+                <a:solidFill>
+                  <a:srgbClr val="F5F5F5">
+                    <a:alpha val="70000"/>
+                  </a:srgbClr>
+                </a:solidFill>
+                <a:latin typeface="Consolas"/>
+                <a:ea typeface="微软雅黑"/>
+                <a:cs typeface="微软雅黑"/>
+              </a:rPr>
+              <a:t>每版自动检查</a:t>
+            </a:r>
           </a:p>
         </p:txBody>
       </p:sp>
@@ -12317,8 +14205,8 @@
         </p:nvSpPr>
         <p:spPr>
           <a:xfrm>
-            <a:off x="2705100" y="2267532"/>
-            <a:ext cx="1206500" cy="228600"/>
+            <a:off x="8255000" y="3746500"/>
+            <a:ext cx="3327400" cy="190500"/>
           </a:xfrm>
           <a:prstGeom prst="rect">
             <a:avLst/>
@@ -12331,1052 +14219,23 @@
           </a:bodyPr>
           <a:lstStyle/>
           <a:p>
-            <a:pPr algn="ctr">
-              <a:lnSpc>
-                <a:spcPts val="1439"/>
-              </a:lnSpc>
-            </a:pPr>
-            <a:r>
-              <a:rPr sz="1200" b="1" lang="zh-CN" altLang="en-US">
-                <a:solidFill>
-                  <a:srgbClr val="F5F5F5"/>
-                </a:solidFill>
-                <a:latin typeface="Consolas"/>
-                <a:ea typeface="微软雅黑"/>
-                <a:cs typeface="微软雅黑"/>
-              </a:rPr>
-              <a:t>约</a:t>
-            </a:r>
-            <a:r>
-              <a:rPr sz="1200" b="1" lang="zh-CN" altLang="en-US">
-                <a:solidFill>
-                  <a:srgbClr val="F5F5F5"/>
-                </a:solidFill>
-                <a:latin typeface="微软雅黑"/>
-                <a:ea typeface="微软雅黑"/>
-                <a:cs typeface="微软雅黑"/>
-              </a:rPr>
-              <a:t> </a:t>
-            </a:r>
-            <a:r>
-              <a:rPr sz="1200" b="1" lang="zh-CN" altLang="en-US">
-                <a:solidFill>
-                  <a:srgbClr val="F5F5F5"/>
-                </a:solidFill>
-                <a:latin typeface="Consolas"/>
-                <a:ea typeface="微软雅黑"/>
-                <a:cs typeface="微软雅黑"/>
-              </a:rPr>
-              <a:t>850</a:t>
-            </a:r>
-          </a:p>
-        </p:txBody>
-      </p:sp>
-      <p:sp>
-        <p:nvSpPr>
-          <p:cNvPr id="13" name="TextBox 12"/>
-          <p:cNvSpPr txBox="1"/>
-          <p:nvPr/>
-        </p:nvSpPr>
-        <p:spPr>
-          <a:xfrm>
-            <a:off x="2832100" y="3860800"/>
-            <a:ext cx="952500" cy="203200"/>
-          </a:xfrm>
-          <a:prstGeom prst="rect">
-            <a:avLst/>
-          </a:prstGeom>
-          <a:noFill/>
-        </p:spPr>
-        <p:txBody>
-          <a:bodyPr wrap="square" lIns="0" rIns="0" tIns="0" bIns="0" anchor="t">
-            <a:noAutofit/>
-          </a:bodyPr>
-          <a:lstStyle/>
-          <a:p>
-            <a:pPr algn="ctr">
-              <a:lnSpc>
-                <a:spcPts val="1320"/>
-              </a:lnSpc>
-            </a:pPr>
-            <a:r>
-              <a:rPr sz="1100" b="0" lang="zh-CN" altLang="en-US">
-                <a:solidFill>
-                  <a:srgbClr val="F5F5F5">
-                    <a:alpha val="70000"/>
-                  </a:srgbClr>
-                </a:solidFill>
-                <a:latin typeface="Consolas"/>
-                <a:ea typeface="微软雅黑"/>
-                <a:cs typeface="微软雅黑"/>
-              </a:rPr>
-              <a:t>中</a:t>
-            </a:r>
-          </a:p>
-        </p:txBody>
-      </p:sp>
-      <p:sp>
-        <p:nvSpPr>
-          <p:cNvPr id="14" name="Rectangle 13"/>
-          <p:cNvSpPr/>
-          <p:nvPr/>
-        </p:nvSpPr>
-        <p:spPr>
-          <a:xfrm>
-            <a:off x="4038600" y="3154148"/>
-            <a:ext cx="952500" cy="655852"/>
-          </a:xfrm>
-          <a:prstGeom prst="rect">
-            <a:avLst/>
-          </a:prstGeom>
-          <a:solidFill>
-            <a:srgbClr val="F5F5F5">
-              <a:alpha val="32000"/>
-            </a:srgbClr>
-          </a:solidFill>
-          <a:ln>
-            <a:noFill/>
-          </a:ln>
-        </p:spPr>
-        <p:txBody>
-          <a:bodyPr rtlCol="0" anchor="ctr"/>
-          <a:lstStyle/>
-          <a:p>
-            <a:pPr algn="ctr"/>
-          </a:p>
-        </p:txBody>
-      </p:sp>
-      <p:sp>
-        <p:nvSpPr>
-          <p:cNvPr id="15" name="TextBox 14"/>
-          <p:cNvSpPr txBox="1"/>
-          <p:nvPr/>
-        </p:nvSpPr>
-        <p:spPr>
-          <a:xfrm>
-            <a:off x="3911600" y="2887448"/>
-            <a:ext cx="1206500" cy="228600"/>
-          </a:xfrm>
-          <a:prstGeom prst="rect">
-            <a:avLst/>
-          </a:prstGeom>
-          <a:noFill/>
-        </p:spPr>
-        <p:txBody>
-          <a:bodyPr wrap="square" lIns="0" rIns="0" tIns="0" bIns="0" anchor="t">
-            <a:noAutofit/>
-          </a:bodyPr>
-          <a:lstStyle/>
-          <a:p>
-            <a:pPr algn="ctr">
-              <a:lnSpc>
-                <a:spcPts val="1439"/>
-              </a:lnSpc>
-            </a:pPr>
-            <a:r>
-              <a:rPr sz="1200" b="1" lang="zh-CN" altLang="en-US">
-                <a:solidFill>
-                  <a:srgbClr val="F5F5F5"/>
-                </a:solidFill>
-                <a:latin typeface="Consolas"/>
-                <a:ea typeface="微软雅黑"/>
-                <a:cs typeface="微软雅黑"/>
-              </a:rPr>
-              <a:t>约</a:t>
-            </a:r>
-            <a:r>
-              <a:rPr sz="1200" b="1" lang="zh-CN" altLang="en-US">
-                <a:solidFill>
-                  <a:srgbClr val="F5F5F5"/>
-                </a:solidFill>
-                <a:latin typeface="微软雅黑"/>
-                <a:ea typeface="微软雅黑"/>
-                <a:cs typeface="微软雅黑"/>
-              </a:rPr>
-              <a:t> </a:t>
-            </a:r>
-            <a:r>
-              <a:rPr sz="1200" b="1" lang="zh-CN" altLang="en-US">
-                <a:solidFill>
-                  <a:srgbClr val="F5F5F5"/>
-                </a:solidFill>
-                <a:latin typeface="Consolas"/>
-                <a:ea typeface="微软雅黑"/>
-                <a:cs typeface="微软雅黑"/>
-              </a:rPr>
-              <a:t>440</a:t>
-            </a:r>
-          </a:p>
-        </p:txBody>
-      </p:sp>
-      <p:sp>
-        <p:nvSpPr>
-          <p:cNvPr id="16" name="TextBox 15"/>
-          <p:cNvSpPr txBox="1"/>
-          <p:nvPr/>
-        </p:nvSpPr>
-        <p:spPr>
-          <a:xfrm>
-            <a:off x="4038600" y="3860800"/>
-            <a:ext cx="952500" cy="203200"/>
-          </a:xfrm>
-          <a:prstGeom prst="rect">
-            <a:avLst/>
-          </a:prstGeom>
-          <a:noFill/>
-        </p:spPr>
-        <p:txBody>
-          <a:bodyPr wrap="square" lIns="0" rIns="0" tIns="0" bIns="0" anchor="t">
-            <a:noAutofit/>
-          </a:bodyPr>
-          <a:lstStyle/>
-          <a:p>
-            <a:pPr algn="ctr">
-              <a:lnSpc>
-                <a:spcPts val="1320"/>
-              </a:lnSpc>
-            </a:pPr>
-            <a:r>
-              <a:rPr sz="1100" b="0" lang="zh-CN" altLang="en-US">
-                <a:solidFill>
-                  <a:srgbClr val="F5F5F5">
-                    <a:alpha val="70000"/>
-                  </a:srgbClr>
-                </a:solidFill>
-                <a:latin typeface="Consolas"/>
-                <a:ea typeface="微软雅黑"/>
-                <a:cs typeface="微软雅黑"/>
-              </a:rPr>
-              <a:t>低</a:t>
-            </a:r>
-          </a:p>
-        </p:txBody>
-      </p:sp>
-      <p:sp>
-        <p:nvSpPr>
-          <p:cNvPr id="17" name="TextBox 16"/>
-          <p:cNvSpPr txBox="1"/>
-          <p:nvPr/>
-        </p:nvSpPr>
-        <p:spPr>
-          <a:xfrm>
-            <a:off x="1625600" y="4064000"/>
-            <a:ext cx="3365500" cy="215900"/>
-          </a:xfrm>
-          <a:prstGeom prst="rect">
-            <a:avLst/>
-          </a:prstGeom>
-          <a:noFill/>
-        </p:spPr>
-        <p:txBody>
-          <a:bodyPr wrap="square" lIns="0" rIns="0" tIns="0" bIns="0" anchor="t">
-            <a:noAutofit/>
-          </a:bodyPr>
-          <a:lstStyle/>
-          <a:p>
-            <a:pPr algn="ctr">
-              <a:lnSpc>
-                <a:spcPts val="1560"/>
-              </a:lnSpc>
-            </a:pPr>
-            <a:r>
-              <a:rPr sz="1300" b="1" lang="zh-CN" altLang="en-US">
-                <a:solidFill>
-                  <a:srgbClr val="F5F5F5"/>
-                </a:solidFill>
-                <a:latin typeface="Consolas"/>
-                <a:ea typeface="微软雅黑"/>
-                <a:cs typeface="微软雅黑"/>
-              </a:rPr>
-              <a:t>PC</a:t>
-            </a:r>
-          </a:p>
-        </p:txBody>
-      </p:sp>
-      <p:sp>
-        <p:nvSpPr>
-          <p:cNvPr id="18" name="Rectangle 17"/>
-          <p:cNvSpPr/>
-          <p:nvPr/>
-        </p:nvSpPr>
-        <p:spPr>
-          <a:xfrm>
-            <a:off x="6261100" y="3139174"/>
-            <a:ext cx="952500" cy="670826"/>
-          </a:xfrm>
-          <a:prstGeom prst="rect">
-            <a:avLst/>
-          </a:prstGeom>
-          <a:solidFill>
-            <a:srgbClr val="F5F5F5">
-              <a:alpha val="32000"/>
-            </a:srgbClr>
-          </a:solidFill>
-          <a:ln>
-            <a:noFill/>
-          </a:ln>
-        </p:spPr>
-        <p:txBody>
-          <a:bodyPr rtlCol="0" anchor="ctr"/>
-          <a:lstStyle/>
-          <a:p>
-            <a:pPr algn="ctr"/>
-          </a:p>
-        </p:txBody>
-      </p:sp>
-      <p:sp>
-        <p:nvSpPr>
-          <p:cNvPr id="19" name="TextBox 18"/>
-          <p:cNvSpPr txBox="1"/>
-          <p:nvPr/>
-        </p:nvSpPr>
-        <p:spPr>
-          <a:xfrm>
-            <a:off x="6134100" y="2872474"/>
-            <a:ext cx="1206500" cy="228600"/>
-          </a:xfrm>
-          <a:prstGeom prst="rect">
-            <a:avLst/>
-          </a:prstGeom>
-          <a:noFill/>
-        </p:spPr>
-        <p:txBody>
-          <a:bodyPr wrap="square" lIns="0" rIns="0" tIns="0" bIns="0" anchor="t">
-            <a:noAutofit/>
-          </a:bodyPr>
-          <a:lstStyle/>
-          <a:p>
-            <a:pPr algn="ctr">
-              <a:lnSpc>
-                <a:spcPts val="1439"/>
-              </a:lnSpc>
-            </a:pPr>
-            <a:r>
-              <a:rPr sz="1200" b="1" lang="zh-CN" altLang="en-US">
-                <a:solidFill>
-                  <a:srgbClr val="F5F5F5"/>
-                </a:solidFill>
-                <a:latin typeface="Consolas"/>
-                <a:ea typeface="微软雅黑"/>
-                <a:cs typeface="微软雅黑"/>
-              </a:rPr>
-              <a:t>约</a:t>
-            </a:r>
-            <a:r>
-              <a:rPr sz="1200" b="1" lang="zh-CN" altLang="en-US">
-                <a:solidFill>
-                  <a:srgbClr val="F5F5F5"/>
-                </a:solidFill>
-                <a:latin typeface="微软雅黑"/>
-                <a:ea typeface="微软雅黑"/>
-                <a:cs typeface="微软雅黑"/>
-              </a:rPr>
-              <a:t> </a:t>
-            </a:r>
-            <a:r>
-              <a:rPr sz="1200" b="1" lang="zh-CN" altLang="en-US">
-                <a:solidFill>
-                  <a:srgbClr val="F5F5F5"/>
-                </a:solidFill>
-                <a:latin typeface="Consolas"/>
-                <a:ea typeface="微软雅黑"/>
-                <a:cs typeface="微软雅黑"/>
-              </a:rPr>
-              <a:t>450</a:t>
-            </a:r>
-          </a:p>
-        </p:txBody>
-      </p:sp>
-      <p:sp>
-        <p:nvSpPr>
-          <p:cNvPr id="20" name="TextBox 19"/>
-          <p:cNvSpPr txBox="1"/>
-          <p:nvPr/>
-        </p:nvSpPr>
-        <p:spPr>
-          <a:xfrm>
-            <a:off x="6261100" y="3860800"/>
-            <a:ext cx="952500" cy="203200"/>
-          </a:xfrm>
-          <a:prstGeom prst="rect">
-            <a:avLst/>
-          </a:prstGeom>
-          <a:noFill/>
-        </p:spPr>
-        <p:txBody>
-          <a:bodyPr wrap="square" lIns="0" rIns="0" tIns="0" bIns="0" anchor="t">
-            <a:noAutofit/>
-          </a:bodyPr>
-          <a:lstStyle/>
-          <a:p>
-            <a:pPr algn="ctr">
-              <a:lnSpc>
-                <a:spcPts val="1320"/>
-              </a:lnSpc>
-            </a:pPr>
-            <a:r>
-              <a:rPr sz="1100" b="0" lang="zh-CN" altLang="en-US">
-                <a:solidFill>
-                  <a:srgbClr val="F5F5F5">
-                    <a:alpha val="70000"/>
-                  </a:srgbClr>
-                </a:solidFill>
-                <a:latin typeface="Consolas"/>
-                <a:ea typeface="微软雅黑"/>
-                <a:cs typeface="微软雅黑"/>
-              </a:rPr>
-              <a:t>高</a:t>
-            </a:r>
-          </a:p>
-        </p:txBody>
-      </p:sp>
-      <p:sp>
-        <p:nvSpPr>
-          <p:cNvPr id="21" name="Rectangle 20"/>
-          <p:cNvSpPr/>
-          <p:nvPr/>
-        </p:nvSpPr>
-        <p:spPr>
-          <a:xfrm>
-            <a:off x="7467600" y="3287414"/>
-            <a:ext cx="952500" cy="522586"/>
-          </a:xfrm>
-          <a:prstGeom prst="rect">
-            <a:avLst/>
-          </a:prstGeom>
-          <a:solidFill>
-            <a:srgbClr val="F5F5F5">
-              <a:alpha val="32000"/>
-            </a:srgbClr>
-          </a:solidFill>
-          <a:ln>
-            <a:noFill/>
-          </a:ln>
-        </p:spPr>
-        <p:txBody>
-          <a:bodyPr rtlCol="0" anchor="ctr"/>
-          <a:lstStyle/>
-          <a:p>
-            <a:pPr algn="ctr"/>
-          </a:p>
-        </p:txBody>
-      </p:sp>
-      <p:sp>
-        <p:nvSpPr>
-          <p:cNvPr id="22" name="TextBox 21"/>
-          <p:cNvSpPr txBox="1"/>
-          <p:nvPr/>
-        </p:nvSpPr>
-        <p:spPr>
-          <a:xfrm>
-            <a:off x="7340600" y="3020714"/>
-            <a:ext cx="1206500" cy="228600"/>
-          </a:xfrm>
-          <a:prstGeom prst="rect">
-            <a:avLst/>
-          </a:prstGeom>
-          <a:noFill/>
-        </p:spPr>
-        <p:txBody>
-          <a:bodyPr wrap="square" lIns="0" rIns="0" tIns="0" bIns="0" anchor="t">
-            <a:noAutofit/>
-          </a:bodyPr>
-          <a:lstStyle/>
-          <a:p>
-            <a:pPr algn="ctr">
-              <a:lnSpc>
-                <a:spcPts val="1439"/>
-              </a:lnSpc>
-            </a:pPr>
-            <a:r>
-              <a:rPr sz="1200" b="1" lang="zh-CN" altLang="en-US">
-                <a:solidFill>
-                  <a:srgbClr val="F5F5F5"/>
-                </a:solidFill>
-                <a:latin typeface="Consolas"/>
-                <a:ea typeface="微软雅黑"/>
-                <a:cs typeface="微软雅黑"/>
-              </a:rPr>
-              <a:t>约</a:t>
-            </a:r>
-            <a:r>
-              <a:rPr sz="1200" b="1" lang="zh-CN" altLang="en-US">
-                <a:solidFill>
-                  <a:srgbClr val="F5F5F5"/>
-                </a:solidFill>
-                <a:latin typeface="微软雅黑"/>
-                <a:ea typeface="微软雅黑"/>
-                <a:cs typeface="微软雅黑"/>
-              </a:rPr>
-              <a:t> </a:t>
-            </a:r>
-            <a:r>
-              <a:rPr sz="1200" b="1" lang="zh-CN" altLang="en-US">
-                <a:solidFill>
-                  <a:srgbClr val="F5F5F5"/>
-                </a:solidFill>
-                <a:latin typeface="Consolas"/>
-                <a:ea typeface="微软雅黑"/>
-                <a:cs typeface="微软雅黑"/>
-              </a:rPr>
-              <a:t>350</a:t>
-            </a:r>
-          </a:p>
-        </p:txBody>
-      </p:sp>
-      <p:sp>
-        <p:nvSpPr>
-          <p:cNvPr id="23" name="TextBox 22"/>
-          <p:cNvSpPr txBox="1"/>
-          <p:nvPr/>
-        </p:nvSpPr>
-        <p:spPr>
-          <a:xfrm>
-            <a:off x="7467600" y="3860800"/>
-            <a:ext cx="952500" cy="203200"/>
-          </a:xfrm>
-          <a:prstGeom prst="rect">
-            <a:avLst/>
-          </a:prstGeom>
-          <a:noFill/>
-        </p:spPr>
-        <p:txBody>
-          <a:bodyPr wrap="square" lIns="0" rIns="0" tIns="0" bIns="0" anchor="t">
-            <a:noAutofit/>
-          </a:bodyPr>
-          <a:lstStyle/>
-          <a:p>
-            <a:pPr algn="ctr">
-              <a:lnSpc>
-                <a:spcPts val="1320"/>
-              </a:lnSpc>
-            </a:pPr>
-            <a:r>
-              <a:rPr sz="1100" b="0" lang="zh-CN" altLang="en-US">
-                <a:solidFill>
-                  <a:srgbClr val="F5F5F5">
-                    <a:alpha val="70000"/>
-                  </a:srgbClr>
-                </a:solidFill>
-                <a:latin typeface="Consolas"/>
-                <a:ea typeface="微软雅黑"/>
-                <a:cs typeface="微软雅黑"/>
-              </a:rPr>
-              <a:t>中</a:t>
-            </a:r>
-          </a:p>
-        </p:txBody>
-      </p:sp>
-      <p:sp>
-        <p:nvSpPr>
-          <p:cNvPr id="24" name="Rectangle 23"/>
-          <p:cNvSpPr/>
-          <p:nvPr/>
-        </p:nvSpPr>
-        <p:spPr>
-          <a:xfrm>
-            <a:off x="8674100" y="3538974"/>
-            <a:ext cx="952500" cy="271026"/>
-          </a:xfrm>
-          <a:prstGeom prst="rect">
-            <a:avLst/>
-          </a:prstGeom>
-          <a:solidFill>
-            <a:srgbClr val="F5F5F5">
-              <a:alpha val="32000"/>
-            </a:srgbClr>
-          </a:solidFill>
-          <a:ln>
-            <a:noFill/>
-          </a:ln>
-        </p:spPr>
-        <p:txBody>
-          <a:bodyPr rtlCol="0" anchor="ctr"/>
-          <a:lstStyle/>
-          <a:p>
-            <a:pPr algn="ctr"/>
-          </a:p>
-        </p:txBody>
-      </p:sp>
-      <p:sp>
-        <p:nvSpPr>
-          <p:cNvPr id="25" name="TextBox 24"/>
-          <p:cNvSpPr txBox="1"/>
-          <p:nvPr/>
-        </p:nvSpPr>
-        <p:spPr>
-          <a:xfrm>
-            <a:off x="8547100" y="3272274"/>
-            <a:ext cx="1206500" cy="228600"/>
-          </a:xfrm>
-          <a:prstGeom prst="rect">
-            <a:avLst/>
-          </a:prstGeom>
-          <a:noFill/>
-        </p:spPr>
-        <p:txBody>
-          <a:bodyPr wrap="square" lIns="0" rIns="0" tIns="0" bIns="0" anchor="t">
-            <a:noAutofit/>
-          </a:bodyPr>
-          <a:lstStyle/>
-          <a:p>
-            <a:pPr algn="ctr">
-              <a:lnSpc>
-                <a:spcPts val="1439"/>
-              </a:lnSpc>
-            </a:pPr>
-            <a:r>
-              <a:rPr sz="1200" b="1" lang="zh-CN" altLang="en-US">
-                <a:solidFill>
-                  <a:srgbClr val="F5F5F5"/>
-                </a:solidFill>
-                <a:latin typeface="Consolas"/>
-                <a:ea typeface="微软雅黑"/>
-                <a:cs typeface="微软雅黑"/>
-              </a:rPr>
-              <a:t>约</a:t>
-            </a:r>
-            <a:r>
-              <a:rPr sz="1200" b="1" lang="zh-CN" altLang="en-US">
-                <a:solidFill>
-                  <a:srgbClr val="F5F5F5"/>
-                </a:solidFill>
-                <a:latin typeface="微软雅黑"/>
-                <a:ea typeface="微软雅黑"/>
-                <a:cs typeface="微软雅黑"/>
-              </a:rPr>
-              <a:t> </a:t>
-            </a:r>
-            <a:r>
-              <a:rPr sz="1200" b="1" lang="zh-CN" altLang="en-US">
-                <a:solidFill>
-                  <a:srgbClr val="F5F5F5"/>
-                </a:solidFill>
-                <a:latin typeface="Consolas"/>
-                <a:ea typeface="微软雅黑"/>
-                <a:cs typeface="微软雅黑"/>
-              </a:rPr>
-              <a:t>180</a:t>
-            </a:r>
-          </a:p>
-        </p:txBody>
-      </p:sp>
-      <p:sp>
-        <p:nvSpPr>
-          <p:cNvPr id="26" name="TextBox 25"/>
-          <p:cNvSpPr txBox="1"/>
-          <p:nvPr/>
-        </p:nvSpPr>
-        <p:spPr>
-          <a:xfrm>
-            <a:off x="8674100" y="3860800"/>
-            <a:ext cx="952500" cy="203200"/>
-          </a:xfrm>
-          <a:prstGeom prst="rect">
-            <a:avLst/>
-          </a:prstGeom>
-          <a:noFill/>
-        </p:spPr>
-        <p:txBody>
-          <a:bodyPr wrap="square" lIns="0" rIns="0" tIns="0" bIns="0" anchor="t">
-            <a:noAutofit/>
-          </a:bodyPr>
-          <a:lstStyle/>
-          <a:p>
-            <a:pPr algn="ctr">
-              <a:lnSpc>
-                <a:spcPts val="1320"/>
-              </a:lnSpc>
-            </a:pPr>
-            <a:r>
-              <a:rPr sz="1100" b="0" lang="zh-CN" altLang="en-US">
-                <a:solidFill>
-                  <a:srgbClr val="F5F5F5">
-                    <a:alpha val="70000"/>
-                  </a:srgbClr>
-                </a:solidFill>
-                <a:latin typeface="Consolas"/>
-                <a:ea typeface="微软雅黑"/>
-                <a:cs typeface="微软雅黑"/>
-              </a:rPr>
-              <a:t>低</a:t>
-            </a:r>
-          </a:p>
-        </p:txBody>
-      </p:sp>
-      <p:sp>
-        <p:nvSpPr>
-          <p:cNvPr id="27" name="TextBox 26"/>
-          <p:cNvSpPr txBox="1"/>
-          <p:nvPr/>
-        </p:nvSpPr>
-        <p:spPr>
-          <a:xfrm>
-            <a:off x="6261100" y="4064000"/>
-            <a:ext cx="3365500" cy="215900"/>
-          </a:xfrm>
-          <a:prstGeom prst="rect">
-            <a:avLst/>
-          </a:prstGeom>
-          <a:noFill/>
-        </p:spPr>
-        <p:txBody>
-          <a:bodyPr wrap="square" lIns="0" rIns="0" tIns="0" bIns="0" anchor="t">
-            <a:noAutofit/>
-          </a:bodyPr>
-          <a:lstStyle/>
-          <a:p>
-            <a:pPr algn="ctr">
-              <a:lnSpc>
-                <a:spcPts val="1560"/>
-              </a:lnSpc>
-            </a:pPr>
-            <a:r>
-              <a:rPr sz="1300" b="1" lang="zh-CN" altLang="en-US">
-                <a:solidFill>
-                  <a:srgbClr val="F5F5F5"/>
-                </a:solidFill>
-                <a:latin typeface="Consolas"/>
-                <a:ea typeface="微软雅黑"/>
-                <a:cs typeface="微软雅黑"/>
-              </a:rPr>
-              <a:t>手游</a:t>
-            </a:r>
-          </a:p>
-        </p:txBody>
-      </p:sp>
-      <p:sp>
-        <p:nvSpPr>
-          <p:cNvPr id="28" name="Rectangle 27"/>
-          <p:cNvSpPr/>
-          <p:nvPr/>
-        </p:nvSpPr>
-        <p:spPr>
-          <a:xfrm>
-            <a:off x="1371600" y="3810000"/>
-            <a:ext cx="9448800" cy="6350"/>
-          </a:xfrm>
-          <a:prstGeom prst="rect">
-            <a:avLst/>
-          </a:prstGeom>
-          <a:solidFill>
-            <a:srgbClr val="F5F5F5">
-              <a:alpha val="25000"/>
-            </a:srgbClr>
-          </a:solidFill>
-          <a:ln>
-            <a:noFill/>
-          </a:ln>
-        </p:spPr>
-        <p:txBody>
-          <a:bodyPr rtlCol="0" anchor="ctr"/>
-          <a:lstStyle/>
-          <a:p>
-            <a:pPr algn="ctr"/>
-          </a:p>
-        </p:txBody>
-      </p:sp>
-      <p:sp>
-        <p:nvSpPr>
-          <p:cNvPr id="29" name="Rectangle 28"/>
-          <p:cNvSpPr/>
-          <p:nvPr/>
-        </p:nvSpPr>
-        <p:spPr>
-          <a:xfrm>
-            <a:off x="609600" y="4533900"/>
-            <a:ext cx="6400800" cy="1536700"/>
-          </a:xfrm>
-          <a:prstGeom prst="rect">
-            <a:avLst/>
-          </a:prstGeom>
-          <a:solidFill>
-            <a:srgbClr val="161616"/>
-          </a:solidFill>
-          <a:ln w="6350">
-            <a:solidFill>
-              <a:srgbClr val="F5F5F5">
-                <a:alpha val="8000"/>
-              </a:srgbClr>
-            </a:solidFill>
-          </a:ln>
-        </p:spPr>
-        <p:txBody>
-          <a:bodyPr rtlCol="0" anchor="ctr"/>
-          <a:lstStyle/>
-          <a:p>
-            <a:pPr algn="ctr"/>
-          </a:p>
-        </p:txBody>
-      </p:sp>
-      <p:sp>
-        <p:nvSpPr>
-          <p:cNvPr id="30" name="Rectangle 29"/>
-          <p:cNvSpPr/>
-          <p:nvPr/>
-        </p:nvSpPr>
-        <p:spPr>
-          <a:xfrm>
-            <a:off x="609600" y="4533900"/>
-            <a:ext cx="38100" cy="1536700"/>
-          </a:xfrm>
-          <a:prstGeom prst="rect">
-            <a:avLst/>
-          </a:prstGeom>
-          <a:solidFill>
-            <a:srgbClr val="0FF796"/>
-          </a:solidFill>
-          <a:ln>
-            <a:noFill/>
-          </a:ln>
-        </p:spPr>
-        <p:txBody>
-          <a:bodyPr rtlCol="0" anchor="ctr"/>
-          <a:lstStyle/>
-          <a:p>
-            <a:pPr algn="ctr"/>
-          </a:p>
-        </p:txBody>
-      </p:sp>
-      <p:sp>
-        <p:nvSpPr>
-          <p:cNvPr id="31" name="TextBox 30"/>
-          <p:cNvSpPr txBox="1"/>
-          <p:nvPr/>
-        </p:nvSpPr>
-        <p:spPr>
-          <a:xfrm>
-            <a:off x="863600" y="4699000"/>
-            <a:ext cx="5715000" cy="508000"/>
-          </a:xfrm>
-          <a:prstGeom prst="rect">
-            <a:avLst/>
-          </a:prstGeom>
-          <a:noFill/>
-        </p:spPr>
-        <p:txBody>
-          <a:bodyPr wrap="square" lIns="0" rIns="0" tIns="0" bIns="0" anchor="t">
-            <a:noAutofit/>
-          </a:bodyPr>
-          <a:lstStyle/>
-          <a:p>
-            <a:pPr algn="l">
-              <a:lnSpc>
-                <a:spcPts val="3780"/>
-              </a:lnSpc>
-            </a:pPr>
-            <a:r>
-              <a:rPr sz="3600" b="1" lang="zh-CN" altLang="en-US">
-                <a:solidFill>
-                  <a:srgbClr val="0FF796"/>
-                </a:solidFill>
-                <a:latin typeface="Consolas"/>
-                <a:ea typeface="微软雅黑"/>
-                <a:cs typeface="微软雅黑"/>
-              </a:rPr>
-              <a:t>11</a:t>
-            </a:r>
-            <a:r>
-              <a:rPr sz="1500" b="1" lang="zh-CN" altLang="en-US">
-                <a:solidFill>
-                  <a:srgbClr val="F5F5F5"/>
-                </a:solidFill>
-                <a:latin typeface="微软雅黑"/>
-                <a:ea typeface="微软雅黑"/>
-                <a:cs typeface="微软雅黑"/>
-              </a:rPr>
-              <a:t> </a:t>
-            </a:r>
-            <a:r>
-              <a:rPr sz="1500" b="1" lang="zh-CN" altLang="en-US">
-                <a:solidFill>
-                  <a:srgbClr val="F5F5F5"/>
-                </a:solidFill>
-                <a:latin typeface="Consolas"/>
-                <a:ea typeface="微软雅黑"/>
-                <a:cs typeface="微软雅黑"/>
-              </a:rPr>
-              <a:t>个大版本</a:t>
-            </a:r>
-          </a:p>
-        </p:txBody>
-      </p:sp>
-      <p:sp>
-        <p:nvSpPr>
-          <p:cNvPr id="32" name="TextBox 31"/>
-          <p:cNvSpPr txBox="1"/>
-          <p:nvPr/>
-        </p:nvSpPr>
-        <p:spPr>
-          <a:xfrm>
-            <a:off x="863600" y="5372100"/>
-            <a:ext cx="5842000" cy="508000"/>
-          </a:xfrm>
-          <a:prstGeom prst="rect">
-            <a:avLst/>
-          </a:prstGeom>
-          <a:noFill/>
-        </p:spPr>
-        <p:txBody>
-          <a:bodyPr wrap="square" lIns="0" rIns="0" tIns="0" bIns="0" anchor="t">
-            <a:noAutofit/>
-          </a:bodyPr>
-          <a:lstStyle/>
-          <a:p>
-            <a:pPr algn="l">
-              <a:lnSpc>
-                <a:spcPts val="2080"/>
-              </a:lnSpc>
-            </a:pPr>
-            <a:r>
-              <a:rPr sz="1300" b="0" lang="zh-CN" altLang="en-US">
-                <a:solidFill>
-                  <a:srgbClr val="F5F5F5">
-                    <a:alpha val="70000"/>
-                  </a:srgbClr>
-                </a:solidFill>
-                <a:latin typeface="Consolas"/>
-                <a:ea typeface="微软雅黑"/>
-                <a:cs typeface="微软雅黑"/>
-              </a:rPr>
-              <a:t>每版自动检查；调整节奏只需重新出表</a:t>
-            </a:r>
-          </a:p>
-        </p:txBody>
-      </p:sp>
-      <p:sp>
-        <p:nvSpPr>
-          <p:cNvPr id="33" name="Rectangle 32"/>
-          <p:cNvSpPr/>
-          <p:nvPr/>
-        </p:nvSpPr>
-        <p:spPr>
-          <a:xfrm>
-            <a:off x="7315200" y="4533900"/>
-            <a:ext cx="4267200" cy="1536700"/>
-          </a:xfrm>
-          <a:prstGeom prst="rect">
-            <a:avLst/>
-          </a:prstGeom>
-          <a:solidFill>
-            <a:srgbClr val="161616"/>
-          </a:solidFill>
-          <a:ln w="6350">
-            <a:solidFill>
-              <a:srgbClr val="F5F5F5">
-                <a:alpha val="8000"/>
-              </a:srgbClr>
-            </a:solidFill>
-          </a:ln>
-        </p:spPr>
-        <p:txBody>
-          <a:bodyPr rtlCol="0" anchor="ctr"/>
-          <a:lstStyle/>
-          <a:p>
-            <a:pPr algn="ctr"/>
-          </a:p>
-        </p:txBody>
-      </p:sp>
-      <p:sp>
-        <p:nvSpPr>
-          <p:cNvPr id="34" name="TextBox 33"/>
-          <p:cNvSpPr txBox="1"/>
-          <p:nvPr/>
-        </p:nvSpPr>
-        <p:spPr>
-          <a:xfrm>
-            <a:off x="7569200" y="4699000"/>
-            <a:ext cx="3810000" cy="228600"/>
-          </a:xfrm>
-          <a:prstGeom prst="rect">
-            <a:avLst/>
-          </a:prstGeom>
-          <a:noFill/>
-        </p:spPr>
-        <p:txBody>
-          <a:bodyPr wrap="square" lIns="0" rIns="0" tIns="0" bIns="0" anchor="t">
-            <a:noAutofit/>
-          </a:bodyPr>
-          <a:lstStyle/>
-          <a:p>
-            <a:pPr algn="l">
-              <a:lnSpc>
-                <a:spcPts val="1560"/>
-              </a:lnSpc>
-            </a:pPr>
-            <a:r>
-              <a:rPr sz="1200" b="1" lang="zh-CN" altLang="en-US" spc="200">
-                <a:solidFill>
-                  <a:srgbClr val="0FF796"/>
-                </a:solidFill>
-                <a:latin typeface="Consolas"/>
-                <a:ea typeface="微软雅黑"/>
-                <a:cs typeface="微软雅黑"/>
-              </a:rPr>
-              <a:t>待改进</a:t>
-            </a:r>
-          </a:p>
-        </p:txBody>
-      </p:sp>
-      <p:sp>
-        <p:nvSpPr>
-          <p:cNvPr id="35" name="TextBox 34"/>
-          <p:cNvSpPr txBox="1"/>
-          <p:nvPr/>
-        </p:nvSpPr>
-        <p:spPr>
-          <a:xfrm>
-            <a:off x="7569200" y="5016500"/>
-            <a:ext cx="3810000" cy="762000"/>
-          </a:xfrm>
-          <a:prstGeom prst="rect">
-            <a:avLst/>
-          </a:prstGeom>
-          <a:noFill/>
-        </p:spPr>
-        <p:txBody>
-          <a:bodyPr wrap="square" lIns="0" rIns="0" tIns="0" bIns="0" anchor="t">
-            <a:noAutofit/>
-          </a:bodyPr>
-          <a:lstStyle/>
-          <a:p>
-            <a:pPr algn="l">
-              <a:lnSpc>
-                <a:spcPts val="2080"/>
-              </a:lnSpc>
-            </a:pPr>
-            <a:r>
-              <a:rPr sz="1300" b="0" lang="zh-CN" altLang="en-US">
-                <a:solidFill>
-                  <a:srgbClr val="F5F5F5">
-                    <a:alpha val="70000"/>
-                  </a:srgbClr>
-                </a:solidFill>
-                <a:latin typeface="Consolas"/>
-                <a:ea typeface="微软雅黑"/>
-                <a:cs typeface="微软雅黑"/>
-              </a:rPr>
-              <a:t>节拍对齐指标</a:t>
-            </a:r>
-          </a:p>
-          <a:p>
-            <a:pPr algn="l">
-              <a:lnSpc>
-                <a:spcPts val="2080"/>
-              </a:lnSpc>
-            </a:pPr>
-            <a:r>
-              <a:rPr sz="1300" b="0" lang="zh-CN" altLang="en-US">
-                <a:solidFill>
-                  <a:srgbClr val="F5F5F5">
-                    <a:alpha val="70000"/>
-                  </a:srgbClr>
-                </a:solidFill>
-                <a:latin typeface="Consolas"/>
-                <a:ea typeface="微软雅黑"/>
-                <a:cs typeface="微软雅黑"/>
-              </a:rPr>
-              <a:t>尚未达到宪章目标</a:t>
+            <a:pPr algn="r">
+              <a:lnSpc>
+                <a:spcPts val="1200"/>
+              </a:lnSpc>
+            </a:pPr>
+            <a:r>
+              <a:rPr sz="1000" b="0" lang="zh-CN" altLang="en-US">
+                <a:solidFill>
+                  <a:srgbClr val="F5F5F5">
+                    <a:alpha val="55000"/>
+                  </a:srgbClr>
+                </a:solidFill>
+                <a:latin typeface="Consolas"/>
+                <a:ea typeface="微软雅黑"/>
+                <a:cs typeface="微软雅黑"/>
+              </a:rPr>
+              <a:t>节拍对齐指标仍在优化</a:t>
             </a:r>
           </a:p>
         </p:txBody>
@@ -22100,159 +22959,9 @@
         <p:nvPr/>
       </p:nvGrpSpPr>
       <p:grpSpPr/>
-      <p:sp>
-        <p:nvSpPr>
-          <p:cNvPr id="2" name="footer_mark"/>
-          <p:cNvSpPr/>
-          <p:nvPr/>
-        </p:nvSpPr>
-        <p:spPr>
-          <a:xfrm>
-            <a:off x="609600" y="6515100"/>
-            <a:ext cx="114300" cy="114300"/>
-          </a:xfrm>
-          <a:prstGeom prst="rect">
-            <a:avLst/>
-          </a:prstGeom>
-          <a:solidFill>
-            <a:srgbClr val="0FF796"/>
-          </a:solidFill>
-          <a:ln>
-            <a:noFill/>
-          </a:ln>
-        </p:spPr>
-        <p:txBody>
-          <a:bodyPr rtlCol="0" anchor="ctr"/>
-          <a:lstStyle/>
-          <a:p>
-            <a:pPr algn="ctr"/>
-          </a:p>
-        </p:txBody>
-      </p:sp>
-      <p:sp>
-        <p:nvSpPr>
-          <p:cNvPr id="3" name="footer"/>
-          <p:cNvSpPr txBox="1"/>
-          <p:nvPr/>
-        </p:nvSpPr>
-        <p:spPr>
-          <a:xfrm>
-            <a:off x="825500" y="6445250"/>
-            <a:ext cx="7620000" cy="254000"/>
-          </a:xfrm>
-          <a:prstGeom prst="rect">
-            <a:avLst/>
-          </a:prstGeom>
-          <a:noFill/>
-        </p:spPr>
-        <p:txBody>
-          <a:bodyPr wrap="square" lIns="0" rIns="0" tIns="0" bIns="0" anchor="ctr">
-            <a:noAutofit/>
-          </a:bodyPr>
-          <a:lstStyle/>
-          <a:p>
-            <a:pPr algn="l">
-              <a:lnSpc>
-                <a:spcPts val="1920"/>
-              </a:lnSpc>
-            </a:pPr>
-            <a:r>
-              <a:rPr sz="1200" b="0" lang="zh-CN" altLang="en-US">
-                <a:solidFill>
-                  <a:srgbClr val="F5F5F5">
-                    <a:alpha val="40000"/>
-                  </a:srgbClr>
-                </a:solidFill>
-                <a:latin typeface="Consolas"/>
-                <a:ea typeface="微软雅黑"/>
-                <a:cs typeface="微软雅黑"/>
-              </a:rPr>
-              <a:t>三角洲行动</a:t>
-            </a:r>
-            <a:r>
-              <a:rPr sz="1200" b="0" lang="zh-CN" altLang="en-US">
-                <a:solidFill>
-                  <a:srgbClr val="F5F5F5">
-                    <a:alpha val="40000"/>
-                  </a:srgbClr>
-                </a:solidFill>
-                <a:latin typeface="微软雅黑"/>
-                <a:ea typeface="微软雅黑"/>
-                <a:cs typeface="微软雅黑"/>
-              </a:rPr>
-              <a:t> </a:t>
-            </a:r>
-            <a:r>
-              <a:rPr sz="1200" b="0" lang="zh-CN" altLang="en-US">
-                <a:solidFill>
-                  <a:srgbClr val="F5F5F5">
-                    <a:alpha val="40000"/>
-                  </a:srgbClr>
-                </a:solidFill>
-                <a:latin typeface="Consolas"/>
-                <a:ea typeface="微软雅黑"/>
-                <a:cs typeface="微软雅黑"/>
-              </a:rPr>
-              <a:t>VFX</a:t>
-            </a:r>
-            <a:r>
-              <a:rPr sz="1200" b="0" lang="zh-CN" altLang="en-US">
-                <a:solidFill>
-                  <a:srgbClr val="F5F5F5">
-                    <a:alpha val="40000"/>
-                  </a:srgbClr>
-                </a:solidFill>
-                <a:latin typeface="微软雅黑"/>
-                <a:ea typeface="微软雅黑"/>
-                <a:cs typeface="微软雅黑"/>
-              </a:rPr>
-              <a:t> </a:t>
-            </a:r>
-            <a:r>
-              <a:rPr sz="1200" b="0" lang="zh-CN" altLang="en-US">
-                <a:solidFill>
-                  <a:srgbClr val="F5F5F5">
-                    <a:alpha val="40000"/>
-                  </a:srgbClr>
-                </a:solidFill>
-                <a:latin typeface="Consolas"/>
-                <a:ea typeface="微软雅黑"/>
-                <a:cs typeface="微软雅黑"/>
-              </a:rPr>
-              <a:t>·</a:t>
-            </a:r>
-            <a:r>
-              <a:rPr sz="1200" b="0" lang="zh-CN" altLang="en-US">
-                <a:solidFill>
-                  <a:srgbClr val="F5F5F5">
-                    <a:alpha val="40000"/>
-                  </a:srgbClr>
-                </a:solidFill>
-                <a:latin typeface="微软雅黑"/>
-                <a:ea typeface="微软雅黑"/>
-                <a:cs typeface="微软雅黑"/>
-              </a:rPr>
-              <a:t> </a:t>
-            </a:r>
-            <a:r>
-              <a:rPr sz="1200" b="0" lang="zh-CN" altLang="en-US">
-                <a:solidFill>
-                  <a:srgbClr val="F5F5F5">
-                    <a:alpha val="40000"/>
-                  </a:srgbClr>
-                </a:solidFill>
-                <a:latin typeface="Consolas"/>
-                <a:ea typeface="微软雅黑"/>
-                <a:cs typeface="微软雅黑"/>
-              </a:rPr>
-              <a:t>烟花工具链与工作方法</a:t>
-            </a:r>
-          </a:p>
-        </p:txBody>
-      </p:sp>
       <p:pic>
         <p:nvPicPr>
-          <p:cNvPr id="4" name="Picture 3" descr="thank.jpg"/>
+          <p:cNvPr id="2" name="Picture 1" descr="thank.jpg"/>
           <p:cNvPicPr>
             <a:picLocks noChangeAspect="1"/>
           </p:cNvPicPr>
@@ -22276,13 +22985,13 @@
       </p:pic>
       <p:sp>
         <p:nvSpPr>
-          <p:cNvPr id="5" name="Rectangle 4"/>
+          <p:cNvPr id="3" name="Rectangle 2"/>
           <p:cNvSpPr/>
           <p:nvPr/>
         </p:nvSpPr>
         <p:spPr>
           <a:xfrm>
-            <a:off x="11394440" y="76200"/>
+            <a:off x="11394440" y="6527800"/>
             <a:ext cx="721360" cy="254000"/>
           </a:xfrm>
           <a:prstGeom prst="rect">
@@ -22307,13 +23016,13 @@
       </p:sp>
       <p:sp>
         <p:nvSpPr>
-          <p:cNvPr id="6" name="source_tag"/>
-          <p:cNvSpPr txBox="1"/>
-          <p:nvPr/>
-        </p:nvSpPr>
-        <p:spPr>
-          <a:xfrm>
-            <a:off x="11394440" y="76200"/>
+          <p:cNvPr id="4" name="source_tag"/>
+          <p:cNvSpPr txBox="1"/>
+          <p:nvPr/>
+        </p:nvSpPr>
+        <p:spPr>
+          <a:xfrm>
+            <a:off x="11394440" y="6527800"/>
             <a:ext cx="721360" cy="254000"/>
           </a:xfrm>
           <a:prstGeom prst="rect">
@@ -22376,14 +23085,14 @@
       </p:sp>
       <p:sp>
         <p:nvSpPr>
-          <p:cNvPr id="7" name="TextBox 6"/>
-          <p:cNvSpPr txBox="1"/>
-          <p:nvPr/>
-        </p:nvSpPr>
-        <p:spPr>
-          <a:xfrm>
-            <a:off x="609600" y="4381500"/>
-            <a:ext cx="10972800" cy="1270000"/>
+          <p:cNvPr id="5" name="TextBox 4"/>
+          <p:cNvSpPr txBox="1"/>
+          <p:nvPr/>
+        </p:nvSpPr>
+        <p:spPr>
+          <a:xfrm>
+            <a:off x="0" y="3175000"/>
+            <a:ext cx="12192000" cy="952500"/>
           </a:xfrm>
           <a:prstGeom prst="rect">
             <a:avLst/>
@@ -22396,13 +23105,13 @@
           </a:bodyPr>
           <a:lstStyle/>
           <a:p>
-            <a:pPr algn="l">
-              <a:lnSpc>
-                <a:spcPts val="8800"/>
-              </a:lnSpc>
-            </a:pPr>
-            <a:r>
-              <a:rPr sz="8800" b="1" lang="zh-CN" altLang="en-US">
+            <a:pPr algn="ctr">
+              <a:lnSpc>
+                <a:spcPts val="7500"/>
+              </a:lnSpc>
+            </a:pPr>
+            <a:r>
+              <a:rPr sz="7500" b="1" lang="zh-CN" altLang="en-US">
                 <a:solidFill>
                   <a:srgbClr val="F5F5F5"/>
                 </a:solidFill>
@@ -22413,7 +23122,7 @@
               <a:t>THANK</a:t>
             </a:r>
             <a:r>
-              <a:rPr sz="8800" b="1" lang="zh-CN" altLang="en-US">
+              <a:rPr sz="7500" b="1" lang="zh-CN" altLang="en-US">
                 <a:solidFill>
                   <a:srgbClr val="F5F5F5"/>
                 </a:solidFill>
@@ -22424,7 +23133,7 @@
               <a:t> </a:t>
             </a:r>
             <a:r>
-              <a:rPr sz="8800" b="1" lang="zh-CN" altLang="en-US">
+              <a:rPr sz="7500" b="1" lang="zh-CN" altLang="en-US">
                 <a:solidFill>
                   <a:srgbClr val="F5F5F5"/>
                 </a:solidFill>
@@ -22439,13 +23148,13 @@
       </p:sp>
       <p:sp>
         <p:nvSpPr>
-          <p:cNvPr id="8" name="Rectangle 7"/>
+          <p:cNvPr id="6" name="Rectangle 5"/>
           <p:cNvSpPr/>
           <p:nvPr/>
         </p:nvSpPr>
         <p:spPr>
           <a:xfrm>
-            <a:off x="609600" y="5715000"/>
+            <a:off x="5791200" y="4241800"/>
             <a:ext cx="609600" cy="38100"/>
           </a:xfrm>
           <a:prstGeom prst="rect">
@@ -22468,102 +23177,7 @@
       </p:sp>
       <p:sp>
         <p:nvSpPr>
-          <p:cNvPr id="9" name="TextBox 8"/>
-          <p:cNvSpPr txBox="1"/>
-          <p:nvPr/>
-        </p:nvSpPr>
-        <p:spPr>
-          <a:xfrm>
-            <a:off x="1371600" y="5588000"/>
-            <a:ext cx="5715000" cy="317500"/>
-          </a:xfrm>
-          <a:prstGeom prst="rect">
-            <a:avLst/>
-          </a:prstGeom>
-          <a:noFill/>
-        </p:spPr>
-        <p:txBody>
-          <a:bodyPr wrap="square" lIns="0" rIns="0" tIns="0" bIns="0" anchor="t">
-            <a:noAutofit/>
-          </a:bodyPr>
-          <a:lstStyle/>
-          <a:p>
-            <a:pPr algn="l">
-              <a:lnSpc>
-                <a:spcPts val="2210"/>
-              </a:lnSpc>
-            </a:pPr>
-            <a:r>
-              <a:rPr sz="1700" b="0" lang="zh-CN" altLang="en-US">
-                <a:solidFill>
-                  <a:srgbClr val="F5F5F5">
-                    <a:alpha val="86000"/>
-                  </a:srgbClr>
-                </a:solidFill>
-                <a:latin typeface="Consolas"/>
-                <a:ea typeface="微软雅黑"/>
-                <a:cs typeface="微软雅黑"/>
-              </a:rPr>
-              <a:t>谢谢</a:t>
-            </a:r>
-            <a:r>
-              <a:rPr sz="1700" b="0" lang="zh-CN" altLang="en-US">
-                <a:solidFill>
-                  <a:srgbClr val="F5F5F5">
-                    <a:alpha val="86000"/>
-                  </a:srgbClr>
-                </a:solidFill>
-                <a:latin typeface="微软雅黑"/>
-                <a:ea typeface="微软雅黑"/>
-                <a:cs typeface="微软雅黑"/>
-              </a:rPr>
-              <a:t> </a:t>
-            </a:r>
-            <a:r>
-              <a:rPr sz="1700" b="0" lang="zh-CN" altLang="en-US">
-                <a:solidFill>
-                  <a:srgbClr val="F5F5F5">
-                    <a:alpha val="86000"/>
-                  </a:srgbClr>
-                </a:solidFill>
-                <a:latin typeface="Consolas"/>
-                <a:ea typeface="微软雅黑"/>
-                <a:cs typeface="微软雅黑"/>
-              </a:rPr>
-              <a:t>·</a:t>
-            </a:r>
-            <a:r>
-              <a:rPr sz="1700" b="0" lang="zh-CN" altLang="en-US">
-                <a:solidFill>
-                  <a:srgbClr val="F5F5F5">
-                    <a:alpha val="86000"/>
-                  </a:srgbClr>
-                </a:solidFill>
-                <a:latin typeface="微软雅黑"/>
-                <a:ea typeface="微软雅黑"/>
-                <a:cs typeface="微软雅黑"/>
-              </a:rPr>
-              <a:t> </a:t>
-            </a:r>
-            <a:r>
-              <a:rPr sz="1700" b="0" lang="zh-CN" altLang="en-US">
-                <a:solidFill>
-                  <a:srgbClr val="F5F5F5">
-                    <a:alpha val="86000"/>
-                  </a:srgbClr>
-                </a:solidFill>
-                <a:latin typeface="Consolas"/>
-                <a:ea typeface="微软雅黑"/>
-                <a:cs typeface="微软雅黑"/>
-              </a:rPr>
-              <a:t>欢迎交流</a:t>
-            </a:r>
-          </a:p>
-        </p:txBody>
-      </p:sp>
-      <p:sp>
-        <p:nvSpPr>
-          <p:cNvPr id="10" name="footer_mark"/>
+          <p:cNvPr id="7" name="footer_mark"/>
           <p:cNvSpPr/>
           <p:nvPr/>
         </p:nvSpPr>
@@ -22592,7 +23206,7 @@
       </p:sp>
       <p:sp>
         <p:nvSpPr>
-          <p:cNvPr id="11" name="footer"/>
+          <p:cNvPr id="8" name="footer"/>
           <p:cNvSpPr txBox="1"/>
           <p:nvPr/>
         </p:nvSpPr>
@@ -23192,1168 +23806,9 @@
           </a:p>
         </p:txBody>
       </p:sp>
-      <p:sp>
-        <p:nvSpPr>
-          <p:cNvPr id="6" name="TextBox 5"/>
-          <p:cNvSpPr txBox="1"/>
-          <p:nvPr/>
-        </p:nvSpPr>
-        <p:spPr>
-          <a:xfrm>
-            <a:off x="609600" y="1358900"/>
-            <a:ext cx="6400800" cy="1460500"/>
-          </a:xfrm>
-          <a:prstGeom prst="rect">
-            <a:avLst/>
-          </a:prstGeom>
-          <a:noFill/>
-        </p:spPr>
-        <p:txBody>
-          <a:bodyPr wrap="square" lIns="0" rIns="0" tIns="0" bIns="0" anchor="t">
-            <a:noAutofit/>
-          </a:bodyPr>
-          <a:lstStyle/>
-          <a:p>
-            <a:pPr algn="l">
-              <a:lnSpc>
-                <a:spcPts val="10000"/>
-              </a:lnSpc>
-            </a:pPr>
-            <a:r>
-              <a:rPr sz="10000" b="1" lang="zh-CN" altLang="en-US">
-                <a:solidFill>
-                  <a:srgbClr val="F5F5F5">
-                    <a:alpha val="45000"/>
-                  </a:srgbClr>
-                </a:solidFill>
-                <a:latin typeface="Consolas"/>
-                <a:ea typeface="微软雅黑"/>
-                <a:cs typeface="微软雅黑"/>
-              </a:rPr>
-              <a:t>3</a:t>
-            </a:r>
-            <a:r>
-              <a:rPr sz="6000" b="1" lang="zh-CN" altLang="en-US">
-                <a:solidFill>
-                  <a:srgbClr val="F5F5F5">
-                    <a:alpha val="45000"/>
-                  </a:srgbClr>
-                </a:solidFill>
-                <a:latin typeface="微软雅黑"/>
-                <a:ea typeface="微软雅黑"/>
-                <a:cs typeface="微软雅黑"/>
-              </a:rPr>
-              <a:t> </a:t>
-            </a:r>
-            <a:r>
-              <a:rPr sz="6000" b="1" lang="zh-CN" altLang="en-US">
-                <a:solidFill>
-                  <a:srgbClr val="F5F5F5">
-                    <a:alpha val="45000"/>
-                  </a:srgbClr>
-                </a:solidFill>
-                <a:latin typeface="Consolas"/>
-                <a:ea typeface="微软雅黑"/>
-                <a:cs typeface="微软雅黑"/>
-              </a:rPr>
-              <a:t>→</a:t>
-            </a:r>
-            <a:r>
-              <a:rPr sz="6000" b="1" lang="zh-CN" altLang="en-US">
-                <a:solidFill>
-                  <a:srgbClr val="F5F5F5">
-                    <a:alpha val="45000"/>
-                  </a:srgbClr>
-                </a:solidFill>
-                <a:latin typeface="微软雅黑"/>
-                <a:ea typeface="微软雅黑"/>
-                <a:cs typeface="微软雅黑"/>
-              </a:rPr>
-              <a:t> </a:t>
-            </a:r>
-            <a:r>
-              <a:rPr sz="10000" b="1" lang="zh-CN" altLang="en-US">
-                <a:solidFill>
-                  <a:srgbClr val="0FF796"/>
-                </a:solidFill>
-                <a:latin typeface="Consolas"/>
-                <a:ea typeface="微软雅黑"/>
-                <a:cs typeface="微软雅黑"/>
-              </a:rPr>
-              <a:t>26</a:t>
-            </a:r>
-          </a:p>
-        </p:txBody>
-      </p:sp>
-      <p:sp>
-        <p:nvSpPr>
-          <p:cNvPr id="7" name="TextBox 6"/>
-          <p:cNvSpPr txBox="1"/>
-          <p:nvPr/>
-        </p:nvSpPr>
-        <p:spPr>
-          <a:xfrm>
-            <a:off x="609600" y="2819400"/>
-            <a:ext cx="6400800" cy="317500"/>
-          </a:xfrm>
-          <a:prstGeom prst="rect">
-            <a:avLst/>
-          </a:prstGeom>
-          <a:noFill/>
-        </p:spPr>
-        <p:txBody>
-          <a:bodyPr wrap="square" lIns="0" rIns="0" tIns="0" bIns="0" anchor="t">
-            <a:noAutofit/>
-          </a:bodyPr>
-          <a:lstStyle/>
-          <a:p>
-            <a:pPr algn="l">
-              <a:lnSpc>
-                <a:spcPts val="2210"/>
-              </a:lnSpc>
-            </a:pPr>
-            <a:r>
-              <a:rPr sz="1700" b="1" lang="zh-CN" altLang="en-US">
-                <a:solidFill>
-                  <a:srgbClr val="F5F5F5"/>
-                </a:solidFill>
-                <a:latin typeface="Consolas"/>
-                <a:ea typeface="微软雅黑"/>
-                <a:cs typeface="微软雅黑"/>
-              </a:rPr>
-              <a:t>开花种类（含扇形）：去年</a:t>
-            </a:r>
-            <a:r>
-              <a:rPr sz="1700" b="1" lang="zh-CN" altLang="en-US">
-                <a:solidFill>
-                  <a:srgbClr val="F5F5F5"/>
-                </a:solidFill>
-                <a:latin typeface="微软雅黑"/>
-                <a:ea typeface="微软雅黑"/>
-                <a:cs typeface="微软雅黑"/>
-              </a:rPr>
-              <a:t> </a:t>
-            </a:r>
-            <a:r>
-              <a:rPr sz="1700" b="1" lang="zh-CN" altLang="en-US">
-                <a:solidFill>
-                  <a:srgbClr val="F5F5F5"/>
-                </a:solidFill>
-                <a:latin typeface="Consolas"/>
-                <a:ea typeface="微软雅黑"/>
-                <a:cs typeface="微软雅黑"/>
-              </a:rPr>
-              <a:t>3</a:t>
-            </a:r>
-            <a:r>
-              <a:rPr sz="1700" b="1" lang="zh-CN" altLang="en-US">
-                <a:solidFill>
-                  <a:srgbClr val="F5F5F5"/>
-                </a:solidFill>
-                <a:latin typeface="微软雅黑"/>
-                <a:ea typeface="微软雅黑"/>
-                <a:cs typeface="微软雅黑"/>
-              </a:rPr>
-              <a:t> </a:t>
-            </a:r>
-            <a:r>
-              <a:rPr sz="1700" b="1" lang="zh-CN" altLang="en-US">
-                <a:solidFill>
-                  <a:srgbClr val="F5F5F5"/>
-                </a:solidFill>
-                <a:latin typeface="Consolas"/>
-                <a:ea typeface="微软雅黑"/>
-                <a:cs typeface="微软雅黑"/>
-              </a:rPr>
-              <a:t>种</a:t>
-            </a:r>
-            <a:r>
-              <a:rPr sz="1700" b="1" lang="zh-CN" altLang="en-US">
-                <a:solidFill>
-                  <a:srgbClr val="F5F5F5"/>
-                </a:solidFill>
-                <a:latin typeface="微软雅黑"/>
-                <a:ea typeface="微软雅黑"/>
-                <a:cs typeface="微软雅黑"/>
-              </a:rPr>
-              <a:t> </a:t>
-            </a:r>
-            <a:r>
-              <a:rPr sz="1700" b="1" lang="zh-CN" altLang="en-US">
-                <a:solidFill>
-                  <a:srgbClr val="F5F5F5"/>
-                </a:solidFill>
-                <a:latin typeface="Consolas"/>
-                <a:ea typeface="微软雅黑"/>
-                <a:cs typeface="微软雅黑"/>
-              </a:rPr>
-              <a:t>→</a:t>
-            </a:r>
-            <a:r>
-              <a:rPr sz="1700" b="1" lang="zh-CN" altLang="en-US">
-                <a:solidFill>
-                  <a:srgbClr val="F5F5F5"/>
-                </a:solidFill>
-                <a:latin typeface="微软雅黑"/>
-                <a:ea typeface="微软雅黑"/>
-                <a:cs typeface="微软雅黑"/>
-              </a:rPr>
-              <a:t> </a:t>
-            </a:r>
-            <a:r>
-              <a:rPr sz="1700" b="1" lang="zh-CN" altLang="en-US">
-                <a:solidFill>
-                  <a:srgbClr val="F5F5F5"/>
-                </a:solidFill>
-                <a:latin typeface="Consolas"/>
-                <a:ea typeface="微软雅黑"/>
-                <a:cs typeface="微软雅黑"/>
-              </a:rPr>
-              <a:t>今年</a:t>
-            </a:r>
-            <a:r>
-              <a:rPr sz="1700" b="1" lang="zh-CN" altLang="en-US">
-                <a:solidFill>
-                  <a:srgbClr val="F5F5F5"/>
-                </a:solidFill>
-                <a:latin typeface="微软雅黑"/>
-                <a:ea typeface="微软雅黑"/>
-                <a:cs typeface="微软雅黑"/>
-              </a:rPr>
-              <a:t> </a:t>
-            </a:r>
-            <a:r>
-              <a:rPr sz="1700" b="1" lang="zh-CN" altLang="en-US">
-                <a:solidFill>
-                  <a:srgbClr val="F5F5F5"/>
-                </a:solidFill>
-                <a:latin typeface="Consolas"/>
-                <a:ea typeface="微软雅黑"/>
-                <a:cs typeface="微软雅黑"/>
-              </a:rPr>
-              <a:t>26</a:t>
-            </a:r>
-            <a:r>
-              <a:rPr sz="1700" b="1" lang="zh-CN" altLang="en-US">
-                <a:solidFill>
-                  <a:srgbClr val="F5F5F5"/>
-                </a:solidFill>
-                <a:latin typeface="微软雅黑"/>
-                <a:ea typeface="微软雅黑"/>
-                <a:cs typeface="微软雅黑"/>
-              </a:rPr>
-              <a:t> </a:t>
-            </a:r>
-            <a:r>
-              <a:rPr sz="1700" b="1" lang="zh-CN" altLang="en-US">
-                <a:solidFill>
-                  <a:srgbClr val="F5F5F5"/>
-                </a:solidFill>
-                <a:latin typeface="Consolas"/>
-                <a:ea typeface="微软雅黑"/>
-                <a:cs typeface="微软雅黑"/>
-              </a:rPr>
-              <a:t>种</a:t>
-            </a:r>
-          </a:p>
-        </p:txBody>
-      </p:sp>
-      <p:sp>
-        <p:nvSpPr>
-          <p:cNvPr id="8" name="Rectangle 7"/>
-          <p:cNvSpPr/>
-          <p:nvPr/>
-        </p:nvSpPr>
-        <p:spPr>
-          <a:xfrm>
-            <a:off x="609600" y="3365500"/>
-            <a:ext cx="6400800" cy="6350"/>
-          </a:xfrm>
-          <a:prstGeom prst="rect">
-            <a:avLst/>
-          </a:prstGeom>
-          <a:solidFill>
-            <a:srgbClr val="F5F5F5">
-              <a:alpha val="12000"/>
-            </a:srgbClr>
-          </a:solidFill>
-          <a:ln>
-            <a:noFill/>
-          </a:ln>
-        </p:spPr>
-        <p:txBody>
-          <a:bodyPr rtlCol="0" anchor="ctr"/>
-          <a:lstStyle/>
-          <a:p>
-            <a:pPr algn="ctr"/>
-          </a:p>
-        </p:txBody>
-      </p:sp>
-      <p:sp>
-        <p:nvSpPr>
-          <p:cNvPr id="9" name="TextBox 8"/>
-          <p:cNvSpPr txBox="1"/>
-          <p:nvPr/>
-        </p:nvSpPr>
-        <p:spPr>
-          <a:xfrm>
-            <a:off x="609600" y="3619500"/>
-            <a:ext cx="1905000" cy="444500"/>
-          </a:xfrm>
-          <a:prstGeom prst="rect">
-            <a:avLst/>
-          </a:prstGeom>
-          <a:noFill/>
-        </p:spPr>
-        <p:txBody>
-          <a:bodyPr wrap="square" lIns="0" rIns="0" tIns="0" bIns="0" anchor="t">
-            <a:noAutofit/>
-          </a:bodyPr>
-          <a:lstStyle/>
-          <a:p>
-            <a:pPr algn="l">
-              <a:lnSpc>
-                <a:spcPts val="3080"/>
-              </a:lnSpc>
-            </a:pPr>
-            <a:r>
-              <a:rPr sz="2800" b="1" lang="zh-CN" altLang="en-US">
-                <a:solidFill>
-                  <a:srgbClr val="F5F5F5"/>
-                </a:solidFill>
-                <a:latin typeface="Consolas"/>
-                <a:ea typeface="微软雅黑"/>
-                <a:cs typeface="微软雅黑"/>
-              </a:rPr>
-              <a:t>1</a:t>
-            </a:r>
-            <a:r>
-              <a:rPr sz="2800" b="1" lang="zh-CN" altLang="en-US">
-                <a:solidFill>
-                  <a:srgbClr val="F5F5F5"/>
-                </a:solidFill>
-                <a:latin typeface="微软雅黑"/>
-                <a:ea typeface="微软雅黑"/>
-                <a:cs typeface="微软雅黑"/>
-              </a:rPr>
-              <a:t> </a:t>
-            </a:r>
-            <a:r>
-              <a:rPr sz="2800" b="1" lang="zh-CN" altLang="en-US">
-                <a:solidFill>
-                  <a:srgbClr val="F5F5F5"/>
-                </a:solidFill>
-                <a:latin typeface="Consolas"/>
-                <a:ea typeface="微软雅黑"/>
-                <a:cs typeface="微软雅黑"/>
-              </a:rPr>
-              <a:t>→</a:t>
-            </a:r>
-            <a:r>
-              <a:rPr sz="2800" b="1" lang="zh-CN" altLang="en-US">
-                <a:solidFill>
-                  <a:srgbClr val="F5F5F5"/>
-                </a:solidFill>
-                <a:latin typeface="微软雅黑"/>
-                <a:ea typeface="微软雅黑"/>
-                <a:cs typeface="微软雅黑"/>
-              </a:rPr>
-              <a:t> </a:t>
-            </a:r>
-            <a:r>
-              <a:rPr sz="2800" b="1" lang="zh-CN" altLang="en-US">
-                <a:solidFill>
-                  <a:srgbClr val="F5F5F5"/>
-                </a:solidFill>
-                <a:latin typeface="Consolas"/>
-                <a:ea typeface="微软雅黑"/>
-                <a:cs typeface="微软雅黑"/>
-              </a:rPr>
-              <a:t>6</a:t>
-            </a:r>
-          </a:p>
-        </p:txBody>
-      </p:sp>
-      <p:sp>
-        <p:nvSpPr>
-          <p:cNvPr id="10" name="TextBox 9"/>
-          <p:cNvSpPr txBox="1"/>
-          <p:nvPr/>
-        </p:nvSpPr>
-        <p:spPr>
-          <a:xfrm>
-            <a:off x="2641600" y="3632200"/>
-            <a:ext cx="4318000" cy="254000"/>
-          </a:xfrm>
-          <a:prstGeom prst="rect">
-            <a:avLst/>
-          </a:prstGeom>
-          <a:noFill/>
-        </p:spPr>
-        <p:txBody>
-          <a:bodyPr wrap="square" lIns="0" rIns="0" tIns="0" bIns="0" anchor="t">
-            <a:noAutofit/>
-          </a:bodyPr>
-          <a:lstStyle/>
-          <a:p>
-            <a:pPr algn="l">
-              <a:lnSpc>
-                <a:spcPts val="1820"/>
-              </a:lnSpc>
-            </a:pPr>
-            <a:r>
-              <a:rPr sz="1400" b="1" lang="zh-CN" altLang="en-US">
-                <a:solidFill>
-                  <a:srgbClr val="F5F5F5"/>
-                </a:solidFill>
-                <a:latin typeface="Consolas"/>
-                <a:ea typeface="微软雅黑"/>
-                <a:cs typeface="微软雅黑"/>
-              </a:rPr>
-              <a:t>升空尾缀</a:t>
-            </a:r>
-          </a:p>
-        </p:txBody>
-      </p:sp>
-      <p:sp>
-        <p:nvSpPr>
-          <p:cNvPr id="11" name="TextBox 10"/>
-          <p:cNvSpPr txBox="1"/>
-          <p:nvPr/>
-        </p:nvSpPr>
-        <p:spPr>
-          <a:xfrm>
-            <a:off x="2641600" y="3886200"/>
-            <a:ext cx="4318000" cy="228600"/>
-          </a:xfrm>
-          <a:prstGeom prst="rect">
-            <a:avLst/>
-          </a:prstGeom>
-          <a:noFill/>
-        </p:spPr>
-        <p:txBody>
-          <a:bodyPr wrap="square" lIns="0" rIns="0" tIns="0" bIns="0" anchor="t">
-            <a:noAutofit/>
-          </a:bodyPr>
-          <a:lstStyle/>
-          <a:p>
-            <a:pPr algn="l">
-              <a:lnSpc>
-                <a:spcPts val="1679"/>
-              </a:lnSpc>
-            </a:pPr>
-            <a:r>
-              <a:rPr sz="1200" b="0" lang="zh-CN" altLang="en-US">
-                <a:solidFill>
-                  <a:srgbClr val="F5F5F5">
-                    <a:alpha val="70000"/>
-                  </a:srgbClr>
-                </a:solidFill>
-                <a:latin typeface="Consolas"/>
-                <a:ea typeface="微软雅黑"/>
-                <a:cs typeface="微软雅黑"/>
-              </a:rPr>
-              <a:t>去年</a:t>
-            </a:r>
-            <a:r>
-              <a:rPr sz="1200" b="0" lang="zh-CN" altLang="en-US">
-                <a:solidFill>
-                  <a:srgbClr val="F5F5F5">
-                    <a:alpha val="70000"/>
-                  </a:srgbClr>
-                </a:solidFill>
-                <a:latin typeface="微软雅黑"/>
-                <a:ea typeface="微软雅黑"/>
-                <a:cs typeface="微软雅黑"/>
-              </a:rPr>
-              <a:t> </a:t>
-            </a:r>
-            <a:r>
-              <a:rPr sz="1200" b="0" lang="zh-CN" altLang="en-US">
-                <a:solidFill>
-                  <a:srgbClr val="F5F5F5">
-                    <a:alpha val="70000"/>
-                  </a:srgbClr>
-                </a:solidFill>
-                <a:latin typeface="Consolas"/>
-                <a:ea typeface="微软雅黑"/>
-                <a:cs typeface="微软雅黑"/>
-              </a:rPr>
-              <a:t>1</a:t>
-            </a:r>
-            <a:r>
-              <a:rPr sz="1200" b="0" lang="zh-CN" altLang="en-US">
-                <a:solidFill>
-                  <a:srgbClr val="F5F5F5">
-                    <a:alpha val="70000"/>
-                  </a:srgbClr>
-                </a:solidFill>
-                <a:latin typeface="微软雅黑"/>
-                <a:ea typeface="微软雅黑"/>
-                <a:cs typeface="微软雅黑"/>
-              </a:rPr>
-              <a:t> </a:t>
-            </a:r>
-            <a:r>
-              <a:rPr sz="1200" b="0" lang="zh-CN" altLang="en-US">
-                <a:solidFill>
-                  <a:srgbClr val="F5F5F5">
-                    <a:alpha val="70000"/>
-                  </a:srgbClr>
-                </a:solidFill>
-                <a:latin typeface="Consolas"/>
-                <a:ea typeface="微软雅黑"/>
-                <a:cs typeface="微软雅黑"/>
-              </a:rPr>
-              <a:t>条</a:t>
-            </a:r>
-            <a:r>
-              <a:rPr sz="1200" b="0" lang="zh-CN" altLang="en-US">
-                <a:solidFill>
-                  <a:srgbClr val="F5F5F5">
-                    <a:alpha val="70000"/>
-                  </a:srgbClr>
-                </a:solidFill>
-                <a:latin typeface="微软雅黑"/>
-                <a:ea typeface="微软雅黑"/>
-                <a:cs typeface="微软雅黑"/>
-              </a:rPr>
-              <a:t> </a:t>
-            </a:r>
-            <a:r>
-              <a:rPr sz="1200" b="0" lang="zh-CN" altLang="en-US">
-                <a:solidFill>
-                  <a:srgbClr val="F5F5F5">
-                    <a:alpha val="70000"/>
-                  </a:srgbClr>
-                </a:solidFill>
-                <a:latin typeface="Consolas"/>
-                <a:ea typeface="微软雅黑"/>
-                <a:cs typeface="微软雅黑"/>
-              </a:rPr>
-              <a:t>→</a:t>
-            </a:r>
-            <a:r>
-              <a:rPr sz="1200" b="0" lang="zh-CN" altLang="en-US">
-                <a:solidFill>
-                  <a:srgbClr val="F5F5F5">
-                    <a:alpha val="70000"/>
-                  </a:srgbClr>
-                </a:solidFill>
-                <a:latin typeface="微软雅黑"/>
-                <a:ea typeface="微软雅黑"/>
-                <a:cs typeface="微软雅黑"/>
-              </a:rPr>
-              <a:t> </a:t>
-            </a:r>
-            <a:r>
-              <a:rPr sz="1200" b="0" lang="zh-CN" altLang="en-US">
-                <a:solidFill>
-                  <a:srgbClr val="F5F5F5">
-                    <a:alpha val="70000"/>
-                  </a:srgbClr>
-                </a:solidFill>
-                <a:latin typeface="Consolas"/>
-                <a:ea typeface="微软雅黑"/>
-                <a:cs typeface="微软雅黑"/>
-              </a:rPr>
-              <a:t>今年按开花高度分</a:t>
-            </a:r>
-            <a:r>
-              <a:rPr sz="1200" b="0" lang="zh-CN" altLang="en-US">
-                <a:solidFill>
-                  <a:srgbClr val="F5F5F5">
-                    <a:alpha val="70000"/>
-                  </a:srgbClr>
-                </a:solidFill>
-                <a:latin typeface="微软雅黑"/>
-                <a:ea typeface="微软雅黑"/>
-                <a:cs typeface="微软雅黑"/>
-              </a:rPr>
-              <a:t> </a:t>
-            </a:r>
-            <a:r>
-              <a:rPr sz="1200" b="0" lang="zh-CN" altLang="en-US">
-                <a:solidFill>
-                  <a:srgbClr val="F5F5F5">
-                    <a:alpha val="70000"/>
-                  </a:srgbClr>
-                </a:solidFill>
-                <a:latin typeface="Consolas"/>
-                <a:ea typeface="微软雅黑"/>
-                <a:cs typeface="微软雅黑"/>
-              </a:rPr>
-              <a:t>6</a:t>
-            </a:r>
-            <a:r>
-              <a:rPr sz="1200" b="0" lang="zh-CN" altLang="en-US">
-                <a:solidFill>
-                  <a:srgbClr val="F5F5F5">
-                    <a:alpha val="70000"/>
-                  </a:srgbClr>
-                </a:solidFill>
-                <a:latin typeface="微软雅黑"/>
-                <a:ea typeface="微软雅黑"/>
-                <a:cs typeface="微软雅黑"/>
-              </a:rPr>
-              <a:t> </a:t>
-            </a:r>
-            <a:r>
-              <a:rPr sz="1200" b="0" lang="zh-CN" altLang="en-US">
-                <a:solidFill>
-                  <a:srgbClr val="F5F5F5">
-                    <a:alpha val="70000"/>
-                  </a:srgbClr>
-                </a:solidFill>
-                <a:latin typeface="Consolas"/>
-                <a:ea typeface="微软雅黑"/>
-                <a:cs typeface="微软雅黑"/>
-              </a:rPr>
-              <a:t>档</a:t>
-            </a:r>
-          </a:p>
-        </p:txBody>
-      </p:sp>
-      <p:sp>
-        <p:nvSpPr>
-          <p:cNvPr id="12" name="TextBox 11"/>
-          <p:cNvSpPr txBox="1"/>
-          <p:nvPr/>
-        </p:nvSpPr>
-        <p:spPr>
-          <a:xfrm>
-            <a:off x="609600" y="4419600"/>
-            <a:ext cx="1905000" cy="444500"/>
-          </a:xfrm>
-          <a:prstGeom prst="rect">
-            <a:avLst/>
-          </a:prstGeom>
-          <a:noFill/>
-        </p:spPr>
-        <p:txBody>
-          <a:bodyPr wrap="square" lIns="0" rIns="0" tIns="0" bIns="0" anchor="t">
-            <a:noAutofit/>
-          </a:bodyPr>
-          <a:lstStyle/>
-          <a:p>
-            <a:pPr algn="l">
-              <a:lnSpc>
-                <a:spcPts val="3080"/>
-              </a:lnSpc>
-            </a:pPr>
-            <a:r>
-              <a:rPr sz="2800" b="1" lang="zh-CN" altLang="en-US">
-                <a:solidFill>
-                  <a:srgbClr val="F5F5F5"/>
-                </a:solidFill>
-                <a:latin typeface="Consolas"/>
-                <a:ea typeface="微软雅黑"/>
-                <a:cs typeface="微软雅黑"/>
-              </a:rPr>
-              <a:t>约</a:t>
-            </a:r>
-            <a:r>
-              <a:rPr sz="2800" b="1" lang="zh-CN" altLang="en-US">
-                <a:solidFill>
-                  <a:srgbClr val="F5F5F5"/>
-                </a:solidFill>
-                <a:latin typeface="微软雅黑"/>
-                <a:ea typeface="微软雅黑"/>
-                <a:cs typeface="微软雅黑"/>
-              </a:rPr>
-              <a:t> </a:t>
-            </a:r>
-            <a:r>
-              <a:rPr sz="2800" b="1" lang="zh-CN" altLang="en-US">
-                <a:solidFill>
-                  <a:srgbClr val="F5F5F5"/>
-                </a:solidFill>
-                <a:latin typeface="Consolas"/>
-                <a:ea typeface="微软雅黑"/>
-                <a:cs typeface="微软雅黑"/>
-              </a:rPr>
-              <a:t>3</a:t>
-            </a:r>
-            <a:r>
-              <a:rPr sz="2800" b="1" lang="zh-CN" altLang="en-US">
-                <a:solidFill>
-                  <a:srgbClr val="F5F5F5"/>
-                </a:solidFill>
-                <a:latin typeface="微软雅黑"/>
-                <a:ea typeface="微软雅黑"/>
-                <a:cs typeface="微软雅黑"/>
-              </a:rPr>
-              <a:t> </a:t>
-            </a:r>
-            <a:r>
-              <a:rPr sz="2800" b="1" lang="zh-CN" altLang="en-US">
-                <a:solidFill>
-                  <a:srgbClr val="F5F5F5"/>
-                </a:solidFill>
-                <a:latin typeface="Consolas"/>
-                <a:ea typeface="微软雅黑"/>
-                <a:cs typeface="微软雅黑"/>
-              </a:rPr>
-              <a:t>倍</a:t>
-            </a:r>
-          </a:p>
-        </p:txBody>
-      </p:sp>
-      <p:sp>
-        <p:nvSpPr>
-          <p:cNvPr id="13" name="TextBox 12"/>
-          <p:cNvSpPr txBox="1"/>
-          <p:nvPr/>
-        </p:nvSpPr>
-        <p:spPr>
-          <a:xfrm>
-            <a:off x="2641600" y="4432300"/>
-            <a:ext cx="4318000" cy="254000"/>
-          </a:xfrm>
-          <a:prstGeom prst="rect">
-            <a:avLst/>
-          </a:prstGeom>
-          <a:noFill/>
-        </p:spPr>
-        <p:txBody>
-          <a:bodyPr wrap="square" lIns="0" rIns="0" tIns="0" bIns="0" anchor="t">
-            <a:noAutofit/>
-          </a:bodyPr>
-          <a:lstStyle/>
-          <a:p>
-            <a:pPr algn="l">
-              <a:lnSpc>
-                <a:spcPts val="1820"/>
-              </a:lnSpc>
-            </a:pPr>
-            <a:r>
-              <a:rPr sz="1400" b="1" lang="zh-CN" altLang="en-US">
-                <a:solidFill>
-                  <a:srgbClr val="F5F5F5"/>
-                </a:solidFill>
-                <a:latin typeface="Consolas"/>
-                <a:ea typeface="微软雅黑"/>
-                <a:cs typeface="微软雅黑"/>
-              </a:rPr>
-              <a:t>节目时长</a:t>
-            </a:r>
-          </a:p>
-        </p:txBody>
-      </p:sp>
-      <p:sp>
-        <p:nvSpPr>
-          <p:cNvPr id="14" name="TextBox 13"/>
-          <p:cNvSpPr txBox="1"/>
-          <p:nvPr/>
-        </p:nvSpPr>
-        <p:spPr>
-          <a:xfrm>
-            <a:off x="2641600" y="4686300"/>
-            <a:ext cx="4318000" cy="228600"/>
-          </a:xfrm>
-          <a:prstGeom prst="rect">
-            <a:avLst/>
-          </a:prstGeom>
-          <a:noFill/>
-        </p:spPr>
-        <p:txBody>
-          <a:bodyPr wrap="square" lIns="0" rIns="0" tIns="0" bIns="0" anchor="t">
-            <a:noAutofit/>
-          </a:bodyPr>
-          <a:lstStyle/>
-          <a:p>
-            <a:pPr algn="l">
-              <a:lnSpc>
-                <a:spcPts val="1679"/>
-              </a:lnSpc>
-            </a:pPr>
-            <a:r>
-              <a:rPr sz="1200" b="0" lang="zh-CN" altLang="en-US">
-                <a:solidFill>
-                  <a:srgbClr val="F5F5F5">
-                    <a:alpha val="70000"/>
-                  </a:srgbClr>
-                </a:solidFill>
-                <a:latin typeface="Consolas"/>
-                <a:ea typeface="微软雅黑"/>
-                <a:cs typeface="微软雅黑"/>
-              </a:rPr>
-              <a:t>约</a:t>
-            </a:r>
-            <a:r>
-              <a:rPr sz="1200" b="0" lang="zh-CN" altLang="en-US">
-                <a:solidFill>
-                  <a:srgbClr val="F5F5F5">
-                    <a:alpha val="70000"/>
-                  </a:srgbClr>
-                </a:solidFill>
-                <a:latin typeface="微软雅黑"/>
-                <a:ea typeface="微软雅黑"/>
-                <a:cs typeface="微软雅黑"/>
-              </a:rPr>
-              <a:t> </a:t>
-            </a:r>
-            <a:r>
-              <a:rPr sz="1200" b="0" lang="zh-CN" altLang="en-US">
-                <a:solidFill>
-                  <a:srgbClr val="F5F5F5">
-                    <a:alpha val="70000"/>
-                  </a:srgbClr>
-                </a:solidFill>
-                <a:latin typeface="Consolas"/>
-                <a:ea typeface="微软雅黑"/>
-                <a:cs typeface="微软雅黑"/>
-              </a:rPr>
-              <a:t>70</a:t>
-            </a:r>
-            <a:r>
-              <a:rPr sz="1200" b="0" lang="zh-CN" altLang="en-US">
-                <a:solidFill>
-                  <a:srgbClr val="F5F5F5">
-                    <a:alpha val="70000"/>
-                  </a:srgbClr>
-                </a:solidFill>
-                <a:latin typeface="微软雅黑"/>
-                <a:ea typeface="微软雅黑"/>
-                <a:cs typeface="微软雅黑"/>
-              </a:rPr>
-              <a:t> </a:t>
-            </a:r>
-            <a:r>
-              <a:rPr sz="1200" b="0" lang="zh-CN" altLang="en-US">
-                <a:solidFill>
-                  <a:srgbClr val="F5F5F5">
-                    <a:alpha val="70000"/>
-                  </a:srgbClr>
-                </a:solidFill>
-                <a:latin typeface="Consolas"/>
-                <a:ea typeface="微软雅黑"/>
-                <a:cs typeface="微软雅黑"/>
-              </a:rPr>
-              <a:t>秒</a:t>
-            </a:r>
-            <a:r>
-              <a:rPr sz="1200" b="0" lang="zh-CN" altLang="en-US">
-                <a:solidFill>
-                  <a:srgbClr val="F5F5F5">
-                    <a:alpha val="70000"/>
-                  </a:srgbClr>
-                </a:solidFill>
-                <a:latin typeface="微软雅黑"/>
-                <a:ea typeface="微软雅黑"/>
-                <a:cs typeface="微软雅黑"/>
-              </a:rPr>
-              <a:t> </a:t>
-            </a:r>
-            <a:r>
-              <a:rPr sz="1200" b="0" lang="zh-CN" altLang="en-US">
-                <a:solidFill>
-                  <a:srgbClr val="F5F5F5">
-                    <a:alpha val="70000"/>
-                  </a:srgbClr>
-                </a:solidFill>
-                <a:latin typeface="Consolas"/>
-                <a:ea typeface="微软雅黑"/>
-                <a:cs typeface="微软雅黑"/>
-              </a:rPr>
-              <a:t>→</a:t>
-            </a:r>
-            <a:r>
-              <a:rPr sz="1200" b="0" lang="zh-CN" altLang="en-US">
-                <a:solidFill>
-                  <a:srgbClr val="F5F5F5">
-                    <a:alpha val="70000"/>
-                  </a:srgbClr>
-                </a:solidFill>
-                <a:latin typeface="微软雅黑"/>
-                <a:ea typeface="微软雅黑"/>
-                <a:cs typeface="微软雅黑"/>
-              </a:rPr>
-              <a:t> </a:t>
-            </a:r>
-            <a:r>
-              <a:rPr sz="1200" b="0" lang="zh-CN" altLang="en-US">
-                <a:solidFill>
-                  <a:srgbClr val="F5F5F5">
-                    <a:alpha val="70000"/>
-                  </a:srgbClr>
-                </a:solidFill>
-                <a:latin typeface="Consolas"/>
-                <a:ea typeface="微软雅黑"/>
-                <a:cs typeface="微软雅黑"/>
-              </a:rPr>
-              <a:t>约</a:t>
-            </a:r>
-            <a:r>
-              <a:rPr sz="1200" b="0" lang="zh-CN" altLang="en-US">
-                <a:solidFill>
-                  <a:srgbClr val="F5F5F5">
-                    <a:alpha val="70000"/>
-                  </a:srgbClr>
-                </a:solidFill>
-                <a:latin typeface="微软雅黑"/>
-                <a:ea typeface="微软雅黑"/>
-                <a:cs typeface="微软雅黑"/>
-              </a:rPr>
-              <a:t> </a:t>
-            </a:r>
-            <a:r>
-              <a:rPr sz="1200" b="0" lang="zh-CN" altLang="en-US">
-                <a:solidFill>
-                  <a:srgbClr val="F5F5F5">
-                    <a:alpha val="70000"/>
-                  </a:srgbClr>
-                </a:solidFill>
-                <a:latin typeface="Consolas"/>
-                <a:ea typeface="微软雅黑"/>
-                <a:cs typeface="微软雅黑"/>
-              </a:rPr>
-              <a:t>220</a:t>
-            </a:r>
-            <a:r>
-              <a:rPr sz="1200" b="0" lang="zh-CN" altLang="en-US">
-                <a:solidFill>
-                  <a:srgbClr val="F5F5F5">
-                    <a:alpha val="70000"/>
-                  </a:srgbClr>
-                </a:solidFill>
-                <a:latin typeface="微软雅黑"/>
-                <a:ea typeface="微软雅黑"/>
-                <a:cs typeface="微软雅黑"/>
-              </a:rPr>
-              <a:t> </a:t>
-            </a:r>
-            <a:r>
-              <a:rPr sz="1200" b="0" lang="zh-CN" altLang="en-US">
-                <a:solidFill>
-                  <a:srgbClr val="F5F5F5">
-                    <a:alpha val="70000"/>
-                  </a:srgbClr>
-                </a:solidFill>
-                <a:latin typeface="Consolas"/>
-                <a:ea typeface="微软雅黑"/>
-                <a:cs typeface="微软雅黑"/>
-              </a:rPr>
-              <a:t>秒</a:t>
-            </a:r>
-          </a:p>
-        </p:txBody>
-      </p:sp>
-      <p:sp>
-        <p:nvSpPr>
-          <p:cNvPr id="15" name="TextBox 14"/>
-          <p:cNvSpPr txBox="1"/>
-          <p:nvPr/>
-        </p:nvSpPr>
-        <p:spPr>
-          <a:xfrm>
-            <a:off x="609600" y="5219700"/>
-            <a:ext cx="1905000" cy="444500"/>
-          </a:xfrm>
-          <a:prstGeom prst="rect">
-            <a:avLst/>
-          </a:prstGeom>
-          <a:noFill/>
-        </p:spPr>
-        <p:txBody>
-          <a:bodyPr wrap="square" lIns="0" rIns="0" tIns="0" bIns="0" anchor="t">
-            <a:noAutofit/>
-          </a:bodyPr>
-          <a:lstStyle/>
-          <a:p>
-            <a:pPr algn="l">
-              <a:lnSpc>
-                <a:spcPts val="3080"/>
-              </a:lnSpc>
-            </a:pPr>
-            <a:r>
-              <a:rPr sz="2800" b="1" lang="zh-CN" altLang="en-US">
-                <a:solidFill>
-                  <a:srgbClr val="F5F5F5"/>
-                </a:solidFill>
-                <a:latin typeface="Consolas"/>
-                <a:ea typeface="微软雅黑"/>
-                <a:cs typeface="微软雅黑"/>
-              </a:rPr>
-              <a:t>2</a:t>
-            </a:r>
-            <a:r>
-              <a:rPr sz="2800" b="1" lang="zh-CN" altLang="en-US">
-                <a:solidFill>
-                  <a:srgbClr val="F5F5F5"/>
-                </a:solidFill>
-                <a:latin typeface="微软雅黑"/>
-                <a:ea typeface="微软雅黑"/>
-                <a:cs typeface="微软雅黑"/>
-              </a:rPr>
-              <a:t> </a:t>
-            </a:r>
-            <a:r>
-              <a:rPr sz="2800" b="1" lang="zh-CN" altLang="en-US">
-                <a:solidFill>
-                  <a:srgbClr val="F5F5F5"/>
-                </a:solidFill>
-                <a:latin typeface="Consolas"/>
-                <a:ea typeface="微软雅黑"/>
-                <a:cs typeface="微软雅黑"/>
-              </a:rPr>
-              <a:t>套</a:t>
-            </a:r>
-          </a:p>
-        </p:txBody>
-      </p:sp>
-      <p:sp>
-        <p:nvSpPr>
-          <p:cNvPr id="16" name="TextBox 15"/>
-          <p:cNvSpPr txBox="1"/>
-          <p:nvPr/>
-        </p:nvSpPr>
-        <p:spPr>
-          <a:xfrm>
-            <a:off x="2641600" y="5232400"/>
-            <a:ext cx="4318000" cy="254000"/>
-          </a:xfrm>
-          <a:prstGeom prst="rect">
-            <a:avLst/>
-          </a:prstGeom>
-          <a:noFill/>
-        </p:spPr>
-        <p:txBody>
-          <a:bodyPr wrap="square" lIns="0" rIns="0" tIns="0" bIns="0" anchor="t">
-            <a:noAutofit/>
-          </a:bodyPr>
-          <a:lstStyle/>
-          <a:p>
-            <a:pPr algn="l">
-              <a:lnSpc>
-                <a:spcPts val="1820"/>
-              </a:lnSpc>
-            </a:pPr>
-            <a:r>
-              <a:rPr sz="1400" b="1" lang="zh-CN" altLang="en-US">
-                <a:solidFill>
-                  <a:srgbClr val="F5F5F5"/>
-                </a:solidFill>
-                <a:latin typeface="Consolas"/>
-                <a:ea typeface="微软雅黑"/>
-                <a:cs typeface="微软雅黑"/>
-              </a:rPr>
-              <a:t>PC</a:t>
-            </a:r>
-            <a:r>
-              <a:rPr sz="1400" b="1" lang="zh-CN" altLang="en-US">
-                <a:solidFill>
-                  <a:srgbClr val="F5F5F5"/>
-                </a:solidFill>
-                <a:latin typeface="微软雅黑"/>
-                <a:ea typeface="微软雅黑"/>
-                <a:cs typeface="微软雅黑"/>
-              </a:rPr>
-              <a:t> </a:t>
-            </a:r>
-            <a:r>
-              <a:rPr sz="1400" b="1" lang="zh-CN" altLang="en-US">
-                <a:solidFill>
-                  <a:srgbClr val="F5F5F5"/>
-                </a:solidFill>
-                <a:latin typeface="Consolas"/>
-                <a:ea typeface="微软雅黑"/>
-                <a:cs typeface="微软雅黑"/>
-              </a:rPr>
-              <a:t>与手游</a:t>
-            </a:r>
-          </a:p>
-        </p:txBody>
-      </p:sp>
-      <p:sp>
-        <p:nvSpPr>
-          <p:cNvPr id="17" name="TextBox 16"/>
-          <p:cNvSpPr txBox="1"/>
-          <p:nvPr/>
-        </p:nvSpPr>
-        <p:spPr>
-          <a:xfrm>
-            <a:off x="2641600" y="5486400"/>
-            <a:ext cx="4318000" cy="228600"/>
-          </a:xfrm>
-          <a:prstGeom prst="rect">
-            <a:avLst/>
-          </a:prstGeom>
-          <a:noFill/>
-        </p:spPr>
-        <p:txBody>
-          <a:bodyPr wrap="square" lIns="0" rIns="0" tIns="0" bIns="0" anchor="t">
-            <a:noAutofit/>
-          </a:bodyPr>
-          <a:lstStyle/>
-          <a:p>
-            <a:pPr algn="l">
-              <a:lnSpc>
-                <a:spcPts val="1679"/>
-              </a:lnSpc>
-            </a:pPr>
-            <a:r>
-              <a:rPr sz="1200" b="0" lang="zh-CN" altLang="en-US">
-                <a:solidFill>
-                  <a:srgbClr val="F5F5F5">
-                    <a:alpha val="70000"/>
-                  </a:srgbClr>
-                </a:solidFill>
-                <a:latin typeface="Consolas"/>
-                <a:ea typeface="微软雅黑"/>
-                <a:cs typeface="微软雅黑"/>
-              </a:rPr>
-              <a:t>分别输出，各分画质档位</a:t>
-            </a:r>
-          </a:p>
-        </p:txBody>
-      </p:sp>
-      <p:sp>
-        <p:nvSpPr>
-          <p:cNvPr id="18" name="TextBox 17"/>
-          <p:cNvSpPr txBox="1"/>
-          <p:nvPr/>
-        </p:nvSpPr>
-        <p:spPr>
-          <a:xfrm>
-            <a:off x="609600" y="5969000"/>
-            <a:ext cx="6400800" cy="190500"/>
-          </a:xfrm>
-          <a:prstGeom prst="rect">
-            <a:avLst/>
-          </a:prstGeom>
-          <a:noFill/>
-        </p:spPr>
-        <p:txBody>
-          <a:bodyPr wrap="square" lIns="0" rIns="0" tIns="0" bIns="0" anchor="t">
-            <a:noAutofit/>
-          </a:bodyPr>
-          <a:lstStyle/>
-          <a:p>
-            <a:pPr algn="l">
-              <a:lnSpc>
-                <a:spcPts val="1200"/>
-              </a:lnSpc>
-            </a:pPr>
-            <a:r>
-              <a:rPr sz="1000" b="0" lang="zh-CN" altLang="en-US">
-                <a:solidFill>
-                  <a:srgbClr val="F5F5F5">
-                    <a:alpha val="40000"/>
-                  </a:srgbClr>
-                </a:solidFill>
-                <a:latin typeface="Consolas"/>
-                <a:ea typeface="微软雅黑"/>
-                <a:cs typeface="微软雅黑"/>
-              </a:rPr>
-              <a:t>按花名计；去年数据为讲者统计</a:t>
-            </a:r>
-          </a:p>
-        </p:txBody>
-      </p:sp>
       <p:pic>
         <p:nvPicPr>
-          <p:cNvPr id="19" name="Picture 18" descr="p02_show.jpg"/>
+          <p:cNvPr id="6" name="Picture 5" descr="p02_show.jpg"/>
           <p:cNvPicPr>
             <a:picLocks noChangeAspect="1"/>
           </p:cNvPicPr>
@@ -24367,8 +23822,8 @@
         </p:blipFill>
         <p:spPr>
           <a:xfrm>
-            <a:off x="7315200" y="1358900"/>
-            <a:ext cx="4267200" cy="4711700"/>
+            <a:off x="609600" y="1358900"/>
+            <a:ext cx="10972800" cy="2667000"/>
           </a:xfrm>
           <a:prstGeom prst="rect">
             <a:avLst/>
@@ -24377,14 +23832,14 @@
       </p:pic>
       <p:sp>
         <p:nvSpPr>
-          <p:cNvPr id="20" name="Rectangle 19"/>
+          <p:cNvPr id="7" name="Rectangle 6"/>
           <p:cNvSpPr/>
           <p:nvPr/>
         </p:nvSpPr>
         <p:spPr>
           <a:xfrm>
-            <a:off x="7391400" y="5740400"/>
-            <a:ext cx="1201420" cy="254000"/>
+            <a:off x="685800" y="3695700"/>
+            <a:ext cx="1506220" cy="254000"/>
           </a:xfrm>
           <a:prstGeom prst="rect">
             <a:avLst/>
@@ -24408,14 +23863,14 @@
       </p:sp>
       <p:sp>
         <p:nvSpPr>
-          <p:cNvPr id="21" name="source_tag"/>
-          <p:cNvSpPr txBox="1"/>
-          <p:nvPr/>
-        </p:nvSpPr>
-        <p:spPr>
-          <a:xfrm>
-            <a:off x="7391400" y="5740400"/>
-            <a:ext cx="1201420" cy="254000"/>
+          <p:cNvPr id="8" name="source_tag"/>
+          <p:cNvSpPr txBox="1"/>
+          <p:nvPr/>
+        </p:nvSpPr>
+        <p:spPr>
+          <a:xfrm>
+            <a:off x="685800" y="3695700"/>
+            <a:ext cx="1506220" cy="254000"/>
           </a:xfrm>
           <a:prstGeom prst="rect">
             <a:avLst/>
@@ -24522,7 +23977,948 @@
                 <a:ea typeface="微软雅黑"/>
                 <a:cs typeface="微软雅黑"/>
               </a:rPr>
-              <a:t>今年</a:t>
+              <a:t>今年节目</a:t>
+            </a:r>
+          </a:p>
+        </p:txBody>
+      </p:sp>
+      <p:sp>
+        <p:nvSpPr>
+          <p:cNvPr id="9" name="Rectangle 8"/>
+          <p:cNvSpPr/>
+          <p:nvPr/>
+        </p:nvSpPr>
+        <p:spPr>
+          <a:xfrm>
+            <a:off x="609600" y="4254500"/>
+            <a:ext cx="2552700" cy="6350"/>
+          </a:xfrm>
+          <a:prstGeom prst="rect">
+            <a:avLst/>
+          </a:prstGeom>
+          <a:solidFill>
+            <a:srgbClr val="F5F5F5">
+              <a:alpha val="14000"/>
+            </a:srgbClr>
+          </a:solidFill>
+          <a:ln>
+            <a:noFill/>
+          </a:ln>
+        </p:spPr>
+        <p:txBody>
+          <a:bodyPr rtlCol="0" anchor="ctr"/>
+          <a:lstStyle/>
+          <a:p>
+            <a:pPr algn="ctr"/>
+          </a:p>
+        </p:txBody>
+      </p:sp>
+      <p:sp>
+        <p:nvSpPr>
+          <p:cNvPr id="10" name="TextBox 9"/>
+          <p:cNvSpPr txBox="1"/>
+          <p:nvPr/>
+        </p:nvSpPr>
+        <p:spPr>
+          <a:xfrm>
+            <a:off x="609600" y="4381500"/>
+            <a:ext cx="2552700" cy="228600"/>
+          </a:xfrm>
+          <a:prstGeom prst="rect">
+            <a:avLst/>
+          </a:prstGeom>
+          <a:noFill/>
+        </p:spPr>
+        <p:txBody>
+          <a:bodyPr wrap="square" lIns="0" rIns="0" tIns="0" bIns="0" anchor="t">
+            <a:noAutofit/>
+          </a:bodyPr>
+          <a:lstStyle/>
+          <a:p>
+            <a:pPr algn="l">
+              <a:lnSpc>
+                <a:spcPts val="1560"/>
+              </a:lnSpc>
+            </a:pPr>
+            <a:r>
+              <a:rPr sz="1200" b="1" lang="zh-CN" altLang="en-US">
+                <a:solidFill>
+                  <a:srgbClr val="F5F5F5">
+                    <a:alpha val="70000"/>
+                  </a:srgbClr>
+                </a:solidFill>
+                <a:latin typeface="Consolas"/>
+                <a:ea typeface="微软雅黑"/>
+                <a:cs typeface="微软雅黑"/>
+              </a:rPr>
+              <a:t>开花种类（含扇形）</a:t>
+            </a:r>
+          </a:p>
+        </p:txBody>
+      </p:sp>
+      <p:sp>
+        <p:nvSpPr>
+          <p:cNvPr id="11" name="TextBox 10"/>
+          <p:cNvSpPr txBox="1"/>
+          <p:nvPr/>
+        </p:nvSpPr>
+        <p:spPr>
+          <a:xfrm>
+            <a:off x="609600" y="4673600"/>
+            <a:ext cx="2552700" cy="635000"/>
+          </a:xfrm>
+          <a:prstGeom prst="rect">
+            <a:avLst/>
+          </a:prstGeom>
+          <a:noFill/>
+        </p:spPr>
+        <p:txBody>
+          <a:bodyPr wrap="square" lIns="0" rIns="0" tIns="0" bIns="0" anchor="t">
+            <a:noAutofit/>
+          </a:bodyPr>
+          <a:lstStyle/>
+          <a:p>
+            <a:pPr algn="l">
+              <a:lnSpc>
+                <a:spcPts val="3960"/>
+              </a:lnSpc>
+            </a:pPr>
+            <a:r>
+              <a:rPr sz="2200" b="1" lang="zh-CN" altLang="en-US">
+                <a:solidFill>
+                  <a:srgbClr val="F5F5F5">
+                    <a:alpha val="45000"/>
+                  </a:srgbClr>
+                </a:solidFill>
+                <a:latin typeface="Consolas"/>
+                <a:ea typeface="微软雅黑"/>
+                <a:cs typeface="微软雅黑"/>
+              </a:rPr>
+              <a:t>3</a:t>
+            </a:r>
+            <a:r>
+              <a:rPr sz="1600" b="0" lang="zh-CN" altLang="en-US">
+                <a:solidFill>
+                  <a:srgbClr val="F5F5F5">
+                    <a:alpha val="45000"/>
+                  </a:srgbClr>
+                </a:solidFill>
+                <a:latin typeface="微软雅黑"/>
+                <a:ea typeface="微软雅黑"/>
+                <a:cs typeface="微软雅黑"/>
+              </a:rPr>
+              <a:t> </a:t>
+            </a:r>
+            <a:r>
+              <a:rPr sz="1600" b="0" lang="zh-CN" altLang="en-US">
+                <a:solidFill>
+                  <a:srgbClr val="F5F5F5">
+                    <a:alpha val="45000"/>
+                  </a:srgbClr>
+                </a:solidFill>
+                <a:latin typeface="Consolas"/>
+                <a:ea typeface="微软雅黑"/>
+                <a:cs typeface="微软雅黑"/>
+              </a:rPr>
+              <a:t>→</a:t>
+            </a:r>
+            <a:r>
+              <a:rPr sz="1600" b="0" lang="zh-CN" altLang="en-US">
+                <a:solidFill>
+                  <a:srgbClr val="F5F5F5">
+                    <a:alpha val="45000"/>
+                  </a:srgbClr>
+                </a:solidFill>
+                <a:latin typeface="微软雅黑"/>
+                <a:ea typeface="微软雅黑"/>
+                <a:cs typeface="微软雅黑"/>
+              </a:rPr>
+              <a:t> </a:t>
+            </a:r>
+            <a:r>
+              <a:rPr sz="3600" b="1" lang="zh-CN" altLang="en-US">
+                <a:solidFill>
+                  <a:srgbClr val="0FF796"/>
+                </a:solidFill>
+                <a:latin typeface="Consolas"/>
+                <a:ea typeface="微软雅黑"/>
+                <a:cs typeface="微软雅黑"/>
+              </a:rPr>
+              <a:t>26</a:t>
+            </a:r>
+            <a:r>
+              <a:rPr sz="1200" b="0" lang="zh-CN" altLang="en-US">
+                <a:solidFill>
+                  <a:srgbClr val="F5F5F5">
+                    <a:alpha val="70000"/>
+                  </a:srgbClr>
+                </a:solidFill>
+                <a:latin typeface="微软雅黑"/>
+                <a:ea typeface="微软雅黑"/>
+                <a:cs typeface="微软雅黑"/>
+              </a:rPr>
+              <a:t> </a:t>
+            </a:r>
+            <a:r>
+              <a:rPr sz="1200" b="0" lang="zh-CN" altLang="en-US">
+                <a:solidFill>
+                  <a:srgbClr val="F5F5F5">
+                    <a:alpha val="70000"/>
+                  </a:srgbClr>
+                </a:solidFill>
+                <a:latin typeface="Consolas"/>
+                <a:ea typeface="微软雅黑"/>
+                <a:cs typeface="微软雅黑"/>
+              </a:rPr>
+              <a:t>种</a:t>
+            </a:r>
+          </a:p>
+        </p:txBody>
+      </p:sp>
+      <p:sp>
+        <p:nvSpPr>
+          <p:cNvPr id="12" name="Rectangle 11"/>
+          <p:cNvSpPr/>
+          <p:nvPr/>
+        </p:nvSpPr>
+        <p:spPr>
+          <a:xfrm>
+            <a:off x="3416300" y="4254500"/>
+            <a:ext cx="2552700" cy="6350"/>
+          </a:xfrm>
+          <a:prstGeom prst="rect">
+            <a:avLst/>
+          </a:prstGeom>
+          <a:solidFill>
+            <a:srgbClr val="F5F5F5">
+              <a:alpha val="14000"/>
+            </a:srgbClr>
+          </a:solidFill>
+          <a:ln>
+            <a:noFill/>
+          </a:ln>
+        </p:spPr>
+        <p:txBody>
+          <a:bodyPr rtlCol="0" anchor="ctr"/>
+          <a:lstStyle/>
+          <a:p>
+            <a:pPr algn="ctr"/>
+          </a:p>
+        </p:txBody>
+      </p:sp>
+      <p:sp>
+        <p:nvSpPr>
+          <p:cNvPr id="13" name="TextBox 12"/>
+          <p:cNvSpPr txBox="1"/>
+          <p:nvPr/>
+        </p:nvSpPr>
+        <p:spPr>
+          <a:xfrm>
+            <a:off x="3416300" y="4381500"/>
+            <a:ext cx="2552700" cy="228600"/>
+          </a:xfrm>
+          <a:prstGeom prst="rect">
+            <a:avLst/>
+          </a:prstGeom>
+          <a:noFill/>
+        </p:spPr>
+        <p:txBody>
+          <a:bodyPr wrap="square" lIns="0" rIns="0" tIns="0" bIns="0" anchor="t">
+            <a:noAutofit/>
+          </a:bodyPr>
+          <a:lstStyle/>
+          <a:p>
+            <a:pPr algn="l">
+              <a:lnSpc>
+                <a:spcPts val="1560"/>
+              </a:lnSpc>
+            </a:pPr>
+            <a:r>
+              <a:rPr sz="1200" b="1" lang="zh-CN" altLang="en-US">
+                <a:solidFill>
+                  <a:srgbClr val="F5F5F5">
+                    <a:alpha val="70000"/>
+                  </a:srgbClr>
+                </a:solidFill>
+                <a:latin typeface="Consolas"/>
+                <a:ea typeface="微软雅黑"/>
+                <a:cs typeface="微软雅黑"/>
+              </a:rPr>
+              <a:t>升空尾缀</a:t>
+            </a:r>
+          </a:p>
+        </p:txBody>
+      </p:sp>
+      <p:sp>
+        <p:nvSpPr>
+          <p:cNvPr id="14" name="TextBox 13"/>
+          <p:cNvSpPr txBox="1"/>
+          <p:nvPr/>
+        </p:nvSpPr>
+        <p:spPr>
+          <a:xfrm>
+            <a:off x="3416300" y="4673600"/>
+            <a:ext cx="2552700" cy="635000"/>
+          </a:xfrm>
+          <a:prstGeom prst="rect">
+            <a:avLst/>
+          </a:prstGeom>
+          <a:noFill/>
+        </p:spPr>
+        <p:txBody>
+          <a:bodyPr wrap="square" lIns="0" rIns="0" tIns="0" bIns="0" anchor="t">
+            <a:noAutofit/>
+          </a:bodyPr>
+          <a:lstStyle/>
+          <a:p>
+            <a:pPr algn="l">
+              <a:lnSpc>
+                <a:spcPts val="3080"/>
+              </a:lnSpc>
+            </a:pPr>
+            <a:r>
+              <a:rPr sz="2200" b="1" lang="zh-CN" altLang="en-US">
+                <a:solidFill>
+                  <a:srgbClr val="F5F5F5">
+                    <a:alpha val="45000"/>
+                  </a:srgbClr>
+                </a:solidFill>
+                <a:latin typeface="Consolas"/>
+                <a:ea typeface="微软雅黑"/>
+                <a:cs typeface="微软雅黑"/>
+              </a:rPr>
+              <a:t>1</a:t>
+            </a:r>
+            <a:r>
+              <a:rPr sz="1600" b="0" lang="zh-CN" altLang="en-US">
+                <a:solidFill>
+                  <a:srgbClr val="F5F5F5">
+                    <a:alpha val="45000"/>
+                  </a:srgbClr>
+                </a:solidFill>
+                <a:latin typeface="微软雅黑"/>
+                <a:ea typeface="微软雅黑"/>
+                <a:cs typeface="微软雅黑"/>
+              </a:rPr>
+              <a:t> </a:t>
+            </a:r>
+            <a:r>
+              <a:rPr sz="1600" b="0" lang="zh-CN" altLang="en-US">
+                <a:solidFill>
+                  <a:srgbClr val="F5F5F5">
+                    <a:alpha val="45000"/>
+                  </a:srgbClr>
+                </a:solidFill>
+                <a:latin typeface="Consolas"/>
+                <a:ea typeface="微软雅黑"/>
+                <a:cs typeface="微软雅黑"/>
+              </a:rPr>
+              <a:t>→</a:t>
+            </a:r>
+            <a:r>
+              <a:rPr sz="1600" b="0" lang="zh-CN" altLang="en-US">
+                <a:solidFill>
+                  <a:srgbClr val="F5F5F5">
+                    <a:alpha val="45000"/>
+                  </a:srgbClr>
+                </a:solidFill>
+                <a:latin typeface="微软雅黑"/>
+                <a:ea typeface="微软雅黑"/>
+                <a:cs typeface="微软雅黑"/>
+              </a:rPr>
+              <a:t> </a:t>
+            </a:r>
+            <a:r>
+              <a:rPr sz="2800" b="1" lang="zh-CN" altLang="en-US">
+                <a:solidFill>
+                  <a:srgbClr val="F5F5F5"/>
+                </a:solidFill>
+                <a:latin typeface="Consolas"/>
+                <a:ea typeface="微软雅黑"/>
+                <a:cs typeface="微软雅黑"/>
+              </a:rPr>
+              <a:t>6</a:t>
+            </a:r>
+            <a:r>
+              <a:rPr sz="1200" b="0" lang="zh-CN" altLang="en-US">
+                <a:solidFill>
+                  <a:srgbClr val="F5F5F5">
+                    <a:alpha val="70000"/>
+                  </a:srgbClr>
+                </a:solidFill>
+                <a:latin typeface="微软雅黑"/>
+                <a:ea typeface="微软雅黑"/>
+                <a:cs typeface="微软雅黑"/>
+              </a:rPr>
+              <a:t> </a:t>
+            </a:r>
+            <a:r>
+              <a:rPr sz="1200" b="0" lang="zh-CN" altLang="en-US">
+                <a:solidFill>
+                  <a:srgbClr val="F5F5F5">
+                    <a:alpha val="70000"/>
+                  </a:srgbClr>
+                </a:solidFill>
+                <a:latin typeface="Consolas"/>
+                <a:ea typeface="微软雅黑"/>
+                <a:cs typeface="微软雅黑"/>
+              </a:rPr>
+              <a:t>档</a:t>
+            </a:r>
+          </a:p>
+        </p:txBody>
+      </p:sp>
+      <p:sp>
+        <p:nvSpPr>
+          <p:cNvPr id="15" name="Rectangle 14"/>
+          <p:cNvSpPr/>
+          <p:nvPr/>
+        </p:nvSpPr>
+        <p:spPr>
+          <a:xfrm>
+            <a:off x="6223000" y="4254500"/>
+            <a:ext cx="2552700" cy="6350"/>
+          </a:xfrm>
+          <a:prstGeom prst="rect">
+            <a:avLst/>
+          </a:prstGeom>
+          <a:solidFill>
+            <a:srgbClr val="F5F5F5">
+              <a:alpha val="14000"/>
+            </a:srgbClr>
+          </a:solidFill>
+          <a:ln>
+            <a:noFill/>
+          </a:ln>
+        </p:spPr>
+        <p:txBody>
+          <a:bodyPr rtlCol="0" anchor="ctr"/>
+          <a:lstStyle/>
+          <a:p>
+            <a:pPr algn="ctr"/>
+          </a:p>
+        </p:txBody>
+      </p:sp>
+      <p:sp>
+        <p:nvSpPr>
+          <p:cNvPr id="16" name="TextBox 15"/>
+          <p:cNvSpPr txBox="1"/>
+          <p:nvPr/>
+        </p:nvSpPr>
+        <p:spPr>
+          <a:xfrm>
+            <a:off x="6223000" y="4381500"/>
+            <a:ext cx="2552700" cy="228600"/>
+          </a:xfrm>
+          <a:prstGeom prst="rect">
+            <a:avLst/>
+          </a:prstGeom>
+          <a:noFill/>
+        </p:spPr>
+        <p:txBody>
+          <a:bodyPr wrap="square" lIns="0" rIns="0" tIns="0" bIns="0" anchor="t">
+            <a:noAutofit/>
+          </a:bodyPr>
+          <a:lstStyle/>
+          <a:p>
+            <a:pPr algn="l">
+              <a:lnSpc>
+                <a:spcPts val="1560"/>
+              </a:lnSpc>
+            </a:pPr>
+            <a:r>
+              <a:rPr sz="1200" b="1" lang="zh-CN" altLang="en-US">
+                <a:solidFill>
+                  <a:srgbClr val="F5F5F5">
+                    <a:alpha val="70000"/>
+                  </a:srgbClr>
+                </a:solidFill>
+                <a:latin typeface="Consolas"/>
+                <a:ea typeface="微软雅黑"/>
+                <a:cs typeface="微软雅黑"/>
+              </a:rPr>
+              <a:t>节目时长</a:t>
+            </a:r>
+          </a:p>
+        </p:txBody>
+      </p:sp>
+      <p:sp>
+        <p:nvSpPr>
+          <p:cNvPr id="17" name="TextBox 16"/>
+          <p:cNvSpPr txBox="1"/>
+          <p:nvPr/>
+        </p:nvSpPr>
+        <p:spPr>
+          <a:xfrm>
+            <a:off x="6223000" y="4673600"/>
+            <a:ext cx="2552700" cy="635000"/>
+          </a:xfrm>
+          <a:prstGeom prst="rect">
+            <a:avLst/>
+          </a:prstGeom>
+          <a:noFill/>
+        </p:spPr>
+        <p:txBody>
+          <a:bodyPr wrap="square" lIns="0" rIns="0" tIns="0" bIns="0" anchor="t">
+            <a:noAutofit/>
+          </a:bodyPr>
+          <a:lstStyle/>
+          <a:p>
+            <a:pPr algn="l">
+              <a:lnSpc>
+                <a:spcPts val="3080"/>
+              </a:lnSpc>
+            </a:pPr>
+            <a:r>
+              <a:rPr sz="2200" b="1" lang="zh-CN" altLang="en-US">
+                <a:solidFill>
+                  <a:srgbClr val="F5F5F5">
+                    <a:alpha val="45000"/>
+                  </a:srgbClr>
+                </a:solidFill>
+                <a:latin typeface="Consolas"/>
+                <a:ea typeface="微软雅黑"/>
+                <a:cs typeface="微软雅黑"/>
+              </a:rPr>
+              <a:t>约</a:t>
+            </a:r>
+            <a:r>
+              <a:rPr sz="2200" b="1" lang="zh-CN" altLang="en-US">
+                <a:solidFill>
+                  <a:srgbClr val="F5F5F5">
+                    <a:alpha val="45000"/>
+                  </a:srgbClr>
+                </a:solidFill>
+                <a:latin typeface="微软雅黑"/>
+                <a:ea typeface="微软雅黑"/>
+                <a:cs typeface="微软雅黑"/>
+              </a:rPr>
+              <a:t> </a:t>
+            </a:r>
+            <a:r>
+              <a:rPr sz="2200" b="1" lang="zh-CN" altLang="en-US">
+                <a:solidFill>
+                  <a:srgbClr val="F5F5F5">
+                    <a:alpha val="45000"/>
+                  </a:srgbClr>
+                </a:solidFill>
+                <a:latin typeface="Consolas"/>
+                <a:ea typeface="微软雅黑"/>
+                <a:cs typeface="微软雅黑"/>
+              </a:rPr>
+              <a:t>70</a:t>
+            </a:r>
+            <a:r>
+              <a:rPr sz="1600" b="0" lang="zh-CN" altLang="en-US">
+                <a:solidFill>
+                  <a:srgbClr val="F5F5F5">
+                    <a:alpha val="45000"/>
+                  </a:srgbClr>
+                </a:solidFill>
+                <a:latin typeface="微软雅黑"/>
+                <a:ea typeface="微软雅黑"/>
+                <a:cs typeface="微软雅黑"/>
+              </a:rPr>
+              <a:t> </a:t>
+            </a:r>
+            <a:r>
+              <a:rPr sz="1600" b="0" lang="zh-CN" altLang="en-US">
+                <a:solidFill>
+                  <a:srgbClr val="F5F5F5">
+                    <a:alpha val="45000"/>
+                  </a:srgbClr>
+                </a:solidFill>
+                <a:latin typeface="Consolas"/>
+                <a:ea typeface="微软雅黑"/>
+                <a:cs typeface="微软雅黑"/>
+              </a:rPr>
+              <a:t>→</a:t>
+            </a:r>
+            <a:r>
+              <a:rPr sz="1600" b="0" lang="zh-CN" altLang="en-US">
+                <a:solidFill>
+                  <a:srgbClr val="F5F5F5">
+                    <a:alpha val="45000"/>
+                  </a:srgbClr>
+                </a:solidFill>
+                <a:latin typeface="微软雅黑"/>
+                <a:ea typeface="微软雅黑"/>
+                <a:cs typeface="微软雅黑"/>
+              </a:rPr>
+              <a:t> </a:t>
+            </a:r>
+            <a:r>
+              <a:rPr sz="2800" b="1" lang="zh-CN" altLang="en-US">
+                <a:solidFill>
+                  <a:srgbClr val="F5F5F5"/>
+                </a:solidFill>
+                <a:latin typeface="Consolas"/>
+                <a:ea typeface="微软雅黑"/>
+                <a:cs typeface="微软雅黑"/>
+              </a:rPr>
+              <a:t>约</a:t>
+            </a:r>
+            <a:r>
+              <a:rPr sz="2800" b="1" lang="zh-CN" altLang="en-US">
+                <a:solidFill>
+                  <a:srgbClr val="F5F5F5"/>
+                </a:solidFill>
+                <a:latin typeface="微软雅黑"/>
+                <a:ea typeface="微软雅黑"/>
+                <a:cs typeface="微软雅黑"/>
+              </a:rPr>
+              <a:t> </a:t>
+            </a:r>
+            <a:r>
+              <a:rPr sz="2800" b="1" lang="zh-CN" altLang="en-US">
+                <a:solidFill>
+                  <a:srgbClr val="F5F5F5"/>
+                </a:solidFill>
+                <a:latin typeface="Consolas"/>
+                <a:ea typeface="微软雅黑"/>
+                <a:cs typeface="微软雅黑"/>
+              </a:rPr>
+              <a:t>220</a:t>
+            </a:r>
+            <a:r>
+              <a:rPr sz="1200" b="0" lang="zh-CN" altLang="en-US">
+                <a:solidFill>
+                  <a:srgbClr val="F5F5F5">
+                    <a:alpha val="70000"/>
+                  </a:srgbClr>
+                </a:solidFill>
+                <a:latin typeface="微软雅黑"/>
+                <a:ea typeface="微软雅黑"/>
+                <a:cs typeface="微软雅黑"/>
+              </a:rPr>
+              <a:t> </a:t>
+            </a:r>
+            <a:r>
+              <a:rPr sz="1200" b="0" lang="zh-CN" altLang="en-US">
+                <a:solidFill>
+                  <a:srgbClr val="F5F5F5">
+                    <a:alpha val="70000"/>
+                  </a:srgbClr>
+                </a:solidFill>
+                <a:latin typeface="Consolas"/>
+                <a:ea typeface="微软雅黑"/>
+                <a:cs typeface="微软雅黑"/>
+              </a:rPr>
+              <a:t>秒</a:t>
+            </a:r>
+          </a:p>
+        </p:txBody>
+      </p:sp>
+      <p:sp>
+        <p:nvSpPr>
+          <p:cNvPr id="18" name="Rectangle 17"/>
+          <p:cNvSpPr/>
+          <p:nvPr/>
+        </p:nvSpPr>
+        <p:spPr>
+          <a:xfrm>
+            <a:off x="9029700" y="4254500"/>
+            <a:ext cx="2552700" cy="6350"/>
+          </a:xfrm>
+          <a:prstGeom prst="rect">
+            <a:avLst/>
+          </a:prstGeom>
+          <a:solidFill>
+            <a:srgbClr val="F5F5F5">
+              <a:alpha val="14000"/>
+            </a:srgbClr>
+          </a:solidFill>
+          <a:ln>
+            <a:noFill/>
+          </a:ln>
+        </p:spPr>
+        <p:txBody>
+          <a:bodyPr rtlCol="0" anchor="ctr"/>
+          <a:lstStyle/>
+          <a:p>
+            <a:pPr algn="ctr"/>
+          </a:p>
+        </p:txBody>
+      </p:sp>
+      <p:sp>
+        <p:nvSpPr>
+          <p:cNvPr id="19" name="TextBox 18"/>
+          <p:cNvSpPr txBox="1"/>
+          <p:nvPr/>
+        </p:nvSpPr>
+        <p:spPr>
+          <a:xfrm>
+            <a:off x="9029700" y="4381500"/>
+            <a:ext cx="2552700" cy="228600"/>
+          </a:xfrm>
+          <a:prstGeom prst="rect">
+            <a:avLst/>
+          </a:prstGeom>
+          <a:noFill/>
+        </p:spPr>
+        <p:txBody>
+          <a:bodyPr wrap="square" lIns="0" rIns="0" tIns="0" bIns="0" anchor="t">
+            <a:noAutofit/>
+          </a:bodyPr>
+          <a:lstStyle/>
+          <a:p>
+            <a:pPr algn="l">
+              <a:lnSpc>
+                <a:spcPts val="1560"/>
+              </a:lnSpc>
+            </a:pPr>
+            <a:r>
+              <a:rPr sz="1200" b="1" lang="zh-CN" altLang="en-US">
+                <a:solidFill>
+                  <a:srgbClr val="F5F5F5">
+                    <a:alpha val="70000"/>
+                  </a:srgbClr>
+                </a:solidFill>
+                <a:latin typeface="Consolas"/>
+                <a:ea typeface="微软雅黑"/>
+                <a:cs typeface="微软雅黑"/>
+              </a:rPr>
+              <a:t>输出平台</a:t>
+            </a:r>
+          </a:p>
+        </p:txBody>
+      </p:sp>
+      <p:sp>
+        <p:nvSpPr>
+          <p:cNvPr id="20" name="TextBox 19"/>
+          <p:cNvSpPr txBox="1"/>
+          <p:nvPr/>
+        </p:nvSpPr>
+        <p:spPr>
+          <a:xfrm>
+            <a:off x="9029700" y="4673600"/>
+            <a:ext cx="2552700" cy="635000"/>
+          </a:xfrm>
+          <a:prstGeom prst="rect">
+            <a:avLst/>
+          </a:prstGeom>
+          <a:noFill/>
+        </p:spPr>
+        <p:txBody>
+          <a:bodyPr wrap="square" lIns="0" rIns="0" tIns="0" bIns="0" anchor="t">
+            <a:noAutofit/>
+          </a:bodyPr>
+          <a:lstStyle/>
+          <a:p>
+            <a:pPr algn="l">
+              <a:lnSpc>
+                <a:spcPts val="3080"/>
+              </a:lnSpc>
+            </a:pPr>
+            <a:r>
+              <a:rPr sz="2800" b="1" lang="zh-CN" altLang="en-US">
+                <a:solidFill>
+                  <a:srgbClr val="F5F5F5"/>
+                </a:solidFill>
+                <a:latin typeface="Consolas"/>
+                <a:ea typeface="微软雅黑"/>
+                <a:cs typeface="微软雅黑"/>
+              </a:rPr>
+              <a:t>2</a:t>
+            </a:r>
+            <a:r>
+              <a:rPr sz="1200" b="0" lang="zh-CN" altLang="en-US">
+                <a:solidFill>
+                  <a:srgbClr val="F5F5F5">
+                    <a:alpha val="70000"/>
+                  </a:srgbClr>
+                </a:solidFill>
+                <a:latin typeface="微软雅黑"/>
+                <a:ea typeface="微软雅黑"/>
+                <a:cs typeface="微软雅黑"/>
+              </a:rPr>
+              <a:t> </a:t>
+            </a:r>
+            <a:r>
+              <a:rPr sz="1200" b="0" lang="zh-CN" altLang="en-US">
+                <a:solidFill>
+                  <a:srgbClr val="F5F5F5">
+                    <a:alpha val="70000"/>
+                  </a:srgbClr>
+                </a:solidFill>
+                <a:latin typeface="Consolas"/>
+                <a:ea typeface="微软雅黑"/>
+                <a:cs typeface="微软雅黑"/>
+              </a:rPr>
+              <a:t>套</a:t>
+            </a:r>
+            <a:r>
+              <a:rPr sz="1200" b="0" lang="zh-CN" altLang="en-US">
+                <a:solidFill>
+                  <a:srgbClr val="F5F5F5">
+                    <a:alpha val="70000"/>
+                  </a:srgbClr>
+                </a:solidFill>
+                <a:latin typeface="微软雅黑"/>
+                <a:ea typeface="微软雅黑"/>
+                <a:cs typeface="微软雅黑"/>
+              </a:rPr>
+              <a:t> </a:t>
+            </a:r>
+            <a:r>
+              <a:rPr sz="1200" b="0" lang="zh-CN" altLang="en-US">
+                <a:solidFill>
+                  <a:srgbClr val="F5F5F5">
+                    <a:alpha val="70000"/>
+                  </a:srgbClr>
+                </a:solidFill>
+                <a:latin typeface="Consolas"/>
+                <a:ea typeface="微软雅黑"/>
+                <a:cs typeface="微软雅黑"/>
+              </a:rPr>
+              <a:t>·</a:t>
+            </a:r>
+            <a:r>
+              <a:rPr sz="1200" b="0" lang="zh-CN" altLang="en-US">
+                <a:solidFill>
+                  <a:srgbClr val="F5F5F5">
+                    <a:alpha val="70000"/>
+                  </a:srgbClr>
+                </a:solidFill>
+                <a:latin typeface="微软雅黑"/>
+                <a:ea typeface="微软雅黑"/>
+                <a:cs typeface="微软雅黑"/>
+              </a:rPr>
+              <a:t> </a:t>
+            </a:r>
+            <a:r>
+              <a:rPr sz="1200" b="0" lang="zh-CN" altLang="en-US">
+                <a:solidFill>
+                  <a:srgbClr val="F5F5F5">
+                    <a:alpha val="70000"/>
+                  </a:srgbClr>
+                </a:solidFill>
+                <a:latin typeface="Consolas"/>
+                <a:ea typeface="微软雅黑"/>
+                <a:cs typeface="微软雅黑"/>
+              </a:rPr>
+              <a:t>PC</a:t>
+            </a:r>
+            <a:r>
+              <a:rPr sz="1200" b="0" lang="zh-CN" altLang="en-US">
+                <a:solidFill>
+                  <a:srgbClr val="F5F5F5">
+                    <a:alpha val="70000"/>
+                  </a:srgbClr>
+                </a:solidFill>
+                <a:latin typeface="微软雅黑"/>
+                <a:ea typeface="微软雅黑"/>
+                <a:cs typeface="微软雅黑"/>
+              </a:rPr>
+              <a:t> </a:t>
+            </a:r>
+            <a:r>
+              <a:rPr sz="1200" b="0" lang="zh-CN" altLang="en-US">
+                <a:solidFill>
+                  <a:srgbClr val="F5F5F5">
+                    <a:alpha val="70000"/>
+                  </a:srgbClr>
+                </a:solidFill>
+                <a:latin typeface="Consolas"/>
+                <a:ea typeface="微软雅黑"/>
+                <a:cs typeface="微软雅黑"/>
+              </a:rPr>
+              <a:t>与手游</a:t>
+            </a:r>
+          </a:p>
+        </p:txBody>
+      </p:sp>
+      <p:sp>
+        <p:nvSpPr>
+          <p:cNvPr id="21" name="TextBox 20"/>
+          <p:cNvSpPr txBox="1"/>
+          <p:nvPr/>
+        </p:nvSpPr>
+        <p:spPr>
+          <a:xfrm>
+            <a:off x="609600" y="5715000"/>
+            <a:ext cx="10972800" cy="215900"/>
+          </a:xfrm>
+          <a:prstGeom prst="rect">
+            <a:avLst/>
+          </a:prstGeom>
+          <a:noFill/>
+        </p:spPr>
+        <p:txBody>
+          <a:bodyPr wrap="square" lIns="0" rIns="0" tIns="0" bIns="0" anchor="t">
+            <a:noAutofit/>
+          </a:bodyPr>
+          <a:lstStyle/>
+          <a:p>
+            <a:pPr algn="l">
+              <a:lnSpc>
+                <a:spcPts val="1300"/>
+              </a:lnSpc>
+            </a:pPr>
+            <a:r>
+              <a:rPr sz="1000" b="0" lang="zh-CN" altLang="en-US">
+                <a:solidFill>
+                  <a:srgbClr val="F5F5F5">
+                    <a:alpha val="40000"/>
+                  </a:srgbClr>
+                </a:solidFill>
+                <a:latin typeface="Consolas"/>
+                <a:ea typeface="微软雅黑"/>
+                <a:cs typeface="微软雅黑"/>
+              </a:rPr>
+              <a:t>去年</a:t>
+            </a:r>
+            <a:r>
+              <a:rPr sz="1000" b="0" lang="zh-CN" altLang="en-US">
+                <a:solidFill>
+                  <a:srgbClr val="F5F5F5">
+                    <a:alpha val="40000"/>
+                  </a:srgbClr>
+                </a:solidFill>
+                <a:latin typeface="微软雅黑"/>
+                <a:ea typeface="微软雅黑"/>
+                <a:cs typeface="微软雅黑"/>
+              </a:rPr>
+              <a:t> </a:t>
+            </a:r>
+            <a:r>
+              <a:rPr sz="1000" b="0" lang="zh-CN" altLang="en-US">
+                <a:solidFill>
+                  <a:srgbClr val="F5F5F5">
+                    <a:alpha val="40000"/>
+                  </a:srgbClr>
+                </a:solidFill>
+                <a:latin typeface="Consolas"/>
+                <a:ea typeface="微软雅黑"/>
+                <a:cs typeface="微软雅黑"/>
+              </a:rPr>
+              <a:t>→</a:t>
+            </a:r>
+            <a:r>
+              <a:rPr sz="1000" b="0" lang="zh-CN" altLang="en-US">
+                <a:solidFill>
+                  <a:srgbClr val="F5F5F5">
+                    <a:alpha val="40000"/>
+                  </a:srgbClr>
+                </a:solidFill>
+                <a:latin typeface="微软雅黑"/>
+                <a:ea typeface="微软雅黑"/>
+                <a:cs typeface="微软雅黑"/>
+              </a:rPr>
+              <a:t> </a:t>
+            </a:r>
+            <a:r>
+              <a:rPr sz="1000" b="0" lang="zh-CN" altLang="en-US">
+                <a:solidFill>
+                  <a:srgbClr val="F5F5F5">
+                    <a:alpha val="40000"/>
+                  </a:srgbClr>
+                </a:solidFill>
+                <a:latin typeface="Consolas"/>
+                <a:ea typeface="微软雅黑"/>
+                <a:cs typeface="微软雅黑"/>
+              </a:rPr>
+              <a:t>今年；花型按花名计，去年数据为讲者统计</a:t>
             </a:r>
           </a:p>
         </p:txBody>
